--- a/kits/kit05/Kit05_PresentationDeck.pptx
+++ b/kits/kit05/Kit05_PresentationDeck.pptx
@@ -1587,7 +1587,7 @@
           <a:p>
             <a:r>
               <a:rPr lang="en-US" dirty="0"/>
-              <a:t>6 minutes. Template is on the handout with worked examples. Push for student language, not policy language. 45-min cut: lane line + disclosure line only.</a:t>
+              <a:t>Say: template on the left; on the right is Ms. Rivera's finished box for her persuasive essay (our running composite example, same teacher whose screen you saw in Kits 1-4). Mimic her box with your own assignment: at worst, copy its shape line for line. 6 minutes. Push for student language, not policy language. 45-min cut: lane line + disclosure line only.</a:t>
             </a:r>
             <a:endParaRPr lang="en-US" dirty="0"/>
           </a:p>
@@ -10000,11 +10000,11 @@
         <p:spPr>
           <a:xfrm>
             <a:off x="640080" y="1463040"/>
-            <a:ext cx="10972800" cy="3291840"/>
+            <a:ext cx="5394960" cy="3566160"/>
           </a:xfrm>
           <a:prstGeom prst="roundRect">
             <a:avLst>
-              <a:gd name="adj" fmla="val 2500"/>
+              <a:gd name="adj" fmla="val 2308"/>
             </a:avLst>
           </a:prstGeom>
           <a:solidFill>
@@ -10026,8 +10026,47 @@
         </p:nvSpPr>
         <p:spPr>
           <a:xfrm>
-            <a:off x="960120" y="1737360"/>
-            <a:ext cx="10332720" cy="2743200"/>
+            <a:off x="914400" y="1627632"/>
+            <a:ext cx="4846320" cy="274320"/>
+          </a:xfrm>
+          <a:prstGeom prst="rect">
+            <a:avLst/>
+          </a:prstGeom>
+          <a:noFill/>
+          <a:ln/>
+        </p:spPr>
+        <p:txBody>
+          <a:bodyPr wrap="square" lIns="0" tIns="0" rIns="0" bIns="0" rtlCol="0" anchor="ctr"/>
+          <a:lstStyle/>
+          <a:p>
+            <a:pPr indent="0" marL="0">
+              <a:buNone/>
+            </a:pPr>
+            <a:r>
+              <a:rPr lang="en-US" sz="1200" b="1" spc="200" kern="0" dirty="0">
+                <a:solidFill>
+                  <a:srgbClr val="5B6B7A"/>
+                </a:solidFill>
+                <a:latin typeface="Inter" pitchFamily="34" charset="0"/>
+                <a:ea typeface="Inter" pitchFamily="34" charset="-122"/>
+                <a:cs typeface="Inter" pitchFamily="34" charset="-120"/>
+              </a:rPr>
+              <a:t>THE TEMPLATE</a:t>
+            </a:r>
+            <a:endParaRPr lang="en-US" sz="1200" dirty="0"/>
+          </a:p>
+        </p:txBody>
+      </p:sp>
+      <p:sp>
+        <p:nvSpPr>
+          <p:cNvPr id="9" name="Text 6"/>
+          <p:cNvSpPr/>
+          <p:nvPr/>
+        </p:nvSpPr>
+        <p:spPr>
+          <a:xfrm>
+            <a:off x="914400" y="1965960"/>
+            <a:ext cx="4892040" cy="2926080"/>
           </a:xfrm>
           <a:prstGeom prst="rect">
             <a:avLst/>
@@ -10041,12 +10080,12 @@
           <a:p>
             <a:pPr indent="0" marL="0">
               <a:lnSpc>
-                <a:spcPct val="125000"/>
+                <a:spcPct val="120000"/>
               </a:lnSpc>
               <a:buNone/>
             </a:pPr>
             <a:r>
-              <a:rPr lang="en-US" sz="1800" b="1" dirty="0">
+              <a:rPr lang="en-US" sz="1600" b="1" dirty="0">
                 <a:solidFill>
                   <a:srgbClr val="13293D"/>
                 </a:solidFill>
@@ -10058,12 +10097,12 @@
             </a:r>
             <a:pPr indent="0" marL="0">
               <a:lnSpc>
-                <a:spcPct val="125000"/>
+                <a:spcPct val="120000"/>
               </a:lnSpc>
               <a:buNone/>
             </a:pPr>
             <a:r>
-              <a:rPr lang="en-US" sz="1800" dirty="0">
+              <a:rPr lang="en-US" sz="1600" dirty="0">
                 <a:solidFill>
                   <a:srgbClr val="1B1F24"/>
                 </a:solidFill>
@@ -10071,17 +10110,17 @@
                 <a:ea typeface="Inter" pitchFamily="34" charset="-122"/>
                 <a:cs typeface="Inter" pitchFamily="34" charset="-120"/>
               </a:rPr>
-              <a:t>[1 / 2 / 3], because [one honest sentence about what this assignment teaches]
+              <a:t>[1 / 2 / 3], because [what this assignment teaches]
 </a:t>
             </a:r>
             <a:pPr indent="0" marL="0">
               <a:lnSpc>
-                <a:spcPct val="125000"/>
+                <a:spcPct val="120000"/>
               </a:lnSpc>
               <a:buNone/>
             </a:pPr>
             <a:r>
-              <a:rPr lang="en-US" sz="1800" b="1" dirty="0">
+              <a:rPr lang="en-US" sz="1600" b="1" dirty="0">
                 <a:solidFill>
                   <a:srgbClr val="13293D"/>
                 </a:solidFill>
@@ -10093,12 +10132,12 @@
             </a:r>
             <a:pPr indent="0" marL="0">
               <a:lnSpc>
-                <a:spcPct val="125000"/>
+                <a:spcPct val="120000"/>
               </a:lnSpc>
               <a:buNone/>
             </a:pPr>
             <a:r>
-              <a:rPr lang="en-US" sz="1800" dirty="0">
+              <a:rPr lang="en-US" sz="1600" dirty="0">
                 <a:solidFill>
                   <a:srgbClr val="1B1F24"/>
                 </a:solidFill>
@@ -10111,12 +10150,12 @@
             </a:r>
             <a:pPr indent="0" marL="0">
               <a:lnSpc>
-                <a:spcPct val="125000"/>
+                <a:spcPct val="120000"/>
               </a:lnSpc>
               <a:buNone/>
             </a:pPr>
             <a:r>
-              <a:rPr lang="en-US" sz="1800" b="1" dirty="0">
+              <a:rPr lang="en-US" sz="1600" b="1" dirty="0">
                 <a:solidFill>
                   <a:srgbClr val="13293D"/>
                 </a:solidFill>
@@ -10128,12 +10167,12 @@
             </a:r>
             <a:pPr indent="0" marL="0">
               <a:lnSpc>
-                <a:spcPct val="125000"/>
+                <a:spcPct val="120000"/>
               </a:lnSpc>
               <a:buNone/>
             </a:pPr>
             <a:r>
-              <a:rPr lang="en-US" sz="1800" dirty="0">
+              <a:rPr lang="en-US" sz="1600" dirty="0">
                 <a:solidFill>
                   <a:srgbClr val="1B1F24"/>
                 </a:solidFill>
@@ -10146,12 +10185,12 @@
             </a:r>
             <a:pPr indent="0" marL="0">
               <a:lnSpc>
-                <a:spcPct val="125000"/>
+                <a:spcPct val="120000"/>
               </a:lnSpc>
               <a:buNone/>
             </a:pPr>
             <a:r>
-              <a:rPr lang="en-US" sz="1800" b="1" dirty="0">
+              <a:rPr lang="en-US" sz="1600" b="1" dirty="0">
                 <a:solidFill>
                   <a:srgbClr val="13293D"/>
                 </a:solidFill>
@@ -10163,12 +10202,12 @@
             </a:r>
             <a:pPr indent="0" marL="0">
               <a:lnSpc>
-                <a:spcPct val="125000"/>
+                <a:spcPct val="120000"/>
               </a:lnSpc>
               <a:buNone/>
             </a:pPr>
             <a:r>
-              <a:rPr lang="en-US" sz="1800" dirty="0">
+              <a:rPr lang="en-US" sz="1600" dirty="0">
                 <a:solidFill>
                   <a:srgbClr val="1B1F24"/>
                 </a:solidFill>
@@ -10176,17 +10215,17 @@
                 <a:ea typeface="Inter" pitchFamily="34" charset="-122"/>
                 <a:cs typeface="Inter" pitchFamily="34" charset="-120"/>
               </a:rPr>
-              <a:t>two lines at the end: what tool, and what it did for you
+              <a:t>two lines: what tool, what it did
 </a:t>
             </a:r>
             <a:pPr indent="0" marL="0">
               <a:lnSpc>
-                <a:spcPct val="125000"/>
+                <a:spcPct val="120000"/>
               </a:lnSpc>
               <a:buNone/>
             </a:pPr>
             <a:r>
-              <a:rPr lang="en-US" sz="1800" b="1" dirty="0">
+              <a:rPr lang="en-US" sz="1600" b="1" dirty="0">
                 <a:solidFill>
                   <a:srgbClr val="13293D"/>
                 </a:solidFill>
@@ -10198,12 +10237,12 @@
             </a:r>
             <a:pPr indent="0" marL="0">
               <a:lnSpc>
-                <a:spcPct val="125000"/>
+                <a:spcPct val="120000"/>
               </a:lnSpc>
               <a:buNone/>
             </a:pPr>
             <a:r>
-              <a:rPr lang="en-US" sz="1800" dirty="0">
+              <a:rPr lang="en-US" sz="1600" dirty="0">
                 <a:solidFill>
                   <a:srgbClr val="1B1F24"/>
                 </a:solidFill>
@@ -10211,21 +10250,286 @@
                 <a:ea typeface="Inter" pitchFamily="34" charset="-122"/>
                 <a:cs typeface="Inter" pitchFamily="34" charset="-120"/>
               </a:rPr>
-              <a:t>I'll ask you to walk me through your work. A conversation, not an accusation.</a:t>
-            </a:r>
-            <a:endParaRPr lang="en-US" sz="1800" dirty="0"/>
-          </a:p>
-        </p:txBody>
-      </p:sp>
-      <p:sp>
-        <p:nvSpPr>
-          <p:cNvPr id="9" name="Text 6"/>
-          <p:cNvSpPr/>
-          <p:nvPr/>
-        </p:nvSpPr>
-        <p:spPr>
-          <a:xfrm>
-            <a:off x="640080" y="5029200"/>
+              <a:t>we walk through the work together.</a:t>
+            </a:r>
+            <a:endParaRPr lang="en-US" sz="1600" dirty="0"/>
+          </a:p>
+        </p:txBody>
+      </p:sp>
+      <p:sp>
+        <p:nvSpPr>
+          <p:cNvPr id="10" name="Shape 7"/>
+          <p:cNvSpPr/>
+          <p:nvPr/>
+        </p:nvSpPr>
+        <p:spPr>
+          <a:xfrm>
+            <a:off x="6263640" y="1463040"/>
+            <a:ext cx="5394960" cy="3566160"/>
+          </a:xfrm>
+          <a:prstGeom prst="roundRect">
+            <a:avLst>
+              <a:gd name="adj" fmla="val 2308"/>
+            </a:avLst>
+          </a:prstGeom>
+          <a:solidFill>
+            <a:srgbClr val="EAF5F3"/>
+          </a:solidFill>
+          <a:ln w="12700">
+            <a:solidFill>
+              <a:srgbClr val="EAF5F3"/>
+            </a:solidFill>
+            <a:prstDash val="solid"/>
+          </a:ln>
+        </p:spPr>
+      </p:sp>
+      <p:sp>
+        <p:nvSpPr>
+          <p:cNvPr id="11" name="Text 8"/>
+          <p:cNvSpPr/>
+          <p:nvPr/>
+        </p:nvSpPr>
+        <p:spPr>
+          <a:xfrm>
+            <a:off x="6537960" y="1627632"/>
+            <a:ext cx="4846320" cy="274320"/>
+          </a:xfrm>
+          <a:prstGeom prst="rect">
+            <a:avLst/>
+          </a:prstGeom>
+          <a:noFill/>
+          <a:ln/>
+        </p:spPr>
+        <p:txBody>
+          <a:bodyPr wrap="square" lIns="0" tIns="0" rIns="0" bIns="0" rtlCol="0" anchor="ctr"/>
+          <a:lstStyle/>
+          <a:p>
+            <a:pPr indent="0" marL="0">
+              <a:buNone/>
+            </a:pPr>
+            <a:r>
+              <a:rPr lang="en-US" sz="1200" b="1" spc="150" kern="0" dirty="0">
+                <a:solidFill>
+                  <a:srgbClr val="2A9D8F"/>
+                </a:solidFill>
+                <a:latin typeface="Inter" pitchFamily="34" charset="0"/>
+                <a:ea typeface="Inter" pitchFamily="34" charset="-122"/>
+                <a:cs typeface="Inter" pitchFamily="34" charset="-120"/>
+              </a:rPr>
+              <a:t>MS. RIVERA'S BOX · PERSUASIVE ESSAY (COMPOSITE EXAMPLE)</a:t>
+            </a:r>
+            <a:endParaRPr lang="en-US" sz="1200" dirty="0"/>
+          </a:p>
+        </p:txBody>
+      </p:sp>
+      <p:sp>
+        <p:nvSpPr>
+          <p:cNvPr id="12" name="Text 9"/>
+          <p:cNvSpPr/>
+          <p:nvPr/>
+        </p:nvSpPr>
+        <p:spPr>
+          <a:xfrm>
+            <a:off x="6537960" y="1965960"/>
+            <a:ext cx="4892040" cy="2926080"/>
+          </a:xfrm>
+          <a:prstGeom prst="rect">
+            <a:avLst/>
+          </a:prstGeom>
+          <a:noFill/>
+          <a:ln/>
+        </p:spPr>
+        <p:txBody>
+          <a:bodyPr wrap="square" lIns="0" tIns="0" rIns="0" bIns="0" rtlCol="0" anchor="t"/>
+          <a:lstStyle/>
+          <a:p>
+            <a:pPr indent="0" marL="0">
+              <a:lnSpc>
+                <a:spcPct val="120000"/>
+              </a:lnSpc>
+              <a:buNone/>
+            </a:pPr>
+            <a:r>
+              <a:rPr lang="en-US" sz="1600" b="1" dirty="0">
+                <a:solidFill>
+                  <a:srgbClr val="13293D"/>
+                </a:solidFill>
+                <a:latin typeface="Inter" pitchFamily="34" charset="0"/>
+                <a:ea typeface="Inter" pitchFamily="34" charset="-122"/>
+                <a:cs typeface="Inter" pitchFamily="34" charset="-120"/>
+              </a:rPr>
+              <a:t>Lane: </a:t>
+            </a:r>
+            <a:pPr indent="0" marL="0">
+              <a:lnSpc>
+                <a:spcPct val="120000"/>
+              </a:lnSpc>
+              <a:buNone/>
+            </a:pPr>
+            <a:r>
+              <a:rPr lang="en-US" sz="1600" dirty="0">
+                <a:solidFill>
+                  <a:srgbClr val="1B1F24"/>
+                </a:solidFill>
+                <a:latin typeface="Inter" pitchFamily="34" charset="0"/>
+                <a:ea typeface="Inter" pitchFamily="34" charset="-122"/>
+                <a:cs typeface="Inter" pitchFamily="34" charset="-120"/>
+              </a:rPr>
+              <a:t>2 · AI-assisted, because I'm grading your argument, not your typing.
+</a:t>
+            </a:r>
+            <a:pPr indent="0" marL="0">
+              <a:lnSpc>
+                <a:spcPct val="120000"/>
+              </a:lnSpc>
+              <a:buNone/>
+            </a:pPr>
+            <a:r>
+              <a:rPr lang="en-US" sz="1600" b="1" dirty="0">
+                <a:solidFill>
+                  <a:srgbClr val="13293D"/>
+                </a:solidFill>
+                <a:latin typeface="Inter" pitchFamily="34" charset="0"/>
+                <a:ea typeface="Inter" pitchFamily="34" charset="-122"/>
+                <a:cs typeface="Inter" pitchFamily="34" charset="-120"/>
+              </a:rPr>
+              <a:t>Okay: </a:t>
+            </a:r>
+            <a:pPr indent="0" marL="0">
+              <a:lnSpc>
+                <a:spcPct val="120000"/>
+              </a:lnSpc>
+              <a:buNone/>
+            </a:pPr>
+            <a:r>
+              <a:rPr lang="en-US" sz="1600" dirty="0">
+                <a:solidFill>
+                  <a:srgbClr val="1B1F24"/>
+                </a:solidFill>
+                <a:latin typeface="Inter" pitchFamily="34" charset="0"/>
+                <a:ea typeface="Inter" pitchFamily="34" charset="-122"/>
+                <a:cs typeface="Inter" pitchFamily="34" charset="-120"/>
+              </a:rPr>
+              <a:t>brainstorming ideas; feedback on your draft.
+</a:t>
+            </a:r>
+            <a:pPr indent="0" marL="0">
+              <a:lnSpc>
+                <a:spcPct val="120000"/>
+              </a:lnSpc>
+              <a:buNone/>
+            </a:pPr>
+            <a:r>
+              <a:rPr lang="en-US" sz="1600" b="1" dirty="0">
+                <a:solidFill>
+                  <a:srgbClr val="13293D"/>
+                </a:solidFill>
+                <a:latin typeface="Inter" pitchFamily="34" charset="0"/>
+                <a:ea typeface="Inter" pitchFamily="34" charset="-122"/>
+                <a:cs typeface="Inter" pitchFamily="34" charset="-120"/>
+              </a:rPr>
+              <a:t>Not okay: </a:t>
+            </a:r>
+            <a:pPr indent="0" marL="0">
+              <a:lnSpc>
+                <a:spcPct val="120000"/>
+              </a:lnSpc>
+              <a:buNone/>
+            </a:pPr>
+            <a:r>
+              <a:rPr lang="en-US" sz="1600" dirty="0">
+                <a:solidFill>
+                  <a:srgbClr val="1B1F24"/>
+                </a:solidFill>
+                <a:latin typeface="Inter" pitchFamily="34" charset="0"/>
+                <a:ea typeface="Inter" pitchFamily="34" charset="-122"/>
+                <a:cs typeface="Inter" pitchFamily="34" charset="-120"/>
+              </a:rPr>
+              <a:t>turning in sentences you didn't write.
+</a:t>
+            </a:r>
+            <a:pPr indent="0" marL="0">
+              <a:lnSpc>
+                <a:spcPct val="120000"/>
+              </a:lnSpc>
+              <a:buNone/>
+            </a:pPr>
+            <a:r>
+              <a:rPr lang="en-US" sz="1600" b="1" dirty="0">
+                <a:solidFill>
+                  <a:srgbClr val="13293D"/>
+                </a:solidFill>
+                <a:latin typeface="Inter" pitchFamily="34" charset="0"/>
+                <a:ea typeface="Inter" pitchFamily="34" charset="-122"/>
+                <a:cs typeface="Inter" pitchFamily="34" charset="-120"/>
+              </a:rPr>
+              <a:t>If you used AI: </a:t>
+            </a:r>
+            <a:pPr indent="0" marL="0">
+              <a:lnSpc>
+                <a:spcPct val="120000"/>
+              </a:lnSpc>
+              <a:buNone/>
+            </a:pPr>
+            <a:r>
+              <a:rPr lang="en-US" sz="1600" dirty="0">
+                <a:solidFill>
+                  <a:srgbClr val="1B1F24"/>
+                </a:solidFill>
+                <a:latin typeface="Inter" pitchFamily="34" charset="0"/>
+                <a:ea typeface="Inter" pitchFamily="34" charset="-122"/>
+                <a:cs typeface="Inter" pitchFamily="34" charset="-120"/>
+              </a:rPr>
+              <a:t>two lines at the end.
+</a:t>
+            </a:r>
+            <a:pPr indent="0" marL="0">
+              <a:lnSpc>
+                <a:spcPct val="120000"/>
+              </a:lnSpc>
+              <a:buNone/>
+            </a:pPr>
+            <a:r>
+              <a:rPr lang="en-US" sz="1600" b="1" dirty="0">
+                <a:solidFill>
+                  <a:srgbClr val="13293D"/>
+                </a:solidFill>
+                <a:latin typeface="Inter" pitchFamily="34" charset="0"/>
+                <a:ea typeface="Inter" pitchFamily="34" charset="-122"/>
+                <a:cs typeface="Inter" pitchFamily="34" charset="-120"/>
+              </a:rPr>
+              <a:t>If something seems off: </a:t>
+            </a:r>
+            <a:pPr indent="0" marL="0">
+              <a:lnSpc>
+                <a:spcPct val="120000"/>
+              </a:lnSpc>
+              <a:buNone/>
+            </a:pPr>
+            <a:r>
+              <a:rPr lang="en-US" sz="1600" dirty="0">
+                <a:solidFill>
+                  <a:srgbClr val="1B1F24"/>
+                </a:solidFill>
+                <a:latin typeface="Inter" pitchFamily="34" charset="0"/>
+                <a:ea typeface="Inter" pitchFamily="34" charset="-122"/>
+                <a:cs typeface="Inter" pitchFamily="34" charset="-120"/>
+              </a:rPr>
+              <a:t>we'll talk it through, not write it up.</a:t>
+            </a:r>
+            <a:endParaRPr lang="en-US" sz="1600" dirty="0"/>
+          </a:p>
+        </p:txBody>
+      </p:sp>
+      <p:sp>
+        <p:nvSpPr>
+          <p:cNvPr id="13" name="Text 10"/>
+          <p:cNvSpPr/>
+          <p:nvPr/>
+        </p:nvSpPr>
+        <p:spPr>
+          <a:xfrm>
+            <a:off x="640080" y="5257800"/>
             <a:ext cx="10972800" cy="502920"/>
           </a:xfrm>
           <a:prstGeom prst="rect">

--- a/kits/kit05/Kit05_PresentationDeck.pptx
+++ b/kits/kit05/Kit05_PresentationDeck.pptx
@@ -3862,7 +3862,214 @@
       </p:sp>
       <p:sp>
         <p:nvSpPr>
-          <p:cNvPr id="5" name="Text 2"/>
+          <p:cNvPr id="5" name="Shape 2"/>
+          <p:cNvSpPr/>
+          <p:nvPr/>
+        </p:nvSpPr>
+        <p:spPr>
+          <a:xfrm>
+            <a:off x="8732520" y="109728"/>
+            <a:ext cx="2926080" cy="896112"/>
+          </a:xfrm>
+          <a:prstGeom prst="roundRect">
+            <a:avLst>
+              <a:gd name="adj" fmla="val 7143"/>
+            </a:avLst>
+          </a:prstGeom>
+          <a:solidFill>
+            <a:srgbClr val="F7F5F0"/>
+          </a:solidFill>
+          <a:ln w="12700">
+            <a:solidFill>
+              <a:srgbClr val="DCE3EA"/>
+            </a:solidFill>
+            <a:prstDash val="solid"/>
+          </a:ln>
+        </p:spPr>
+      </p:sp>
+      <p:sp>
+        <p:nvSpPr>
+          <p:cNvPr id="6" name="Shape 3"/>
+          <p:cNvSpPr/>
+          <p:nvPr/>
+        </p:nvSpPr>
+        <p:spPr>
+          <a:xfrm>
+            <a:off x="8732520" y="109728"/>
+            <a:ext cx="2926080" cy="237744"/>
+          </a:xfrm>
+          <a:prstGeom prst="roundRect">
+            <a:avLst>
+              <a:gd name="adj" fmla="val 26923"/>
+            </a:avLst>
+          </a:prstGeom>
+          <a:solidFill>
+            <a:srgbClr val="0D1E2E"/>
+          </a:solidFill>
+          <a:ln w="12700">
+            <a:solidFill>
+              <a:srgbClr val="0D1E2E"/>
+            </a:solidFill>
+            <a:prstDash val="solid"/>
+          </a:ln>
+        </p:spPr>
+      </p:sp>
+      <p:sp>
+        <p:nvSpPr>
+          <p:cNvPr id="7" name="Shape 4"/>
+          <p:cNvSpPr/>
+          <p:nvPr/>
+        </p:nvSpPr>
+        <p:spPr>
+          <a:xfrm>
+            <a:off x="8823960" y="182880"/>
+            <a:ext cx="91440" cy="91440"/>
+          </a:xfrm>
+          <a:prstGeom prst="ellipse">
+            <a:avLst/>
+          </a:prstGeom>
+          <a:solidFill>
+            <a:srgbClr val="E8837A"/>
+          </a:solidFill>
+          <a:ln w="12700">
+            <a:solidFill>
+              <a:srgbClr val="E8837A"/>
+            </a:solidFill>
+            <a:prstDash val="solid"/>
+          </a:ln>
+        </p:spPr>
+      </p:sp>
+      <p:sp>
+        <p:nvSpPr>
+          <p:cNvPr id="8" name="Shape 5"/>
+          <p:cNvSpPr/>
+          <p:nvPr/>
+        </p:nvSpPr>
+        <p:spPr>
+          <a:xfrm>
+            <a:off x="8970264" y="182880"/>
+            <a:ext cx="91440" cy="91440"/>
+          </a:xfrm>
+          <a:prstGeom prst="ellipse">
+            <a:avLst/>
+          </a:prstGeom>
+          <a:solidFill>
+            <a:srgbClr val="F4A825"/>
+          </a:solidFill>
+          <a:ln w="12700">
+            <a:solidFill>
+              <a:srgbClr val="F4A825"/>
+            </a:solidFill>
+            <a:prstDash val="solid"/>
+          </a:ln>
+        </p:spPr>
+      </p:sp>
+      <p:sp>
+        <p:nvSpPr>
+          <p:cNvPr id="9" name="Shape 6"/>
+          <p:cNvSpPr/>
+          <p:nvPr/>
+        </p:nvSpPr>
+        <p:spPr>
+          <a:xfrm>
+            <a:off x="9116568" y="182880"/>
+            <a:ext cx="91440" cy="91440"/>
+          </a:xfrm>
+          <a:prstGeom prst="ellipse">
+            <a:avLst/>
+          </a:prstGeom>
+          <a:solidFill>
+            <a:srgbClr val="2E7D5B"/>
+          </a:solidFill>
+          <a:ln w="12700">
+            <a:solidFill>
+              <a:srgbClr val="2E7D5B"/>
+            </a:solidFill>
+            <a:prstDash val="solid"/>
+          </a:ln>
+        </p:spPr>
+      </p:sp>
+      <p:sp>
+        <p:nvSpPr>
+          <p:cNvPr id="10" name="Text 7"/>
+          <p:cNvSpPr/>
+          <p:nvPr/>
+        </p:nvSpPr>
+        <p:spPr>
+          <a:xfrm>
+            <a:off x="9299448" y="109728"/>
+            <a:ext cx="2286000" cy="237744"/>
+          </a:xfrm>
+          <a:prstGeom prst="rect">
+            <a:avLst/>
+          </a:prstGeom>
+          <a:noFill/>
+          <a:ln/>
+        </p:spPr>
+        <p:txBody>
+          <a:bodyPr wrap="square" lIns="0" tIns="0" rIns="0" bIns="0" rtlCol="0" anchor="ctr"/>
+          <a:lstStyle/>
+          <a:p>
+            <a:pPr indent="0" marL="0">
+              <a:buNone/>
+            </a:pPr>
+            <a:r>
+              <a:rPr lang="en-US" sz="800" b="1" spc="100" kern="0" dirty="0">
+                <a:solidFill>
+                  <a:srgbClr val="9FB2C2"/>
+                </a:solidFill>
+                <a:latin typeface="Inter" pitchFamily="34" charset="0"/>
+                <a:ea typeface="Inter" pitchFamily="34" charset="-122"/>
+                <a:cs typeface="Inter" pitchFamily="34" charset="-120"/>
+              </a:rPr>
+              <a:t>MS. RIVERA'S SCREEN · SO FAR</a:t>
+            </a:r>
+            <a:endParaRPr lang="en-US" sz="800" dirty="0"/>
+          </a:p>
+        </p:txBody>
+      </p:sp>
+      <p:sp>
+        <p:nvSpPr>
+          <p:cNvPr id="11" name="Text 8"/>
+          <p:cNvSpPr/>
+          <p:nvPr/>
+        </p:nvSpPr>
+        <p:spPr>
+          <a:xfrm>
+            <a:off x="8860536" y="365760"/>
+            <a:ext cx="2670048" cy="566928"/>
+          </a:xfrm>
+          <a:prstGeom prst="rect">
+            <a:avLst/>
+          </a:prstGeom>
+          <a:noFill/>
+          <a:ln/>
+        </p:spPr>
+        <p:txBody>
+          <a:bodyPr wrap="square" lIns="0" tIns="0" rIns="0" bIns="0" rtlCol="0" anchor="ctr"/>
+          <a:lstStyle/>
+          <a:p>
+            <a:pPr indent="0" marL="0">
+              <a:buNone/>
+            </a:pPr>
+            <a:r>
+              <a:rPr lang="en-US" sz="1000" dirty="0">
+                <a:solidFill>
+                  <a:srgbClr val="1B1F24"/>
+                </a:solidFill>
+                <a:latin typeface="Inter" pitchFamily="34" charset="0"/>
+                <a:ea typeface="Inter" pitchFamily="34" charset="-122"/>
+                <a:cs typeface="Inter" pitchFamily="34" charset="-120"/>
+              </a:rPr>
+              <a:t>Her labels, ready to print: one line per lane, in student words.</a:t>
+            </a:r>
+            <a:endParaRPr lang="en-US" sz="1000" dirty="0"/>
+          </a:p>
+        </p:txBody>
+      </p:sp>
+      <p:sp>
+        <p:nvSpPr>
+          <p:cNvPr id="12" name="Text 9"/>
           <p:cNvSpPr/>
           <p:nvPr/>
         </p:nvSpPr>
@@ -3901,7 +4108,7 @@
       </p:sp>
       <p:sp>
         <p:nvSpPr>
-          <p:cNvPr id="6" name="Text 3"/>
+          <p:cNvPr id="13" name="Text 10"/>
           <p:cNvSpPr/>
           <p:nvPr/>
         </p:nvSpPr>
@@ -3940,7 +4147,7 @@
       </p:sp>
       <p:sp>
         <p:nvSpPr>
-          <p:cNvPr id="7" name="Shape 4"/>
+          <p:cNvPr id="14" name="Shape 11"/>
           <p:cNvSpPr/>
           <p:nvPr/>
         </p:nvSpPr>
@@ -3967,7 +4174,7 @@
       </p:sp>
       <p:sp>
         <p:nvSpPr>
-          <p:cNvPr id="8" name="Text 5"/>
+          <p:cNvPr id="15" name="Text 12"/>
           <p:cNvSpPr/>
           <p:nvPr/>
         </p:nvSpPr>
@@ -4006,7 +4213,7 @@
       </p:sp>
       <p:sp>
         <p:nvSpPr>
-          <p:cNvPr id="9" name="Text 6"/>
+          <p:cNvPr id="16" name="Text 13"/>
           <p:cNvSpPr/>
           <p:nvPr/>
         </p:nvSpPr>
@@ -4045,7 +4252,7 @@
       </p:sp>
       <p:sp>
         <p:nvSpPr>
-          <p:cNvPr id="10" name="Shape 7"/>
+          <p:cNvPr id="17" name="Shape 14"/>
           <p:cNvSpPr/>
           <p:nvPr/>
         </p:nvSpPr>
@@ -4072,7 +4279,7 @@
       </p:sp>
       <p:sp>
         <p:nvSpPr>
-          <p:cNvPr id="11" name="Text 8"/>
+          <p:cNvPr id="18" name="Text 15"/>
           <p:cNvSpPr/>
           <p:nvPr/>
         </p:nvSpPr>
@@ -4111,7 +4318,7 @@
       </p:sp>
       <p:sp>
         <p:nvSpPr>
-          <p:cNvPr id="12" name="Text 9"/>
+          <p:cNvPr id="19" name="Text 16"/>
           <p:cNvSpPr/>
           <p:nvPr/>
         </p:nvSpPr>
@@ -4150,7 +4357,7 @@
       </p:sp>
       <p:sp>
         <p:nvSpPr>
-          <p:cNvPr id="13" name="Shape 10"/>
+          <p:cNvPr id="20" name="Shape 17"/>
           <p:cNvSpPr/>
           <p:nvPr/>
         </p:nvSpPr>
@@ -4177,7 +4384,7 @@
       </p:sp>
       <p:sp>
         <p:nvSpPr>
-          <p:cNvPr id="14" name="Text 11"/>
+          <p:cNvPr id="21" name="Text 18"/>
           <p:cNvSpPr/>
           <p:nvPr/>
         </p:nvSpPr>
@@ -4216,7 +4423,7 @@
       </p:sp>
       <p:sp>
         <p:nvSpPr>
-          <p:cNvPr id="15" name="Text 12"/>
+          <p:cNvPr id="22" name="Text 19"/>
           <p:cNvSpPr/>
           <p:nvPr/>
         </p:nvSpPr>
@@ -4255,7 +4462,7 @@
       </p:sp>
       <p:sp>
         <p:nvSpPr>
-          <p:cNvPr id="16" name="Text 13"/>
+          <p:cNvPr id="23" name="Text 20"/>
           <p:cNvSpPr/>
           <p:nvPr/>
         </p:nvSpPr>
@@ -4442,7 +4649,214 @@
       </p:sp>
       <p:sp>
         <p:nvSpPr>
-          <p:cNvPr id="5" name="Text 2"/>
+          <p:cNvPr id="5" name="Shape 2"/>
+          <p:cNvSpPr/>
+          <p:nvPr/>
+        </p:nvSpPr>
+        <p:spPr>
+          <a:xfrm>
+            <a:off x="8732520" y="109728"/>
+            <a:ext cx="2926080" cy="896112"/>
+          </a:xfrm>
+          <a:prstGeom prst="roundRect">
+            <a:avLst>
+              <a:gd name="adj" fmla="val 7143"/>
+            </a:avLst>
+          </a:prstGeom>
+          <a:solidFill>
+            <a:srgbClr val="F7F5F0"/>
+          </a:solidFill>
+          <a:ln w="12700">
+            <a:solidFill>
+              <a:srgbClr val="DCE3EA"/>
+            </a:solidFill>
+            <a:prstDash val="solid"/>
+          </a:ln>
+        </p:spPr>
+      </p:sp>
+      <p:sp>
+        <p:nvSpPr>
+          <p:cNvPr id="6" name="Shape 3"/>
+          <p:cNvSpPr/>
+          <p:nvPr/>
+        </p:nvSpPr>
+        <p:spPr>
+          <a:xfrm>
+            <a:off x="8732520" y="109728"/>
+            <a:ext cx="2926080" cy="237744"/>
+          </a:xfrm>
+          <a:prstGeom prst="roundRect">
+            <a:avLst>
+              <a:gd name="adj" fmla="val 26923"/>
+            </a:avLst>
+          </a:prstGeom>
+          <a:solidFill>
+            <a:srgbClr val="0D1E2E"/>
+          </a:solidFill>
+          <a:ln w="12700">
+            <a:solidFill>
+              <a:srgbClr val="0D1E2E"/>
+            </a:solidFill>
+            <a:prstDash val="solid"/>
+          </a:ln>
+        </p:spPr>
+      </p:sp>
+      <p:sp>
+        <p:nvSpPr>
+          <p:cNvPr id="7" name="Shape 4"/>
+          <p:cNvSpPr/>
+          <p:nvPr/>
+        </p:nvSpPr>
+        <p:spPr>
+          <a:xfrm>
+            <a:off x="8823960" y="182880"/>
+            <a:ext cx="91440" cy="91440"/>
+          </a:xfrm>
+          <a:prstGeom prst="ellipse">
+            <a:avLst/>
+          </a:prstGeom>
+          <a:solidFill>
+            <a:srgbClr val="E8837A"/>
+          </a:solidFill>
+          <a:ln w="12700">
+            <a:solidFill>
+              <a:srgbClr val="E8837A"/>
+            </a:solidFill>
+            <a:prstDash val="solid"/>
+          </a:ln>
+        </p:spPr>
+      </p:sp>
+      <p:sp>
+        <p:nvSpPr>
+          <p:cNvPr id="8" name="Shape 5"/>
+          <p:cNvSpPr/>
+          <p:nvPr/>
+        </p:nvSpPr>
+        <p:spPr>
+          <a:xfrm>
+            <a:off x="8970264" y="182880"/>
+            <a:ext cx="91440" cy="91440"/>
+          </a:xfrm>
+          <a:prstGeom prst="ellipse">
+            <a:avLst/>
+          </a:prstGeom>
+          <a:solidFill>
+            <a:srgbClr val="F4A825"/>
+          </a:solidFill>
+          <a:ln w="12700">
+            <a:solidFill>
+              <a:srgbClr val="F4A825"/>
+            </a:solidFill>
+            <a:prstDash val="solid"/>
+          </a:ln>
+        </p:spPr>
+      </p:sp>
+      <p:sp>
+        <p:nvSpPr>
+          <p:cNvPr id="9" name="Shape 6"/>
+          <p:cNvSpPr/>
+          <p:nvPr/>
+        </p:nvSpPr>
+        <p:spPr>
+          <a:xfrm>
+            <a:off x="9116568" y="182880"/>
+            <a:ext cx="91440" cy="91440"/>
+          </a:xfrm>
+          <a:prstGeom prst="ellipse">
+            <a:avLst/>
+          </a:prstGeom>
+          <a:solidFill>
+            <a:srgbClr val="2E7D5B"/>
+          </a:solidFill>
+          <a:ln w="12700">
+            <a:solidFill>
+              <a:srgbClr val="2E7D5B"/>
+            </a:solidFill>
+            <a:prstDash val="solid"/>
+          </a:ln>
+        </p:spPr>
+      </p:sp>
+      <p:sp>
+        <p:nvSpPr>
+          <p:cNvPr id="10" name="Text 7"/>
+          <p:cNvSpPr/>
+          <p:nvPr/>
+        </p:nvSpPr>
+        <p:spPr>
+          <a:xfrm>
+            <a:off x="9299448" y="109728"/>
+            <a:ext cx="2286000" cy="237744"/>
+          </a:xfrm>
+          <a:prstGeom prst="rect">
+            <a:avLst/>
+          </a:prstGeom>
+          <a:noFill/>
+          <a:ln/>
+        </p:spPr>
+        <p:txBody>
+          <a:bodyPr wrap="square" lIns="0" tIns="0" rIns="0" bIns="0" rtlCol="0" anchor="ctr"/>
+          <a:lstStyle/>
+          <a:p>
+            <a:pPr indent="0" marL="0">
+              <a:buNone/>
+            </a:pPr>
+            <a:r>
+              <a:rPr lang="en-US" sz="800" b="1" spc="100" kern="0" dirty="0">
+                <a:solidFill>
+                  <a:srgbClr val="9FB2C2"/>
+                </a:solidFill>
+                <a:latin typeface="Inter" pitchFamily="34" charset="0"/>
+                <a:ea typeface="Inter" pitchFamily="34" charset="-122"/>
+                <a:cs typeface="Inter" pitchFamily="34" charset="-120"/>
+              </a:rPr>
+              <a:t>MS. RIVERA'S SCREEN · SO FAR</a:t>
+            </a:r>
+            <a:endParaRPr lang="en-US" sz="800" dirty="0"/>
+          </a:p>
+        </p:txBody>
+      </p:sp>
+      <p:sp>
+        <p:nvSpPr>
+          <p:cNvPr id="11" name="Text 8"/>
+          <p:cNvSpPr/>
+          <p:nvPr/>
+        </p:nvSpPr>
+        <p:spPr>
+          <a:xfrm>
+            <a:off x="8860536" y="365760"/>
+            <a:ext cx="2670048" cy="566928"/>
+          </a:xfrm>
+          <a:prstGeom prst="rect">
+            <a:avLst/>
+          </a:prstGeom>
+          <a:noFill/>
+          <a:ln/>
+        </p:spPr>
+        <p:txBody>
+          <a:bodyPr wrap="square" lIns="0" tIns="0" rIns="0" bIns="0" rtlCol="0" anchor="ctr"/>
+          <a:lstStyle/>
+          <a:p>
+            <a:pPr indent="0" marL="0">
+              <a:buNone/>
+            </a:pPr>
+            <a:r>
+              <a:rPr lang="en-US" sz="1000" dirty="0">
+                <a:solidFill>
+                  <a:srgbClr val="1B1F24"/>
+                </a:solidFill>
+                <a:latin typeface="Inter" pitchFamily="34" charset="0"/>
+                <a:ea typeface="Inter" pitchFamily="34" charset="-122"/>
+                <a:cs typeface="Inter" pitchFamily="34" charset="-120"/>
+              </a:rPr>
+              <a:t>Her disclosure norm: two lines: what tool, what it did. Honesty lands soft.</a:t>
+            </a:r>
+            <a:endParaRPr lang="en-US" sz="1000" dirty="0"/>
+          </a:p>
+        </p:txBody>
+      </p:sp>
+      <p:sp>
+        <p:nvSpPr>
+          <p:cNvPr id="12" name="Text 9"/>
           <p:cNvSpPr/>
           <p:nvPr/>
         </p:nvSpPr>
@@ -4481,7 +4895,7 @@
       </p:sp>
       <p:sp>
         <p:nvSpPr>
-          <p:cNvPr id="6" name="Text 3"/>
+          <p:cNvPr id="13" name="Text 10"/>
           <p:cNvSpPr/>
           <p:nvPr/>
         </p:nvSpPr>
@@ -4520,7 +4934,7 @@
       </p:sp>
       <p:sp>
         <p:nvSpPr>
-          <p:cNvPr id="7" name="Shape 4"/>
+          <p:cNvPr id="14" name="Shape 11"/>
           <p:cNvSpPr/>
           <p:nvPr/>
         </p:nvSpPr>
@@ -4547,7 +4961,7 @@
       </p:sp>
       <p:sp>
         <p:nvSpPr>
-          <p:cNvPr id="8" name="Text 5"/>
+          <p:cNvPr id="15" name="Text 12"/>
           <p:cNvSpPr/>
           <p:nvPr/>
         </p:nvSpPr>
@@ -4586,7 +5000,7 @@
       </p:sp>
       <p:sp>
         <p:nvSpPr>
-          <p:cNvPr id="9" name="Text 6"/>
+          <p:cNvPr id="16" name="Text 13"/>
           <p:cNvSpPr/>
           <p:nvPr/>
         </p:nvSpPr>
@@ -4642,7 +5056,7 @@
       </p:sp>
       <p:sp>
         <p:nvSpPr>
-          <p:cNvPr id="10" name="Text 7"/>
+          <p:cNvPr id="17" name="Text 14"/>
           <p:cNvSpPr/>
           <p:nvPr/>
         </p:nvSpPr>
@@ -4875,7 +5289,214 @@
       </p:sp>
       <p:sp>
         <p:nvSpPr>
-          <p:cNvPr id="5" name="Text 2"/>
+          <p:cNvPr id="5" name="Shape 2"/>
+          <p:cNvSpPr/>
+          <p:nvPr/>
+        </p:nvSpPr>
+        <p:spPr>
+          <a:xfrm>
+            <a:off x="8732520" y="109728"/>
+            <a:ext cx="2926080" cy="896112"/>
+          </a:xfrm>
+          <a:prstGeom prst="roundRect">
+            <a:avLst>
+              <a:gd name="adj" fmla="val 7143"/>
+            </a:avLst>
+          </a:prstGeom>
+          <a:solidFill>
+            <a:srgbClr val="F7F5F0"/>
+          </a:solidFill>
+          <a:ln w="12700">
+            <a:solidFill>
+              <a:srgbClr val="DCE3EA"/>
+            </a:solidFill>
+            <a:prstDash val="solid"/>
+          </a:ln>
+        </p:spPr>
+      </p:sp>
+      <p:sp>
+        <p:nvSpPr>
+          <p:cNvPr id="6" name="Shape 3"/>
+          <p:cNvSpPr/>
+          <p:nvPr/>
+        </p:nvSpPr>
+        <p:spPr>
+          <a:xfrm>
+            <a:off x="8732520" y="109728"/>
+            <a:ext cx="2926080" cy="237744"/>
+          </a:xfrm>
+          <a:prstGeom prst="roundRect">
+            <a:avLst>
+              <a:gd name="adj" fmla="val 26923"/>
+            </a:avLst>
+          </a:prstGeom>
+          <a:solidFill>
+            <a:srgbClr val="0D1E2E"/>
+          </a:solidFill>
+          <a:ln w="12700">
+            <a:solidFill>
+              <a:srgbClr val="0D1E2E"/>
+            </a:solidFill>
+            <a:prstDash val="solid"/>
+          </a:ln>
+        </p:spPr>
+      </p:sp>
+      <p:sp>
+        <p:nvSpPr>
+          <p:cNvPr id="7" name="Shape 4"/>
+          <p:cNvSpPr/>
+          <p:nvPr/>
+        </p:nvSpPr>
+        <p:spPr>
+          <a:xfrm>
+            <a:off x="8823960" y="182880"/>
+            <a:ext cx="91440" cy="91440"/>
+          </a:xfrm>
+          <a:prstGeom prst="ellipse">
+            <a:avLst/>
+          </a:prstGeom>
+          <a:solidFill>
+            <a:srgbClr val="E8837A"/>
+          </a:solidFill>
+          <a:ln w="12700">
+            <a:solidFill>
+              <a:srgbClr val="E8837A"/>
+            </a:solidFill>
+            <a:prstDash val="solid"/>
+          </a:ln>
+        </p:spPr>
+      </p:sp>
+      <p:sp>
+        <p:nvSpPr>
+          <p:cNvPr id="8" name="Shape 5"/>
+          <p:cNvSpPr/>
+          <p:nvPr/>
+        </p:nvSpPr>
+        <p:spPr>
+          <a:xfrm>
+            <a:off x="8970264" y="182880"/>
+            <a:ext cx="91440" cy="91440"/>
+          </a:xfrm>
+          <a:prstGeom prst="ellipse">
+            <a:avLst/>
+          </a:prstGeom>
+          <a:solidFill>
+            <a:srgbClr val="F4A825"/>
+          </a:solidFill>
+          <a:ln w="12700">
+            <a:solidFill>
+              <a:srgbClr val="F4A825"/>
+            </a:solidFill>
+            <a:prstDash val="solid"/>
+          </a:ln>
+        </p:spPr>
+      </p:sp>
+      <p:sp>
+        <p:nvSpPr>
+          <p:cNvPr id="9" name="Shape 6"/>
+          <p:cNvSpPr/>
+          <p:nvPr/>
+        </p:nvSpPr>
+        <p:spPr>
+          <a:xfrm>
+            <a:off x="9116568" y="182880"/>
+            <a:ext cx="91440" cy="91440"/>
+          </a:xfrm>
+          <a:prstGeom prst="ellipse">
+            <a:avLst/>
+          </a:prstGeom>
+          <a:solidFill>
+            <a:srgbClr val="2E7D5B"/>
+          </a:solidFill>
+          <a:ln w="12700">
+            <a:solidFill>
+              <a:srgbClr val="2E7D5B"/>
+            </a:solidFill>
+            <a:prstDash val="solid"/>
+          </a:ln>
+        </p:spPr>
+      </p:sp>
+      <p:sp>
+        <p:nvSpPr>
+          <p:cNvPr id="10" name="Text 7"/>
+          <p:cNvSpPr/>
+          <p:nvPr/>
+        </p:nvSpPr>
+        <p:spPr>
+          <a:xfrm>
+            <a:off x="9299448" y="109728"/>
+            <a:ext cx="2286000" cy="237744"/>
+          </a:xfrm>
+          <a:prstGeom prst="rect">
+            <a:avLst/>
+          </a:prstGeom>
+          <a:noFill/>
+          <a:ln/>
+        </p:spPr>
+        <p:txBody>
+          <a:bodyPr wrap="square" lIns="0" tIns="0" rIns="0" bIns="0" rtlCol="0" anchor="ctr"/>
+          <a:lstStyle/>
+          <a:p>
+            <a:pPr indent="0" marL="0">
+              <a:buNone/>
+            </a:pPr>
+            <a:r>
+              <a:rPr lang="en-US" sz="800" b="1" spc="100" kern="0" dirty="0">
+                <a:solidFill>
+                  <a:srgbClr val="9FB2C2"/>
+                </a:solidFill>
+                <a:latin typeface="Inter" pitchFamily="34" charset="0"/>
+                <a:ea typeface="Inter" pitchFamily="34" charset="-122"/>
+                <a:cs typeface="Inter" pitchFamily="34" charset="-120"/>
+              </a:rPr>
+              <a:t>MS. RIVERA'S SCREEN · SO FAR</a:t>
+            </a:r>
+            <a:endParaRPr lang="en-US" sz="800" dirty="0"/>
+          </a:p>
+        </p:txBody>
+      </p:sp>
+      <p:sp>
+        <p:nvSpPr>
+          <p:cNvPr id="11" name="Text 8"/>
+          <p:cNvSpPr/>
+          <p:nvPr/>
+        </p:nvSpPr>
+        <p:spPr>
+          <a:xfrm>
+            <a:off x="8860536" y="365760"/>
+            <a:ext cx="2670048" cy="566928"/>
+          </a:xfrm>
+          <a:prstGeom prst="rect">
+            <a:avLst/>
+          </a:prstGeom>
+          <a:noFill/>
+          <a:ln/>
+        </p:spPr>
+        <p:txBody>
+          <a:bodyPr wrap="square" lIns="0" tIns="0" rIns="0" bIns="0" rtlCol="0" anchor="ctr"/>
+          <a:lstStyle/>
+          <a:p>
+            <a:pPr indent="0" marL="0">
+              <a:buNone/>
+            </a:pPr>
+            <a:r>
+              <a:rPr lang="en-US" sz="1000" dirty="0">
+                <a:solidFill>
+                  <a:srgbClr val="1B1F24"/>
+                </a:solidFill>
+                <a:latin typeface="Inter" pitchFamily="34" charset="0"/>
+                <a:ea typeface="Inter" pitchFamily="34" charset="-122"/>
+                <a:cs typeface="Inter" pitchFamily="34" charset="-120"/>
+              </a:rPr>
+              <a:t>Her calls: quiz lane 1, essay lane 2, research lane 3, homework = design.</a:t>
+            </a:r>
+            <a:endParaRPr lang="en-US" sz="1000" dirty="0"/>
+          </a:p>
+        </p:txBody>
+      </p:sp>
+      <p:sp>
+        <p:nvSpPr>
+          <p:cNvPr id="12" name="Text 9"/>
           <p:cNvSpPr/>
           <p:nvPr/>
         </p:nvSpPr>
@@ -4914,7 +5535,7 @@
       </p:sp>
       <p:sp>
         <p:nvSpPr>
-          <p:cNvPr id="6" name="Text 3"/>
+          <p:cNvPr id="13" name="Text 10"/>
           <p:cNvSpPr/>
           <p:nvPr/>
         </p:nvSpPr>
@@ -4953,7 +5574,7 @@
       </p:sp>
       <p:sp>
         <p:nvSpPr>
-          <p:cNvPr id="7" name="Text 4"/>
+          <p:cNvPr id="14" name="Text 11"/>
           <p:cNvSpPr/>
           <p:nvPr/>
         </p:nvSpPr>
@@ -4992,7 +5613,7 @@
       </p:sp>
       <p:sp>
         <p:nvSpPr>
-          <p:cNvPr id="8" name="Text 5"/>
+          <p:cNvPr id="15" name="Text 12"/>
           <p:cNvSpPr/>
           <p:nvPr/>
         </p:nvSpPr>
@@ -5031,7 +5652,7 @@
       </p:sp>
       <p:sp>
         <p:nvSpPr>
-          <p:cNvPr id="9" name="Text 6"/>
+          <p:cNvPr id="16" name="Text 13"/>
           <p:cNvSpPr/>
           <p:nvPr/>
         </p:nvSpPr>
@@ -5070,7 +5691,7 @@
       </p:sp>
       <p:sp>
         <p:nvSpPr>
-          <p:cNvPr id="10" name="Text 7"/>
+          <p:cNvPr id="17" name="Text 14"/>
           <p:cNvSpPr/>
           <p:nvPr/>
         </p:nvSpPr>
@@ -5109,7 +5730,7 @@
       </p:sp>
       <p:sp>
         <p:nvSpPr>
-          <p:cNvPr id="11" name="Text 8"/>
+          <p:cNvPr id="18" name="Text 15"/>
           <p:cNvSpPr/>
           <p:nvPr/>
         </p:nvSpPr>
@@ -5148,7 +5769,7 @@
       </p:sp>
       <p:sp>
         <p:nvSpPr>
-          <p:cNvPr id="12" name="Text 9"/>
+          <p:cNvPr id="19" name="Text 16"/>
           <p:cNvSpPr/>
           <p:nvPr/>
         </p:nvSpPr>
@@ -5187,7 +5808,7 @@
       </p:sp>
       <p:sp>
         <p:nvSpPr>
-          <p:cNvPr id="13" name="Text 10"/>
+          <p:cNvPr id="20" name="Text 17"/>
           <p:cNvSpPr/>
           <p:nvPr/>
         </p:nvSpPr>
@@ -5226,7 +5847,7 @@
       </p:sp>
       <p:sp>
         <p:nvSpPr>
-          <p:cNvPr id="14" name="Text 11"/>
+          <p:cNvPr id="21" name="Text 18"/>
           <p:cNvSpPr/>
           <p:nvPr/>
         </p:nvSpPr>
@@ -5265,7 +5886,7 @@
       </p:sp>
       <p:sp>
         <p:nvSpPr>
-          <p:cNvPr id="15" name="Text 12"/>
+          <p:cNvPr id="22" name="Text 19"/>
           <p:cNvSpPr/>
           <p:nvPr/>
         </p:nvSpPr>
@@ -5304,7 +5925,7 @@
       </p:sp>
       <p:sp>
         <p:nvSpPr>
-          <p:cNvPr id="16" name="Text 13"/>
+          <p:cNvPr id="23" name="Text 20"/>
           <p:cNvSpPr/>
           <p:nvPr/>
         </p:nvSpPr>
@@ -5343,7 +5964,7 @@
       </p:sp>
       <p:sp>
         <p:nvSpPr>
-          <p:cNvPr id="17" name="Text 14"/>
+          <p:cNvPr id="24" name="Text 21"/>
           <p:cNvSpPr/>
           <p:nvPr/>
         </p:nvSpPr>
@@ -5382,7 +6003,7 @@
       </p:sp>
       <p:sp>
         <p:nvSpPr>
-          <p:cNvPr id="18" name="Text 15"/>
+          <p:cNvPr id="25" name="Text 22"/>
           <p:cNvSpPr/>
           <p:nvPr/>
         </p:nvSpPr>
@@ -5569,7 +6190,214 @@
       </p:sp>
       <p:sp>
         <p:nvSpPr>
-          <p:cNvPr id="5" name="Text 2"/>
+          <p:cNvPr id="5" name="Shape 2"/>
+          <p:cNvSpPr/>
+          <p:nvPr/>
+        </p:nvSpPr>
+        <p:spPr>
+          <a:xfrm>
+            <a:off x="8732520" y="109728"/>
+            <a:ext cx="2926080" cy="896112"/>
+          </a:xfrm>
+          <a:prstGeom prst="roundRect">
+            <a:avLst>
+              <a:gd name="adj" fmla="val 7143"/>
+            </a:avLst>
+          </a:prstGeom>
+          <a:solidFill>
+            <a:srgbClr val="F7F5F0"/>
+          </a:solidFill>
+          <a:ln w="12700">
+            <a:solidFill>
+              <a:srgbClr val="DCE3EA"/>
+            </a:solidFill>
+            <a:prstDash val="solid"/>
+          </a:ln>
+        </p:spPr>
+      </p:sp>
+      <p:sp>
+        <p:nvSpPr>
+          <p:cNvPr id="6" name="Shape 3"/>
+          <p:cNvSpPr/>
+          <p:nvPr/>
+        </p:nvSpPr>
+        <p:spPr>
+          <a:xfrm>
+            <a:off x="8732520" y="109728"/>
+            <a:ext cx="2926080" cy="237744"/>
+          </a:xfrm>
+          <a:prstGeom prst="roundRect">
+            <a:avLst>
+              <a:gd name="adj" fmla="val 26923"/>
+            </a:avLst>
+          </a:prstGeom>
+          <a:solidFill>
+            <a:srgbClr val="0D1E2E"/>
+          </a:solidFill>
+          <a:ln w="12700">
+            <a:solidFill>
+              <a:srgbClr val="0D1E2E"/>
+            </a:solidFill>
+            <a:prstDash val="solid"/>
+          </a:ln>
+        </p:spPr>
+      </p:sp>
+      <p:sp>
+        <p:nvSpPr>
+          <p:cNvPr id="7" name="Shape 4"/>
+          <p:cNvSpPr/>
+          <p:nvPr/>
+        </p:nvSpPr>
+        <p:spPr>
+          <a:xfrm>
+            <a:off x="8823960" y="182880"/>
+            <a:ext cx="91440" cy="91440"/>
+          </a:xfrm>
+          <a:prstGeom prst="ellipse">
+            <a:avLst/>
+          </a:prstGeom>
+          <a:solidFill>
+            <a:srgbClr val="E8837A"/>
+          </a:solidFill>
+          <a:ln w="12700">
+            <a:solidFill>
+              <a:srgbClr val="E8837A"/>
+            </a:solidFill>
+            <a:prstDash val="solid"/>
+          </a:ln>
+        </p:spPr>
+      </p:sp>
+      <p:sp>
+        <p:nvSpPr>
+          <p:cNvPr id="8" name="Shape 5"/>
+          <p:cNvSpPr/>
+          <p:nvPr/>
+        </p:nvSpPr>
+        <p:spPr>
+          <a:xfrm>
+            <a:off x="8970264" y="182880"/>
+            <a:ext cx="91440" cy="91440"/>
+          </a:xfrm>
+          <a:prstGeom prst="ellipse">
+            <a:avLst/>
+          </a:prstGeom>
+          <a:solidFill>
+            <a:srgbClr val="F4A825"/>
+          </a:solidFill>
+          <a:ln w="12700">
+            <a:solidFill>
+              <a:srgbClr val="F4A825"/>
+            </a:solidFill>
+            <a:prstDash val="solid"/>
+          </a:ln>
+        </p:spPr>
+      </p:sp>
+      <p:sp>
+        <p:nvSpPr>
+          <p:cNvPr id="9" name="Shape 6"/>
+          <p:cNvSpPr/>
+          <p:nvPr/>
+        </p:nvSpPr>
+        <p:spPr>
+          <a:xfrm>
+            <a:off x="9116568" y="182880"/>
+            <a:ext cx="91440" cy="91440"/>
+          </a:xfrm>
+          <a:prstGeom prst="ellipse">
+            <a:avLst/>
+          </a:prstGeom>
+          <a:solidFill>
+            <a:srgbClr val="2E7D5B"/>
+          </a:solidFill>
+          <a:ln w="12700">
+            <a:solidFill>
+              <a:srgbClr val="2E7D5B"/>
+            </a:solidFill>
+            <a:prstDash val="solid"/>
+          </a:ln>
+        </p:spPr>
+      </p:sp>
+      <p:sp>
+        <p:nvSpPr>
+          <p:cNvPr id="10" name="Text 7"/>
+          <p:cNvSpPr/>
+          <p:nvPr/>
+        </p:nvSpPr>
+        <p:spPr>
+          <a:xfrm>
+            <a:off x="9299448" y="109728"/>
+            <a:ext cx="2286000" cy="237744"/>
+          </a:xfrm>
+          <a:prstGeom prst="rect">
+            <a:avLst/>
+          </a:prstGeom>
+          <a:noFill/>
+          <a:ln/>
+        </p:spPr>
+        <p:txBody>
+          <a:bodyPr wrap="square" lIns="0" tIns="0" rIns="0" bIns="0" rtlCol="0" anchor="ctr"/>
+          <a:lstStyle/>
+          <a:p>
+            <a:pPr indent="0" marL="0">
+              <a:buNone/>
+            </a:pPr>
+            <a:r>
+              <a:rPr lang="en-US" sz="800" b="1" spc="100" kern="0" dirty="0">
+                <a:solidFill>
+                  <a:srgbClr val="9FB2C2"/>
+                </a:solidFill>
+                <a:latin typeface="Inter" pitchFamily="34" charset="0"/>
+                <a:ea typeface="Inter" pitchFamily="34" charset="-122"/>
+                <a:cs typeface="Inter" pitchFamily="34" charset="-120"/>
+              </a:rPr>
+              <a:t>MS. RIVERA'S SCREEN · SO FAR</a:t>
+            </a:r>
+            <a:endParaRPr lang="en-US" sz="800" dirty="0"/>
+          </a:p>
+        </p:txBody>
+      </p:sp>
+      <p:sp>
+        <p:nvSpPr>
+          <p:cNvPr id="11" name="Text 8"/>
+          <p:cNvSpPr/>
+          <p:nvPr/>
+        </p:nvSpPr>
+        <p:spPr>
+          <a:xfrm>
+            <a:off x="8860536" y="365760"/>
+            <a:ext cx="2670048" cy="566928"/>
+          </a:xfrm>
+          <a:prstGeom prst="rect">
+            <a:avLst/>
+          </a:prstGeom>
+          <a:noFill/>
+          <a:ln/>
+        </p:spPr>
+        <p:txBody>
+          <a:bodyPr wrap="square" lIns="0" tIns="0" rIns="0" bIns="0" rtlCol="0" anchor="ctr"/>
+          <a:lstStyle/>
+          <a:p>
+            <a:pPr indent="0" marL="0">
+              <a:buNone/>
+            </a:pPr>
+            <a:r>
+              <a:rPr lang="en-US" sz="1000" dirty="0">
+                <a:solidFill>
+                  <a:srgbClr val="1B1F24"/>
+                </a:solidFill>
+                <a:latin typeface="Inter" pitchFamily="34" charset="0"/>
+                <a:ea typeface="Inter" pitchFamily="34" charset="-122"/>
+                <a:cs typeface="Inter" pitchFamily="34" charset="-120"/>
+              </a:rPr>
+              <a:t>Her design moves: visible thinking, plus anchors from Tuesday's class.</a:t>
+            </a:r>
+            <a:endParaRPr lang="en-US" sz="1000" dirty="0"/>
+          </a:p>
+        </p:txBody>
+      </p:sp>
+      <p:sp>
+        <p:nvSpPr>
+          <p:cNvPr id="12" name="Text 9"/>
           <p:cNvSpPr/>
           <p:nvPr/>
         </p:nvSpPr>
@@ -5608,30 +6436,30 @@
       </p:sp>
       <p:sp>
         <p:nvSpPr>
-          <p:cNvPr id="6" name="Text 3"/>
+          <p:cNvPr id="13" name="Text 10"/>
           <p:cNvSpPr/>
           <p:nvPr/>
         </p:nvSpPr>
         <p:spPr>
           <a:xfrm>
             <a:off x="548640" y="384048"/>
-            <a:ext cx="11091672" cy="777240"/>
-          </a:xfrm>
-          <a:prstGeom prst="rect">
-            <a:avLst/>
-          </a:prstGeom>
-          <a:noFill/>
-          <a:ln/>
-        </p:spPr>
-        <p:txBody>
-          <a:bodyPr wrap="square" lIns="0" tIns="0" rIns="0" bIns="0" rtlCol="0" anchor="ctr"/>
-          <a:lstStyle/>
-          <a:p>
-            <a:pPr indent="0" marL="0">
-              <a:buNone/>
-            </a:pPr>
-            <a:r>
-              <a:rPr lang="en-US" sz="3200" b="1" dirty="0">
+            <a:ext cx="7955280" cy="777240"/>
+          </a:xfrm>
+          <a:prstGeom prst="rect">
+            <a:avLst/>
+          </a:prstGeom>
+          <a:noFill/>
+          <a:ln/>
+        </p:spPr>
+        <p:txBody>
+          <a:bodyPr wrap="square" lIns="0" tIns="0" rIns="0" bIns="0" rtlCol="0" anchor="ctr"/>
+          <a:lstStyle/>
+          <a:p>
+            <a:pPr indent="0" marL="0">
+              <a:buNone/>
+            </a:pPr>
+            <a:r>
+              <a:rPr lang="en-US" sz="2800" b="1" dirty="0">
                 <a:solidFill>
                   <a:srgbClr val="13293D"/>
                 </a:solidFill>
@@ -5641,13 +6469,13 @@
               </a:rPr>
               <a:t>Move 1: visible thinking · Move 2: local anchors</a:t>
             </a:r>
-            <a:endParaRPr lang="en-US" sz="3200" dirty="0"/>
-          </a:p>
-        </p:txBody>
-      </p:sp>
-      <p:sp>
-        <p:nvSpPr>
-          <p:cNvPr id="7" name="Shape 4"/>
+            <a:endParaRPr lang="en-US" sz="2800" dirty="0"/>
+          </a:p>
+        </p:txBody>
+      </p:sp>
+      <p:sp>
+        <p:nvSpPr>
+          <p:cNvPr id="14" name="Shape 11"/>
           <p:cNvSpPr/>
           <p:nvPr/>
         </p:nvSpPr>
@@ -5674,7 +6502,7 @@
       </p:sp>
       <p:sp>
         <p:nvSpPr>
-          <p:cNvPr id="8" name="Text 5"/>
+          <p:cNvPr id="15" name="Text 12"/>
           <p:cNvSpPr/>
           <p:nvPr/>
         </p:nvSpPr>
@@ -5713,7 +6541,7 @@
       </p:sp>
       <p:sp>
         <p:nvSpPr>
-          <p:cNvPr id="9" name="Text 6"/>
+          <p:cNvPr id="16" name="Text 13"/>
           <p:cNvSpPr/>
           <p:nvPr/>
         </p:nvSpPr>
@@ -5775,7 +6603,7 @@
       </p:sp>
       <p:sp>
         <p:nvSpPr>
-          <p:cNvPr id="10" name="Shape 7"/>
+          <p:cNvPr id="17" name="Shape 14"/>
           <p:cNvSpPr/>
           <p:nvPr/>
         </p:nvSpPr>
@@ -5802,7 +6630,7 @@
       </p:sp>
       <p:sp>
         <p:nvSpPr>
-          <p:cNvPr id="11" name="Text 8"/>
+          <p:cNvPr id="18" name="Text 15"/>
           <p:cNvSpPr/>
           <p:nvPr/>
         </p:nvSpPr>
@@ -5841,7 +6669,7 @@
       </p:sp>
       <p:sp>
         <p:nvSpPr>
-          <p:cNvPr id="12" name="Text 9"/>
+          <p:cNvPr id="19" name="Text 16"/>
           <p:cNvSpPr/>
           <p:nvPr/>
         </p:nvSpPr>
@@ -6051,7 +6879,214 @@
       </p:sp>
       <p:sp>
         <p:nvSpPr>
-          <p:cNvPr id="5" name="Text 2"/>
+          <p:cNvPr id="5" name="Shape 2"/>
+          <p:cNvSpPr/>
+          <p:nvPr/>
+        </p:nvSpPr>
+        <p:spPr>
+          <a:xfrm>
+            <a:off x="8732520" y="109728"/>
+            <a:ext cx="2926080" cy="896112"/>
+          </a:xfrm>
+          <a:prstGeom prst="roundRect">
+            <a:avLst>
+              <a:gd name="adj" fmla="val 7143"/>
+            </a:avLst>
+          </a:prstGeom>
+          <a:solidFill>
+            <a:srgbClr val="F7F5F0"/>
+          </a:solidFill>
+          <a:ln w="12700">
+            <a:solidFill>
+              <a:srgbClr val="DCE3EA"/>
+            </a:solidFill>
+            <a:prstDash val="solid"/>
+          </a:ln>
+        </p:spPr>
+      </p:sp>
+      <p:sp>
+        <p:nvSpPr>
+          <p:cNvPr id="6" name="Shape 3"/>
+          <p:cNvSpPr/>
+          <p:nvPr/>
+        </p:nvSpPr>
+        <p:spPr>
+          <a:xfrm>
+            <a:off x="8732520" y="109728"/>
+            <a:ext cx="2926080" cy="237744"/>
+          </a:xfrm>
+          <a:prstGeom prst="roundRect">
+            <a:avLst>
+              <a:gd name="adj" fmla="val 26923"/>
+            </a:avLst>
+          </a:prstGeom>
+          <a:solidFill>
+            <a:srgbClr val="0D1E2E"/>
+          </a:solidFill>
+          <a:ln w="12700">
+            <a:solidFill>
+              <a:srgbClr val="0D1E2E"/>
+            </a:solidFill>
+            <a:prstDash val="solid"/>
+          </a:ln>
+        </p:spPr>
+      </p:sp>
+      <p:sp>
+        <p:nvSpPr>
+          <p:cNvPr id="7" name="Shape 4"/>
+          <p:cNvSpPr/>
+          <p:nvPr/>
+        </p:nvSpPr>
+        <p:spPr>
+          <a:xfrm>
+            <a:off x="8823960" y="182880"/>
+            <a:ext cx="91440" cy="91440"/>
+          </a:xfrm>
+          <a:prstGeom prst="ellipse">
+            <a:avLst/>
+          </a:prstGeom>
+          <a:solidFill>
+            <a:srgbClr val="E8837A"/>
+          </a:solidFill>
+          <a:ln w="12700">
+            <a:solidFill>
+              <a:srgbClr val="E8837A"/>
+            </a:solidFill>
+            <a:prstDash val="solid"/>
+          </a:ln>
+        </p:spPr>
+      </p:sp>
+      <p:sp>
+        <p:nvSpPr>
+          <p:cNvPr id="8" name="Shape 5"/>
+          <p:cNvSpPr/>
+          <p:nvPr/>
+        </p:nvSpPr>
+        <p:spPr>
+          <a:xfrm>
+            <a:off x="8970264" y="182880"/>
+            <a:ext cx="91440" cy="91440"/>
+          </a:xfrm>
+          <a:prstGeom prst="ellipse">
+            <a:avLst/>
+          </a:prstGeom>
+          <a:solidFill>
+            <a:srgbClr val="F4A825"/>
+          </a:solidFill>
+          <a:ln w="12700">
+            <a:solidFill>
+              <a:srgbClr val="F4A825"/>
+            </a:solidFill>
+            <a:prstDash val="solid"/>
+          </a:ln>
+        </p:spPr>
+      </p:sp>
+      <p:sp>
+        <p:nvSpPr>
+          <p:cNvPr id="9" name="Shape 6"/>
+          <p:cNvSpPr/>
+          <p:nvPr/>
+        </p:nvSpPr>
+        <p:spPr>
+          <a:xfrm>
+            <a:off x="9116568" y="182880"/>
+            <a:ext cx="91440" cy="91440"/>
+          </a:xfrm>
+          <a:prstGeom prst="ellipse">
+            <a:avLst/>
+          </a:prstGeom>
+          <a:solidFill>
+            <a:srgbClr val="2E7D5B"/>
+          </a:solidFill>
+          <a:ln w="12700">
+            <a:solidFill>
+              <a:srgbClr val="2E7D5B"/>
+            </a:solidFill>
+            <a:prstDash val="solid"/>
+          </a:ln>
+        </p:spPr>
+      </p:sp>
+      <p:sp>
+        <p:nvSpPr>
+          <p:cNvPr id="10" name="Text 7"/>
+          <p:cNvSpPr/>
+          <p:nvPr/>
+        </p:nvSpPr>
+        <p:spPr>
+          <a:xfrm>
+            <a:off x="9299448" y="109728"/>
+            <a:ext cx="2286000" cy="237744"/>
+          </a:xfrm>
+          <a:prstGeom prst="rect">
+            <a:avLst/>
+          </a:prstGeom>
+          <a:noFill/>
+          <a:ln/>
+        </p:spPr>
+        <p:txBody>
+          <a:bodyPr wrap="square" lIns="0" tIns="0" rIns="0" bIns="0" rtlCol="0" anchor="ctr"/>
+          <a:lstStyle/>
+          <a:p>
+            <a:pPr indent="0" marL="0">
+              <a:buNone/>
+            </a:pPr>
+            <a:r>
+              <a:rPr lang="en-US" sz="800" b="1" spc="100" kern="0" dirty="0">
+                <a:solidFill>
+                  <a:srgbClr val="9FB2C2"/>
+                </a:solidFill>
+                <a:latin typeface="Inter" pitchFamily="34" charset="0"/>
+                <a:ea typeface="Inter" pitchFamily="34" charset="-122"/>
+                <a:cs typeface="Inter" pitchFamily="34" charset="-120"/>
+              </a:rPr>
+              <a:t>MS. RIVERA'S SCREEN · SO FAR</a:t>
+            </a:r>
+            <a:endParaRPr lang="en-US" sz="800" dirty="0"/>
+          </a:p>
+        </p:txBody>
+      </p:sp>
+      <p:sp>
+        <p:nvSpPr>
+          <p:cNvPr id="11" name="Text 8"/>
+          <p:cNvSpPr/>
+          <p:nvPr/>
+        </p:nvSpPr>
+        <p:spPr>
+          <a:xfrm>
+            <a:off x="8860536" y="365760"/>
+            <a:ext cx="2670048" cy="566928"/>
+          </a:xfrm>
+          <a:prstGeom prst="rect">
+            <a:avLst/>
+          </a:prstGeom>
+          <a:noFill/>
+          <a:ln/>
+        </p:spPr>
+        <p:txBody>
+          <a:bodyPr wrap="square" lIns="0" tIns="0" rIns="0" bIns="0" rtlCol="0" anchor="ctr"/>
+          <a:lstStyle/>
+          <a:p>
+            <a:pPr indent="0" marL="0">
+              <a:buNone/>
+            </a:pPr>
+            <a:r>
+              <a:rPr lang="en-US" sz="1000" dirty="0">
+                <a:solidFill>
+                  <a:srgbClr val="1B1F24"/>
+                </a:solidFill>
+                <a:latin typeface="Inter" pitchFamily="34" charset="0"/>
+                <a:ea typeface="Inter" pitchFamily="34" charset="-122"/>
+                <a:cs typeface="Inter" pitchFamily="34" charset="-120"/>
+              </a:rPr>
+              <a:t>Her other moves: a two-minute live defense; the process in the rubric.</a:t>
+            </a:r>
+            <a:endParaRPr lang="en-US" sz="1000" dirty="0"/>
+          </a:p>
+        </p:txBody>
+      </p:sp>
+      <p:sp>
+        <p:nvSpPr>
+          <p:cNvPr id="12" name="Text 9"/>
           <p:cNvSpPr/>
           <p:nvPr/>
         </p:nvSpPr>
@@ -6090,30 +7125,30 @@
       </p:sp>
       <p:sp>
         <p:nvSpPr>
-          <p:cNvPr id="6" name="Text 3"/>
+          <p:cNvPr id="13" name="Text 10"/>
           <p:cNvSpPr/>
           <p:nvPr/>
         </p:nvSpPr>
         <p:spPr>
           <a:xfrm>
             <a:off x="548640" y="384048"/>
-            <a:ext cx="11091672" cy="777240"/>
-          </a:xfrm>
-          <a:prstGeom prst="rect">
-            <a:avLst/>
-          </a:prstGeom>
-          <a:noFill/>
-          <a:ln/>
-        </p:spPr>
-        <p:txBody>
-          <a:bodyPr wrap="square" lIns="0" tIns="0" rIns="0" bIns="0" rtlCol="0" anchor="ctr"/>
-          <a:lstStyle/>
-          <a:p>
-            <a:pPr indent="0" marL="0">
-              <a:buNone/>
-            </a:pPr>
-            <a:r>
-              <a:rPr lang="en-US" sz="3200" b="1" dirty="0">
+            <a:ext cx="7955280" cy="777240"/>
+          </a:xfrm>
+          <a:prstGeom prst="rect">
+            <a:avLst/>
+          </a:prstGeom>
+          <a:noFill/>
+          <a:ln/>
+        </p:spPr>
+        <p:txBody>
+          <a:bodyPr wrap="square" lIns="0" tIns="0" rIns="0" bIns="0" rtlCol="0" anchor="ctr"/>
+          <a:lstStyle/>
+          <a:p>
+            <a:pPr indent="0" marL="0">
+              <a:buNone/>
+            </a:pPr>
+            <a:r>
+              <a:rPr lang="en-US" sz="2800" b="1" dirty="0">
                 <a:solidFill>
                   <a:srgbClr val="13293D"/>
                 </a:solidFill>
@@ -6123,13 +7158,13 @@
               </a:rPr>
               <a:t>Move 3: live thinking · Move 4: assessed process</a:t>
             </a:r>
-            <a:endParaRPr lang="en-US" sz="3200" dirty="0"/>
-          </a:p>
-        </p:txBody>
-      </p:sp>
-      <p:sp>
-        <p:nvSpPr>
-          <p:cNvPr id="7" name="Shape 4"/>
+            <a:endParaRPr lang="en-US" sz="2800" dirty="0"/>
+          </a:p>
+        </p:txBody>
+      </p:sp>
+      <p:sp>
+        <p:nvSpPr>
+          <p:cNvPr id="14" name="Shape 11"/>
           <p:cNvSpPr/>
           <p:nvPr/>
         </p:nvSpPr>
@@ -6156,7 +7191,7 @@
       </p:sp>
       <p:sp>
         <p:nvSpPr>
-          <p:cNvPr id="8" name="Text 5"/>
+          <p:cNvPr id="15" name="Text 12"/>
           <p:cNvSpPr/>
           <p:nvPr/>
         </p:nvSpPr>
@@ -6195,7 +7230,7 @@
       </p:sp>
       <p:sp>
         <p:nvSpPr>
-          <p:cNvPr id="9" name="Text 6"/>
+          <p:cNvPr id="16" name="Text 13"/>
           <p:cNvSpPr/>
           <p:nvPr/>
         </p:nvSpPr>
@@ -6257,7 +7292,7 @@
       </p:sp>
       <p:sp>
         <p:nvSpPr>
-          <p:cNvPr id="10" name="Shape 7"/>
+          <p:cNvPr id="17" name="Shape 14"/>
           <p:cNvSpPr/>
           <p:nvPr/>
         </p:nvSpPr>
@@ -6284,7 +7319,7 @@
       </p:sp>
       <p:sp>
         <p:nvSpPr>
-          <p:cNvPr id="11" name="Text 8"/>
+          <p:cNvPr id="18" name="Text 15"/>
           <p:cNvSpPr/>
           <p:nvPr/>
         </p:nvSpPr>
@@ -6323,7 +7358,7 @@
       </p:sp>
       <p:sp>
         <p:nvSpPr>
-          <p:cNvPr id="12" name="Text 9"/>
+          <p:cNvPr id="19" name="Text 16"/>
           <p:cNvSpPr/>
           <p:nvPr/>
         </p:nvSpPr>
@@ -6385,7 +7420,7 @@
       </p:sp>
       <p:sp>
         <p:nvSpPr>
-          <p:cNvPr id="13" name="Text 10"/>
+          <p:cNvPr id="20" name="Text 17"/>
           <p:cNvSpPr/>
           <p:nvPr/>
         </p:nvSpPr>
@@ -6572,7 +7607,214 @@
       </p:sp>
       <p:sp>
         <p:nvSpPr>
-          <p:cNvPr id="5" name="Text 2"/>
+          <p:cNvPr id="5" name="Shape 2"/>
+          <p:cNvSpPr/>
+          <p:nvPr/>
+        </p:nvSpPr>
+        <p:spPr>
+          <a:xfrm>
+            <a:off x="8732520" y="109728"/>
+            <a:ext cx="2926080" cy="896112"/>
+          </a:xfrm>
+          <a:prstGeom prst="roundRect">
+            <a:avLst>
+              <a:gd name="adj" fmla="val 7143"/>
+            </a:avLst>
+          </a:prstGeom>
+          <a:solidFill>
+            <a:srgbClr val="F7F5F0"/>
+          </a:solidFill>
+          <a:ln w="12700">
+            <a:solidFill>
+              <a:srgbClr val="DCE3EA"/>
+            </a:solidFill>
+            <a:prstDash val="solid"/>
+          </a:ln>
+        </p:spPr>
+      </p:sp>
+      <p:sp>
+        <p:nvSpPr>
+          <p:cNvPr id="6" name="Shape 3"/>
+          <p:cNvSpPr/>
+          <p:nvPr/>
+        </p:nvSpPr>
+        <p:spPr>
+          <a:xfrm>
+            <a:off x="8732520" y="109728"/>
+            <a:ext cx="2926080" cy="237744"/>
+          </a:xfrm>
+          <a:prstGeom prst="roundRect">
+            <a:avLst>
+              <a:gd name="adj" fmla="val 26923"/>
+            </a:avLst>
+          </a:prstGeom>
+          <a:solidFill>
+            <a:srgbClr val="0D1E2E"/>
+          </a:solidFill>
+          <a:ln w="12700">
+            <a:solidFill>
+              <a:srgbClr val="0D1E2E"/>
+            </a:solidFill>
+            <a:prstDash val="solid"/>
+          </a:ln>
+        </p:spPr>
+      </p:sp>
+      <p:sp>
+        <p:nvSpPr>
+          <p:cNvPr id="7" name="Shape 4"/>
+          <p:cNvSpPr/>
+          <p:nvPr/>
+        </p:nvSpPr>
+        <p:spPr>
+          <a:xfrm>
+            <a:off x="8823960" y="182880"/>
+            <a:ext cx="91440" cy="91440"/>
+          </a:xfrm>
+          <a:prstGeom prst="ellipse">
+            <a:avLst/>
+          </a:prstGeom>
+          <a:solidFill>
+            <a:srgbClr val="E8837A"/>
+          </a:solidFill>
+          <a:ln w="12700">
+            <a:solidFill>
+              <a:srgbClr val="E8837A"/>
+            </a:solidFill>
+            <a:prstDash val="solid"/>
+          </a:ln>
+        </p:spPr>
+      </p:sp>
+      <p:sp>
+        <p:nvSpPr>
+          <p:cNvPr id="8" name="Shape 5"/>
+          <p:cNvSpPr/>
+          <p:nvPr/>
+        </p:nvSpPr>
+        <p:spPr>
+          <a:xfrm>
+            <a:off x="8970264" y="182880"/>
+            <a:ext cx="91440" cy="91440"/>
+          </a:xfrm>
+          <a:prstGeom prst="ellipse">
+            <a:avLst/>
+          </a:prstGeom>
+          <a:solidFill>
+            <a:srgbClr val="F4A825"/>
+          </a:solidFill>
+          <a:ln w="12700">
+            <a:solidFill>
+              <a:srgbClr val="F4A825"/>
+            </a:solidFill>
+            <a:prstDash val="solid"/>
+          </a:ln>
+        </p:spPr>
+      </p:sp>
+      <p:sp>
+        <p:nvSpPr>
+          <p:cNvPr id="9" name="Shape 6"/>
+          <p:cNvSpPr/>
+          <p:nvPr/>
+        </p:nvSpPr>
+        <p:spPr>
+          <a:xfrm>
+            <a:off x="9116568" y="182880"/>
+            <a:ext cx="91440" cy="91440"/>
+          </a:xfrm>
+          <a:prstGeom prst="ellipse">
+            <a:avLst/>
+          </a:prstGeom>
+          <a:solidFill>
+            <a:srgbClr val="2E7D5B"/>
+          </a:solidFill>
+          <a:ln w="12700">
+            <a:solidFill>
+              <a:srgbClr val="2E7D5B"/>
+            </a:solidFill>
+            <a:prstDash val="solid"/>
+          </a:ln>
+        </p:spPr>
+      </p:sp>
+      <p:sp>
+        <p:nvSpPr>
+          <p:cNvPr id="10" name="Text 7"/>
+          <p:cNvSpPr/>
+          <p:nvPr/>
+        </p:nvSpPr>
+        <p:spPr>
+          <a:xfrm>
+            <a:off x="9299448" y="109728"/>
+            <a:ext cx="2286000" cy="237744"/>
+          </a:xfrm>
+          <a:prstGeom prst="rect">
+            <a:avLst/>
+          </a:prstGeom>
+          <a:noFill/>
+          <a:ln/>
+        </p:spPr>
+        <p:txBody>
+          <a:bodyPr wrap="square" lIns="0" tIns="0" rIns="0" bIns="0" rtlCol="0" anchor="ctr"/>
+          <a:lstStyle/>
+          <a:p>
+            <a:pPr indent="0" marL="0">
+              <a:buNone/>
+            </a:pPr>
+            <a:r>
+              <a:rPr lang="en-US" sz="800" b="1" spc="100" kern="0" dirty="0">
+                <a:solidFill>
+                  <a:srgbClr val="9FB2C2"/>
+                </a:solidFill>
+                <a:latin typeface="Inter" pitchFamily="34" charset="0"/>
+                <a:ea typeface="Inter" pitchFamily="34" charset="-122"/>
+                <a:cs typeface="Inter" pitchFamily="34" charset="-120"/>
+              </a:rPr>
+              <a:t>MS. RIVERA'S SCREEN · SO FAR</a:t>
+            </a:r>
+            <a:endParaRPr lang="en-US" sz="800" dirty="0"/>
+          </a:p>
+        </p:txBody>
+      </p:sp>
+      <p:sp>
+        <p:nvSpPr>
+          <p:cNvPr id="11" name="Text 8"/>
+          <p:cNvSpPr/>
+          <p:nvPr/>
+        </p:nvSpPr>
+        <p:spPr>
+          <a:xfrm>
+            <a:off x="8860536" y="365760"/>
+            <a:ext cx="2670048" cy="566928"/>
+          </a:xfrm>
+          <a:prstGeom prst="rect">
+            <a:avLst/>
+          </a:prstGeom>
+          <a:noFill/>
+          <a:ln/>
+        </p:spPr>
+        <p:txBody>
+          <a:bodyPr wrap="square" lIns="0" tIns="0" rIns="0" bIns="0" rtlCol="0" anchor="ctr"/>
+          <a:lstStyle/>
+          <a:p>
+            <a:pPr indent="0" marL="0">
+              <a:buNone/>
+            </a:pPr>
+            <a:r>
+              <a:rPr lang="en-US" sz="1000" dirty="0">
+                <a:solidFill>
+                  <a:srgbClr val="1B1F24"/>
+                </a:solidFill>
+                <a:latin typeface="Inter" pitchFamily="34" charset="0"/>
+                <a:ea typeface="Inter" pitchFamily="34" charset="-122"/>
+                <a:cs typeface="Inter" pitchFamily="34" charset="-120"/>
+              </a:rPr>
+              <a:t>Her opener, rehearsed: 'walk me through how you made this.'</a:t>
+            </a:r>
+            <a:endParaRPr lang="en-US" sz="1000" dirty="0"/>
+          </a:p>
+        </p:txBody>
+      </p:sp>
+      <p:sp>
+        <p:nvSpPr>
+          <p:cNvPr id="12" name="Text 9"/>
           <p:cNvSpPr/>
           <p:nvPr/>
         </p:nvSpPr>
@@ -6611,7 +7853,7 @@
       </p:sp>
       <p:sp>
         <p:nvSpPr>
-          <p:cNvPr id="6" name="Text 3"/>
+          <p:cNvPr id="13" name="Text 10"/>
           <p:cNvSpPr/>
           <p:nvPr/>
         </p:nvSpPr>
@@ -6650,7 +7892,7 @@
       </p:sp>
       <p:sp>
         <p:nvSpPr>
-          <p:cNvPr id="7" name="Shape 4"/>
+          <p:cNvPr id="14" name="Shape 11"/>
           <p:cNvSpPr/>
           <p:nvPr/>
         </p:nvSpPr>
@@ -6677,7 +7919,7 @@
       </p:sp>
       <p:sp>
         <p:nvSpPr>
-          <p:cNvPr id="8" name="Text 5"/>
+          <p:cNvPr id="15" name="Text 12"/>
           <p:cNvSpPr/>
           <p:nvPr/>
         </p:nvSpPr>
@@ -6716,7 +7958,7 @@
       </p:sp>
       <p:sp>
         <p:nvSpPr>
-          <p:cNvPr id="9" name="Text 6"/>
+          <p:cNvPr id="16" name="Text 13"/>
           <p:cNvSpPr/>
           <p:nvPr/>
         </p:nvSpPr>
@@ -6755,7 +7997,7 @@
       </p:sp>
       <p:sp>
         <p:nvSpPr>
-          <p:cNvPr id="10" name="Shape 7"/>
+          <p:cNvPr id="17" name="Shape 14"/>
           <p:cNvSpPr/>
           <p:nvPr/>
         </p:nvSpPr>
@@ -6782,7 +8024,7 @@
       </p:sp>
       <p:sp>
         <p:nvSpPr>
-          <p:cNvPr id="11" name="Text 8"/>
+          <p:cNvPr id="18" name="Text 15"/>
           <p:cNvSpPr/>
           <p:nvPr/>
         </p:nvSpPr>
@@ -6821,7 +8063,7 @@
       </p:sp>
       <p:sp>
         <p:nvSpPr>
-          <p:cNvPr id="12" name="Text 9"/>
+          <p:cNvPr id="19" name="Text 16"/>
           <p:cNvSpPr/>
           <p:nvPr/>
         </p:nvSpPr>
@@ -6860,7 +8102,7 @@
       </p:sp>
       <p:sp>
         <p:nvSpPr>
-          <p:cNvPr id="13" name="Shape 10"/>
+          <p:cNvPr id="20" name="Shape 17"/>
           <p:cNvSpPr/>
           <p:nvPr/>
         </p:nvSpPr>
@@ -6887,7 +8129,7 @@
       </p:sp>
       <p:sp>
         <p:nvSpPr>
-          <p:cNvPr id="14" name="Text 11"/>
+          <p:cNvPr id="21" name="Text 18"/>
           <p:cNvSpPr/>
           <p:nvPr/>
         </p:nvSpPr>
@@ -6926,7 +8168,7 @@
       </p:sp>
       <p:sp>
         <p:nvSpPr>
-          <p:cNvPr id="15" name="Text 12"/>
+          <p:cNvPr id="22" name="Text 19"/>
           <p:cNvSpPr/>
           <p:nvPr/>
         </p:nvSpPr>
@@ -6965,7 +8207,7 @@
       </p:sp>
       <p:sp>
         <p:nvSpPr>
-          <p:cNvPr id="16" name="Shape 13"/>
+          <p:cNvPr id="23" name="Shape 20"/>
           <p:cNvSpPr/>
           <p:nvPr/>
         </p:nvSpPr>
@@ -6992,7 +8234,7 @@
       </p:sp>
       <p:sp>
         <p:nvSpPr>
-          <p:cNvPr id="17" name="Text 14"/>
+          <p:cNvPr id="24" name="Text 21"/>
           <p:cNvSpPr/>
           <p:nvPr/>
         </p:nvSpPr>
@@ -7031,7 +8273,7 @@
       </p:sp>
       <p:sp>
         <p:nvSpPr>
-          <p:cNvPr id="18" name="Text 15"/>
+          <p:cNvPr id="25" name="Text 22"/>
           <p:cNvSpPr/>
           <p:nvPr/>
         </p:nvSpPr>
@@ -7070,7 +8312,7 @@
       </p:sp>
       <p:sp>
         <p:nvSpPr>
-          <p:cNvPr id="19" name="Text 16"/>
+          <p:cNvPr id="26" name="Text 23"/>
           <p:cNvSpPr/>
           <p:nvPr/>
         </p:nvSpPr>
@@ -7257,7 +8499,214 @@
       </p:sp>
       <p:sp>
         <p:nvSpPr>
-          <p:cNvPr id="5" name="Text 2"/>
+          <p:cNvPr id="5" name="Shape 2"/>
+          <p:cNvSpPr/>
+          <p:nvPr/>
+        </p:nvSpPr>
+        <p:spPr>
+          <a:xfrm>
+            <a:off x="8732520" y="109728"/>
+            <a:ext cx="2926080" cy="896112"/>
+          </a:xfrm>
+          <a:prstGeom prst="roundRect">
+            <a:avLst>
+              <a:gd name="adj" fmla="val 7143"/>
+            </a:avLst>
+          </a:prstGeom>
+          <a:solidFill>
+            <a:srgbClr val="1E3A50"/>
+          </a:solidFill>
+          <a:ln w="12700">
+            <a:solidFill>
+              <a:srgbClr val="2A4A63"/>
+            </a:solidFill>
+            <a:prstDash val="solid"/>
+          </a:ln>
+        </p:spPr>
+      </p:sp>
+      <p:sp>
+        <p:nvSpPr>
+          <p:cNvPr id="6" name="Shape 3"/>
+          <p:cNvSpPr/>
+          <p:nvPr/>
+        </p:nvSpPr>
+        <p:spPr>
+          <a:xfrm>
+            <a:off x="8732520" y="109728"/>
+            <a:ext cx="2926080" cy="237744"/>
+          </a:xfrm>
+          <a:prstGeom prst="roundRect">
+            <a:avLst>
+              <a:gd name="adj" fmla="val 26923"/>
+            </a:avLst>
+          </a:prstGeom>
+          <a:solidFill>
+            <a:srgbClr val="0D1E2E"/>
+          </a:solidFill>
+          <a:ln w="12700">
+            <a:solidFill>
+              <a:srgbClr val="0D1E2E"/>
+            </a:solidFill>
+            <a:prstDash val="solid"/>
+          </a:ln>
+        </p:spPr>
+      </p:sp>
+      <p:sp>
+        <p:nvSpPr>
+          <p:cNvPr id="7" name="Shape 4"/>
+          <p:cNvSpPr/>
+          <p:nvPr/>
+        </p:nvSpPr>
+        <p:spPr>
+          <a:xfrm>
+            <a:off x="8823960" y="182880"/>
+            <a:ext cx="91440" cy="91440"/>
+          </a:xfrm>
+          <a:prstGeom prst="ellipse">
+            <a:avLst/>
+          </a:prstGeom>
+          <a:solidFill>
+            <a:srgbClr val="E8837A"/>
+          </a:solidFill>
+          <a:ln w="12700">
+            <a:solidFill>
+              <a:srgbClr val="E8837A"/>
+            </a:solidFill>
+            <a:prstDash val="solid"/>
+          </a:ln>
+        </p:spPr>
+      </p:sp>
+      <p:sp>
+        <p:nvSpPr>
+          <p:cNvPr id="8" name="Shape 5"/>
+          <p:cNvSpPr/>
+          <p:nvPr/>
+        </p:nvSpPr>
+        <p:spPr>
+          <a:xfrm>
+            <a:off x="8970264" y="182880"/>
+            <a:ext cx="91440" cy="91440"/>
+          </a:xfrm>
+          <a:prstGeom prst="ellipse">
+            <a:avLst/>
+          </a:prstGeom>
+          <a:solidFill>
+            <a:srgbClr val="F4A825"/>
+          </a:solidFill>
+          <a:ln w="12700">
+            <a:solidFill>
+              <a:srgbClr val="F4A825"/>
+            </a:solidFill>
+            <a:prstDash val="solid"/>
+          </a:ln>
+        </p:spPr>
+      </p:sp>
+      <p:sp>
+        <p:nvSpPr>
+          <p:cNvPr id="9" name="Shape 6"/>
+          <p:cNvSpPr/>
+          <p:nvPr/>
+        </p:nvSpPr>
+        <p:spPr>
+          <a:xfrm>
+            <a:off x="9116568" y="182880"/>
+            <a:ext cx="91440" cy="91440"/>
+          </a:xfrm>
+          <a:prstGeom prst="ellipse">
+            <a:avLst/>
+          </a:prstGeom>
+          <a:solidFill>
+            <a:srgbClr val="2E7D5B"/>
+          </a:solidFill>
+          <a:ln w="12700">
+            <a:solidFill>
+              <a:srgbClr val="2E7D5B"/>
+            </a:solidFill>
+            <a:prstDash val="solid"/>
+          </a:ln>
+        </p:spPr>
+      </p:sp>
+      <p:sp>
+        <p:nvSpPr>
+          <p:cNvPr id="10" name="Text 7"/>
+          <p:cNvSpPr/>
+          <p:nvPr/>
+        </p:nvSpPr>
+        <p:spPr>
+          <a:xfrm>
+            <a:off x="9299448" y="109728"/>
+            <a:ext cx="2286000" cy="237744"/>
+          </a:xfrm>
+          <a:prstGeom prst="rect">
+            <a:avLst/>
+          </a:prstGeom>
+          <a:noFill/>
+          <a:ln/>
+        </p:spPr>
+        <p:txBody>
+          <a:bodyPr wrap="square" lIns="0" tIns="0" rIns="0" bIns="0" rtlCol="0" anchor="ctr"/>
+          <a:lstStyle/>
+          <a:p>
+            <a:pPr indent="0" marL="0">
+              <a:buNone/>
+            </a:pPr>
+            <a:r>
+              <a:rPr lang="en-US" sz="800" b="1" spc="100" kern="0" dirty="0">
+                <a:solidFill>
+                  <a:srgbClr val="9FB2C2"/>
+                </a:solidFill>
+                <a:latin typeface="Inter" pitchFamily="34" charset="0"/>
+                <a:ea typeface="Inter" pitchFamily="34" charset="-122"/>
+                <a:cs typeface="Inter" pitchFamily="34" charset="-120"/>
+              </a:rPr>
+              <a:t>MS. RIVERA'S SCREEN · SO FAR</a:t>
+            </a:r>
+            <a:endParaRPr lang="en-US" sz="800" dirty="0"/>
+          </a:p>
+        </p:txBody>
+      </p:sp>
+      <p:sp>
+        <p:nvSpPr>
+          <p:cNvPr id="11" name="Text 8"/>
+          <p:cNvSpPr/>
+          <p:nvPr/>
+        </p:nvSpPr>
+        <p:spPr>
+          <a:xfrm>
+            <a:off x="8860536" y="365760"/>
+            <a:ext cx="2670048" cy="566928"/>
+          </a:xfrm>
+          <a:prstGeom prst="rect">
+            <a:avLst/>
+          </a:prstGeom>
+          <a:noFill/>
+          <a:ln/>
+        </p:spPr>
+        <p:txBody>
+          <a:bodyPr wrap="square" lIns="0" tIns="0" rIns="0" bIns="0" rtlCol="0" anchor="ctr"/>
+          <a:lstStyle/>
+          <a:p>
+            <a:pPr indent="0" marL="0">
+              <a:buNone/>
+            </a:pPr>
+            <a:r>
+              <a:rPr lang="en-US" sz="1000" dirty="0">
+                <a:solidFill>
+                  <a:srgbClr val="C9D4DE"/>
+                </a:solidFill>
+                <a:latin typeface="Inter" pitchFamily="34" charset="0"/>
+                <a:ea typeface="Inter" pitchFamily="34" charset="-122"/>
+                <a:cs typeface="Inter" pitchFamily="34" charset="-120"/>
+              </a:rPr>
+              <a:t>Her never list: no confession-first, no score-only, never public.</a:t>
+            </a:r>
+            <a:endParaRPr lang="en-US" sz="1000" dirty="0"/>
+          </a:p>
+        </p:txBody>
+      </p:sp>
+      <p:sp>
+        <p:nvSpPr>
+          <p:cNvPr id="12" name="Text 9"/>
           <p:cNvSpPr/>
           <p:nvPr/>
         </p:nvSpPr>
@@ -7296,7 +8745,7 @@
       </p:sp>
       <p:sp>
         <p:nvSpPr>
-          <p:cNvPr id="6" name="Text 3"/>
+          <p:cNvPr id="13" name="Text 10"/>
           <p:cNvSpPr/>
           <p:nvPr/>
         </p:nvSpPr>
@@ -7335,7 +8784,7 @@
       </p:sp>
       <p:sp>
         <p:nvSpPr>
-          <p:cNvPr id="7" name="Text 4"/>
+          <p:cNvPr id="14" name="Text 11"/>
           <p:cNvSpPr/>
           <p:nvPr/>
         </p:nvSpPr>
@@ -7374,7 +8823,7 @@
       </p:sp>
       <p:sp>
         <p:nvSpPr>
-          <p:cNvPr id="8" name="Text 5"/>
+          <p:cNvPr id="15" name="Text 12"/>
           <p:cNvSpPr/>
           <p:nvPr/>
         </p:nvSpPr>
@@ -7413,7 +8862,7 @@
       </p:sp>
       <p:sp>
         <p:nvSpPr>
-          <p:cNvPr id="9" name="Text 6"/>
+          <p:cNvPr id="16" name="Text 13"/>
           <p:cNvSpPr/>
           <p:nvPr/>
         </p:nvSpPr>
@@ -7452,7 +8901,7 @@
       </p:sp>
       <p:sp>
         <p:nvSpPr>
-          <p:cNvPr id="10" name="Text 7"/>
+          <p:cNvPr id="17" name="Text 14"/>
           <p:cNvSpPr/>
           <p:nvPr/>
         </p:nvSpPr>
@@ -7491,7 +8940,7 @@
       </p:sp>
       <p:sp>
         <p:nvSpPr>
-          <p:cNvPr id="11" name="Text 8"/>
+          <p:cNvPr id="18" name="Text 15"/>
           <p:cNvSpPr/>
           <p:nvPr/>
         </p:nvSpPr>
@@ -7530,7 +8979,7 @@
       </p:sp>
       <p:sp>
         <p:nvSpPr>
-          <p:cNvPr id="12" name="Text 9"/>
+          <p:cNvPr id="19" name="Text 16"/>
           <p:cNvSpPr/>
           <p:nvPr/>
         </p:nvSpPr>
@@ -7569,7 +9018,7 @@
       </p:sp>
       <p:sp>
         <p:nvSpPr>
-          <p:cNvPr id="13" name="Text 10"/>
+          <p:cNvPr id="20" name="Text 17"/>
           <p:cNvSpPr/>
           <p:nvPr/>
         </p:nvSpPr>
@@ -7608,7 +9057,7 @@
       </p:sp>
       <p:sp>
         <p:nvSpPr>
-          <p:cNvPr id="14" name="Text 11"/>
+          <p:cNvPr id="21" name="Text 18"/>
           <p:cNvSpPr/>
           <p:nvPr/>
         </p:nvSpPr>
@@ -7795,7 +9244,214 @@
       </p:sp>
       <p:sp>
         <p:nvSpPr>
-          <p:cNvPr id="5" name="Text 2"/>
+          <p:cNvPr id="5" name="Shape 2"/>
+          <p:cNvSpPr/>
+          <p:nvPr/>
+        </p:nvSpPr>
+        <p:spPr>
+          <a:xfrm>
+            <a:off x="8732520" y="109728"/>
+            <a:ext cx="2926080" cy="896112"/>
+          </a:xfrm>
+          <a:prstGeom prst="roundRect">
+            <a:avLst>
+              <a:gd name="adj" fmla="val 7143"/>
+            </a:avLst>
+          </a:prstGeom>
+          <a:solidFill>
+            <a:srgbClr val="F7F5F0"/>
+          </a:solidFill>
+          <a:ln w="12700">
+            <a:solidFill>
+              <a:srgbClr val="DCE3EA"/>
+            </a:solidFill>
+            <a:prstDash val="solid"/>
+          </a:ln>
+        </p:spPr>
+      </p:sp>
+      <p:sp>
+        <p:nvSpPr>
+          <p:cNvPr id="6" name="Shape 3"/>
+          <p:cNvSpPr/>
+          <p:nvPr/>
+        </p:nvSpPr>
+        <p:spPr>
+          <a:xfrm>
+            <a:off x="8732520" y="109728"/>
+            <a:ext cx="2926080" cy="237744"/>
+          </a:xfrm>
+          <a:prstGeom prst="roundRect">
+            <a:avLst>
+              <a:gd name="adj" fmla="val 26923"/>
+            </a:avLst>
+          </a:prstGeom>
+          <a:solidFill>
+            <a:srgbClr val="0D1E2E"/>
+          </a:solidFill>
+          <a:ln w="12700">
+            <a:solidFill>
+              <a:srgbClr val="0D1E2E"/>
+            </a:solidFill>
+            <a:prstDash val="solid"/>
+          </a:ln>
+        </p:spPr>
+      </p:sp>
+      <p:sp>
+        <p:nvSpPr>
+          <p:cNvPr id="7" name="Shape 4"/>
+          <p:cNvSpPr/>
+          <p:nvPr/>
+        </p:nvSpPr>
+        <p:spPr>
+          <a:xfrm>
+            <a:off x="8823960" y="182880"/>
+            <a:ext cx="91440" cy="91440"/>
+          </a:xfrm>
+          <a:prstGeom prst="ellipse">
+            <a:avLst/>
+          </a:prstGeom>
+          <a:solidFill>
+            <a:srgbClr val="E8837A"/>
+          </a:solidFill>
+          <a:ln w="12700">
+            <a:solidFill>
+              <a:srgbClr val="E8837A"/>
+            </a:solidFill>
+            <a:prstDash val="solid"/>
+          </a:ln>
+        </p:spPr>
+      </p:sp>
+      <p:sp>
+        <p:nvSpPr>
+          <p:cNvPr id="8" name="Shape 5"/>
+          <p:cNvSpPr/>
+          <p:nvPr/>
+        </p:nvSpPr>
+        <p:spPr>
+          <a:xfrm>
+            <a:off x="8970264" y="182880"/>
+            <a:ext cx="91440" cy="91440"/>
+          </a:xfrm>
+          <a:prstGeom prst="ellipse">
+            <a:avLst/>
+          </a:prstGeom>
+          <a:solidFill>
+            <a:srgbClr val="F4A825"/>
+          </a:solidFill>
+          <a:ln w="12700">
+            <a:solidFill>
+              <a:srgbClr val="F4A825"/>
+            </a:solidFill>
+            <a:prstDash val="solid"/>
+          </a:ln>
+        </p:spPr>
+      </p:sp>
+      <p:sp>
+        <p:nvSpPr>
+          <p:cNvPr id="9" name="Shape 6"/>
+          <p:cNvSpPr/>
+          <p:nvPr/>
+        </p:nvSpPr>
+        <p:spPr>
+          <a:xfrm>
+            <a:off x="9116568" y="182880"/>
+            <a:ext cx="91440" cy="91440"/>
+          </a:xfrm>
+          <a:prstGeom prst="ellipse">
+            <a:avLst/>
+          </a:prstGeom>
+          <a:solidFill>
+            <a:srgbClr val="2E7D5B"/>
+          </a:solidFill>
+          <a:ln w="12700">
+            <a:solidFill>
+              <a:srgbClr val="2E7D5B"/>
+            </a:solidFill>
+            <a:prstDash val="solid"/>
+          </a:ln>
+        </p:spPr>
+      </p:sp>
+      <p:sp>
+        <p:nvSpPr>
+          <p:cNvPr id="10" name="Text 7"/>
+          <p:cNvSpPr/>
+          <p:nvPr/>
+        </p:nvSpPr>
+        <p:spPr>
+          <a:xfrm>
+            <a:off x="9299448" y="109728"/>
+            <a:ext cx="2286000" cy="237744"/>
+          </a:xfrm>
+          <a:prstGeom prst="rect">
+            <a:avLst/>
+          </a:prstGeom>
+          <a:noFill/>
+          <a:ln/>
+        </p:spPr>
+        <p:txBody>
+          <a:bodyPr wrap="square" lIns="0" tIns="0" rIns="0" bIns="0" rtlCol="0" anchor="ctr"/>
+          <a:lstStyle/>
+          <a:p>
+            <a:pPr indent="0" marL="0">
+              <a:buNone/>
+            </a:pPr>
+            <a:r>
+              <a:rPr lang="en-US" sz="800" b="1" spc="100" kern="0" dirty="0">
+                <a:solidFill>
+                  <a:srgbClr val="9FB2C2"/>
+                </a:solidFill>
+                <a:latin typeface="Inter" pitchFamily="34" charset="0"/>
+                <a:ea typeface="Inter" pitchFamily="34" charset="-122"/>
+                <a:cs typeface="Inter" pitchFamily="34" charset="-120"/>
+              </a:rPr>
+              <a:t>MS. RIVERA'S SCREEN · SO FAR</a:t>
+            </a:r>
+            <a:endParaRPr lang="en-US" sz="800" dirty="0"/>
+          </a:p>
+        </p:txBody>
+      </p:sp>
+      <p:sp>
+        <p:nvSpPr>
+          <p:cNvPr id="11" name="Text 8"/>
+          <p:cNvSpPr/>
+          <p:nvPr/>
+        </p:nvSpPr>
+        <p:spPr>
+          <a:xfrm>
+            <a:off x="8860536" y="365760"/>
+            <a:ext cx="2670048" cy="566928"/>
+          </a:xfrm>
+          <a:prstGeom prst="rect">
+            <a:avLst/>
+          </a:prstGeom>
+          <a:noFill/>
+          <a:ln/>
+        </p:spPr>
+        <p:txBody>
+          <a:bodyPr wrap="square" lIns="0" tIns="0" rIns="0" bIns="0" rtlCol="0" anchor="ctr"/>
+          <a:lstStyle/>
+          <a:p>
+            <a:pPr indent="0" marL="0">
+              <a:buNone/>
+            </a:pPr>
+            <a:r>
+              <a:rPr lang="en-US" sz="1000" dirty="0">
+                <a:solidFill>
+                  <a:srgbClr val="1B1F24"/>
+                </a:solidFill>
+                <a:latin typeface="Inter" pitchFamily="34" charset="0"/>
+                <a:ea typeface="Inter" pitchFamily="34" charset="-122"/>
+                <a:cs typeface="Inter" pitchFamily="34" charset="-120"/>
+              </a:rPr>
+              <a:t>Her why: six values a false accusation breaks and clear rules build.</a:t>
+            </a:r>
+            <a:endParaRPr lang="en-US" sz="1000" dirty="0"/>
+          </a:p>
+        </p:txBody>
+      </p:sp>
+      <p:sp>
+        <p:nvSpPr>
+          <p:cNvPr id="12" name="Text 9"/>
           <p:cNvSpPr/>
           <p:nvPr/>
         </p:nvSpPr>
@@ -7834,7 +9490,7 @@
       </p:sp>
       <p:sp>
         <p:nvSpPr>
-          <p:cNvPr id="6" name="Text 3"/>
+          <p:cNvPr id="13" name="Text 10"/>
           <p:cNvSpPr/>
           <p:nvPr/>
         </p:nvSpPr>
@@ -7873,7 +9529,7 @@
       </p:sp>
       <p:sp>
         <p:nvSpPr>
-          <p:cNvPr id="7" name="Shape 4"/>
+          <p:cNvPr id="14" name="Shape 11"/>
           <p:cNvSpPr/>
           <p:nvPr/>
         </p:nvSpPr>
@@ -7900,7 +9556,7 @@
       </p:sp>
       <p:sp>
         <p:nvSpPr>
-          <p:cNvPr id="8" name="Text 5"/>
+          <p:cNvPr id="15" name="Text 12"/>
           <p:cNvSpPr/>
           <p:nvPr/>
         </p:nvSpPr>
@@ -7939,7 +9595,7 @@
       </p:sp>
       <p:sp>
         <p:nvSpPr>
-          <p:cNvPr id="9" name="Shape 6"/>
+          <p:cNvPr id="16" name="Shape 13"/>
           <p:cNvSpPr/>
           <p:nvPr/>
         </p:nvSpPr>
@@ -7966,7 +9622,7 @@
       </p:sp>
       <p:sp>
         <p:nvSpPr>
-          <p:cNvPr id="10" name="Text 7"/>
+          <p:cNvPr id="17" name="Text 14"/>
           <p:cNvSpPr/>
           <p:nvPr/>
         </p:nvSpPr>
@@ -8005,7 +9661,7 @@
       </p:sp>
       <p:sp>
         <p:nvSpPr>
-          <p:cNvPr id="11" name="Shape 8"/>
+          <p:cNvPr id="18" name="Shape 15"/>
           <p:cNvSpPr/>
           <p:nvPr/>
         </p:nvSpPr>
@@ -8032,7 +9688,7 @@
       </p:sp>
       <p:sp>
         <p:nvSpPr>
-          <p:cNvPr id="12" name="Text 9"/>
+          <p:cNvPr id="19" name="Text 16"/>
           <p:cNvSpPr/>
           <p:nvPr/>
         </p:nvSpPr>
@@ -8071,7 +9727,7 @@
       </p:sp>
       <p:sp>
         <p:nvSpPr>
-          <p:cNvPr id="13" name="Shape 10"/>
+          <p:cNvPr id="20" name="Shape 17"/>
           <p:cNvSpPr/>
           <p:nvPr/>
         </p:nvSpPr>
@@ -8098,7 +9754,7 @@
       </p:sp>
       <p:sp>
         <p:nvSpPr>
-          <p:cNvPr id="14" name="Text 11"/>
+          <p:cNvPr id="21" name="Text 18"/>
           <p:cNvSpPr/>
           <p:nvPr/>
         </p:nvSpPr>
@@ -8137,7 +9793,7 @@
       </p:sp>
       <p:sp>
         <p:nvSpPr>
-          <p:cNvPr id="15" name="Shape 12"/>
+          <p:cNvPr id="22" name="Shape 19"/>
           <p:cNvSpPr/>
           <p:nvPr/>
         </p:nvSpPr>
@@ -8164,7 +9820,7 @@
       </p:sp>
       <p:sp>
         <p:nvSpPr>
-          <p:cNvPr id="16" name="Text 13"/>
+          <p:cNvPr id="23" name="Text 20"/>
           <p:cNvSpPr/>
           <p:nvPr/>
         </p:nvSpPr>
@@ -8203,7 +9859,7 @@
       </p:sp>
       <p:sp>
         <p:nvSpPr>
-          <p:cNvPr id="17" name="Shape 14"/>
+          <p:cNvPr id="24" name="Shape 21"/>
           <p:cNvSpPr/>
           <p:nvPr/>
         </p:nvSpPr>
@@ -8230,7 +9886,7 @@
       </p:sp>
       <p:sp>
         <p:nvSpPr>
-          <p:cNvPr id="18" name="Text 15"/>
+          <p:cNvPr id="25" name="Text 22"/>
           <p:cNvSpPr/>
           <p:nvPr/>
         </p:nvSpPr>
@@ -8269,7 +9925,7 @@
       </p:sp>
       <p:sp>
         <p:nvSpPr>
-          <p:cNvPr id="19" name="Text 16"/>
+          <p:cNvPr id="26" name="Text 23"/>
           <p:cNvSpPr/>
           <p:nvPr/>
         </p:nvSpPr>
@@ -8456,7 +10112,214 @@
       </p:sp>
       <p:sp>
         <p:nvSpPr>
-          <p:cNvPr id="5" name="Text 2"/>
+          <p:cNvPr id="5" name="Shape 2"/>
+          <p:cNvSpPr/>
+          <p:nvPr/>
+        </p:nvSpPr>
+        <p:spPr>
+          <a:xfrm>
+            <a:off x="8732520" y="109728"/>
+            <a:ext cx="2926080" cy="896112"/>
+          </a:xfrm>
+          <a:prstGeom prst="roundRect">
+            <a:avLst>
+              <a:gd name="adj" fmla="val 7143"/>
+            </a:avLst>
+          </a:prstGeom>
+          <a:solidFill>
+            <a:srgbClr val="1E3A50"/>
+          </a:solidFill>
+          <a:ln w="12700">
+            <a:solidFill>
+              <a:srgbClr val="2A4A63"/>
+            </a:solidFill>
+            <a:prstDash val="solid"/>
+          </a:ln>
+        </p:spPr>
+      </p:sp>
+      <p:sp>
+        <p:nvSpPr>
+          <p:cNvPr id="6" name="Shape 3"/>
+          <p:cNvSpPr/>
+          <p:nvPr/>
+        </p:nvSpPr>
+        <p:spPr>
+          <a:xfrm>
+            <a:off x="8732520" y="109728"/>
+            <a:ext cx="2926080" cy="237744"/>
+          </a:xfrm>
+          <a:prstGeom prst="roundRect">
+            <a:avLst>
+              <a:gd name="adj" fmla="val 26923"/>
+            </a:avLst>
+          </a:prstGeom>
+          <a:solidFill>
+            <a:srgbClr val="0D1E2E"/>
+          </a:solidFill>
+          <a:ln w="12700">
+            <a:solidFill>
+              <a:srgbClr val="0D1E2E"/>
+            </a:solidFill>
+            <a:prstDash val="solid"/>
+          </a:ln>
+        </p:spPr>
+      </p:sp>
+      <p:sp>
+        <p:nvSpPr>
+          <p:cNvPr id="7" name="Shape 4"/>
+          <p:cNvSpPr/>
+          <p:nvPr/>
+        </p:nvSpPr>
+        <p:spPr>
+          <a:xfrm>
+            <a:off x="8823960" y="182880"/>
+            <a:ext cx="91440" cy="91440"/>
+          </a:xfrm>
+          <a:prstGeom prst="ellipse">
+            <a:avLst/>
+          </a:prstGeom>
+          <a:solidFill>
+            <a:srgbClr val="E8837A"/>
+          </a:solidFill>
+          <a:ln w="12700">
+            <a:solidFill>
+              <a:srgbClr val="E8837A"/>
+            </a:solidFill>
+            <a:prstDash val="solid"/>
+          </a:ln>
+        </p:spPr>
+      </p:sp>
+      <p:sp>
+        <p:nvSpPr>
+          <p:cNvPr id="8" name="Shape 5"/>
+          <p:cNvSpPr/>
+          <p:nvPr/>
+        </p:nvSpPr>
+        <p:spPr>
+          <a:xfrm>
+            <a:off x="8970264" y="182880"/>
+            <a:ext cx="91440" cy="91440"/>
+          </a:xfrm>
+          <a:prstGeom prst="ellipse">
+            <a:avLst/>
+          </a:prstGeom>
+          <a:solidFill>
+            <a:srgbClr val="F4A825"/>
+          </a:solidFill>
+          <a:ln w="12700">
+            <a:solidFill>
+              <a:srgbClr val="F4A825"/>
+            </a:solidFill>
+            <a:prstDash val="solid"/>
+          </a:ln>
+        </p:spPr>
+      </p:sp>
+      <p:sp>
+        <p:nvSpPr>
+          <p:cNvPr id="9" name="Shape 6"/>
+          <p:cNvSpPr/>
+          <p:nvPr/>
+        </p:nvSpPr>
+        <p:spPr>
+          <a:xfrm>
+            <a:off x="9116568" y="182880"/>
+            <a:ext cx="91440" cy="91440"/>
+          </a:xfrm>
+          <a:prstGeom prst="ellipse">
+            <a:avLst/>
+          </a:prstGeom>
+          <a:solidFill>
+            <a:srgbClr val="2E7D5B"/>
+          </a:solidFill>
+          <a:ln w="12700">
+            <a:solidFill>
+              <a:srgbClr val="2E7D5B"/>
+            </a:solidFill>
+            <a:prstDash val="solid"/>
+          </a:ln>
+        </p:spPr>
+      </p:sp>
+      <p:sp>
+        <p:nvSpPr>
+          <p:cNvPr id="10" name="Text 7"/>
+          <p:cNvSpPr/>
+          <p:nvPr/>
+        </p:nvSpPr>
+        <p:spPr>
+          <a:xfrm>
+            <a:off x="9299448" y="109728"/>
+            <a:ext cx="2286000" cy="237744"/>
+          </a:xfrm>
+          <a:prstGeom prst="rect">
+            <a:avLst/>
+          </a:prstGeom>
+          <a:noFill/>
+          <a:ln/>
+        </p:spPr>
+        <p:txBody>
+          <a:bodyPr wrap="square" lIns="0" tIns="0" rIns="0" bIns="0" rtlCol="0" anchor="ctr"/>
+          <a:lstStyle/>
+          <a:p>
+            <a:pPr indent="0" marL="0">
+              <a:buNone/>
+            </a:pPr>
+            <a:r>
+              <a:rPr lang="en-US" sz="800" b="1" spc="100" kern="0" dirty="0">
+                <a:solidFill>
+                  <a:srgbClr val="9FB2C2"/>
+                </a:solidFill>
+                <a:latin typeface="Inter" pitchFamily="34" charset="0"/>
+                <a:ea typeface="Inter" pitchFamily="34" charset="-122"/>
+                <a:cs typeface="Inter" pitchFamily="34" charset="-120"/>
+              </a:rPr>
+              <a:t>MS. RIVERA'S SCREEN · SO FAR</a:t>
+            </a:r>
+            <a:endParaRPr lang="en-US" sz="800" dirty="0"/>
+          </a:p>
+        </p:txBody>
+      </p:sp>
+      <p:sp>
+        <p:nvSpPr>
+          <p:cNvPr id="11" name="Text 8"/>
+          <p:cNvSpPr/>
+          <p:nvPr/>
+        </p:nvSpPr>
+        <p:spPr>
+          <a:xfrm>
+            <a:off x="8860536" y="365760"/>
+            <a:ext cx="2670048" cy="566928"/>
+          </a:xfrm>
+          <a:prstGeom prst="rect">
+            <a:avLst/>
+          </a:prstGeom>
+          <a:noFill/>
+          <a:ln/>
+        </p:spPr>
+        <p:txBody>
+          <a:bodyPr wrap="square" lIns="0" tIns="0" rIns="0" bIns="0" rtlCol="0" anchor="ctr"/>
+          <a:lstStyle/>
+          <a:p>
+            <a:pPr indent="0" marL="0">
+              <a:buNone/>
+            </a:pPr>
+            <a:r>
+              <a:rPr lang="en-US" sz="1000" dirty="0">
+                <a:solidFill>
+                  <a:srgbClr val="C9D4DE"/>
+                </a:solidFill>
+                <a:latin typeface="Inter" pitchFamily="34" charset="0"/>
+                <a:ea typeface="Inter" pitchFamily="34" charset="-122"/>
+                <a:cs typeface="Inter" pitchFamily="34" charset="-120"/>
+              </a:rPr>
+              <a:t>Her lab pick: the persuasive essay she assigns next week.</a:t>
+            </a:r>
+            <a:endParaRPr lang="en-US" sz="1000" dirty="0"/>
+          </a:p>
+        </p:txBody>
+      </p:sp>
+      <p:sp>
+        <p:nvSpPr>
+          <p:cNvPr id="12" name="Text 9"/>
           <p:cNvSpPr/>
           <p:nvPr/>
         </p:nvSpPr>
@@ -8495,7 +10358,7 @@
       </p:sp>
       <p:sp>
         <p:nvSpPr>
-          <p:cNvPr id="6" name="Text 3"/>
+          <p:cNvPr id="13" name="Text 10"/>
           <p:cNvSpPr/>
           <p:nvPr/>
         </p:nvSpPr>
@@ -8534,7 +10397,7 @@
       </p:sp>
       <p:sp>
         <p:nvSpPr>
-          <p:cNvPr id="7" name="Text 4"/>
+          <p:cNvPr id="14" name="Text 11"/>
           <p:cNvSpPr/>
           <p:nvPr/>
         </p:nvSpPr>
@@ -8573,7 +10436,7 @@
       </p:sp>
       <p:sp>
         <p:nvSpPr>
-          <p:cNvPr id="8" name="Shape 5"/>
+          <p:cNvPr id="15" name="Shape 12"/>
           <p:cNvSpPr/>
           <p:nvPr/>
         </p:nvSpPr>
@@ -8598,7 +10461,7 @@
       </p:sp>
       <p:sp>
         <p:nvSpPr>
-          <p:cNvPr id="9" name="Text 6"/>
+          <p:cNvPr id="16" name="Text 13"/>
           <p:cNvSpPr/>
           <p:nvPr/>
         </p:nvSpPr>
@@ -8637,7 +10500,7 @@
       </p:sp>
       <p:sp>
         <p:nvSpPr>
-          <p:cNvPr id="10" name="Text 7"/>
+          <p:cNvPr id="17" name="Text 14"/>
           <p:cNvSpPr/>
           <p:nvPr/>
         </p:nvSpPr>
@@ -8676,7 +10539,7 @@
       </p:sp>
       <p:sp>
         <p:nvSpPr>
-          <p:cNvPr id="11" name="Shape 8"/>
+          <p:cNvPr id="18" name="Shape 15"/>
           <p:cNvSpPr/>
           <p:nvPr/>
         </p:nvSpPr>
@@ -8701,7 +10564,7 @@
       </p:sp>
       <p:sp>
         <p:nvSpPr>
-          <p:cNvPr id="12" name="Text 9"/>
+          <p:cNvPr id="19" name="Text 16"/>
           <p:cNvSpPr/>
           <p:nvPr/>
         </p:nvSpPr>
@@ -8740,7 +10603,7 @@
       </p:sp>
       <p:sp>
         <p:nvSpPr>
-          <p:cNvPr id="13" name="Text 10"/>
+          <p:cNvPr id="20" name="Text 17"/>
           <p:cNvSpPr/>
           <p:nvPr/>
         </p:nvSpPr>
@@ -8779,7 +10642,7 @@
       </p:sp>
       <p:sp>
         <p:nvSpPr>
-          <p:cNvPr id="14" name="Shape 11"/>
+          <p:cNvPr id="21" name="Shape 18"/>
           <p:cNvSpPr/>
           <p:nvPr/>
         </p:nvSpPr>
@@ -8804,7 +10667,7 @@
       </p:sp>
       <p:sp>
         <p:nvSpPr>
-          <p:cNvPr id="15" name="Text 12"/>
+          <p:cNvPr id="22" name="Text 19"/>
           <p:cNvSpPr/>
           <p:nvPr/>
         </p:nvSpPr>
@@ -8843,7 +10706,7 @@
       </p:sp>
       <p:sp>
         <p:nvSpPr>
-          <p:cNvPr id="16" name="Text 13"/>
+          <p:cNvPr id="23" name="Text 20"/>
           <p:cNvSpPr/>
           <p:nvPr/>
         </p:nvSpPr>
@@ -9030,7 +10893,214 @@
       </p:sp>
       <p:sp>
         <p:nvSpPr>
-          <p:cNvPr id="5" name="Text 2"/>
+          <p:cNvPr id="5" name="Shape 2"/>
+          <p:cNvSpPr/>
+          <p:nvPr/>
+        </p:nvSpPr>
+        <p:spPr>
+          <a:xfrm>
+            <a:off x="8732520" y="109728"/>
+            <a:ext cx="2926080" cy="896112"/>
+          </a:xfrm>
+          <a:prstGeom prst="roundRect">
+            <a:avLst>
+              <a:gd name="adj" fmla="val 7143"/>
+            </a:avLst>
+          </a:prstGeom>
+          <a:solidFill>
+            <a:srgbClr val="F7F5F0"/>
+          </a:solidFill>
+          <a:ln w="12700">
+            <a:solidFill>
+              <a:srgbClr val="DCE3EA"/>
+            </a:solidFill>
+            <a:prstDash val="solid"/>
+          </a:ln>
+        </p:spPr>
+      </p:sp>
+      <p:sp>
+        <p:nvSpPr>
+          <p:cNvPr id="6" name="Shape 3"/>
+          <p:cNvSpPr/>
+          <p:nvPr/>
+        </p:nvSpPr>
+        <p:spPr>
+          <a:xfrm>
+            <a:off x="8732520" y="109728"/>
+            <a:ext cx="2926080" cy="237744"/>
+          </a:xfrm>
+          <a:prstGeom prst="roundRect">
+            <a:avLst>
+              <a:gd name="adj" fmla="val 26923"/>
+            </a:avLst>
+          </a:prstGeom>
+          <a:solidFill>
+            <a:srgbClr val="0D1E2E"/>
+          </a:solidFill>
+          <a:ln w="12700">
+            <a:solidFill>
+              <a:srgbClr val="0D1E2E"/>
+            </a:solidFill>
+            <a:prstDash val="solid"/>
+          </a:ln>
+        </p:spPr>
+      </p:sp>
+      <p:sp>
+        <p:nvSpPr>
+          <p:cNvPr id="7" name="Shape 4"/>
+          <p:cNvSpPr/>
+          <p:nvPr/>
+        </p:nvSpPr>
+        <p:spPr>
+          <a:xfrm>
+            <a:off x="8823960" y="182880"/>
+            <a:ext cx="91440" cy="91440"/>
+          </a:xfrm>
+          <a:prstGeom prst="ellipse">
+            <a:avLst/>
+          </a:prstGeom>
+          <a:solidFill>
+            <a:srgbClr val="E8837A"/>
+          </a:solidFill>
+          <a:ln w="12700">
+            <a:solidFill>
+              <a:srgbClr val="E8837A"/>
+            </a:solidFill>
+            <a:prstDash val="solid"/>
+          </a:ln>
+        </p:spPr>
+      </p:sp>
+      <p:sp>
+        <p:nvSpPr>
+          <p:cNvPr id="8" name="Shape 5"/>
+          <p:cNvSpPr/>
+          <p:nvPr/>
+        </p:nvSpPr>
+        <p:spPr>
+          <a:xfrm>
+            <a:off x="8970264" y="182880"/>
+            <a:ext cx="91440" cy="91440"/>
+          </a:xfrm>
+          <a:prstGeom prst="ellipse">
+            <a:avLst/>
+          </a:prstGeom>
+          <a:solidFill>
+            <a:srgbClr val="F4A825"/>
+          </a:solidFill>
+          <a:ln w="12700">
+            <a:solidFill>
+              <a:srgbClr val="F4A825"/>
+            </a:solidFill>
+            <a:prstDash val="solid"/>
+          </a:ln>
+        </p:spPr>
+      </p:sp>
+      <p:sp>
+        <p:nvSpPr>
+          <p:cNvPr id="9" name="Shape 6"/>
+          <p:cNvSpPr/>
+          <p:nvPr/>
+        </p:nvSpPr>
+        <p:spPr>
+          <a:xfrm>
+            <a:off x="9116568" y="182880"/>
+            <a:ext cx="91440" cy="91440"/>
+          </a:xfrm>
+          <a:prstGeom prst="ellipse">
+            <a:avLst/>
+          </a:prstGeom>
+          <a:solidFill>
+            <a:srgbClr val="2E7D5B"/>
+          </a:solidFill>
+          <a:ln w="12700">
+            <a:solidFill>
+              <a:srgbClr val="2E7D5B"/>
+            </a:solidFill>
+            <a:prstDash val="solid"/>
+          </a:ln>
+        </p:spPr>
+      </p:sp>
+      <p:sp>
+        <p:nvSpPr>
+          <p:cNvPr id="10" name="Text 7"/>
+          <p:cNvSpPr/>
+          <p:nvPr/>
+        </p:nvSpPr>
+        <p:spPr>
+          <a:xfrm>
+            <a:off x="9299448" y="109728"/>
+            <a:ext cx="2286000" cy="237744"/>
+          </a:xfrm>
+          <a:prstGeom prst="rect">
+            <a:avLst/>
+          </a:prstGeom>
+          <a:noFill/>
+          <a:ln/>
+        </p:spPr>
+        <p:txBody>
+          <a:bodyPr wrap="square" lIns="0" tIns="0" rIns="0" bIns="0" rtlCol="0" anchor="ctr"/>
+          <a:lstStyle/>
+          <a:p>
+            <a:pPr indent="0" marL="0">
+              <a:buNone/>
+            </a:pPr>
+            <a:r>
+              <a:rPr lang="en-US" sz="800" b="1" spc="100" kern="0" dirty="0">
+                <a:solidFill>
+                  <a:srgbClr val="9FB2C2"/>
+                </a:solidFill>
+                <a:latin typeface="Inter" pitchFamily="34" charset="0"/>
+                <a:ea typeface="Inter" pitchFamily="34" charset="-122"/>
+                <a:cs typeface="Inter" pitchFamily="34" charset="-120"/>
+              </a:rPr>
+              <a:t>MS. RIVERA'S SCREEN · SO FAR</a:t>
+            </a:r>
+            <a:endParaRPr lang="en-US" sz="800" dirty="0"/>
+          </a:p>
+        </p:txBody>
+      </p:sp>
+      <p:sp>
+        <p:nvSpPr>
+          <p:cNvPr id="11" name="Text 8"/>
+          <p:cNvSpPr/>
+          <p:nvPr/>
+        </p:nvSpPr>
+        <p:spPr>
+          <a:xfrm>
+            <a:off x="8860536" y="365760"/>
+            <a:ext cx="2670048" cy="566928"/>
+          </a:xfrm>
+          <a:prstGeom prst="rect">
+            <a:avLst/>
+          </a:prstGeom>
+          <a:noFill/>
+          <a:ln/>
+        </p:spPr>
+        <p:txBody>
+          <a:bodyPr wrap="square" lIns="0" tIns="0" rIns="0" bIns="0" rtlCol="0" anchor="ctr"/>
+          <a:lstStyle/>
+          <a:p>
+            <a:pPr indent="0" marL="0">
+              <a:buNone/>
+            </a:pPr>
+            <a:r>
+              <a:rPr lang="en-US" sz="1000" dirty="0">
+                <a:solidFill>
+                  <a:srgbClr val="1B1F24"/>
+                </a:solidFill>
+                <a:latin typeface="Inter" pitchFamily="34" charset="0"/>
+                <a:ea typeface="Inter" pitchFamily="34" charset="-122"/>
+                <a:cs typeface="Inter" pitchFamily="34" charset="-120"/>
+              </a:rPr>
+              <a:t>Her lanes: research lane 3, final draft lane 1. Defended in one sentence.</a:t>
+            </a:r>
+            <a:endParaRPr lang="en-US" sz="1000" dirty="0"/>
+          </a:p>
+        </p:txBody>
+      </p:sp>
+      <p:sp>
+        <p:nvSpPr>
+          <p:cNvPr id="12" name="Text 9"/>
           <p:cNvSpPr/>
           <p:nvPr/>
         </p:nvSpPr>
@@ -9069,7 +11139,7 @@
       </p:sp>
       <p:sp>
         <p:nvSpPr>
-          <p:cNvPr id="6" name="Text 3"/>
+          <p:cNvPr id="13" name="Text 10"/>
           <p:cNvSpPr/>
           <p:nvPr/>
         </p:nvSpPr>
@@ -9108,7 +11178,7 @@
       </p:sp>
       <p:sp>
         <p:nvSpPr>
-          <p:cNvPr id="7" name="Text 4"/>
+          <p:cNvPr id="14" name="Text 11"/>
           <p:cNvSpPr/>
           <p:nvPr/>
         </p:nvSpPr>
@@ -9362,7 +11432,214 @@
       </p:sp>
       <p:sp>
         <p:nvSpPr>
-          <p:cNvPr id="5" name="Text 2"/>
+          <p:cNvPr id="5" name="Shape 2"/>
+          <p:cNvSpPr/>
+          <p:nvPr/>
+        </p:nvSpPr>
+        <p:spPr>
+          <a:xfrm>
+            <a:off x="8732520" y="109728"/>
+            <a:ext cx="2926080" cy="896112"/>
+          </a:xfrm>
+          <a:prstGeom prst="roundRect">
+            <a:avLst>
+              <a:gd name="adj" fmla="val 7143"/>
+            </a:avLst>
+          </a:prstGeom>
+          <a:solidFill>
+            <a:srgbClr val="F7F5F0"/>
+          </a:solidFill>
+          <a:ln w="12700">
+            <a:solidFill>
+              <a:srgbClr val="DCE3EA"/>
+            </a:solidFill>
+            <a:prstDash val="solid"/>
+          </a:ln>
+        </p:spPr>
+      </p:sp>
+      <p:sp>
+        <p:nvSpPr>
+          <p:cNvPr id="6" name="Shape 3"/>
+          <p:cNvSpPr/>
+          <p:nvPr/>
+        </p:nvSpPr>
+        <p:spPr>
+          <a:xfrm>
+            <a:off x="8732520" y="109728"/>
+            <a:ext cx="2926080" cy="237744"/>
+          </a:xfrm>
+          <a:prstGeom prst="roundRect">
+            <a:avLst>
+              <a:gd name="adj" fmla="val 26923"/>
+            </a:avLst>
+          </a:prstGeom>
+          <a:solidFill>
+            <a:srgbClr val="0D1E2E"/>
+          </a:solidFill>
+          <a:ln w="12700">
+            <a:solidFill>
+              <a:srgbClr val="0D1E2E"/>
+            </a:solidFill>
+            <a:prstDash val="solid"/>
+          </a:ln>
+        </p:spPr>
+      </p:sp>
+      <p:sp>
+        <p:nvSpPr>
+          <p:cNvPr id="7" name="Shape 4"/>
+          <p:cNvSpPr/>
+          <p:nvPr/>
+        </p:nvSpPr>
+        <p:spPr>
+          <a:xfrm>
+            <a:off x="8823960" y="182880"/>
+            <a:ext cx="91440" cy="91440"/>
+          </a:xfrm>
+          <a:prstGeom prst="ellipse">
+            <a:avLst/>
+          </a:prstGeom>
+          <a:solidFill>
+            <a:srgbClr val="E8837A"/>
+          </a:solidFill>
+          <a:ln w="12700">
+            <a:solidFill>
+              <a:srgbClr val="E8837A"/>
+            </a:solidFill>
+            <a:prstDash val="solid"/>
+          </a:ln>
+        </p:spPr>
+      </p:sp>
+      <p:sp>
+        <p:nvSpPr>
+          <p:cNvPr id="8" name="Shape 5"/>
+          <p:cNvSpPr/>
+          <p:nvPr/>
+        </p:nvSpPr>
+        <p:spPr>
+          <a:xfrm>
+            <a:off x="8970264" y="182880"/>
+            <a:ext cx="91440" cy="91440"/>
+          </a:xfrm>
+          <a:prstGeom prst="ellipse">
+            <a:avLst/>
+          </a:prstGeom>
+          <a:solidFill>
+            <a:srgbClr val="F4A825"/>
+          </a:solidFill>
+          <a:ln w="12700">
+            <a:solidFill>
+              <a:srgbClr val="F4A825"/>
+            </a:solidFill>
+            <a:prstDash val="solid"/>
+          </a:ln>
+        </p:spPr>
+      </p:sp>
+      <p:sp>
+        <p:nvSpPr>
+          <p:cNvPr id="9" name="Shape 6"/>
+          <p:cNvSpPr/>
+          <p:nvPr/>
+        </p:nvSpPr>
+        <p:spPr>
+          <a:xfrm>
+            <a:off x="9116568" y="182880"/>
+            <a:ext cx="91440" cy="91440"/>
+          </a:xfrm>
+          <a:prstGeom prst="ellipse">
+            <a:avLst/>
+          </a:prstGeom>
+          <a:solidFill>
+            <a:srgbClr val="2E7D5B"/>
+          </a:solidFill>
+          <a:ln w="12700">
+            <a:solidFill>
+              <a:srgbClr val="2E7D5B"/>
+            </a:solidFill>
+            <a:prstDash val="solid"/>
+          </a:ln>
+        </p:spPr>
+      </p:sp>
+      <p:sp>
+        <p:nvSpPr>
+          <p:cNvPr id="10" name="Text 7"/>
+          <p:cNvSpPr/>
+          <p:nvPr/>
+        </p:nvSpPr>
+        <p:spPr>
+          <a:xfrm>
+            <a:off x="9299448" y="109728"/>
+            <a:ext cx="2286000" cy="237744"/>
+          </a:xfrm>
+          <a:prstGeom prst="rect">
+            <a:avLst/>
+          </a:prstGeom>
+          <a:noFill/>
+          <a:ln/>
+        </p:spPr>
+        <p:txBody>
+          <a:bodyPr wrap="square" lIns="0" tIns="0" rIns="0" bIns="0" rtlCol="0" anchor="ctr"/>
+          <a:lstStyle/>
+          <a:p>
+            <a:pPr indent="0" marL="0">
+              <a:buNone/>
+            </a:pPr>
+            <a:r>
+              <a:rPr lang="en-US" sz="800" b="1" spc="100" kern="0" dirty="0">
+                <a:solidFill>
+                  <a:srgbClr val="9FB2C2"/>
+                </a:solidFill>
+                <a:latin typeface="Inter" pitchFamily="34" charset="0"/>
+                <a:ea typeface="Inter" pitchFamily="34" charset="-122"/>
+                <a:cs typeface="Inter" pitchFamily="34" charset="-120"/>
+              </a:rPr>
+              <a:t>MS. RIVERA'S SCREEN · SO FAR</a:t>
+            </a:r>
+            <a:endParaRPr lang="en-US" sz="800" dirty="0"/>
+          </a:p>
+        </p:txBody>
+      </p:sp>
+      <p:sp>
+        <p:nvSpPr>
+          <p:cNvPr id="11" name="Text 8"/>
+          <p:cNvSpPr/>
+          <p:nvPr/>
+        </p:nvSpPr>
+        <p:spPr>
+          <a:xfrm>
+            <a:off x="8860536" y="365760"/>
+            <a:ext cx="2670048" cy="566928"/>
+          </a:xfrm>
+          <a:prstGeom prst="rect">
+            <a:avLst/>
+          </a:prstGeom>
+          <a:noFill/>
+          <a:ln/>
+        </p:spPr>
+        <p:txBody>
+          <a:bodyPr wrap="square" lIns="0" tIns="0" rIns="0" bIns="0" rtlCol="0" anchor="ctr"/>
+          <a:lstStyle/>
+          <a:p>
+            <a:pPr indent="0" marL="0">
+              <a:buNone/>
+            </a:pPr>
+            <a:r>
+              <a:rPr lang="en-US" sz="1000" dirty="0">
+                <a:solidFill>
+                  <a:srgbClr val="1B1F24"/>
+                </a:solidFill>
+                <a:latin typeface="Inter" pitchFamily="34" charset="0"/>
+                <a:ea typeface="Inter" pitchFamily="34" charset="-122"/>
+                <a:cs typeface="Inter" pitchFamily="34" charset="-120"/>
+              </a:rPr>
+              <a:t>Her reality check: half her students use AI; nobody told them the rules.</a:t>
+            </a:r>
+            <a:endParaRPr lang="en-US" sz="1000" dirty="0"/>
+          </a:p>
+        </p:txBody>
+      </p:sp>
+      <p:sp>
+        <p:nvSpPr>
+          <p:cNvPr id="12" name="Text 9"/>
           <p:cNvSpPr/>
           <p:nvPr/>
         </p:nvSpPr>
@@ -9401,7 +11678,7 @@
       </p:sp>
       <p:sp>
         <p:nvSpPr>
-          <p:cNvPr id="6" name="Text 3"/>
+          <p:cNvPr id="13" name="Text 10"/>
           <p:cNvSpPr/>
           <p:nvPr/>
         </p:nvSpPr>
@@ -9440,7 +11717,7 @@
       </p:sp>
       <p:sp>
         <p:nvSpPr>
-          <p:cNvPr id="7" name="Shape 4"/>
+          <p:cNvPr id="14" name="Shape 11"/>
           <p:cNvSpPr/>
           <p:nvPr/>
         </p:nvSpPr>
@@ -9467,7 +11744,7 @@
       </p:sp>
       <p:sp>
         <p:nvSpPr>
-          <p:cNvPr id="8" name="Text 5"/>
+          <p:cNvPr id="15" name="Text 12"/>
           <p:cNvSpPr/>
           <p:nvPr/>
         </p:nvSpPr>
@@ -9506,7 +11783,7 @@
       </p:sp>
       <p:sp>
         <p:nvSpPr>
-          <p:cNvPr id="9" name="Text 6"/>
+          <p:cNvPr id="16" name="Text 13"/>
           <p:cNvSpPr/>
           <p:nvPr/>
         </p:nvSpPr>
@@ -9545,7 +11822,7 @@
       </p:sp>
       <p:sp>
         <p:nvSpPr>
-          <p:cNvPr id="10" name="Text 7"/>
+          <p:cNvPr id="17" name="Text 14"/>
           <p:cNvSpPr/>
           <p:nvPr/>
         </p:nvSpPr>
@@ -9584,7 +11861,7 @@
       </p:sp>
       <p:sp>
         <p:nvSpPr>
-          <p:cNvPr id="11" name="Shape 8"/>
+          <p:cNvPr id="18" name="Shape 15"/>
           <p:cNvSpPr/>
           <p:nvPr/>
         </p:nvSpPr>
@@ -9611,7 +11888,7 @@
       </p:sp>
       <p:sp>
         <p:nvSpPr>
-          <p:cNvPr id="12" name="Text 9"/>
+          <p:cNvPr id="19" name="Text 16"/>
           <p:cNvSpPr/>
           <p:nvPr/>
         </p:nvSpPr>
@@ -9650,7 +11927,7 @@
       </p:sp>
       <p:sp>
         <p:nvSpPr>
-          <p:cNvPr id="13" name="Text 10"/>
+          <p:cNvPr id="20" name="Text 17"/>
           <p:cNvSpPr/>
           <p:nvPr/>
         </p:nvSpPr>
@@ -9689,7 +11966,7 @@
       </p:sp>
       <p:sp>
         <p:nvSpPr>
-          <p:cNvPr id="14" name="Text 11"/>
+          <p:cNvPr id="21" name="Text 18"/>
           <p:cNvSpPr/>
           <p:nvPr/>
         </p:nvSpPr>
@@ -9728,7 +12005,7 @@
       </p:sp>
       <p:sp>
         <p:nvSpPr>
-          <p:cNvPr id="15" name="Text 12"/>
+          <p:cNvPr id="22" name="Text 19"/>
           <p:cNvSpPr/>
           <p:nvPr/>
         </p:nvSpPr>
@@ -10710,7 +12987,214 @@
       </p:sp>
       <p:sp>
         <p:nvSpPr>
-          <p:cNvPr id="5" name="Text 2"/>
+          <p:cNvPr id="5" name="Shape 2"/>
+          <p:cNvSpPr/>
+          <p:nvPr/>
+        </p:nvSpPr>
+        <p:spPr>
+          <a:xfrm>
+            <a:off x="8732520" y="109728"/>
+            <a:ext cx="2926080" cy="896112"/>
+          </a:xfrm>
+          <a:prstGeom prst="roundRect">
+            <a:avLst>
+              <a:gd name="adj" fmla="val 7143"/>
+            </a:avLst>
+          </a:prstGeom>
+          <a:solidFill>
+            <a:srgbClr val="F7F5F0"/>
+          </a:solidFill>
+          <a:ln w="12700">
+            <a:solidFill>
+              <a:srgbClr val="DCE3EA"/>
+            </a:solidFill>
+            <a:prstDash val="solid"/>
+          </a:ln>
+        </p:spPr>
+      </p:sp>
+      <p:sp>
+        <p:nvSpPr>
+          <p:cNvPr id="6" name="Shape 3"/>
+          <p:cNvSpPr/>
+          <p:nvPr/>
+        </p:nvSpPr>
+        <p:spPr>
+          <a:xfrm>
+            <a:off x="8732520" y="109728"/>
+            <a:ext cx="2926080" cy="237744"/>
+          </a:xfrm>
+          <a:prstGeom prst="roundRect">
+            <a:avLst>
+              <a:gd name="adj" fmla="val 26923"/>
+            </a:avLst>
+          </a:prstGeom>
+          <a:solidFill>
+            <a:srgbClr val="0D1E2E"/>
+          </a:solidFill>
+          <a:ln w="12700">
+            <a:solidFill>
+              <a:srgbClr val="0D1E2E"/>
+            </a:solidFill>
+            <a:prstDash val="solid"/>
+          </a:ln>
+        </p:spPr>
+      </p:sp>
+      <p:sp>
+        <p:nvSpPr>
+          <p:cNvPr id="7" name="Shape 4"/>
+          <p:cNvSpPr/>
+          <p:nvPr/>
+        </p:nvSpPr>
+        <p:spPr>
+          <a:xfrm>
+            <a:off x="8823960" y="182880"/>
+            <a:ext cx="91440" cy="91440"/>
+          </a:xfrm>
+          <a:prstGeom prst="ellipse">
+            <a:avLst/>
+          </a:prstGeom>
+          <a:solidFill>
+            <a:srgbClr val="E8837A"/>
+          </a:solidFill>
+          <a:ln w="12700">
+            <a:solidFill>
+              <a:srgbClr val="E8837A"/>
+            </a:solidFill>
+            <a:prstDash val="solid"/>
+          </a:ln>
+        </p:spPr>
+      </p:sp>
+      <p:sp>
+        <p:nvSpPr>
+          <p:cNvPr id="8" name="Shape 5"/>
+          <p:cNvSpPr/>
+          <p:nvPr/>
+        </p:nvSpPr>
+        <p:spPr>
+          <a:xfrm>
+            <a:off x="8970264" y="182880"/>
+            <a:ext cx="91440" cy="91440"/>
+          </a:xfrm>
+          <a:prstGeom prst="ellipse">
+            <a:avLst/>
+          </a:prstGeom>
+          <a:solidFill>
+            <a:srgbClr val="F4A825"/>
+          </a:solidFill>
+          <a:ln w="12700">
+            <a:solidFill>
+              <a:srgbClr val="F4A825"/>
+            </a:solidFill>
+            <a:prstDash val="solid"/>
+          </a:ln>
+        </p:spPr>
+      </p:sp>
+      <p:sp>
+        <p:nvSpPr>
+          <p:cNvPr id="9" name="Shape 6"/>
+          <p:cNvSpPr/>
+          <p:nvPr/>
+        </p:nvSpPr>
+        <p:spPr>
+          <a:xfrm>
+            <a:off x="9116568" y="182880"/>
+            <a:ext cx="91440" cy="91440"/>
+          </a:xfrm>
+          <a:prstGeom prst="ellipse">
+            <a:avLst/>
+          </a:prstGeom>
+          <a:solidFill>
+            <a:srgbClr val="2E7D5B"/>
+          </a:solidFill>
+          <a:ln w="12700">
+            <a:solidFill>
+              <a:srgbClr val="2E7D5B"/>
+            </a:solidFill>
+            <a:prstDash val="solid"/>
+          </a:ln>
+        </p:spPr>
+      </p:sp>
+      <p:sp>
+        <p:nvSpPr>
+          <p:cNvPr id="10" name="Text 7"/>
+          <p:cNvSpPr/>
+          <p:nvPr/>
+        </p:nvSpPr>
+        <p:spPr>
+          <a:xfrm>
+            <a:off x="9299448" y="109728"/>
+            <a:ext cx="2286000" cy="237744"/>
+          </a:xfrm>
+          <a:prstGeom prst="rect">
+            <a:avLst/>
+          </a:prstGeom>
+          <a:noFill/>
+          <a:ln/>
+        </p:spPr>
+        <p:txBody>
+          <a:bodyPr wrap="square" lIns="0" tIns="0" rIns="0" bIns="0" rtlCol="0" anchor="ctr"/>
+          <a:lstStyle/>
+          <a:p>
+            <a:pPr indent="0" marL="0">
+              <a:buNone/>
+            </a:pPr>
+            <a:r>
+              <a:rPr lang="en-US" sz="800" b="1" spc="100" kern="0" dirty="0">
+                <a:solidFill>
+                  <a:srgbClr val="9FB2C2"/>
+                </a:solidFill>
+                <a:latin typeface="Inter" pitchFamily="34" charset="0"/>
+                <a:ea typeface="Inter" pitchFamily="34" charset="-122"/>
+                <a:cs typeface="Inter" pitchFamily="34" charset="-120"/>
+              </a:rPr>
+              <a:t>MS. RIVERA'S SCREEN · SO FAR</a:t>
+            </a:r>
+            <a:endParaRPr lang="en-US" sz="800" dirty="0"/>
+          </a:p>
+        </p:txBody>
+      </p:sp>
+      <p:sp>
+        <p:nvSpPr>
+          <p:cNvPr id="11" name="Text 8"/>
+          <p:cNvSpPr/>
+          <p:nvPr/>
+        </p:nvSpPr>
+        <p:spPr>
+          <a:xfrm>
+            <a:off x="8860536" y="365760"/>
+            <a:ext cx="2670048" cy="566928"/>
+          </a:xfrm>
+          <a:prstGeom prst="rect">
+            <a:avLst/>
+          </a:prstGeom>
+          <a:noFill/>
+          <a:ln/>
+        </p:spPr>
+        <p:txBody>
+          <a:bodyPr wrap="square" lIns="0" tIns="0" rIns="0" bIns="0" rtlCol="0" anchor="ctr"/>
+          <a:lstStyle/>
+          <a:p>
+            <a:pPr indent="0" marL="0">
+              <a:buNone/>
+            </a:pPr>
+            <a:r>
+              <a:rPr lang="en-US" sz="1000" dirty="0">
+                <a:solidFill>
+                  <a:srgbClr val="1B1F24"/>
+                </a:solidFill>
+                <a:latin typeface="Inter" pitchFamily="34" charset="0"/>
+                <a:ea typeface="Inter" pitchFamily="34" charset="-122"/>
+                <a:cs typeface="Inter" pitchFamily="34" charset="-120"/>
+              </a:rPr>
+              <a:t>Her design change: outline due Thursday, worth ten points.</a:t>
+            </a:r>
+            <a:endParaRPr lang="en-US" sz="1000" dirty="0"/>
+          </a:p>
+        </p:txBody>
+      </p:sp>
+      <p:sp>
+        <p:nvSpPr>
+          <p:cNvPr id="12" name="Text 9"/>
           <p:cNvSpPr/>
           <p:nvPr/>
         </p:nvSpPr>
@@ -10749,7 +13233,7 @@
       </p:sp>
       <p:sp>
         <p:nvSpPr>
-          <p:cNvPr id="6" name="Text 3"/>
+          <p:cNvPr id="13" name="Text 10"/>
           <p:cNvSpPr/>
           <p:nvPr/>
         </p:nvSpPr>
@@ -10788,7 +13272,7 @@
       </p:sp>
       <p:sp>
         <p:nvSpPr>
-          <p:cNvPr id="7" name="Text 4"/>
+          <p:cNvPr id="14" name="Text 11"/>
           <p:cNvSpPr/>
           <p:nvPr/>
         </p:nvSpPr>
@@ -10894,7 +13378,7 @@
       </p:sp>
       <p:sp>
         <p:nvSpPr>
-          <p:cNvPr id="8" name="Shape 5"/>
+          <p:cNvPr id="15" name="Shape 12"/>
           <p:cNvSpPr/>
           <p:nvPr/>
         </p:nvSpPr>
@@ -10921,7 +13405,7 @@
       </p:sp>
       <p:sp>
         <p:nvSpPr>
-          <p:cNvPr id="9" name="Text 6"/>
+          <p:cNvPr id="16" name="Text 13"/>
           <p:cNvSpPr/>
           <p:nvPr/>
         </p:nvSpPr>
@@ -11108,7 +13592,214 @@
       </p:sp>
       <p:sp>
         <p:nvSpPr>
-          <p:cNvPr id="5" name="Text 2"/>
+          <p:cNvPr id="5" name="Shape 2"/>
+          <p:cNvSpPr/>
+          <p:nvPr/>
+        </p:nvSpPr>
+        <p:spPr>
+          <a:xfrm>
+            <a:off x="8732520" y="109728"/>
+            <a:ext cx="2926080" cy="896112"/>
+          </a:xfrm>
+          <a:prstGeom prst="roundRect">
+            <a:avLst>
+              <a:gd name="adj" fmla="val 7143"/>
+            </a:avLst>
+          </a:prstGeom>
+          <a:solidFill>
+            <a:srgbClr val="F7F5F0"/>
+          </a:solidFill>
+          <a:ln w="12700">
+            <a:solidFill>
+              <a:srgbClr val="DCE3EA"/>
+            </a:solidFill>
+            <a:prstDash val="solid"/>
+          </a:ln>
+        </p:spPr>
+      </p:sp>
+      <p:sp>
+        <p:nvSpPr>
+          <p:cNvPr id="6" name="Shape 3"/>
+          <p:cNvSpPr/>
+          <p:nvPr/>
+        </p:nvSpPr>
+        <p:spPr>
+          <a:xfrm>
+            <a:off x="8732520" y="109728"/>
+            <a:ext cx="2926080" cy="237744"/>
+          </a:xfrm>
+          <a:prstGeom prst="roundRect">
+            <a:avLst>
+              <a:gd name="adj" fmla="val 26923"/>
+            </a:avLst>
+          </a:prstGeom>
+          <a:solidFill>
+            <a:srgbClr val="0D1E2E"/>
+          </a:solidFill>
+          <a:ln w="12700">
+            <a:solidFill>
+              <a:srgbClr val="0D1E2E"/>
+            </a:solidFill>
+            <a:prstDash val="solid"/>
+          </a:ln>
+        </p:spPr>
+      </p:sp>
+      <p:sp>
+        <p:nvSpPr>
+          <p:cNvPr id="7" name="Shape 4"/>
+          <p:cNvSpPr/>
+          <p:nvPr/>
+        </p:nvSpPr>
+        <p:spPr>
+          <a:xfrm>
+            <a:off x="8823960" y="182880"/>
+            <a:ext cx="91440" cy="91440"/>
+          </a:xfrm>
+          <a:prstGeom prst="ellipse">
+            <a:avLst/>
+          </a:prstGeom>
+          <a:solidFill>
+            <a:srgbClr val="E8837A"/>
+          </a:solidFill>
+          <a:ln w="12700">
+            <a:solidFill>
+              <a:srgbClr val="E8837A"/>
+            </a:solidFill>
+            <a:prstDash val="solid"/>
+          </a:ln>
+        </p:spPr>
+      </p:sp>
+      <p:sp>
+        <p:nvSpPr>
+          <p:cNvPr id="8" name="Shape 5"/>
+          <p:cNvSpPr/>
+          <p:nvPr/>
+        </p:nvSpPr>
+        <p:spPr>
+          <a:xfrm>
+            <a:off x="8970264" y="182880"/>
+            <a:ext cx="91440" cy="91440"/>
+          </a:xfrm>
+          <a:prstGeom prst="ellipse">
+            <a:avLst/>
+          </a:prstGeom>
+          <a:solidFill>
+            <a:srgbClr val="F4A825"/>
+          </a:solidFill>
+          <a:ln w="12700">
+            <a:solidFill>
+              <a:srgbClr val="F4A825"/>
+            </a:solidFill>
+            <a:prstDash val="solid"/>
+          </a:ln>
+        </p:spPr>
+      </p:sp>
+      <p:sp>
+        <p:nvSpPr>
+          <p:cNvPr id="9" name="Shape 6"/>
+          <p:cNvSpPr/>
+          <p:nvPr/>
+        </p:nvSpPr>
+        <p:spPr>
+          <a:xfrm>
+            <a:off x="9116568" y="182880"/>
+            <a:ext cx="91440" cy="91440"/>
+          </a:xfrm>
+          <a:prstGeom prst="ellipse">
+            <a:avLst/>
+          </a:prstGeom>
+          <a:solidFill>
+            <a:srgbClr val="2E7D5B"/>
+          </a:solidFill>
+          <a:ln w="12700">
+            <a:solidFill>
+              <a:srgbClr val="2E7D5B"/>
+            </a:solidFill>
+            <a:prstDash val="solid"/>
+          </a:ln>
+        </p:spPr>
+      </p:sp>
+      <p:sp>
+        <p:nvSpPr>
+          <p:cNvPr id="10" name="Text 7"/>
+          <p:cNvSpPr/>
+          <p:nvPr/>
+        </p:nvSpPr>
+        <p:spPr>
+          <a:xfrm>
+            <a:off x="9299448" y="109728"/>
+            <a:ext cx="2286000" cy="237744"/>
+          </a:xfrm>
+          <a:prstGeom prst="rect">
+            <a:avLst/>
+          </a:prstGeom>
+          <a:noFill/>
+          <a:ln/>
+        </p:spPr>
+        <p:txBody>
+          <a:bodyPr wrap="square" lIns="0" tIns="0" rIns="0" bIns="0" rtlCol="0" anchor="ctr"/>
+          <a:lstStyle/>
+          <a:p>
+            <a:pPr indent="0" marL="0">
+              <a:buNone/>
+            </a:pPr>
+            <a:r>
+              <a:rPr lang="en-US" sz="800" b="1" spc="100" kern="0" dirty="0">
+                <a:solidFill>
+                  <a:srgbClr val="9FB2C2"/>
+                </a:solidFill>
+                <a:latin typeface="Inter" pitchFamily="34" charset="0"/>
+                <a:ea typeface="Inter" pitchFamily="34" charset="-122"/>
+                <a:cs typeface="Inter" pitchFamily="34" charset="-120"/>
+              </a:rPr>
+              <a:t>MS. RIVERA'S SCREEN · SO FAR</a:t>
+            </a:r>
+            <a:endParaRPr lang="en-US" sz="800" dirty="0"/>
+          </a:p>
+        </p:txBody>
+      </p:sp>
+      <p:sp>
+        <p:nvSpPr>
+          <p:cNvPr id="11" name="Text 8"/>
+          <p:cNvSpPr/>
+          <p:nvPr/>
+        </p:nvSpPr>
+        <p:spPr>
+          <a:xfrm>
+            <a:off x="8860536" y="365760"/>
+            <a:ext cx="2670048" cy="566928"/>
+          </a:xfrm>
+          <a:prstGeom prst="rect">
+            <a:avLst/>
+          </a:prstGeom>
+          <a:noFill/>
+          <a:ln/>
+        </p:spPr>
+        <p:txBody>
+          <a:bodyPr wrap="square" lIns="0" tIns="0" rIns="0" bIns="0" rtlCol="0" anchor="ctr"/>
+          <a:lstStyle/>
+          <a:p>
+            <a:pPr indent="0" marL="0">
+              <a:buNone/>
+            </a:pPr>
+            <a:r>
+              <a:rPr lang="en-US" sz="1000" dirty="0">
+                <a:solidFill>
+                  <a:srgbClr val="1B1F24"/>
+                </a:solidFill>
+                <a:latin typeface="Inter" pitchFamily="34" charset="0"/>
+                <a:ea typeface="Inter" pitchFamily="34" charset="-122"/>
+                <a:cs typeface="Inter" pitchFamily="34" charset="-120"/>
+              </a:rPr>
+              <a:t>Her two sentences: written calm, filed where frustrated-her will look.</a:t>
+            </a:r>
+            <a:endParaRPr lang="en-US" sz="1000" dirty="0"/>
+          </a:p>
+        </p:txBody>
+      </p:sp>
+      <p:sp>
+        <p:nvSpPr>
+          <p:cNvPr id="12" name="Text 9"/>
           <p:cNvSpPr/>
           <p:nvPr/>
         </p:nvSpPr>
@@ -11147,7 +13838,7 @@
       </p:sp>
       <p:sp>
         <p:nvSpPr>
-          <p:cNvPr id="6" name="Text 3"/>
+          <p:cNvPr id="13" name="Text 10"/>
           <p:cNvSpPr/>
           <p:nvPr/>
         </p:nvSpPr>
@@ -11186,7 +13877,7 @@
       </p:sp>
       <p:sp>
         <p:nvSpPr>
-          <p:cNvPr id="7" name="Shape 4"/>
+          <p:cNvPr id="14" name="Shape 11"/>
           <p:cNvSpPr/>
           <p:nvPr/>
         </p:nvSpPr>
@@ -11213,7 +13904,7 @@
       </p:sp>
       <p:sp>
         <p:nvSpPr>
-          <p:cNvPr id="8" name="Text 5"/>
+          <p:cNvPr id="15" name="Text 12"/>
           <p:cNvSpPr/>
           <p:nvPr/>
         </p:nvSpPr>
@@ -11275,7 +13966,7 @@
       </p:sp>
       <p:sp>
         <p:nvSpPr>
-          <p:cNvPr id="9" name="Text 6"/>
+          <p:cNvPr id="16" name="Text 13"/>
           <p:cNvSpPr/>
           <p:nvPr/>
         </p:nvSpPr>
@@ -11462,7 +14153,214 @@
       </p:sp>
       <p:sp>
         <p:nvSpPr>
-          <p:cNvPr id="5" name="Text 2"/>
+          <p:cNvPr id="5" name="Shape 2"/>
+          <p:cNvSpPr/>
+          <p:nvPr/>
+        </p:nvSpPr>
+        <p:spPr>
+          <a:xfrm>
+            <a:off x="8732520" y="109728"/>
+            <a:ext cx="2926080" cy="896112"/>
+          </a:xfrm>
+          <a:prstGeom prst="roundRect">
+            <a:avLst>
+              <a:gd name="adj" fmla="val 7143"/>
+            </a:avLst>
+          </a:prstGeom>
+          <a:solidFill>
+            <a:srgbClr val="F7F5F0"/>
+          </a:solidFill>
+          <a:ln w="12700">
+            <a:solidFill>
+              <a:srgbClr val="DCE3EA"/>
+            </a:solidFill>
+            <a:prstDash val="solid"/>
+          </a:ln>
+        </p:spPr>
+      </p:sp>
+      <p:sp>
+        <p:nvSpPr>
+          <p:cNvPr id="6" name="Shape 3"/>
+          <p:cNvSpPr/>
+          <p:nvPr/>
+        </p:nvSpPr>
+        <p:spPr>
+          <a:xfrm>
+            <a:off x="8732520" y="109728"/>
+            <a:ext cx="2926080" cy="237744"/>
+          </a:xfrm>
+          <a:prstGeom prst="roundRect">
+            <a:avLst>
+              <a:gd name="adj" fmla="val 26923"/>
+            </a:avLst>
+          </a:prstGeom>
+          <a:solidFill>
+            <a:srgbClr val="0D1E2E"/>
+          </a:solidFill>
+          <a:ln w="12700">
+            <a:solidFill>
+              <a:srgbClr val="0D1E2E"/>
+            </a:solidFill>
+            <a:prstDash val="solid"/>
+          </a:ln>
+        </p:spPr>
+      </p:sp>
+      <p:sp>
+        <p:nvSpPr>
+          <p:cNvPr id="7" name="Shape 4"/>
+          <p:cNvSpPr/>
+          <p:nvPr/>
+        </p:nvSpPr>
+        <p:spPr>
+          <a:xfrm>
+            <a:off x="8823960" y="182880"/>
+            <a:ext cx="91440" cy="91440"/>
+          </a:xfrm>
+          <a:prstGeom prst="ellipse">
+            <a:avLst/>
+          </a:prstGeom>
+          <a:solidFill>
+            <a:srgbClr val="E8837A"/>
+          </a:solidFill>
+          <a:ln w="12700">
+            <a:solidFill>
+              <a:srgbClr val="E8837A"/>
+            </a:solidFill>
+            <a:prstDash val="solid"/>
+          </a:ln>
+        </p:spPr>
+      </p:sp>
+      <p:sp>
+        <p:nvSpPr>
+          <p:cNvPr id="8" name="Shape 5"/>
+          <p:cNvSpPr/>
+          <p:nvPr/>
+        </p:nvSpPr>
+        <p:spPr>
+          <a:xfrm>
+            <a:off x="8970264" y="182880"/>
+            <a:ext cx="91440" cy="91440"/>
+          </a:xfrm>
+          <a:prstGeom prst="ellipse">
+            <a:avLst/>
+          </a:prstGeom>
+          <a:solidFill>
+            <a:srgbClr val="F4A825"/>
+          </a:solidFill>
+          <a:ln w="12700">
+            <a:solidFill>
+              <a:srgbClr val="F4A825"/>
+            </a:solidFill>
+            <a:prstDash val="solid"/>
+          </a:ln>
+        </p:spPr>
+      </p:sp>
+      <p:sp>
+        <p:nvSpPr>
+          <p:cNvPr id="9" name="Shape 6"/>
+          <p:cNvSpPr/>
+          <p:nvPr/>
+        </p:nvSpPr>
+        <p:spPr>
+          <a:xfrm>
+            <a:off x="9116568" y="182880"/>
+            <a:ext cx="91440" cy="91440"/>
+          </a:xfrm>
+          <a:prstGeom prst="ellipse">
+            <a:avLst/>
+          </a:prstGeom>
+          <a:solidFill>
+            <a:srgbClr val="2E7D5B"/>
+          </a:solidFill>
+          <a:ln w="12700">
+            <a:solidFill>
+              <a:srgbClr val="2E7D5B"/>
+            </a:solidFill>
+            <a:prstDash val="solid"/>
+          </a:ln>
+        </p:spPr>
+      </p:sp>
+      <p:sp>
+        <p:nvSpPr>
+          <p:cNvPr id="10" name="Text 7"/>
+          <p:cNvSpPr/>
+          <p:nvPr/>
+        </p:nvSpPr>
+        <p:spPr>
+          <a:xfrm>
+            <a:off x="9299448" y="109728"/>
+            <a:ext cx="2286000" cy="237744"/>
+          </a:xfrm>
+          <a:prstGeom prst="rect">
+            <a:avLst/>
+          </a:prstGeom>
+          <a:noFill/>
+          <a:ln/>
+        </p:spPr>
+        <p:txBody>
+          <a:bodyPr wrap="square" lIns="0" tIns="0" rIns="0" bIns="0" rtlCol="0" anchor="ctr"/>
+          <a:lstStyle/>
+          <a:p>
+            <a:pPr indent="0" marL="0">
+              <a:buNone/>
+            </a:pPr>
+            <a:r>
+              <a:rPr lang="en-US" sz="800" b="1" spc="100" kern="0" dirty="0">
+                <a:solidFill>
+                  <a:srgbClr val="9FB2C2"/>
+                </a:solidFill>
+                <a:latin typeface="Inter" pitchFamily="34" charset="0"/>
+                <a:ea typeface="Inter" pitchFamily="34" charset="-122"/>
+                <a:cs typeface="Inter" pitchFamily="34" charset="-120"/>
+              </a:rPr>
+              <a:t>MS. RIVERA'S SCREEN · SO FAR</a:t>
+            </a:r>
+            <a:endParaRPr lang="en-US" sz="800" dirty="0"/>
+          </a:p>
+        </p:txBody>
+      </p:sp>
+      <p:sp>
+        <p:nvSpPr>
+          <p:cNvPr id="11" name="Text 8"/>
+          <p:cNvSpPr/>
+          <p:nvPr/>
+        </p:nvSpPr>
+        <p:spPr>
+          <a:xfrm>
+            <a:off x="8860536" y="365760"/>
+            <a:ext cx="2670048" cy="566928"/>
+          </a:xfrm>
+          <a:prstGeom prst="rect">
+            <a:avLst/>
+          </a:prstGeom>
+          <a:noFill/>
+          <a:ln/>
+        </p:spPr>
+        <p:txBody>
+          <a:bodyPr wrap="square" lIns="0" tIns="0" rIns="0" bIns="0" rtlCol="0" anchor="ctr"/>
+          <a:lstStyle/>
+          <a:p>
+            <a:pPr indent="0" marL="0">
+              <a:buNone/>
+            </a:pPr>
+            <a:r>
+              <a:rPr lang="en-US" sz="1000" dirty="0">
+                <a:solidFill>
+                  <a:srgbClr val="1B1F24"/>
+                </a:solidFill>
+                <a:latin typeface="Inter" pitchFamily="34" charset="0"/>
+                <a:ea typeface="Inter" pitchFamily="34" charset="-122"/>
+                <a:cs typeface="Inter" pitchFamily="34" charset="-120"/>
+              </a:rPr>
+              <a:t>Her share-out: the box, read aloud, in student words.</a:t>
+            </a:r>
+            <a:endParaRPr lang="en-US" sz="1000" dirty="0"/>
+          </a:p>
+        </p:txBody>
+      </p:sp>
+      <p:sp>
+        <p:nvSpPr>
+          <p:cNvPr id="12" name="Text 9"/>
           <p:cNvSpPr/>
           <p:nvPr/>
         </p:nvSpPr>
@@ -11501,7 +14399,7 @@
       </p:sp>
       <p:sp>
         <p:nvSpPr>
-          <p:cNvPr id="6" name="Text 3"/>
+          <p:cNvPr id="13" name="Text 10"/>
           <p:cNvSpPr/>
           <p:nvPr/>
         </p:nvSpPr>
@@ -11540,7 +14438,7 @@
       </p:sp>
       <p:sp>
         <p:nvSpPr>
-          <p:cNvPr id="7" name="Text 4"/>
+          <p:cNvPr id="14" name="Text 11"/>
           <p:cNvSpPr/>
           <p:nvPr/>
         </p:nvSpPr>
@@ -11773,7 +14671,214 @@
       </p:sp>
       <p:sp>
         <p:nvSpPr>
-          <p:cNvPr id="5" name="Text 2"/>
+          <p:cNvPr id="5" name="Shape 2"/>
+          <p:cNvSpPr/>
+          <p:nvPr/>
+        </p:nvSpPr>
+        <p:spPr>
+          <a:xfrm>
+            <a:off x="8732520" y="109728"/>
+            <a:ext cx="2926080" cy="896112"/>
+          </a:xfrm>
+          <a:prstGeom prst="roundRect">
+            <a:avLst>
+              <a:gd name="adj" fmla="val 7143"/>
+            </a:avLst>
+          </a:prstGeom>
+          <a:solidFill>
+            <a:srgbClr val="F7F5F0"/>
+          </a:solidFill>
+          <a:ln w="12700">
+            <a:solidFill>
+              <a:srgbClr val="DCE3EA"/>
+            </a:solidFill>
+            <a:prstDash val="solid"/>
+          </a:ln>
+        </p:spPr>
+      </p:sp>
+      <p:sp>
+        <p:nvSpPr>
+          <p:cNvPr id="6" name="Shape 3"/>
+          <p:cNvSpPr/>
+          <p:nvPr/>
+        </p:nvSpPr>
+        <p:spPr>
+          <a:xfrm>
+            <a:off x="8732520" y="109728"/>
+            <a:ext cx="2926080" cy="237744"/>
+          </a:xfrm>
+          <a:prstGeom prst="roundRect">
+            <a:avLst>
+              <a:gd name="adj" fmla="val 26923"/>
+            </a:avLst>
+          </a:prstGeom>
+          <a:solidFill>
+            <a:srgbClr val="0D1E2E"/>
+          </a:solidFill>
+          <a:ln w="12700">
+            <a:solidFill>
+              <a:srgbClr val="0D1E2E"/>
+            </a:solidFill>
+            <a:prstDash val="solid"/>
+          </a:ln>
+        </p:spPr>
+      </p:sp>
+      <p:sp>
+        <p:nvSpPr>
+          <p:cNvPr id="7" name="Shape 4"/>
+          <p:cNvSpPr/>
+          <p:nvPr/>
+        </p:nvSpPr>
+        <p:spPr>
+          <a:xfrm>
+            <a:off x="8823960" y="182880"/>
+            <a:ext cx="91440" cy="91440"/>
+          </a:xfrm>
+          <a:prstGeom prst="ellipse">
+            <a:avLst/>
+          </a:prstGeom>
+          <a:solidFill>
+            <a:srgbClr val="E8837A"/>
+          </a:solidFill>
+          <a:ln w="12700">
+            <a:solidFill>
+              <a:srgbClr val="E8837A"/>
+            </a:solidFill>
+            <a:prstDash val="solid"/>
+          </a:ln>
+        </p:spPr>
+      </p:sp>
+      <p:sp>
+        <p:nvSpPr>
+          <p:cNvPr id="8" name="Shape 5"/>
+          <p:cNvSpPr/>
+          <p:nvPr/>
+        </p:nvSpPr>
+        <p:spPr>
+          <a:xfrm>
+            <a:off x="8970264" y="182880"/>
+            <a:ext cx="91440" cy="91440"/>
+          </a:xfrm>
+          <a:prstGeom prst="ellipse">
+            <a:avLst/>
+          </a:prstGeom>
+          <a:solidFill>
+            <a:srgbClr val="F4A825"/>
+          </a:solidFill>
+          <a:ln w="12700">
+            <a:solidFill>
+              <a:srgbClr val="F4A825"/>
+            </a:solidFill>
+            <a:prstDash val="solid"/>
+          </a:ln>
+        </p:spPr>
+      </p:sp>
+      <p:sp>
+        <p:nvSpPr>
+          <p:cNvPr id="9" name="Shape 6"/>
+          <p:cNvSpPr/>
+          <p:nvPr/>
+        </p:nvSpPr>
+        <p:spPr>
+          <a:xfrm>
+            <a:off x="9116568" y="182880"/>
+            <a:ext cx="91440" cy="91440"/>
+          </a:xfrm>
+          <a:prstGeom prst="ellipse">
+            <a:avLst/>
+          </a:prstGeom>
+          <a:solidFill>
+            <a:srgbClr val="2E7D5B"/>
+          </a:solidFill>
+          <a:ln w="12700">
+            <a:solidFill>
+              <a:srgbClr val="2E7D5B"/>
+            </a:solidFill>
+            <a:prstDash val="solid"/>
+          </a:ln>
+        </p:spPr>
+      </p:sp>
+      <p:sp>
+        <p:nvSpPr>
+          <p:cNvPr id="10" name="Text 7"/>
+          <p:cNvSpPr/>
+          <p:nvPr/>
+        </p:nvSpPr>
+        <p:spPr>
+          <a:xfrm>
+            <a:off x="9299448" y="109728"/>
+            <a:ext cx="2286000" cy="237744"/>
+          </a:xfrm>
+          <a:prstGeom prst="rect">
+            <a:avLst/>
+          </a:prstGeom>
+          <a:noFill/>
+          <a:ln/>
+        </p:spPr>
+        <p:txBody>
+          <a:bodyPr wrap="square" lIns="0" tIns="0" rIns="0" bIns="0" rtlCol="0" anchor="ctr"/>
+          <a:lstStyle/>
+          <a:p>
+            <a:pPr indent="0" marL="0">
+              <a:buNone/>
+            </a:pPr>
+            <a:r>
+              <a:rPr lang="en-US" sz="800" b="1" spc="100" kern="0" dirty="0">
+                <a:solidFill>
+                  <a:srgbClr val="9FB2C2"/>
+                </a:solidFill>
+                <a:latin typeface="Inter" pitchFamily="34" charset="0"/>
+                <a:ea typeface="Inter" pitchFamily="34" charset="-122"/>
+                <a:cs typeface="Inter" pitchFamily="34" charset="-120"/>
+              </a:rPr>
+              <a:t>MS. RIVERA'S SCREEN · SO FAR</a:t>
+            </a:r>
+            <a:endParaRPr lang="en-US" sz="800" dirty="0"/>
+          </a:p>
+        </p:txBody>
+      </p:sp>
+      <p:sp>
+        <p:nvSpPr>
+          <p:cNvPr id="11" name="Text 8"/>
+          <p:cNvSpPr/>
+          <p:nvPr/>
+        </p:nvSpPr>
+        <p:spPr>
+          <a:xfrm>
+            <a:off x="8860536" y="365760"/>
+            <a:ext cx="2670048" cy="566928"/>
+          </a:xfrm>
+          <a:prstGeom prst="rect">
+            <a:avLst/>
+          </a:prstGeom>
+          <a:noFill/>
+          <a:ln/>
+        </p:spPr>
+        <p:txBody>
+          <a:bodyPr wrap="square" lIns="0" tIns="0" rIns="0" bIns="0" rtlCol="0" anchor="ctr"/>
+          <a:lstStyle/>
+          <a:p>
+            <a:pPr indent="0" marL="0">
+              <a:buNone/>
+            </a:pPr>
+            <a:r>
+              <a:rPr lang="en-US" sz="1000" dirty="0">
+                <a:solidFill>
+                  <a:srgbClr val="1B1F24"/>
+                </a:solidFill>
+                <a:latin typeface="Inter" pitchFamily="34" charset="0"/>
+                <a:ea typeface="Inter" pitchFamily="34" charset="-122"/>
+                <a:cs typeface="Inter" pitchFamily="34" charset="-120"/>
+              </a:rPr>
+              <a:t>Her inventory: lane, box, one design move, two sentences.</a:t>
+            </a:r>
+            <a:endParaRPr lang="en-US" sz="1000" dirty="0"/>
+          </a:p>
+        </p:txBody>
+      </p:sp>
+      <p:sp>
+        <p:nvSpPr>
+          <p:cNvPr id="12" name="Text 9"/>
           <p:cNvSpPr/>
           <p:nvPr/>
         </p:nvSpPr>
@@ -11812,7 +14917,7 @@
       </p:sp>
       <p:sp>
         <p:nvSpPr>
-          <p:cNvPr id="6" name="Text 3"/>
+          <p:cNvPr id="13" name="Text 10"/>
           <p:cNvSpPr/>
           <p:nvPr/>
         </p:nvSpPr>
@@ -11851,7 +14956,7 @@
       </p:sp>
       <p:sp>
         <p:nvSpPr>
-          <p:cNvPr id="7" name="Shape 4"/>
+          <p:cNvPr id="14" name="Shape 11"/>
           <p:cNvSpPr/>
           <p:nvPr/>
         </p:nvSpPr>
@@ -11878,7 +14983,7 @@
       </p:sp>
       <p:sp>
         <p:nvSpPr>
-          <p:cNvPr id="8" name="Text 5"/>
+          <p:cNvPr id="15" name="Text 12"/>
           <p:cNvSpPr/>
           <p:nvPr/>
         </p:nvSpPr>
@@ -12080,7 +15185,214 @@
       </p:sp>
       <p:sp>
         <p:nvSpPr>
-          <p:cNvPr id="5" name="Text 2"/>
+          <p:cNvPr id="5" name="Shape 2"/>
+          <p:cNvSpPr/>
+          <p:nvPr/>
+        </p:nvSpPr>
+        <p:spPr>
+          <a:xfrm>
+            <a:off x="8732520" y="109728"/>
+            <a:ext cx="2926080" cy="896112"/>
+          </a:xfrm>
+          <a:prstGeom prst="roundRect">
+            <a:avLst>
+              <a:gd name="adj" fmla="val 7143"/>
+            </a:avLst>
+          </a:prstGeom>
+          <a:solidFill>
+            <a:srgbClr val="F7F5F0"/>
+          </a:solidFill>
+          <a:ln w="12700">
+            <a:solidFill>
+              <a:srgbClr val="DCE3EA"/>
+            </a:solidFill>
+            <a:prstDash val="solid"/>
+          </a:ln>
+        </p:spPr>
+      </p:sp>
+      <p:sp>
+        <p:nvSpPr>
+          <p:cNvPr id="6" name="Shape 3"/>
+          <p:cNvSpPr/>
+          <p:nvPr/>
+        </p:nvSpPr>
+        <p:spPr>
+          <a:xfrm>
+            <a:off x="8732520" y="109728"/>
+            <a:ext cx="2926080" cy="237744"/>
+          </a:xfrm>
+          <a:prstGeom prst="roundRect">
+            <a:avLst>
+              <a:gd name="adj" fmla="val 26923"/>
+            </a:avLst>
+          </a:prstGeom>
+          <a:solidFill>
+            <a:srgbClr val="0D1E2E"/>
+          </a:solidFill>
+          <a:ln w="12700">
+            <a:solidFill>
+              <a:srgbClr val="0D1E2E"/>
+            </a:solidFill>
+            <a:prstDash val="solid"/>
+          </a:ln>
+        </p:spPr>
+      </p:sp>
+      <p:sp>
+        <p:nvSpPr>
+          <p:cNvPr id="7" name="Shape 4"/>
+          <p:cNvSpPr/>
+          <p:nvPr/>
+        </p:nvSpPr>
+        <p:spPr>
+          <a:xfrm>
+            <a:off x="8823960" y="182880"/>
+            <a:ext cx="91440" cy="91440"/>
+          </a:xfrm>
+          <a:prstGeom prst="ellipse">
+            <a:avLst/>
+          </a:prstGeom>
+          <a:solidFill>
+            <a:srgbClr val="E8837A"/>
+          </a:solidFill>
+          <a:ln w="12700">
+            <a:solidFill>
+              <a:srgbClr val="E8837A"/>
+            </a:solidFill>
+            <a:prstDash val="solid"/>
+          </a:ln>
+        </p:spPr>
+      </p:sp>
+      <p:sp>
+        <p:nvSpPr>
+          <p:cNvPr id="8" name="Shape 5"/>
+          <p:cNvSpPr/>
+          <p:nvPr/>
+        </p:nvSpPr>
+        <p:spPr>
+          <a:xfrm>
+            <a:off x="8970264" y="182880"/>
+            <a:ext cx="91440" cy="91440"/>
+          </a:xfrm>
+          <a:prstGeom prst="ellipse">
+            <a:avLst/>
+          </a:prstGeom>
+          <a:solidFill>
+            <a:srgbClr val="F4A825"/>
+          </a:solidFill>
+          <a:ln w="12700">
+            <a:solidFill>
+              <a:srgbClr val="F4A825"/>
+            </a:solidFill>
+            <a:prstDash val="solid"/>
+          </a:ln>
+        </p:spPr>
+      </p:sp>
+      <p:sp>
+        <p:nvSpPr>
+          <p:cNvPr id="9" name="Shape 6"/>
+          <p:cNvSpPr/>
+          <p:nvPr/>
+        </p:nvSpPr>
+        <p:spPr>
+          <a:xfrm>
+            <a:off x="9116568" y="182880"/>
+            <a:ext cx="91440" cy="91440"/>
+          </a:xfrm>
+          <a:prstGeom prst="ellipse">
+            <a:avLst/>
+          </a:prstGeom>
+          <a:solidFill>
+            <a:srgbClr val="2E7D5B"/>
+          </a:solidFill>
+          <a:ln w="12700">
+            <a:solidFill>
+              <a:srgbClr val="2E7D5B"/>
+            </a:solidFill>
+            <a:prstDash val="solid"/>
+          </a:ln>
+        </p:spPr>
+      </p:sp>
+      <p:sp>
+        <p:nvSpPr>
+          <p:cNvPr id="10" name="Text 7"/>
+          <p:cNvSpPr/>
+          <p:nvPr/>
+        </p:nvSpPr>
+        <p:spPr>
+          <a:xfrm>
+            <a:off x="9299448" y="109728"/>
+            <a:ext cx="2286000" cy="237744"/>
+          </a:xfrm>
+          <a:prstGeom prst="rect">
+            <a:avLst/>
+          </a:prstGeom>
+          <a:noFill/>
+          <a:ln/>
+        </p:spPr>
+        <p:txBody>
+          <a:bodyPr wrap="square" lIns="0" tIns="0" rIns="0" bIns="0" rtlCol="0" anchor="ctr"/>
+          <a:lstStyle/>
+          <a:p>
+            <a:pPr indent="0" marL="0">
+              <a:buNone/>
+            </a:pPr>
+            <a:r>
+              <a:rPr lang="en-US" sz="800" b="1" spc="100" kern="0" dirty="0">
+                <a:solidFill>
+                  <a:srgbClr val="9FB2C2"/>
+                </a:solidFill>
+                <a:latin typeface="Inter" pitchFamily="34" charset="0"/>
+                <a:ea typeface="Inter" pitchFamily="34" charset="-122"/>
+                <a:cs typeface="Inter" pitchFamily="34" charset="-120"/>
+              </a:rPr>
+              <a:t>MS. RIVERA'S SCREEN · SO FAR</a:t>
+            </a:r>
+            <a:endParaRPr lang="en-US" sz="800" dirty="0"/>
+          </a:p>
+        </p:txBody>
+      </p:sp>
+      <p:sp>
+        <p:nvSpPr>
+          <p:cNvPr id="11" name="Text 8"/>
+          <p:cNvSpPr/>
+          <p:nvPr/>
+        </p:nvSpPr>
+        <p:spPr>
+          <a:xfrm>
+            <a:off x="8860536" y="365760"/>
+            <a:ext cx="2670048" cy="566928"/>
+          </a:xfrm>
+          <a:prstGeom prst="rect">
+            <a:avLst/>
+          </a:prstGeom>
+          <a:noFill/>
+          <a:ln/>
+        </p:spPr>
+        <p:txBody>
+          <a:bodyPr wrap="square" lIns="0" tIns="0" rIns="0" bIns="0" rtlCol="0" anchor="ctr"/>
+          <a:lstStyle/>
+          <a:p>
+            <a:pPr indent="0" marL="0">
+              <a:buNone/>
+            </a:pPr>
+            <a:r>
+              <a:rPr lang="en-US" sz="1000" dirty="0">
+                <a:solidFill>
+                  <a:srgbClr val="1B1F24"/>
+                </a:solidFill>
+                <a:latin typeface="Inter" pitchFamily="34" charset="0"/>
+                <a:ea typeface="Inter" pitchFamily="34" charset="-122"/>
+                <a:cs typeface="Inter" pitchFamily="34" charset="-120"/>
+              </a:rPr>
+              <a:t>Her honesty: some will still cheat. Honest kids now know the rules.</a:t>
+            </a:r>
+            <a:endParaRPr lang="en-US" sz="1000" dirty="0"/>
+          </a:p>
+        </p:txBody>
+      </p:sp>
+      <p:sp>
+        <p:nvSpPr>
+          <p:cNvPr id="12" name="Text 9"/>
           <p:cNvSpPr/>
           <p:nvPr/>
         </p:nvSpPr>
@@ -12119,7 +15431,7 @@
       </p:sp>
       <p:sp>
         <p:nvSpPr>
-          <p:cNvPr id="6" name="Text 3"/>
+          <p:cNvPr id="13" name="Text 10"/>
           <p:cNvSpPr/>
           <p:nvPr/>
         </p:nvSpPr>
@@ -12158,7 +15470,7 @@
       </p:sp>
       <p:sp>
         <p:nvSpPr>
-          <p:cNvPr id="7" name="Text 4"/>
+          <p:cNvPr id="14" name="Text 11"/>
           <p:cNvSpPr/>
           <p:nvPr/>
         </p:nvSpPr>
@@ -12412,7 +15724,214 @@
       </p:sp>
       <p:sp>
         <p:nvSpPr>
-          <p:cNvPr id="5" name="Text 2"/>
+          <p:cNvPr id="5" name="Shape 2"/>
+          <p:cNvSpPr/>
+          <p:nvPr/>
+        </p:nvSpPr>
+        <p:spPr>
+          <a:xfrm>
+            <a:off x="8732520" y="109728"/>
+            <a:ext cx="2926080" cy="896112"/>
+          </a:xfrm>
+          <a:prstGeom prst="roundRect">
+            <a:avLst>
+              <a:gd name="adj" fmla="val 7143"/>
+            </a:avLst>
+          </a:prstGeom>
+          <a:solidFill>
+            <a:srgbClr val="1E3A50"/>
+          </a:solidFill>
+          <a:ln w="12700">
+            <a:solidFill>
+              <a:srgbClr val="2A4A63"/>
+            </a:solidFill>
+            <a:prstDash val="solid"/>
+          </a:ln>
+        </p:spPr>
+      </p:sp>
+      <p:sp>
+        <p:nvSpPr>
+          <p:cNvPr id="6" name="Shape 3"/>
+          <p:cNvSpPr/>
+          <p:nvPr/>
+        </p:nvSpPr>
+        <p:spPr>
+          <a:xfrm>
+            <a:off x="8732520" y="109728"/>
+            <a:ext cx="2926080" cy="237744"/>
+          </a:xfrm>
+          <a:prstGeom prst="roundRect">
+            <a:avLst>
+              <a:gd name="adj" fmla="val 26923"/>
+            </a:avLst>
+          </a:prstGeom>
+          <a:solidFill>
+            <a:srgbClr val="0D1E2E"/>
+          </a:solidFill>
+          <a:ln w="12700">
+            <a:solidFill>
+              <a:srgbClr val="0D1E2E"/>
+            </a:solidFill>
+            <a:prstDash val="solid"/>
+          </a:ln>
+        </p:spPr>
+      </p:sp>
+      <p:sp>
+        <p:nvSpPr>
+          <p:cNvPr id="7" name="Shape 4"/>
+          <p:cNvSpPr/>
+          <p:nvPr/>
+        </p:nvSpPr>
+        <p:spPr>
+          <a:xfrm>
+            <a:off x="8823960" y="182880"/>
+            <a:ext cx="91440" cy="91440"/>
+          </a:xfrm>
+          <a:prstGeom prst="ellipse">
+            <a:avLst/>
+          </a:prstGeom>
+          <a:solidFill>
+            <a:srgbClr val="E8837A"/>
+          </a:solidFill>
+          <a:ln w="12700">
+            <a:solidFill>
+              <a:srgbClr val="E8837A"/>
+            </a:solidFill>
+            <a:prstDash val="solid"/>
+          </a:ln>
+        </p:spPr>
+      </p:sp>
+      <p:sp>
+        <p:nvSpPr>
+          <p:cNvPr id="8" name="Shape 5"/>
+          <p:cNvSpPr/>
+          <p:nvPr/>
+        </p:nvSpPr>
+        <p:spPr>
+          <a:xfrm>
+            <a:off x="8970264" y="182880"/>
+            <a:ext cx="91440" cy="91440"/>
+          </a:xfrm>
+          <a:prstGeom prst="ellipse">
+            <a:avLst/>
+          </a:prstGeom>
+          <a:solidFill>
+            <a:srgbClr val="F4A825"/>
+          </a:solidFill>
+          <a:ln w="12700">
+            <a:solidFill>
+              <a:srgbClr val="F4A825"/>
+            </a:solidFill>
+            <a:prstDash val="solid"/>
+          </a:ln>
+        </p:spPr>
+      </p:sp>
+      <p:sp>
+        <p:nvSpPr>
+          <p:cNvPr id="9" name="Shape 6"/>
+          <p:cNvSpPr/>
+          <p:nvPr/>
+        </p:nvSpPr>
+        <p:spPr>
+          <a:xfrm>
+            <a:off x="9116568" y="182880"/>
+            <a:ext cx="91440" cy="91440"/>
+          </a:xfrm>
+          <a:prstGeom prst="ellipse">
+            <a:avLst/>
+          </a:prstGeom>
+          <a:solidFill>
+            <a:srgbClr val="2E7D5B"/>
+          </a:solidFill>
+          <a:ln w="12700">
+            <a:solidFill>
+              <a:srgbClr val="2E7D5B"/>
+            </a:solidFill>
+            <a:prstDash val="solid"/>
+          </a:ln>
+        </p:spPr>
+      </p:sp>
+      <p:sp>
+        <p:nvSpPr>
+          <p:cNvPr id="10" name="Text 7"/>
+          <p:cNvSpPr/>
+          <p:nvPr/>
+        </p:nvSpPr>
+        <p:spPr>
+          <a:xfrm>
+            <a:off x="9299448" y="109728"/>
+            <a:ext cx="2286000" cy="237744"/>
+          </a:xfrm>
+          <a:prstGeom prst="rect">
+            <a:avLst/>
+          </a:prstGeom>
+          <a:noFill/>
+          <a:ln/>
+        </p:spPr>
+        <p:txBody>
+          <a:bodyPr wrap="square" lIns="0" tIns="0" rIns="0" bIns="0" rtlCol="0" anchor="ctr"/>
+          <a:lstStyle/>
+          <a:p>
+            <a:pPr indent="0" marL="0">
+              <a:buNone/>
+            </a:pPr>
+            <a:r>
+              <a:rPr lang="en-US" sz="800" b="1" spc="100" kern="0" dirty="0">
+                <a:solidFill>
+                  <a:srgbClr val="9FB2C2"/>
+                </a:solidFill>
+                <a:latin typeface="Inter" pitchFamily="34" charset="0"/>
+                <a:ea typeface="Inter" pitchFamily="34" charset="-122"/>
+                <a:cs typeface="Inter" pitchFamily="34" charset="-120"/>
+              </a:rPr>
+              <a:t>MS. RIVERA'S SCREEN · SO FAR</a:t>
+            </a:r>
+            <a:endParaRPr lang="en-US" sz="800" dirty="0"/>
+          </a:p>
+        </p:txBody>
+      </p:sp>
+      <p:sp>
+        <p:nvSpPr>
+          <p:cNvPr id="11" name="Text 8"/>
+          <p:cNvSpPr/>
+          <p:nvPr/>
+        </p:nvSpPr>
+        <p:spPr>
+          <a:xfrm>
+            <a:off x="8860536" y="365760"/>
+            <a:ext cx="2670048" cy="566928"/>
+          </a:xfrm>
+          <a:prstGeom prst="rect">
+            <a:avLst/>
+          </a:prstGeom>
+          <a:noFill/>
+          <a:ln/>
+        </p:spPr>
+        <p:txBody>
+          <a:bodyPr wrap="square" lIns="0" tIns="0" rIns="0" bIns="0" rtlCol="0" anchor="ctr"/>
+          <a:lstStyle/>
+          <a:p>
+            <a:pPr indent="0" marL="0">
+              <a:buNone/>
+            </a:pPr>
+            <a:r>
+              <a:rPr lang="en-US" sz="1000" dirty="0">
+                <a:solidFill>
+                  <a:srgbClr val="C9D4DE"/>
+                </a:solidFill>
+                <a:latin typeface="Inter" pitchFamily="34" charset="0"/>
+                <a:ea typeface="Inter" pitchFamily="34" charset="-122"/>
+                <a:cs typeface="Inter" pitchFamily="34" charset="-120"/>
+              </a:rPr>
+              <a:t>Her commitments: label, disclose with a soft landing, never score-only.</a:t>
+            </a:r>
+            <a:endParaRPr lang="en-US" sz="1000" dirty="0"/>
+          </a:p>
+        </p:txBody>
+      </p:sp>
+      <p:sp>
+        <p:nvSpPr>
+          <p:cNvPr id="12" name="Text 9"/>
           <p:cNvSpPr/>
           <p:nvPr/>
         </p:nvSpPr>
@@ -12451,7 +15970,7 @@
       </p:sp>
       <p:sp>
         <p:nvSpPr>
-          <p:cNvPr id="6" name="Shape 3"/>
+          <p:cNvPr id="13" name="Shape 10"/>
           <p:cNvSpPr/>
           <p:nvPr/>
         </p:nvSpPr>
@@ -12476,7 +15995,7 @@
       </p:sp>
       <p:sp>
         <p:nvSpPr>
-          <p:cNvPr id="7" name="Text 4"/>
+          <p:cNvPr id="14" name="Text 11"/>
           <p:cNvSpPr/>
           <p:nvPr/>
         </p:nvSpPr>
@@ -12515,7 +16034,7 @@
       </p:sp>
       <p:sp>
         <p:nvSpPr>
-          <p:cNvPr id="8" name="Text 5"/>
+          <p:cNvPr id="15" name="Text 12"/>
           <p:cNvSpPr/>
           <p:nvPr/>
         </p:nvSpPr>
@@ -12554,7 +16073,7 @@
       </p:sp>
       <p:sp>
         <p:nvSpPr>
-          <p:cNvPr id="9" name="Shape 6"/>
+          <p:cNvPr id="16" name="Shape 13"/>
           <p:cNvSpPr/>
           <p:nvPr/>
         </p:nvSpPr>
@@ -12579,7 +16098,7 @@
       </p:sp>
       <p:sp>
         <p:nvSpPr>
-          <p:cNvPr id="10" name="Text 7"/>
+          <p:cNvPr id="17" name="Text 14"/>
           <p:cNvSpPr/>
           <p:nvPr/>
         </p:nvSpPr>
@@ -12618,7 +16137,7 @@
       </p:sp>
       <p:sp>
         <p:nvSpPr>
-          <p:cNvPr id="11" name="Text 8"/>
+          <p:cNvPr id="18" name="Text 15"/>
           <p:cNvSpPr/>
           <p:nvPr/>
         </p:nvSpPr>
@@ -12657,7 +16176,7 @@
       </p:sp>
       <p:sp>
         <p:nvSpPr>
-          <p:cNvPr id="12" name="Shape 9"/>
+          <p:cNvPr id="19" name="Shape 16"/>
           <p:cNvSpPr/>
           <p:nvPr/>
         </p:nvSpPr>
@@ -12682,7 +16201,7 @@
       </p:sp>
       <p:sp>
         <p:nvSpPr>
-          <p:cNvPr id="13" name="Text 10"/>
+          <p:cNvPr id="20" name="Text 17"/>
           <p:cNvSpPr/>
           <p:nvPr/>
         </p:nvSpPr>
@@ -12721,7 +16240,7 @@
       </p:sp>
       <p:sp>
         <p:nvSpPr>
-          <p:cNvPr id="14" name="Text 11"/>
+          <p:cNvPr id="21" name="Text 18"/>
           <p:cNvSpPr/>
           <p:nvPr/>
         </p:nvSpPr>
@@ -12760,7 +16279,7 @@
       </p:sp>
       <p:sp>
         <p:nvSpPr>
-          <p:cNvPr id="15" name="Text 12"/>
+          <p:cNvPr id="22" name="Text 19"/>
           <p:cNvSpPr/>
           <p:nvPr/>
         </p:nvSpPr>
@@ -12947,7 +16466,214 @@
       </p:sp>
       <p:sp>
         <p:nvSpPr>
-          <p:cNvPr id="5" name="Text 2"/>
+          <p:cNvPr id="5" name="Shape 2"/>
+          <p:cNvSpPr/>
+          <p:nvPr/>
+        </p:nvSpPr>
+        <p:spPr>
+          <a:xfrm>
+            <a:off x="8732520" y="109728"/>
+            <a:ext cx="2926080" cy="896112"/>
+          </a:xfrm>
+          <a:prstGeom prst="roundRect">
+            <a:avLst>
+              <a:gd name="adj" fmla="val 7143"/>
+            </a:avLst>
+          </a:prstGeom>
+          <a:solidFill>
+            <a:srgbClr val="F7F5F0"/>
+          </a:solidFill>
+          <a:ln w="12700">
+            <a:solidFill>
+              <a:srgbClr val="DCE3EA"/>
+            </a:solidFill>
+            <a:prstDash val="solid"/>
+          </a:ln>
+        </p:spPr>
+      </p:sp>
+      <p:sp>
+        <p:nvSpPr>
+          <p:cNvPr id="6" name="Shape 3"/>
+          <p:cNvSpPr/>
+          <p:nvPr/>
+        </p:nvSpPr>
+        <p:spPr>
+          <a:xfrm>
+            <a:off x="8732520" y="109728"/>
+            <a:ext cx="2926080" cy="237744"/>
+          </a:xfrm>
+          <a:prstGeom prst="roundRect">
+            <a:avLst>
+              <a:gd name="adj" fmla="val 26923"/>
+            </a:avLst>
+          </a:prstGeom>
+          <a:solidFill>
+            <a:srgbClr val="0D1E2E"/>
+          </a:solidFill>
+          <a:ln w="12700">
+            <a:solidFill>
+              <a:srgbClr val="0D1E2E"/>
+            </a:solidFill>
+            <a:prstDash val="solid"/>
+          </a:ln>
+        </p:spPr>
+      </p:sp>
+      <p:sp>
+        <p:nvSpPr>
+          <p:cNvPr id="7" name="Shape 4"/>
+          <p:cNvSpPr/>
+          <p:nvPr/>
+        </p:nvSpPr>
+        <p:spPr>
+          <a:xfrm>
+            <a:off x="8823960" y="182880"/>
+            <a:ext cx="91440" cy="91440"/>
+          </a:xfrm>
+          <a:prstGeom prst="ellipse">
+            <a:avLst/>
+          </a:prstGeom>
+          <a:solidFill>
+            <a:srgbClr val="E8837A"/>
+          </a:solidFill>
+          <a:ln w="12700">
+            <a:solidFill>
+              <a:srgbClr val="E8837A"/>
+            </a:solidFill>
+            <a:prstDash val="solid"/>
+          </a:ln>
+        </p:spPr>
+      </p:sp>
+      <p:sp>
+        <p:nvSpPr>
+          <p:cNvPr id="8" name="Shape 5"/>
+          <p:cNvSpPr/>
+          <p:nvPr/>
+        </p:nvSpPr>
+        <p:spPr>
+          <a:xfrm>
+            <a:off x="8970264" y="182880"/>
+            <a:ext cx="91440" cy="91440"/>
+          </a:xfrm>
+          <a:prstGeom prst="ellipse">
+            <a:avLst/>
+          </a:prstGeom>
+          <a:solidFill>
+            <a:srgbClr val="F4A825"/>
+          </a:solidFill>
+          <a:ln w="12700">
+            <a:solidFill>
+              <a:srgbClr val="F4A825"/>
+            </a:solidFill>
+            <a:prstDash val="solid"/>
+          </a:ln>
+        </p:spPr>
+      </p:sp>
+      <p:sp>
+        <p:nvSpPr>
+          <p:cNvPr id="9" name="Shape 6"/>
+          <p:cNvSpPr/>
+          <p:nvPr/>
+        </p:nvSpPr>
+        <p:spPr>
+          <a:xfrm>
+            <a:off x="9116568" y="182880"/>
+            <a:ext cx="91440" cy="91440"/>
+          </a:xfrm>
+          <a:prstGeom prst="ellipse">
+            <a:avLst/>
+          </a:prstGeom>
+          <a:solidFill>
+            <a:srgbClr val="2E7D5B"/>
+          </a:solidFill>
+          <a:ln w="12700">
+            <a:solidFill>
+              <a:srgbClr val="2E7D5B"/>
+            </a:solidFill>
+            <a:prstDash val="solid"/>
+          </a:ln>
+        </p:spPr>
+      </p:sp>
+      <p:sp>
+        <p:nvSpPr>
+          <p:cNvPr id="10" name="Text 7"/>
+          <p:cNvSpPr/>
+          <p:nvPr/>
+        </p:nvSpPr>
+        <p:spPr>
+          <a:xfrm>
+            <a:off x="9299448" y="109728"/>
+            <a:ext cx="2286000" cy="237744"/>
+          </a:xfrm>
+          <a:prstGeom prst="rect">
+            <a:avLst/>
+          </a:prstGeom>
+          <a:noFill/>
+          <a:ln/>
+        </p:spPr>
+        <p:txBody>
+          <a:bodyPr wrap="square" lIns="0" tIns="0" rIns="0" bIns="0" rtlCol="0" anchor="ctr"/>
+          <a:lstStyle/>
+          <a:p>
+            <a:pPr indent="0" marL="0">
+              <a:buNone/>
+            </a:pPr>
+            <a:r>
+              <a:rPr lang="en-US" sz="800" b="1" spc="100" kern="0" dirty="0">
+                <a:solidFill>
+                  <a:srgbClr val="9FB2C2"/>
+                </a:solidFill>
+                <a:latin typeface="Inter" pitchFamily="34" charset="0"/>
+                <a:ea typeface="Inter" pitchFamily="34" charset="-122"/>
+                <a:cs typeface="Inter" pitchFamily="34" charset="-120"/>
+              </a:rPr>
+              <a:t>MS. RIVERA'S SCREEN · SO FAR</a:t>
+            </a:r>
+            <a:endParaRPr lang="en-US" sz="800" dirty="0"/>
+          </a:p>
+        </p:txBody>
+      </p:sp>
+      <p:sp>
+        <p:nvSpPr>
+          <p:cNvPr id="11" name="Text 8"/>
+          <p:cNvSpPr/>
+          <p:nvPr/>
+        </p:nvSpPr>
+        <p:spPr>
+          <a:xfrm>
+            <a:off x="8860536" y="365760"/>
+            <a:ext cx="2670048" cy="566928"/>
+          </a:xfrm>
+          <a:prstGeom prst="rect">
+            <a:avLst/>
+          </a:prstGeom>
+          <a:noFill/>
+          <a:ln/>
+        </p:spPr>
+        <p:txBody>
+          <a:bodyPr wrap="square" lIns="0" tIns="0" rIns="0" bIns="0" rtlCol="0" anchor="ctr"/>
+          <a:lstStyle/>
+          <a:p>
+            <a:pPr indent="0" marL="0">
+              <a:buNone/>
+            </a:pPr>
+            <a:r>
+              <a:rPr lang="en-US" sz="1000" dirty="0">
+                <a:solidFill>
+                  <a:srgbClr val="1B1F24"/>
+                </a:solidFill>
+                <a:latin typeface="Inter" pitchFamily="34" charset="0"/>
+                <a:ea typeface="Inter" pitchFamily="34" charset="-122"/>
+                <a:cs typeface="Inter" pitchFamily="34" charset="-120"/>
+              </a:rPr>
+              <a:t>Her month: box swap, gray-area calibration, a class-written agreement.</a:t>
+            </a:r>
+            <a:endParaRPr lang="en-US" sz="1000" dirty="0"/>
+          </a:p>
+        </p:txBody>
+      </p:sp>
+      <p:sp>
+        <p:nvSpPr>
+          <p:cNvPr id="12" name="Text 9"/>
           <p:cNvSpPr/>
           <p:nvPr/>
         </p:nvSpPr>
@@ -12986,7 +16712,7 @@
       </p:sp>
       <p:sp>
         <p:nvSpPr>
-          <p:cNvPr id="6" name="Text 3"/>
+          <p:cNvPr id="13" name="Text 10"/>
           <p:cNvSpPr/>
           <p:nvPr/>
         </p:nvSpPr>
@@ -13025,7 +16751,7 @@
       </p:sp>
       <p:sp>
         <p:nvSpPr>
-          <p:cNvPr id="7" name="Text 4"/>
+          <p:cNvPr id="14" name="Text 11"/>
           <p:cNvSpPr/>
           <p:nvPr/>
         </p:nvSpPr>
@@ -13064,7 +16790,7 @@
       </p:sp>
       <p:sp>
         <p:nvSpPr>
-          <p:cNvPr id="8" name="Text 5"/>
+          <p:cNvPr id="15" name="Text 12"/>
           <p:cNvSpPr/>
           <p:nvPr/>
         </p:nvSpPr>
@@ -13103,7 +16829,7 @@
       </p:sp>
       <p:sp>
         <p:nvSpPr>
-          <p:cNvPr id="9" name="Text 6"/>
+          <p:cNvPr id="16" name="Text 13"/>
           <p:cNvSpPr/>
           <p:nvPr/>
         </p:nvSpPr>
@@ -13142,7 +16868,7 @@
       </p:sp>
       <p:sp>
         <p:nvSpPr>
-          <p:cNvPr id="10" name="Text 7"/>
+          <p:cNvPr id="17" name="Text 14"/>
           <p:cNvSpPr/>
           <p:nvPr/>
         </p:nvSpPr>
@@ -13181,7 +16907,7 @@
       </p:sp>
       <p:sp>
         <p:nvSpPr>
-          <p:cNvPr id="11" name="Text 8"/>
+          <p:cNvPr id="18" name="Text 15"/>
           <p:cNvSpPr/>
           <p:nvPr/>
         </p:nvSpPr>
@@ -13220,7 +16946,7 @@
       </p:sp>
       <p:sp>
         <p:nvSpPr>
-          <p:cNvPr id="12" name="Text 9"/>
+          <p:cNvPr id="19" name="Text 16"/>
           <p:cNvSpPr/>
           <p:nvPr/>
         </p:nvSpPr>
@@ -13259,7 +16985,7 @@
       </p:sp>
       <p:sp>
         <p:nvSpPr>
-          <p:cNvPr id="13" name="Text 10"/>
+          <p:cNvPr id="20" name="Text 17"/>
           <p:cNvSpPr/>
           <p:nvPr/>
         </p:nvSpPr>
@@ -13298,7 +17024,7 @@
       </p:sp>
       <p:sp>
         <p:nvSpPr>
-          <p:cNvPr id="14" name="Text 11"/>
+          <p:cNvPr id="21" name="Text 18"/>
           <p:cNvSpPr/>
           <p:nvPr/>
         </p:nvSpPr>
@@ -13337,7 +17063,7 @@
       </p:sp>
       <p:sp>
         <p:nvSpPr>
-          <p:cNvPr id="15" name="Text 12"/>
+          <p:cNvPr id="22" name="Text 19"/>
           <p:cNvSpPr/>
           <p:nvPr/>
         </p:nvSpPr>
@@ -13524,7 +17250,214 @@
       </p:sp>
       <p:sp>
         <p:nvSpPr>
-          <p:cNvPr id="5" name="Text 2"/>
+          <p:cNvPr id="5" name="Shape 2"/>
+          <p:cNvSpPr/>
+          <p:nvPr/>
+        </p:nvSpPr>
+        <p:spPr>
+          <a:xfrm>
+            <a:off x="8732520" y="109728"/>
+            <a:ext cx="2926080" cy="896112"/>
+          </a:xfrm>
+          <a:prstGeom prst="roundRect">
+            <a:avLst>
+              <a:gd name="adj" fmla="val 7143"/>
+            </a:avLst>
+          </a:prstGeom>
+          <a:solidFill>
+            <a:srgbClr val="F7F5F0"/>
+          </a:solidFill>
+          <a:ln w="12700">
+            <a:solidFill>
+              <a:srgbClr val="DCE3EA"/>
+            </a:solidFill>
+            <a:prstDash val="solid"/>
+          </a:ln>
+        </p:spPr>
+      </p:sp>
+      <p:sp>
+        <p:nvSpPr>
+          <p:cNvPr id="6" name="Shape 3"/>
+          <p:cNvSpPr/>
+          <p:nvPr/>
+        </p:nvSpPr>
+        <p:spPr>
+          <a:xfrm>
+            <a:off x="8732520" y="109728"/>
+            <a:ext cx="2926080" cy="237744"/>
+          </a:xfrm>
+          <a:prstGeom prst="roundRect">
+            <a:avLst>
+              <a:gd name="adj" fmla="val 26923"/>
+            </a:avLst>
+          </a:prstGeom>
+          <a:solidFill>
+            <a:srgbClr val="0D1E2E"/>
+          </a:solidFill>
+          <a:ln w="12700">
+            <a:solidFill>
+              <a:srgbClr val="0D1E2E"/>
+            </a:solidFill>
+            <a:prstDash val="solid"/>
+          </a:ln>
+        </p:spPr>
+      </p:sp>
+      <p:sp>
+        <p:nvSpPr>
+          <p:cNvPr id="7" name="Shape 4"/>
+          <p:cNvSpPr/>
+          <p:nvPr/>
+        </p:nvSpPr>
+        <p:spPr>
+          <a:xfrm>
+            <a:off x="8823960" y="182880"/>
+            <a:ext cx="91440" cy="91440"/>
+          </a:xfrm>
+          <a:prstGeom prst="ellipse">
+            <a:avLst/>
+          </a:prstGeom>
+          <a:solidFill>
+            <a:srgbClr val="E8837A"/>
+          </a:solidFill>
+          <a:ln w="12700">
+            <a:solidFill>
+              <a:srgbClr val="E8837A"/>
+            </a:solidFill>
+            <a:prstDash val="solid"/>
+          </a:ln>
+        </p:spPr>
+      </p:sp>
+      <p:sp>
+        <p:nvSpPr>
+          <p:cNvPr id="8" name="Shape 5"/>
+          <p:cNvSpPr/>
+          <p:nvPr/>
+        </p:nvSpPr>
+        <p:spPr>
+          <a:xfrm>
+            <a:off x="8970264" y="182880"/>
+            <a:ext cx="91440" cy="91440"/>
+          </a:xfrm>
+          <a:prstGeom prst="ellipse">
+            <a:avLst/>
+          </a:prstGeom>
+          <a:solidFill>
+            <a:srgbClr val="F4A825"/>
+          </a:solidFill>
+          <a:ln w="12700">
+            <a:solidFill>
+              <a:srgbClr val="F4A825"/>
+            </a:solidFill>
+            <a:prstDash val="solid"/>
+          </a:ln>
+        </p:spPr>
+      </p:sp>
+      <p:sp>
+        <p:nvSpPr>
+          <p:cNvPr id="9" name="Shape 6"/>
+          <p:cNvSpPr/>
+          <p:nvPr/>
+        </p:nvSpPr>
+        <p:spPr>
+          <a:xfrm>
+            <a:off x="9116568" y="182880"/>
+            <a:ext cx="91440" cy="91440"/>
+          </a:xfrm>
+          <a:prstGeom prst="ellipse">
+            <a:avLst/>
+          </a:prstGeom>
+          <a:solidFill>
+            <a:srgbClr val="2E7D5B"/>
+          </a:solidFill>
+          <a:ln w="12700">
+            <a:solidFill>
+              <a:srgbClr val="2E7D5B"/>
+            </a:solidFill>
+            <a:prstDash val="solid"/>
+          </a:ln>
+        </p:spPr>
+      </p:sp>
+      <p:sp>
+        <p:nvSpPr>
+          <p:cNvPr id="10" name="Text 7"/>
+          <p:cNvSpPr/>
+          <p:nvPr/>
+        </p:nvSpPr>
+        <p:spPr>
+          <a:xfrm>
+            <a:off x="9299448" y="109728"/>
+            <a:ext cx="2286000" cy="237744"/>
+          </a:xfrm>
+          <a:prstGeom prst="rect">
+            <a:avLst/>
+          </a:prstGeom>
+          <a:noFill/>
+          <a:ln/>
+        </p:spPr>
+        <p:txBody>
+          <a:bodyPr wrap="square" lIns="0" tIns="0" rIns="0" bIns="0" rtlCol="0" anchor="ctr"/>
+          <a:lstStyle/>
+          <a:p>
+            <a:pPr indent="0" marL="0">
+              <a:buNone/>
+            </a:pPr>
+            <a:r>
+              <a:rPr lang="en-US" sz="800" b="1" spc="100" kern="0" dirty="0">
+                <a:solidFill>
+                  <a:srgbClr val="9FB2C2"/>
+                </a:solidFill>
+                <a:latin typeface="Inter" pitchFamily="34" charset="0"/>
+                <a:ea typeface="Inter" pitchFamily="34" charset="-122"/>
+                <a:cs typeface="Inter" pitchFamily="34" charset="-120"/>
+              </a:rPr>
+              <a:t>MS. RIVERA'S SCREEN · SO FAR</a:t>
+            </a:r>
+            <a:endParaRPr lang="en-US" sz="800" dirty="0"/>
+          </a:p>
+        </p:txBody>
+      </p:sp>
+      <p:sp>
+        <p:nvSpPr>
+          <p:cNvPr id="11" name="Text 8"/>
+          <p:cNvSpPr/>
+          <p:nvPr/>
+        </p:nvSpPr>
+        <p:spPr>
+          <a:xfrm>
+            <a:off x="8860536" y="365760"/>
+            <a:ext cx="2670048" cy="566928"/>
+          </a:xfrm>
+          <a:prstGeom prst="rect">
+            <a:avLst/>
+          </a:prstGeom>
+          <a:noFill/>
+          <a:ln/>
+        </p:spPr>
+        <p:txBody>
+          <a:bodyPr wrap="square" lIns="0" tIns="0" rIns="0" bIns="0" rtlCol="0" anchor="ctr"/>
+          <a:lstStyle/>
+          <a:p>
+            <a:pPr indent="0" marL="0">
+              <a:buNone/>
+            </a:pPr>
+            <a:r>
+              <a:rPr lang="en-US" sz="1000" dirty="0">
+                <a:solidFill>
+                  <a:srgbClr val="1B1F24"/>
+                </a:solidFill>
+                <a:latin typeface="Inter" pitchFamily="34" charset="0"/>
+                <a:ea typeface="Inter" pitchFamily="34" charset="-122"/>
+                <a:cs typeface="Inter" pitchFamily="34" charset="-120"/>
+              </a:rPr>
+              <a:t>Her 48 hours: box out, norm taught once, sentences filed.</a:t>
+            </a:r>
+            <a:endParaRPr lang="en-US" sz="1000" dirty="0"/>
+          </a:p>
+        </p:txBody>
+      </p:sp>
+      <p:sp>
+        <p:nvSpPr>
+          <p:cNvPr id="12" name="Text 9"/>
           <p:cNvSpPr/>
           <p:nvPr/>
         </p:nvSpPr>
@@ -13563,7 +17496,7 @@
       </p:sp>
       <p:sp>
         <p:nvSpPr>
-          <p:cNvPr id="6" name="Text 3"/>
+          <p:cNvPr id="13" name="Text 10"/>
           <p:cNvSpPr/>
           <p:nvPr/>
         </p:nvSpPr>
@@ -13602,7 +17535,7 @@
       </p:sp>
       <p:sp>
         <p:nvSpPr>
-          <p:cNvPr id="7" name="Shape 4"/>
+          <p:cNvPr id="14" name="Shape 11"/>
           <p:cNvSpPr/>
           <p:nvPr/>
         </p:nvSpPr>
@@ -13629,7 +17562,7 @@
       </p:sp>
       <p:sp>
         <p:nvSpPr>
-          <p:cNvPr id="8" name="Text 5"/>
+          <p:cNvPr id="15" name="Text 12"/>
           <p:cNvSpPr/>
           <p:nvPr/>
         </p:nvSpPr>
@@ -13668,7 +17601,7 @@
       </p:sp>
       <p:sp>
         <p:nvSpPr>
-          <p:cNvPr id="9" name="Text 6"/>
+          <p:cNvPr id="16" name="Text 13"/>
           <p:cNvSpPr/>
           <p:nvPr/>
         </p:nvSpPr>
@@ -13707,7 +17640,7 @@
       </p:sp>
       <p:sp>
         <p:nvSpPr>
-          <p:cNvPr id="10" name="Text 7"/>
+          <p:cNvPr id="17" name="Text 14"/>
           <p:cNvSpPr/>
           <p:nvPr/>
         </p:nvSpPr>
@@ -13746,7 +17679,7 @@
       </p:sp>
       <p:sp>
         <p:nvSpPr>
-          <p:cNvPr id="11" name="Text 8"/>
+          <p:cNvPr id="18" name="Text 15"/>
           <p:cNvSpPr/>
           <p:nvPr/>
         </p:nvSpPr>
@@ -13785,7 +17718,7 @@
       </p:sp>
       <p:sp>
         <p:nvSpPr>
-          <p:cNvPr id="12" name="Shape 9"/>
+          <p:cNvPr id="19" name="Shape 16"/>
           <p:cNvSpPr/>
           <p:nvPr/>
         </p:nvSpPr>
@@ -13812,7 +17745,7 @@
       </p:sp>
       <p:sp>
         <p:nvSpPr>
-          <p:cNvPr id="13" name="Text 10"/>
+          <p:cNvPr id="20" name="Text 17"/>
           <p:cNvSpPr/>
           <p:nvPr/>
         </p:nvSpPr>
@@ -13851,7 +17784,7 @@
       </p:sp>
       <p:sp>
         <p:nvSpPr>
-          <p:cNvPr id="14" name="Text 11"/>
+          <p:cNvPr id="21" name="Text 18"/>
           <p:cNvSpPr/>
           <p:nvPr/>
         </p:nvSpPr>
@@ -13890,7 +17823,7 @@
       </p:sp>
       <p:sp>
         <p:nvSpPr>
-          <p:cNvPr id="15" name="Text 12"/>
+          <p:cNvPr id="22" name="Text 19"/>
           <p:cNvSpPr/>
           <p:nvPr/>
         </p:nvSpPr>
@@ -13929,7 +17862,7 @@
       </p:sp>
       <p:sp>
         <p:nvSpPr>
-          <p:cNvPr id="16" name="Text 13"/>
+          <p:cNvPr id="23" name="Text 20"/>
           <p:cNvSpPr/>
           <p:nvPr/>
         </p:nvSpPr>
@@ -13968,7 +17901,7 @@
       </p:sp>
       <p:sp>
         <p:nvSpPr>
-          <p:cNvPr id="17" name="Shape 14"/>
+          <p:cNvPr id="24" name="Shape 21"/>
           <p:cNvSpPr/>
           <p:nvPr/>
         </p:nvSpPr>
@@ -13995,7 +17928,7 @@
       </p:sp>
       <p:sp>
         <p:nvSpPr>
-          <p:cNvPr id="18" name="Text 15"/>
+          <p:cNvPr id="25" name="Text 22"/>
           <p:cNvSpPr/>
           <p:nvPr/>
         </p:nvSpPr>
@@ -14034,7 +17967,7 @@
       </p:sp>
       <p:sp>
         <p:nvSpPr>
-          <p:cNvPr id="19" name="Text 16"/>
+          <p:cNvPr id="26" name="Text 23"/>
           <p:cNvSpPr/>
           <p:nvPr/>
         </p:nvSpPr>
@@ -14073,7 +18006,7 @@
       </p:sp>
       <p:sp>
         <p:nvSpPr>
-          <p:cNvPr id="20" name="Text 17"/>
+          <p:cNvPr id="27" name="Text 24"/>
           <p:cNvSpPr/>
           <p:nvPr/>
         </p:nvSpPr>
@@ -14112,7 +18045,7 @@
       </p:sp>
       <p:sp>
         <p:nvSpPr>
-          <p:cNvPr id="21" name="Text 18"/>
+          <p:cNvPr id="28" name="Text 25"/>
           <p:cNvSpPr/>
           <p:nvPr/>
         </p:nvSpPr>
@@ -14299,7 +18232,214 @@
       </p:sp>
       <p:sp>
         <p:nvSpPr>
-          <p:cNvPr id="5" name="Text 2"/>
+          <p:cNvPr id="5" name="Shape 2"/>
+          <p:cNvSpPr/>
+          <p:nvPr/>
+        </p:nvSpPr>
+        <p:spPr>
+          <a:xfrm>
+            <a:off x="8732520" y="109728"/>
+            <a:ext cx="2926080" cy="896112"/>
+          </a:xfrm>
+          <a:prstGeom prst="roundRect">
+            <a:avLst>
+              <a:gd name="adj" fmla="val 7143"/>
+            </a:avLst>
+          </a:prstGeom>
+          <a:solidFill>
+            <a:srgbClr val="F7F5F0"/>
+          </a:solidFill>
+          <a:ln w="12700">
+            <a:solidFill>
+              <a:srgbClr val="DCE3EA"/>
+            </a:solidFill>
+            <a:prstDash val="solid"/>
+          </a:ln>
+        </p:spPr>
+      </p:sp>
+      <p:sp>
+        <p:nvSpPr>
+          <p:cNvPr id="6" name="Shape 3"/>
+          <p:cNvSpPr/>
+          <p:nvPr/>
+        </p:nvSpPr>
+        <p:spPr>
+          <a:xfrm>
+            <a:off x="8732520" y="109728"/>
+            <a:ext cx="2926080" cy="237744"/>
+          </a:xfrm>
+          <a:prstGeom prst="roundRect">
+            <a:avLst>
+              <a:gd name="adj" fmla="val 26923"/>
+            </a:avLst>
+          </a:prstGeom>
+          <a:solidFill>
+            <a:srgbClr val="0D1E2E"/>
+          </a:solidFill>
+          <a:ln w="12700">
+            <a:solidFill>
+              <a:srgbClr val="0D1E2E"/>
+            </a:solidFill>
+            <a:prstDash val="solid"/>
+          </a:ln>
+        </p:spPr>
+      </p:sp>
+      <p:sp>
+        <p:nvSpPr>
+          <p:cNvPr id="7" name="Shape 4"/>
+          <p:cNvSpPr/>
+          <p:nvPr/>
+        </p:nvSpPr>
+        <p:spPr>
+          <a:xfrm>
+            <a:off x="8823960" y="182880"/>
+            <a:ext cx="91440" cy="91440"/>
+          </a:xfrm>
+          <a:prstGeom prst="ellipse">
+            <a:avLst/>
+          </a:prstGeom>
+          <a:solidFill>
+            <a:srgbClr val="E8837A"/>
+          </a:solidFill>
+          <a:ln w="12700">
+            <a:solidFill>
+              <a:srgbClr val="E8837A"/>
+            </a:solidFill>
+            <a:prstDash val="solid"/>
+          </a:ln>
+        </p:spPr>
+      </p:sp>
+      <p:sp>
+        <p:nvSpPr>
+          <p:cNvPr id="8" name="Shape 5"/>
+          <p:cNvSpPr/>
+          <p:nvPr/>
+        </p:nvSpPr>
+        <p:spPr>
+          <a:xfrm>
+            <a:off x="8970264" y="182880"/>
+            <a:ext cx="91440" cy="91440"/>
+          </a:xfrm>
+          <a:prstGeom prst="ellipse">
+            <a:avLst/>
+          </a:prstGeom>
+          <a:solidFill>
+            <a:srgbClr val="F4A825"/>
+          </a:solidFill>
+          <a:ln w="12700">
+            <a:solidFill>
+              <a:srgbClr val="F4A825"/>
+            </a:solidFill>
+            <a:prstDash val="solid"/>
+          </a:ln>
+        </p:spPr>
+      </p:sp>
+      <p:sp>
+        <p:nvSpPr>
+          <p:cNvPr id="9" name="Shape 6"/>
+          <p:cNvSpPr/>
+          <p:nvPr/>
+        </p:nvSpPr>
+        <p:spPr>
+          <a:xfrm>
+            <a:off x="9116568" y="182880"/>
+            <a:ext cx="91440" cy="91440"/>
+          </a:xfrm>
+          <a:prstGeom prst="ellipse">
+            <a:avLst/>
+          </a:prstGeom>
+          <a:solidFill>
+            <a:srgbClr val="2E7D5B"/>
+          </a:solidFill>
+          <a:ln w="12700">
+            <a:solidFill>
+              <a:srgbClr val="2E7D5B"/>
+            </a:solidFill>
+            <a:prstDash val="solid"/>
+          </a:ln>
+        </p:spPr>
+      </p:sp>
+      <p:sp>
+        <p:nvSpPr>
+          <p:cNvPr id="10" name="Text 7"/>
+          <p:cNvSpPr/>
+          <p:nvPr/>
+        </p:nvSpPr>
+        <p:spPr>
+          <a:xfrm>
+            <a:off x="9299448" y="109728"/>
+            <a:ext cx="2286000" cy="237744"/>
+          </a:xfrm>
+          <a:prstGeom prst="rect">
+            <a:avLst/>
+          </a:prstGeom>
+          <a:noFill/>
+          <a:ln/>
+        </p:spPr>
+        <p:txBody>
+          <a:bodyPr wrap="square" lIns="0" tIns="0" rIns="0" bIns="0" rtlCol="0" anchor="ctr"/>
+          <a:lstStyle/>
+          <a:p>
+            <a:pPr indent="0" marL="0">
+              <a:buNone/>
+            </a:pPr>
+            <a:r>
+              <a:rPr lang="en-US" sz="800" b="1" spc="100" kern="0" dirty="0">
+                <a:solidFill>
+                  <a:srgbClr val="9FB2C2"/>
+                </a:solidFill>
+                <a:latin typeface="Inter" pitchFamily="34" charset="0"/>
+                <a:ea typeface="Inter" pitchFamily="34" charset="-122"/>
+                <a:cs typeface="Inter" pitchFamily="34" charset="-120"/>
+              </a:rPr>
+              <a:t>MS. RIVERA'S SCREEN · SO FAR</a:t>
+            </a:r>
+            <a:endParaRPr lang="en-US" sz="800" dirty="0"/>
+          </a:p>
+        </p:txBody>
+      </p:sp>
+      <p:sp>
+        <p:nvSpPr>
+          <p:cNvPr id="11" name="Text 8"/>
+          <p:cNvSpPr/>
+          <p:nvPr/>
+        </p:nvSpPr>
+        <p:spPr>
+          <a:xfrm>
+            <a:off x="8860536" y="365760"/>
+            <a:ext cx="2670048" cy="566928"/>
+          </a:xfrm>
+          <a:prstGeom prst="rect">
+            <a:avLst/>
+          </a:prstGeom>
+          <a:noFill/>
+          <a:ln/>
+        </p:spPr>
+        <p:txBody>
+          <a:bodyPr wrap="square" lIns="0" tIns="0" rIns="0" bIns="0" rtlCol="0" anchor="ctr"/>
+          <a:lstStyle/>
+          <a:p>
+            <a:pPr indent="0" marL="0">
+              <a:buNone/>
+            </a:pPr>
+            <a:r>
+              <a:rPr lang="en-US" sz="1000" dirty="0">
+                <a:solidFill>
+                  <a:srgbClr val="1B1F24"/>
+                </a:solidFill>
+                <a:latin typeface="Inter" pitchFamily="34" charset="0"/>
+                <a:ea typeface="Inter" pitchFamily="34" charset="-122"/>
+                <a:cs typeface="Inter" pitchFamily="34" charset="-120"/>
+              </a:rPr>
+              <a:t>Her exit ticket: lane, box line, one gray area for the staff.</a:t>
+            </a:r>
+            <a:endParaRPr lang="en-US" sz="1000" dirty="0"/>
+          </a:p>
+        </p:txBody>
+      </p:sp>
+      <p:sp>
+        <p:nvSpPr>
+          <p:cNvPr id="12" name="Text 9"/>
           <p:cNvSpPr/>
           <p:nvPr/>
         </p:nvSpPr>
@@ -14338,7 +18478,7 @@
       </p:sp>
       <p:sp>
         <p:nvSpPr>
-          <p:cNvPr id="6" name="Text 3"/>
+          <p:cNvPr id="13" name="Text 10"/>
           <p:cNvSpPr/>
           <p:nvPr/>
         </p:nvSpPr>
@@ -14377,7 +18517,7 @@
       </p:sp>
       <p:sp>
         <p:nvSpPr>
-          <p:cNvPr id="7" name="Text 4"/>
+          <p:cNvPr id="14" name="Text 11"/>
           <p:cNvSpPr/>
           <p:nvPr/>
         </p:nvSpPr>
@@ -14631,7 +18771,214 @@
       </p:sp>
       <p:sp>
         <p:nvSpPr>
-          <p:cNvPr id="5" name="Text 2"/>
+          <p:cNvPr id="5" name="Shape 2"/>
+          <p:cNvSpPr/>
+          <p:nvPr/>
+        </p:nvSpPr>
+        <p:spPr>
+          <a:xfrm>
+            <a:off x="8732520" y="109728"/>
+            <a:ext cx="2926080" cy="896112"/>
+          </a:xfrm>
+          <a:prstGeom prst="roundRect">
+            <a:avLst>
+              <a:gd name="adj" fmla="val 7143"/>
+            </a:avLst>
+          </a:prstGeom>
+          <a:solidFill>
+            <a:srgbClr val="F7F5F0"/>
+          </a:solidFill>
+          <a:ln w="12700">
+            <a:solidFill>
+              <a:srgbClr val="DCE3EA"/>
+            </a:solidFill>
+            <a:prstDash val="solid"/>
+          </a:ln>
+        </p:spPr>
+      </p:sp>
+      <p:sp>
+        <p:nvSpPr>
+          <p:cNvPr id="6" name="Shape 3"/>
+          <p:cNvSpPr/>
+          <p:nvPr/>
+        </p:nvSpPr>
+        <p:spPr>
+          <a:xfrm>
+            <a:off x="8732520" y="109728"/>
+            <a:ext cx="2926080" cy="237744"/>
+          </a:xfrm>
+          <a:prstGeom prst="roundRect">
+            <a:avLst>
+              <a:gd name="adj" fmla="val 26923"/>
+            </a:avLst>
+          </a:prstGeom>
+          <a:solidFill>
+            <a:srgbClr val="0D1E2E"/>
+          </a:solidFill>
+          <a:ln w="12700">
+            <a:solidFill>
+              <a:srgbClr val="0D1E2E"/>
+            </a:solidFill>
+            <a:prstDash val="solid"/>
+          </a:ln>
+        </p:spPr>
+      </p:sp>
+      <p:sp>
+        <p:nvSpPr>
+          <p:cNvPr id="7" name="Shape 4"/>
+          <p:cNvSpPr/>
+          <p:nvPr/>
+        </p:nvSpPr>
+        <p:spPr>
+          <a:xfrm>
+            <a:off x="8823960" y="182880"/>
+            <a:ext cx="91440" cy="91440"/>
+          </a:xfrm>
+          <a:prstGeom prst="ellipse">
+            <a:avLst/>
+          </a:prstGeom>
+          <a:solidFill>
+            <a:srgbClr val="E8837A"/>
+          </a:solidFill>
+          <a:ln w="12700">
+            <a:solidFill>
+              <a:srgbClr val="E8837A"/>
+            </a:solidFill>
+            <a:prstDash val="solid"/>
+          </a:ln>
+        </p:spPr>
+      </p:sp>
+      <p:sp>
+        <p:nvSpPr>
+          <p:cNvPr id="8" name="Shape 5"/>
+          <p:cNvSpPr/>
+          <p:nvPr/>
+        </p:nvSpPr>
+        <p:spPr>
+          <a:xfrm>
+            <a:off x="8970264" y="182880"/>
+            <a:ext cx="91440" cy="91440"/>
+          </a:xfrm>
+          <a:prstGeom prst="ellipse">
+            <a:avLst/>
+          </a:prstGeom>
+          <a:solidFill>
+            <a:srgbClr val="F4A825"/>
+          </a:solidFill>
+          <a:ln w="12700">
+            <a:solidFill>
+              <a:srgbClr val="F4A825"/>
+            </a:solidFill>
+            <a:prstDash val="solid"/>
+          </a:ln>
+        </p:spPr>
+      </p:sp>
+      <p:sp>
+        <p:nvSpPr>
+          <p:cNvPr id="9" name="Shape 6"/>
+          <p:cNvSpPr/>
+          <p:nvPr/>
+        </p:nvSpPr>
+        <p:spPr>
+          <a:xfrm>
+            <a:off x="9116568" y="182880"/>
+            <a:ext cx="91440" cy="91440"/>
+          </a:xfrm>
+          <a:prstGeom prst="ellipse">
+            <a:avLst/>
+          </a:prstGeom>
+          <a:solidFill>
+            <a:srgbClr val="2E7D5B"/>
+          </a:solidFill>
+          <a:ln w="12700">
+            <a:solidFill>
+              <a:srgbClr val="2E7D5B"/>
+            </a:solidFill>
+            <a:prstDash val="solid"/>
+          </a:ln>
+        </p:spPr>
+      </p:sp>
+      <p:sp>
+        <p:nvSpPr>
+          <p:cNvPr id="10" name="Text 7"/>
+          <p:cNvSpPr/>
+          <p:nvPr/>
+        </p:nvSpPr>
+        <p:spPr>
+          <a:xfrm>
+            <a:off x="9299448" y="109728"/>
+            <a:ext cx="2286000" cy="237744"/>
+          </a:xfrm>
+          <a:prstGeom prst="rect">
+            <a:avLst/>
+          </a:prstGeom>
+          <a:noFill/>
+          <a:ln/>
+        </p:spPr>
+        <p:txBody>
+          <a:bodyPr wrap="square" lIns="0" tIns="0" rIns="0" bIns="0" rtlCol="0" anchor="ctr"/>
+          <a:lstStyle/>
+          <a:p>
+            <a:pPr indent="0" marL="0">
+              <a:buNone/>
+            </a:pPr>
+            <a:r>
+              <a:rPr lang="en-US" sz="800" b="1" spc="100" kern="0" dirty="0">
+                <a:solidFill>
+                  <a:srgbClr val="9FB2C2"/>
+                </a:solidFill>
+                <a:latin typeface="Inter" pitchFamily="34" charset="0"/>
+                <a:ea typeface="Inter" pitchFamily="34" charset="-122"/>
+                <a:cs typeface="Inter" pitchFamily="34" charset="-120"/>
+              </a:rPr>
+              <a:t>MS. RIVERA'S SCREEN · SO FAR</a:t>
+            </a:r>
+            <a:endParaRPr lang="en-US" sz="800" dirty="0"/>
+          </a:p>
+        </p:txBody>
+      </p:sp>
+      <p:sp>
+        <p:nvSpPr>
+          <p:cNvPr id="11" name="Text 8"/>
+          <p:cNvSpPr/>
+          <p:nvPr/>
+        </p:nvSpPr>
+        <p:spPr>
+          <a:xfrm>
+            <a:off x="8860536" y="365760"/>
+            <a:ext cx="2670048" cy="566928"/>
+          </a:xfrm>
+          <a:prstGeom prst="rect">
+            <a:avLst/>
+          </a:prstGeom>
+          <a:noFill/>
+          <a:ln/>
+        </p:spPr>
+        <p:txBody>
+          <a:bodyPr wrap="square" lIns="0" tIns="0" rIns="0" bIns="0" rtlCol="0" anchor="ctr"/>
+          <a:lstStyle/>
+          <a:p>
+            <a:pPr indent="0" marL="0">
+              <a:buNone/>
+            </a:pPr>
+            <a:r>
+              <a:rPr lang="en-US" sz="1000" dirty="0">
+                <a:solidFill>
+                  <a:srgbClr val="1B1F24"/>
+                </a:solidFill>
+                <a:latin typeface="Inter" pitchFamily="34" charset="0"/>
+                <a:ea typeface="Inter" pitchFamily="34" charset="-122"/>
+                <a:cs typeface="Inter" pitchFamily="34" charset="-120"/>
+              </a:rPr>
+              <a:t>Her blood pressure, lowered: the cheating rate didn't move.</a:t>
+            </a:r>
+            <a:endParaRPr lang="en-US" sz="1000" dirty="0"/>
+          </a:p>
+        </p:txBody>
+      </p:sp>
+      <p:sp>
+        <p:nvSpPr>
+          <p:cNvPr id="12" name="Text 9"/>
           <p:cNvSpPr/>
           <p:nvPr/>
         </p:nvSpPr>
@@ -14670,30 +19017,30 @@
       </p:sp>
       <p:sp>
         <p:nvSpPr>
-          <p:cNvPr id="6" name="Text 3"/>
+          <p:cNvPr id="13" name="Text 10"/>
           <p:cNvSpPr/>
           <p:nvPr/>
         </p:nvSpPr>
         <p:spPr>
           <a:xfrm>
             <a:off x="548640" y="384048"/>
-            <a:ext cx="11091672" cy="777240"/>
-          </a:xfrm>
-          <a:prstGeom prst="rect">
-            <a:avLst/>
-          </a:prstGeom>
-          <a:noFill/>
-          <a:ln/>
-        </p:spPr>
-        <p:txBody>
-          <a:bodyPr wrap="square" lIns="0" tIns="0" rIns="0" bIns="0" rtlCol="0" anchor="ctr"/>
-          <a:lstStyle/>
-          <a:p>
-            <a:pPr indent="0" marL="0">
-              <a:buNone/>
-            </a:pPr>
-            <a:r>
-              <a:rPr lang="en-US" sz="3200" b="1" dirty="0">
+            <a:ext cx="7955280" cy="777240"/>
+          </a:xfrm>
+          <a:prstGeom prst="rect">
+            <a:avLst/>
+          </a:prstGeom>
+          <a:noFill/>
+          <a:ln/>
+        </p:spPr>
+        <p:txBody>
+          <a:bodyPr wrap="square" lIns="0" tIns="0" rIns="0" bIns="0" rtlCol="0" anchor="ctr"/>
+          <a:lstStyle/>
+          <a:p>
+            <a:pPr indent="0" marL="0">
+              <a:buNone/>
+            </a:pPr>
+            <a:r>
+              <a:rPr lang="en-US" sz="2800" b="1" dirty="0">
                 <a:solidFill>
                   <a:srgbClr val="13293D"/>
                 </a:solidFill>
@@ -14703,13 +19050,13 @@
               </a:rPr>
               <a:t>The number that should lower your blood pressure</a:t>
             </a:r>
-            <a:endParaRPr lang="en-US" sz="3200" dirty="0"/>
-          </a:p>
-        </p:txBody>
-      </p:sp>
-      <p:sp>
-        <p:nvSpPr>
-          <p:cNvPr id="7" name="Shape 4"/>
+            <a:endParaRPr lang="en-US" sz="2800" dirty="0"/>
+          </a:p>
+        </p:txBody>
+      </p:sp>
+      <p:sp>
+        <p:nvSpPr>
+          <p:cNvPr id="14" name="Shape 11"/>
           <p:cNvSpPr/>
           <p:nvPr/>
         </p:nvSpPr>
@@ -14736,7 +19083,7 @@
       </p:sp>
       <p:sp>
         <p:nvSpPr>
-          <p:cNvPr id="8" name="Text 5"/>
+          <p:cNvPr id="15" name="Text 12"/>
           <p:cNvSpPr/>
           <p:nvPr/>
         </p:nvSpPr>
@@ -14775,7 +19122,7 @@
       </p:sp>
       <p:sp>
         <p:nvSpPr>
-          <p:cNvPr id="9" name="Text 6"/>
+          <p:cNvPr id="16" name="Text 13"/>
           <p:cNvSpPr/>
           <p:nvPr/>
         </p:nvSpPr>
@@ -14814,7 +19161,7 @@
       </p:sp>
       <p:sp>
         <p:nvSpPr>
-          <p:cNvPr id="10" name="Text 7"/>
+          <p:cNvPr id="17" name="Text 14"/>
           <p:cNvSpPr/>
           <p:nvPr/>
         </p:nvSpPr>
@@ -14853,7 +19200,7 @@
       </p:sp>
       <p:sp>
         <p:nvSpPr>
-          <p:cNvPr id="11" name="Shape 8"/>
+          <p:cNvPr id="18" name="Shape 15"/>
           <p:cNvSpPr/>
           <p:nvPr/>
         </p:nvSpPr>
@@ -14880,7 +19227,7 @@
       </p:sp>
       <p:sp>
         <p:nvSpPr>
-          <p:cNvPr id="12" name="Text 9"/>
+          <p:cNvPr id="19" name="Text 16"/>
           <p:cNvSpPr/>
           <p:nvPr/>
         </p:nvSpPr>
@@ -14919,7 +19266,7 @@
       </p:sp>
       <p:sp>
         <p:nvSpPr>
-          <p:cNvPr id="13" name="Text 10"/>
+          <p:cNvPr id="20" name="Text 17"/>
           <p:cNvSpPr/>
           <p:nvPr/>
         </p:nvSpPr>
@@ -14958,7 +19305,7 @@
       </p:sp>
       <p:sp>
         <p:nvSpPr>
-          <p:cNvPr id="14" name="Text 11"/>
+          <p:cNvPr id="21" name="Text 18"/>
           <p:cNvSpPr/>
           <p:nvPr/>
         </p:nvSpPr>
@@ -14997,7 +19344,7 @@
       </p:sp>
       <p:sp>
         <p:nvSpPr>
-          <p:cNvPr id="15" name="Text 12"/>
+          <p:cNvPr id="22" name="Text 19"/>
           <p:cNvSpPr/>
           <p:nvPr/>
         </p:nvSpPr>
@@ -15511,7 +19858,214 @@
       </p:sp>
       <p:sp>
         <p:nvSpPr>
-          <p:cNvPr id="5" name="Text 2"/>
+          <p:cNvPr id="5" name="Shape 2"/>
+          <p:cNvSpPr/>
+          <p:nvPr/>
+        </p:nvSpPr>
+        <p:spPr>
+          <a:xfrm>
+            <a:off x="8732520" y="109728"/>
+            <a:ext cx="2926080" cy="896112"/>
+          </a:xfrm>
+          <a:prstGeom prst="roundRect">
+            <a:avLst>
+              <a:gd name="adj" fmla="val 7143"/>
+            </a:avLst>
+          </a:prstGeom>
+          <a:solidFill>
+            <a:srgbClr val="F7F5F0"/>
+          </a:solidFill>
+          <a:ln w="12700">
+            <a:solidFill>
+              <a:srgbClr val="DCE3EA"/>
+            </a:solidFill>
+            <a:prstDash val="solid"/>
+          </a:ln>
+        </p:spPr>
+      </p:sp>
+      <p:sp>
+        <p:nvSpPr>
+          <p:cNvPr id="6" name="Shape 3"/>
+          <p:cNvSpPr/>
+          <p:nvPr/>
+        </p:nvSpPr>
+        <p:spPr>
+          <a:xfrm>
+            <a:off x="8732520" y="109728"/>
+            <a:ext cx="2926080" cy="237744"/>
+          </a:xfrm>
+          <a:prstGeom prst="roundRect">
+            <a:avLst>
+              <a:gd name="adj" fmla="val 26923"/>
+            </a:avLst>
+          </a:prstGeom>
+          <a:solidFill>
+            <a:srgbClr val="0D1E2E"/>
+          </a:solidFill>
+          <a:ln w="12700">
+            <a:solidFill>
+              <a:srgbClr val="0D1E2E"/>
+            </a:solidFill>
+            <a:prstDash val="solid"/>
+          </a:ln>
+        </p:spPr>
+      </p:sp>
+      <p:sp>
+        <p:nvSpPr>
+          <p:cNvPr id="7" name="Shape 4"/>
+          <p:cNvSpPr/>
+          <p:nvPr/>
+        </p:nvSpPr>
+        <p:spPr>
+          <a:xfrm>
+            <a:off x="8823960" y="182880"/>
+            <a:ext cx="91440" cy="91440"/>
+          </a:xfrm>
+          <a:prstGeom prst="ellipse">
+            <a:avLst/>
+          </a:prstGeom>
+          <a:solidFill>
+            <a:srgbClr val="E8837A"/>
+          </a:solidFill>
+          <a:ln w="12700">
+            <a:solidFill>
+              <a:srgbClr val="E8837A"/>
+            </a:solidFill>
+            <a:prstDash val="solid"/>
+          </a:ln>
+        </p:spPr>
+      </p:sp>
+      <p:sp>
+        <p:nvSpPr>
+          <p:cNvPr id="8" name="Shape 5"/>
+          <p:cNvSpPr/>
+          <p:nvPr/>
+        </p:nvSpPr>
+        <p:spPr>
+          <a:xfrm>
+            <a:off x="8970264" y="182880"/>
+            <a:ext cx="91440" cy="91440"/>
+          </a:xfrm>
+          <a:prstGeom prst="ellipse">
+            <a:avLst/>
+          </a:prstGeom>
+          <a:solidFill>
+            <a:srgbClr val="F4A825"/>
+          </a:solidFill>
+          <a:ln w="12700">
+            <a:solidFill>
+              <a:srgbClr val="F4A825"/>
+            </a:solidFill>
+            <a:prstDash val="solid"/>
+          </a:ln>
+        </p:spPr>
+      </p:sp>
+      <p:sp>
+        <p:nvSpPr>
+          <p:cNvPr id="9" name="Shape 6"/>
+          <p:cNvSpPr/>
+          <p:nvPr/>
+        </p:nvSpPr>
+        <p:spPr>
+          <a:xfrm>
+            <a:off x="9116568" y="182880"/>
+            <a:ext cx="91440" cy="91440"/>
+          </a:xfrm>
+          <a:prstGeom prst="ellipse">
+            <a:avLst/>
+          </a:prstGeom>
+          <a:solidFill>
+            <a:srgbClr val="2E7D5B"/>
+          </a:solidFill>
+          <a:ln w="12700">
+            <a:solidFill>
+              <a:srgbClr val="2E7D5B"/>
+            </a:solidFill>
+            <a:prstDash val="solid"/>
+          </a:ln>
+        </p:spPr>
+      </p:sp>
+      <p:sp>
+        <p:nvSpPr>
+          <p:cNvPr id="10" name="Text 7"/>
+          <p:cNvSpPr/>
+          <p:nvPr/>
+        </p:nvSpPr>
+        <p:spPr>
+          <a:xfrm>
+            <a:off x="9299448" y="109728"/>
+            <a:ext cx="2286000" cy="237744"/>
+          </a:xfrm>
+          <a:prstGeom prst="rect">
+            <a:avLst/>
+          </a:prstGeom>
+          <a:noFill/>
+          <a:ln/>
+        </p:spPr>
+        <p:txBody>
+          <a:bodyPr wrap="square" lIns="0" tIns="0" rIns="0" bIns="0" rtlCol="0" anchor="ctr"/>
+          <a:lstStyle/>
+          <a:p>
+            <a:pPr indent="0" marL="0">
+              <a:buNone/>
+            </a:pPr>
+            <a:r>
+              <a:rPr lang="en-US" sz="800" b="1" spc="100" kern="0" dirty="0">
+                <a:solidFill>
+                  <a:srgbClr val="9FB2C2"/>
+                </a:solidFill>
+                <a:latin typeface="Inter" pitchFamily="34" charset="0"/>
+                <a:ea typeface="Inter" pitchFamily="34" charset="-122"/>
+                <a:cs typeface="Inter" pitchFamily="34" charset="-120"/>
+              </a:rPr>
+              <a:t>MS. RIVERA'S SCREEN · SO FAR</a:t>
+            </a:r>
+            <a:endParaRPr lang="en-US" sz="800" dirty="0"/>
+          </a:p>
+        </p:txBody>
+      </p:sp>
+      <p:sp>
+        <p:nvSpPr>
+          <p:cNvPr id="11" name="Text 8"/>
+          <p:cNvSpPr/>
+          <p:nvPr/>
+        </p:nvSpPr>
+        <p:spPr>
+          <a:xfrm>
+            <a:off x="8860536" y="365760"/>
+            <a:ext cx="2670048" cy="566928"/>
+          </a:xfrm>
+          <a:prstGeom prst="rect">
+            <a:avLst/>
+          </a:prstGeom>
+          <a:noFill/>
+          <a:ln/>
+        </p:spPr>
+        <p:txBody>
+          <a:bodyPr wrap="square" lIns="0" tIns="0" rIns="0" bIns="0" rtlCol="0" anchor="ctr"/>
+          <a:lstStyle/>
+          <a:p>
+            <a:pPr indent="0" marL="0">
+              <a:buNone/>
+            </a:pPr>
+            <a:r>
+              <a:rPr lang="en-US" sz="1000" dirty="0">
+                <a:solidFill>
+                  <a:srgbClr val="1B1F24"/>
+                </a:solidFill>
+                <a:latin typeface="Inter" pitchFamily="34" charset="0"/>
+                <a:ea typeface="Inter" pitchFamily="34" charset="-122"/>
+                <a:cs typeface="Inter" pitchFamily="34" charset="-120"/>
+              </a:rPr>
+              <a:t>Her goal: her next assignment leaves with its AI rules written on it.</a:t>
+            </a:r>
+            <a:endParaRPr lang="en-US" sz="1000" dirty="0"/>
+          </a:p>
+        </p:txBody>
+      </p:sp>
+      <p:sp>
+        <p:nvSpPr>
+          <p:cNvPr id="12" name="Text 9"/>
           <p:cNvSpPr/>
           <p:nvPr/>
         </p:nvSpPr>
@@ -15550,7 +20104,7 @@
       </p:sp>
       <p:sp>
         <p:nvSpPr>
-          <p:cNvPr id="6" name="Text 3"/>
+          <p:cNvPr id="13" name="Text 10"/>
           <p:cNvSpPr/>
           <p:nvPr/>
         </p:nvSpPr>
@@ -15589,7 +20143,7 @@
       </p:sp>
       <p:sp>
         <p:nvSpPr>
-          <p:cNvPr id="7" name="Text 4"/>
+          <p:cNvPr id="14" name="Text 11"/>
           <p:cNvSpPr/>
           <p:nvPr/>
         </p:nvSpPr>
@@ -15628,7 +20182,7 @@
       </p:sp>
       <p:sp>
         <p:nvSpPr>
-          <p:cNvPr id="8" name="Text 5"/>
+          <p:cNvPr id="15" name="Text 12"/>
           <p:cNvSpPr/>
           <p:nvPr/>
         </p:nvSpPr>
@@ -15667,7 +20221,7 @@
       </p:sp>
       <p:sp>
         <p:nvSpPr>
-          <p:cNvPr id="9" name="Text 6"/>
+          <p:cNvPr id="16" name="Text 13"/>
           <p:cNvSpPr/>
           <p:nvPr/>
         </p:nvSpPr>
@@ -15706,7 +20260,7 @@
       </p:sp>
       <p:sp>
         <p:nvSpPr>
-          <p:cNvPr id="10" name="Text 7"/>
+          <p:cNvPr id="17" name="Text 14"/>
           <p:cNvSpPr/>
           <p:nvPr/>
         </p:nvSpPr>
@@ -15745,7 +20299,7 @@
       </p:sp>
       <p:sp>
         <p:nvSpPr>
-          <p:cNvPr id="11" name="Text 8"/>
+          <p:cNvPr id="18" name="Text 15"/>
           <p:cNvSpPr/>
           <p:nvPr/>
         </p:nvSpPr>
@@ -15784,7 +20338,7 @@
       </p:sp>
       <p:sp>
         <p:nvSpPr>
-          <p:cNvPr id="12" name="Text 9"/>
+          <p:cNvPr id="19" name="Text 16"/>
           <p:cNvSpPr/>
           <p:nvPr/>
         </p:nvSpPr>
@@ -15823,7 +20377,7 @@
       </p:sp>
       <p:sp>
         <p:nvSpPr>
-          <p:cNvPr id="13" name="Text 10"/>
+          <p:cNvPr id="20" name="Text 17"/>
           <p:cNvSpPr/>
           <p:nvPr/>
         </p:nvSpPr>
@@ -15862,7 +20416,7 @@
       </p:sp>
       <p:sp>
         <p:nvSpPr>
-          <p:cNvPr id="14" name="Text 11"/>
+          <p:cNvPr id="21" name="Text 18"/>
           <p:cNvSpPr/>
           <p:nvPr/>
         </p:nvSpPr>
@@ -15901,7 +20455,7 @@
       </p:sp>
       <p:sp>
         <p:nvSpPr>
-          <p:cNvPr id="15" name="Text 12"/>
+          <p:cNvPr id="22" name="Text 19"/>
           <p:cNvSpPr/>
           <p:nvPr/>
         </p:nvSpPr>
@@ -15940,7 +20494,7 @@
       </p:sp>
       <p:sp>
         <p:nvSpPr>
-          <p:cNvPr id="16" name="Text 13"/>
+          <p:cNvPr id="23" name="Text 20"/>
           <p:cNvSpPr/>
           <p:nvPr/>
         </p:nvSpPr>
@@ -15979,7 +20533,7 @@
       </p:sp>
       <p:sp>
         <p:nvSpPr>
-          <p:cNvPr id="17" name="Shape 14"/>
+          <p:cNvPr id="24" name="Shape 21"/>
           <p:cNvSpPr/>
           <p:nvPr/>
         </p:nvSpPr>
@@ -16006,7 +20560,7 @@
       </p:sp>
       <p:sp>
         <p:nvSpPr>
-          <p:cNvPr id="18" name="Text 15"/>
+          <p:cNvPr id="25" name="Text 22"/>
           <p:cNvSpPr/>
           <p:nvPr/>
         </p:nvSpPr>
@@ -16045,7 +20599,7 @@
       </p:sp>
       <p:sp>
         <p:nvSpPr>
-          <p:cNvPr id="19" name="Text 16"/>
+          <p:cNvPr id="26" name="Text 23"/>
           <p:cNvSpPr/>
           <p:nvPr/>
         </p:nvSpPr>
@@ -16232,7 +20786,214 @@
       </p:sp>
       <p:sp>
         <p:nvSpPr>
-          <p:cNvPr id="5" name="Text 2"/>
+          <p:cNvPr id="5" name="Shape 2"/>
+          <p:cNvSpPr/>
+          <p:nvPr/>
+        </p:nvSpPr>
+        <p:spPr>
+          <a:xfrm>
+            <a:off x="8732520" y="109728"/>
+            <a:ext cx="2926080" cy="896112"/>
+          </a:xfrm>
+          <a:prstGeom prst="roundRect">
+            <a:avLst>
+              <a:gd name="adj" fmla="val 7143"/>
+            </a:avLst>
+          </a:prstGeom>
+          <a:solidFill>
+            <a:srgbClr val="F7F5F0"/>
+          </a:solidFill>
+          <a:ln w="12700">
+            <a:solidFill>
+              <a:srgbClr val="DCE3EA"/>
+            </a:solidFill>
+            <a:prstDash val="solid"/>
+          </a:ln>
+        </p:spPr>
+      </p:sp>
+      <p:sp>
+        <p:nvSpPr>
+          <p:cNvPr id="6" name="Shape 3"/>
+          <p:cNvSpPr/>
+          <p:nvPr/>
+        </p:nvSpPr>
+        <p:spPr>
+          <a:xfrm>
+            <a:off x="8732520" y="109728"/>
+            <a:ext cx="2926080" cy="237744"/>
+          </a:xfrm>
+          <a:prstGeom prst="roundRect">
+            <a:avLst>
+              <a:gd name="adj" fmla="val 26923"/>
+            </a:avLst>
+          </a:prstGeom>
+          <a:solidFill>
+            <a:srgbClr val="0D1E2E"/>
+          </a:solidFill>
+          <a:ln w="12700">
+            <a:solidFill>
+              <a:srgbClr val="0D1E2E"/>
+            </a:solidFill>
+            <a:prstDash val="solid"/>
+          </a:ln>
+        </p:spPr>
+      </p:sp>
+      <p:sp>
+        <p:nvSpPr>
+          <p:cNvPr id="7" name="Shape 4"/>
+          <p:cNvSpPr/>
+          <p:nvPr/>
+        </p:nvSpPr>
+        <p:spPr>
+          <a:xfrm>
+            <a:off x="8823960" y="182880"/>
+            <a:ext cx="91440" cy="91440"/>
+          </a:xfrm>
+          <a:prstGeom prst="ellipse">
+            <a:avLst/>
+          </a:prstGeom>
+          <a:solidFill>
+            <a:srgbClr val="E8837A"/>
+          </a:solidFill>
+          <a:ln w="12700">
+            <a:solidFill>
+              <a:srgbClr val="E8837A"/>
+            </a:solidFill>
+            <a:prstDash val="solid"/>
+          </a:ln>
+        </p:spPr>
+      </p:sp>
+      <p:sp>
+        <p:nvSpPr>
+          <p:cNvPr id="8" name="Shape 5"/>
+          <p:cNvSpPr/>
+          <p:nvPr/>
+        </p:nvSpPr>
+        <p:spPr>
+          <a:xfrm>
+            <a:off x="8970264" y="182880"/>
+            <a:ext cx="91440" cy="91440"/>
+          </a:xfrm>
+          <a:prstGeom prst="ellipse">
+            <a:avLst/>
+          </a:prstGeom>
+          <a:solidFill>
+            <a:srgbClr val="F4A825"/>
+          </a:solidFill>
+          <a:ln w="12700">
+            <a:solidFill>
+              <a:srgbClr val="F4A825"/>
+            </a:solidFill>
+            <a:prstDash val="solid"/>
+          </a:ln>
+        </p:spPr>
+      </p:sp>
+      <p:sp>
+        <p:nvSpPr>
+          <p:cNvPr id="9" name="Shape 6"/>
+          <p:cNvSpPr/>
+          <p:nvPr/>
+        </p:nvSpPr>
+        <p:spPr>
+          <a:xfrm>
+            <a:off x="9116568" y="182880"/>
+            <a:ext cx="91440" cy="91440"/>
+          </a:xfrm>
+          <a:prstGeom prst="ellipse">
+            <a:avLst/>
+          </a:prstGeom>
+          <a:solidFill>
+            <a:srgbClr val="2E7D5B"/>
+          </a:solidFill>
+          <a:ln w="12700">
+            <a:solidFill>
+              <a:srgbClr val="2E7D5B"/>
+            </a:solidFill>
+            <a:prstDash val="solid"/>
+          </a:ln>
+        </p:spPr>
+      </p:sp>
+      <p:sp>
+        <p:nvSpPr>
+          <p:cNvPr id="10" name="Text 7"/>
+          <p:cNvSpPr/>
+          <p:nvPr/>
+        </p:nvSpPr>
+        <p:spPr>
+          <a:xfrm>
+            <a:off x="9299448" y="109728"/>
+            <a:ext cx="2286000" cy="237744"/>
+          </a:xfrm>
+          <a:prstGeom prst="rect">
+            <a:avLst/>
+          </a:prstGeom>
+          <a:noFill/>
+          <a:ln/>
+        </p:spPr>
+        <p:txBody>
+          <a:bodyPr wrap="square" lIns="0" tIns="0" rIns="0" bIns="0" rtlCol="0" anchor="ctr"/>
+          <a:lstStyle/>
+          <a:p>
+            <a:pPr indent="0" marL="0">
+              <a:buNone/>
+            </a:pPr>
+            <a:r>
+              <a:rPr lang="en-US" sz="800" b="1" spc="100" kern="0" dirty="0">
+                <a:solidFill>
+                  <a:srgbClr val="9FB2C2"/>
+                </a:solidFill>
+                <a:latin typeface="Inter" pitchFamily="34" charset="0"/>
+                <a:ea typeface="Inter" pitchFamily="34" charset="-122"/>
+                <a:cs typeface="Inter" pitchFamily="34" charset="-120"/>
+              </a:rPr>
+              <a:t>MS. RIVERA'S SCREEN · SO FAR</a:t>
+            </a:r>
+            <a:endParaRPr lang="en-US" sz="800" dirty="0"/>
+          </a:p>
+        </p:txBody>
+      </p:sp>
+      <p:sp>
+        <p:nvSpPr>
+          <p:cNvPr id="11" name="Text 8"/>
+          <p:cNvSpPr/>
+          <p:nvPr/>
+        </p:nvSpPr>
+        <p:spPr>
+          <a:xfrm>
+            <a:off x="8860536" y="365760"/>
+            <a:ext cx="2670048" cy="566928"/>
+          </a:xfrm>
+          <a:prstGeom prst="rect">
+            <a:avLst/>
+          </a:prstGeom>
+          <a:noFill/>
+          <a:ln/>
+        </p:spPr>
+        <p:txBody>
+          <a:bodyPr wrap="square" lIns="0" tIns="0" rIns="0" bIns="0" rtlCol="0" anchor="ctr"/>
+          <a:lstStyle/>
+          <a:p>
+            <a:pPr indent="0" marL="0">
+              <a:buNone/>
+            </a:pPr>
+            <a:r>
+              <a:rPr lang="en-US" sz="1000" dirty="0">
+                <a:solidFill>
+                  <a:srgbClr val="1B1F24"/>
+                </a:solidFill>
+                <a:latin typeface="Inter" pitchFamily="34" charset="0"/>
+                <a:ea typeface="Inter" pitchFamily="34" charset="-122"/>
+                <a:cs typeface="Inter" pitchFamily="34" charset="-120"/>
+              </a:rPr>
+              <a:t>Her lens: kids cheat from pressure and disengagement, not tool access.</a:t>
+            </a:r>
+            <a:endParaRPr lang="en-US" sz="1000" dirty="0"/>
+          </a:p>
+        </p:txBody>
+      </p:sp>
+      <p:sp>
+        <p:nvSpPr>
+          <p:cNvPr id="12" name="Text 9"/>
           <p:cNvSpPr/>
           <p:nvPr/>
         </p:nvSpPr>
@@ -16271,7 +21032,7 @@
       </p:sp>
       <p:sp>
         <p:nvSpPr>
-          <p:cNvPr id="6" name="Text 3"/>
+          <p:cNvPr id="13" name="Text 10"/>
           <p:cNvSpPr/>
           <p:nvPr/>
         </p:nvSpPr>
@@ -16310,7 +21071,7 @@
       </p:sp>
       <p:sp>
         <p:nvSpPr>
-          <p:cNvPr id="7" name="Text 4"/>
+          <p:cNvPr id="14" name="Text 11"/>
           <p:cNvSpPr/>
           <p:nvPr/>
         </p:nvSpPr>
@@ -16416,7 +21177,7 @@
       </p:sp>
       <p:sp>
         <p:nvSpPr>
-          <p:cNvPr id="8" name="Shape 5"/>
+          <p:cNvPr id="15" name="Shape 12"/>
           <p:cNvSpPr/>
           <p:nvPr/>
         </p:nvSpPr>
@@ -16443,7 +21204,7 @@
       </p:sp>
       <p:sp>
         <p:nvSpPr>
-          <p:cNvPr id="9" name="Text 6"/>
+          <p:cNvPr id="16" name="Text 13"/>
           <p:cNvSpPr/>
           <p:nvPr/>
         </p:nvSpPr>
@@ -16630,7 +21391,214 @@
       </p:sp>
       <p:sp>
         <p:nvSpPr>
-          <p:cNvPr id="5" name="Text 2"/>
+          <p:cNvPr id="5" name="Shape 2"/>
+          <p:cNvSpPr/>
+          <p:nvPr/>
+        </p:nvSpPr>
+        <p:spPr>
+          <a:xfrm>
+            <a:off x="8732520" y="109728"/>
+            <a:ext cx="2926080" cy="896112"/>
+          </a:xfrm>
+          <a:prstGeom prst="roundRect">
+            <a:avLst>
+              <a:gd name="adj" fmla="val 7143"/>
+            </a:avLst>
+          </a:prstGeom>
+          <a:solidFill>
+            <a:srgbClr val="F7F5F0"/>
+          </a:solidFill>
+          <a:ln w="12700">
+            <a:solidFill>
+              <a:srgbClr val="DCE3EA"/>
+            </a:solidFill>
+            <a:prstDash val="solid"/>
+          </a:ln>
+        </p:spPr>
+      </p:sp>
+      <p:sp>
+        <p:nvSpPr>
+          <p:cNvPr id="6" name="Shape 3"/>
+          <p:cNvSpPr/>
+          <p:nvPr/>
+        </p:nvSpPr>
+        <p:spPr>
+          <a:xfrm>
+            <a:off x="8732520" y="109728"/>
+            <a:ext cx="2926080" cy="237744"/>
+          </a:xfrm>
+          <a:prstGeom prst="roundRect">
+            <a:avLst>
+              <a:gd name="adj" fmla="val 26923"/>
+            </a:avLst>
+          </a:prstGeom>
+          <a:solidFill>
+            <a:srgbClr val="0D1E2E"/>
+          </a:solidFill>
+          <a:ln w="12700">
+            <a:solidFill>
+              <a:srgbClr val="0D1E2E"/>
+            </a:solidFill>
+            <a:prstDash val="solid"/>
+          </a:ln>
+        </p:spPr>
+      </p:sp>
+      <p:sp>
+        <p:nvSpPr>
+          <p:cNvPr id="7" name="Shape 4"/>
+          <p:cNvSpPr/>
+          <p:nvPr/>
+        </p:nvSpPr>
+        <p:spPr>
+          <a:xfrm>
+            <a:off x="8823960" y="182880"/>
+            <a:ext cx="91440" cy="91440"/>
+          </a:xfrm>
+          <a:prstGeom prst="ellipse">
+            <a:avLst/>
+          </a:prstGeom>
+          <a:solidFill>
+            <a:srgbClr val="E8837A"/>
+          </a:solidFill>
+          <a:ln w="12700">
+            <a:solidFill>
+              <a:srgbClr val="E8837A"/>
+            </a:solidFill>
+            <a:prstDash val="solid"/>
+          </a:ln>
+        </p:spPr>
+      </p:sp>
+      <p:sp>
+        <p:nvSpPr>
+          <p:cNvPr id="8" name="Shape 5"/>
+          <p:cNvSpPr/>
+          <p:nvPr/>
+        </p:nvSpPr>
+        <p:spPr>
+          <a:xfrm>
+            <a:off x="8970264" y="182880"/>
+            <a:ext cx="91440" cy="91440"/>
+          </a:xfrm>
+          <a:prstGeom prst="ellipse">
+            <a:avLst/>
+          </a:prstGeom>
+          <a:solidFill>
+            <a:srgbClr val="F4A825"/>
+          </a:solidFill>
+          <a:ln w="12700">
+            <a:solidFill>
+              <a:srgbClr val="F4A825"/>
+            </a:solidFill>
+            <a:prstDash val="solid"/>
+          </a:ln>
+        </p:spPr>
+      </p:sp>
+      <p:sp>
+        <p:nvSpPr>
+          <p:cNvPr id="9" name="Shape 6"/>
+          <p:cNvSpPr/>
+          <p:nvPr/>
+        </p:nvSpPr>
+        <p:spPr>
+          <a:xfrm>
+            <a:off x="9116568" y="182880"/>
+            <a:ext cx="91440" cy="91440"/>
+          </a:xfrm>
+          <a:prstGeom prst="ellipse">
+            <a:avLst/>
+          </a:prstGeom>
+          <a:solidFill>
+            <a:srgbClr val="2E7D5B"/>
+          </a:solidFill>
+          <a:ln w="12700">
+            <a:solidFill>
+              <a:srgbClr val="2E7D5B"/>
+            </a:solidFill>
+            <a:prstDash val="solid"/>
+          </a:ln>
+        </p:spPr>
+      </p:sp>
+      <p:sp>
+        <p:nvSpPr>
+          <p:cNvPr id="10" name="Text 7"/>
+          <p:cNvSpPr/>
+          <p:nvPr/>
+        </p:nvSpPr>
+        <p:spPr>
+          <a:xfrm>
+            <a:off x="9299448" y="109728"/>
+            <a:ext cx="2286000" cy="237744"/>
+          </a:xfrm>
+          <a:prstGeom prst="rect">
+            <a:avLst/>
+          </a:prstGeom>
+          <a:noFill/>
+          <a:ln/>
+        </p:spPr>
+        <p:txBody>
+          <a:bodyPr wrap="square" lIns="0" tIns="0" rIns="0" bIns="0" rtlCol="0" anchor="ctr"/>
+          <a:lstStyle/>
+          <a:p>
+            <a:pPr indent="0" marL="0">
+              <a:buNone/>
+            </a:pPr>
+            <a:r>
+              <a:rPr lang="en-US" sz="800" b="1" spc="100" kern="0" dirty="0">
+                <a:solidFill>
+                  <a:srgbClr val="9FB2C2"/>
+                </a:solidFill>
+                <a:latin typeface="Inter" pitchFamily="34" charset="0"/>
+                <a:ea typeface="Inter" pitchFamily="34" charset="-122"/>
+                <a:cs typeface="Inter" pitchFamily="34" charset="-120"/>
+              </a:rPr>
+              <a:t>MS. RIVERA'S SCREEN · SO FAR</a:t>
+            </a:r>
+            <a:endParaRPr lang="en-US" sz="800" dirty="0"/>
+          </a:p>
+        </p:txBody>
+      </p:sp>
+      <p:sp>
+        <p:nvSpPr>
+          <p:cNvPr id="11" name="Text 8"/>
+          <p:cNvSpPr/>
+          <p:nvPr/>
+        </p:nvSpPr>
+        <p:spPr>
+          <a:xfrm>
+            <a:off x="8860536" y="365760"/>
+            <a:ext cx="2670048" cy="566928"/>
+          </a:xfrm>
+          <a:prstGeom prst="rect">
+            <a:avLst/>
+          </a:prstGeom>
+          <a:noFill/>
+          <a:ln/>
+        </p:spPr>
+        <p:txBody>
+          <a:bodyPr wrap="square" lIns="0" tIns="0" rIns="0" bIns="0" rtlCol="0" anchor="ctr"/>
+          <a:lstStyle/>
+          <a:p>
+            <a:pPr indent="0" marL="0">
+              <a:buNone/>
+            </a:pPr>
+            <a:r>
+              <a:rPr lang="en-US" sz="1000" dirty="0">
+                <a:solidFill>
+                  <a:srgbClr val="1B1F24"/>
+                </a:solidFill>
+                <a:latin typeface="Inter" pitchFamily="34" charset="0"/>
+                <a:ea typeface="Inter" pitchFamily="34" charset="-122"/>
+                <a:cs typeface="Inter" pitchFamily="34" charset="-120"/>
+              </a:rPr>
+              <a:t>Her verdict on bans: honest kids lose, teaching stops. Not her policy.</a:t>
+            </a:r>
+            <a:endParaRPr lang="en-US" sz="1000" dirty="0"/>
+          </a:p>
+        </p:txBody>
+      </p:sp>
+      <p:sp>
+        <p:nvSpPr>
+          <p:cNvPr id="12" name="Text 9"/>
           <p:cNvSpPr/>
           <p:nvPr/>
         </p:nvSpPr>
@@ -16669,7 +21637,7 @@
       </p:sp>
       <p:sp>
         <p:nvSpPr>
-          <p:cNvPr id="6" name="Text 3"/>
+          <p:cNvPr id="13" name="Text 10"/>
           <p:cNvSpPr/>
           <p:nvPr/>
         </p:nvSpPr>
@@ -16708,7 +21676,7 @@
       </p:sp>
       <p:sp>
         <p:nvSpPr>
-          <p:cNvPr id="7" name="Text 4"/>
+          <p:cNvPr id="14" name="Text 11"/>
           <p:cNvSpPr/>
           <p:nvPr/>
         </p:nvSpPr>
@@ -16814,7 +21782,7 @@
       </p:sp>
       <p:sp>
         <p:nvSpPr>
-          <p:cNvPr id="8" name="Shape 5"/>
+          <p:cNvPr id="15" name="Shape 12"/>
           <p:cNvSpPr/>
           <p:nvPr/>
         </p:nvSpPr>
@@ -16841,7 +21809,7 @@
       </p:sp>
       <p:sp>
         <p:nvSpPr>
-          <p:cNvPr id="9" name="Text 6"/>
+          <p:cNvPr id="16" name="Text 13"/>
           <p:cNvSpPr/>
           <p:nvPr/>
         </p:nvSpPr>
@@ -17042,7 +22010,214 @@
       </p:sp>
       <p:sp>
         <p:nvSpPr>
-          <p:cNvPr id="5" name="Text 2"/>
+          <p:cNvPr id="5" name="Shape 2"/>
+          <p:cNvSpPr/>
+          <p:nvPr/>
+        </p:nvSpPr>
+        <p:spPr>
+          <a:xfrm>
+            <a:off x="8732520" y="109728"/>
+            <a:ext cx="2926080" cy="896112"/>
+          </a:xfrm>
+          <a:prstGeom prst="roundRect">
+            <a:avLst>
+              <a:gd name="adj" fmla="val 7143"/>
+            </a:avLst>
+          </a:prstGeom>
+          <a:solidFill>
+            <a:srgbClr val="F7F5F0"/>
+          </a:solidFill>
+          <a:ln w="12700">
+            <a:solidFill>
+              <a:srgbClr val="DCE3EA"/>
+            </a:solidFill>
+            <a:prstDash val="solid"/>
+          </a:ln>
+        </p:spPr>
+      </p:sp>
+      <p:sp>
+        <p:nvSpPr>
+          <p:cNvPr id="6" name="Shape 3"/>
+          <p:cNvSpPr/>
+          <p:nvPr/>
+        </p:nvSpPr>
+        <p:spPr>
+          <a:xfrm>
+            <a:off x="8732520" y="109728"/>
+            <a:ext cx="2926080" cy="237744"/>
+          </a:xfrm>
+          <a:prstGeom prst="roundRect">
+            <a:avLst>
+              <a:gd name="adj" fmla="val 26923"/>
+            </a:avLst>
+          </a:prstGeom>
+          <a:solidFill>
+            <a:srgbClr val="0D1E2E"/>
+          </a:solidFill>
+          <a:ln w="12700">
+            <a:solidFill>
+              <a:srgbClr val="0D1E2E"/>
+            </a:solidFill>
+            <a:prstDash val="solid"/>
+          </a:ln>
+        </p:spPr>
+      </p:sp>
+      <p:sp>
+        <p:nvSpPr>
+          <p:cNvPr id="7" name="Shape 4"/>
+          <p:cNvSpPr/>
+          <p:nvPr/>
+        </p:nvSpPr>
+        <p:spPr>
+          <a:xfrm>
+            <a:off x="8823960" y="182880"/>
+            <a:ext cx="91440" cy="91440"/>
+          </a:xfrm>
+          <a:prstGeom prst="ellipse">
+            <a:avLst/>
+          </a:prstGeom>
+          <a:solidFill>
+            <a:srgbClr val="E8837A"/>
+          </a:solidFill>
+          <a:ln w="12700">
+            <a:solidFill>
+              <a:srgbClr val="E8837A"/>
+            </a:solidFill>
+            <a:prstDash val="solid"/>
+          </a:ln>
+        </p:spPr>
+      </p:sp>
+      <p:sp>
+        <p:nvSpPr>
+          <p:cNvPr id="8" name="Shape 5"/>
+          <p:cNvSpPr/>
+          <p:nvPr/>
+        </p:nvSpPr>
+        <p:spPr>
+          <a:xfrm>
+            <a:off x="8970264" y="182880"/>
+            <a:ext cx="91440" cy="91440"/>
+          </a:xfrm>
+          <a:prstGeom prst="ellipse">
+            <a:avLst/>
+          </a:prstGeom>
+          <a:solidFill>
+            <a:srgbClr val="F4A825"/>
+          </a:solidFill>
+          <a:ln w="12700">
+            <a:solidFill>
+              <a:srgbClr val="F4A825"/>
+            </a:solidFill>
+            <a:prstDash val="solid"/>
+          </a:ln>
+        </p:spPr>
+      </p:sp>
+      <p:sp>
+        <p:nvSpPr>
+          <p:cNvPr id="9" name="Shape 6"/>
+          <p:cNvSpPr/>
+          <p:nvPr/>
+        </p:nvSpPr>
+        <p:spPr>
+          <a:xfrm>
+            <a:off x="9116568" y="182880"/>
+            <a:ext cx="91440" cy="91440"/>
+          </a:xfrm>
+          <a:prstGeom prst="ellipse">
+            <a:avLst/>
+          </a:prstGeom>
+          <a:solidFill>
+            <a:srgbClr val="2E7D5B"/>
+          </a:solidFill>
+          <a:ln w="12700">
+            <a:solidFill>
+              <a:srgbClr val="2E7D5B"/>
+            </a:solidFill>
+            <a:prstDash val="solid"/>
+          </a:ln>
+        </p:spPr>
+      </p:sp>
+      <p:sp>
+        <p:nvSpPr>
+          <p:cNvPr id="10" name="Text 7"/>
+          <p:cNvSpPr/>
+          <p:nvPr/>
+        </p:nvSpPr>
+        <p:spPr>
+          <a:xfrm>
+            <a:off x="9299448" y="109728"/>
+            <a:ext cx="2286000" cy="237744"/>
+          </a:xfrm>
+          <a:prstGeom prst="rect">
+            <a:avLst/>
+          </a:prstGeom>
+          <a:noFill/>
+          <a:ln/>
+        </p:spPr>
+        <p:txBody>
+          <a:bodyPr wrap="square" lIns="0" tIns="0" rIns="0" bIns="0" rtlCol="0" anchor="ctr"/>
+          <a:lstStyle/>
+          <a:p>
+            <a:pPr indent="0" marL="0">
+              <a:buNone/>
+            </a:pPr>
+            <a:r>
+              <a:rPr lang="en-US" sz="800" b="1" spc="100" kern="0" dirty="0">
+                <a:solidFill>
+                  <a:srgbClr val="9FB2C2"/>
+                </a:solidFill>
+                <a:latin typeface="Inter" pitchFamily="34" charset="0"/>
+                <a:ea typeface="Inter" pitchFamily="34" charset="-122"/>
+                <a:cs typeface="Inter" pitchFamily="34" charset="-120"/>
+              </a:rPr>
+              <a:t>MS. RIVERA'S SCREEN · SO FAR</a:t>
+            </a:r>
+            <a:endParaRPr lang="en-US" sz="800" dirty="0"/>
+          </a:p>
+        </p:txBody>
+      </p:sp>
+      <p:sp>
+        <p:nvSpPr>
+          <p:cNvPr id="11" name="Text 8"/>
+          <p:cNvSpPr/>
+          <p:nvPr/>
+        </p:nvSpPr>
+        <p:spPr>
+          <a:xfrm>
+            <a:off x="8860536" y="365760"/>
+            <a:ext cx="2670048" cy="566928"/>
+          </a:xfrm>
+          <a:prstGeom prst="rect">
+            <a:avLst/>
+          </a:prstGeom>
+          <a:noFill/>
+          <a:ln/>
+        </p:spPr>
+        <p:txBody>
+          <a:bodyPr wrap="square" lIns="0" tIns="0" rIns="0" bIns="0" rtlCol="0" anchor="ctr"/>
+          <a:lstStyle/>
+          <a:p>
+            <a:pPr indent="0" marL="0">
+              <a:buNone/>
+            </a:pPr>
+            <a:r>
+              <a:rPr lang="en-US" sz="1000" dirty="0">
+                <a:solidFill>
+                  <a:srgbClr val="1B1F24"/>
+                </a:solidFill>
+                <a:latin typeface="Inter" pitchFamily="34" charset="0"/>
+                <a:ea typeface="Inter" pitchFamily="34" charset="-122"/>
+                <a:cs typeface="Inter" pitchFamily="34" charset="-120"/>
+              </a:rPr>
+              <a:t>Her verdict on detectors: the maker shut its own down. Not evidence.</a:t>
+            </a:r>
+            <a:endParaRPr lang="en-US" sz="1000" dirty="0"/>
+          </a:p>
+        </p:txBody>
+      </p:sp>
+      <p:sp>
+        <p:nvSpPr>
+          <p:cNvPr id="12" name="Text 9"/>
           <p:cNvSpPr/>
           <p:nvPr/>
         </p:nvSpPr>
@@ -17081,7 +22256,7 @@
       </p:sp>
       <p:sp>
         <p:nvSpPr>
-          <p:cNvPr id="6" name="Text 3"/>
+          <p:cNvPr id="13" name="Text 10"/>
           <p:cNvSpPr/>
           <p:nvPr/>
         </p:nvSpPr>
@@ -17120,7 +22295,7 @@
       </p:sp>
       <p:sp>
         <p:nvSpPr>
-          <p:cNvPr id="7" name="Shape 4"/>
+          <p:cNvPr id="14" name="Shape 11"/>
           <p:cNvSpPr/>
           <p:nvPr/>
         </p:nvSpPr>
@@ -17147,7 +22322,7 @@
       </p:sp>
       <p:sp>
         <p:nvSpPr>
-          <p:cNvPr id="8" name="Text 5"/>
+          <p:cNvPr id="15" name="Text 12"/>
           <p:cNvSpPr/>
           <p:nvPr/>
         </p:nvSpPr>
@@ -17186,7 +22361,7 @@
       </p:sp>
       <p:sp>
         <p:nvSpPr>
-          <p:cNvPr id="9" name="Text 6"/>
+          <p:cNvPr id="16" name="Text 13"/>
           <p:cNvSpPr/>
           <p:nvPr/>
         </p:nvSpPr>
@@ -17225,7 +22400,7 @@
       </p:sp>
       <p:sp>
         <p:nvSpPr>
-          <p:cNvPr id="10" name="Text 7"/>
+          <p:cNvPr id="17" name="Text 14"/>
           <p:cNvSpPr/>
           <p:nvPr/>
         </p:nvSpPr>
@@ -17264,7 +22439,7 @@
       </p:sp>
       <p:sp>
         <p:nvSpPr>
-          <p:cNvPr id="11" name="Shape 8"/>
+          <p:cNvPr id="18" name="Shape 15"/>
           <p:cNvSpPr/>
           <p:nvPr/>
         </p:nvSpPr>
@@ -17291,7 +22466,7 @@
       </p:sp>
       <p:sp>
         <p:nvSpPr>
-          <p:cNvPr id="12" name="Text 9"/>
+          <p:cNvPr id="19" name="Text 16"/>
           <p:cNvSpPr/>
           <p:nvPr/>
         </p:nvSpPr>
@@ -17330,7 +22505,7 @@
       </p:sp>
       <p:sp>
         <p:nvSpPr>
-          <p:cNvPr id="13" name="Text 10"/>
+          <p:cNvPr id="20" name="Text 17"/>
           <p:cNvSpPr/>
           <p:nvPr/>
         </p:nvSpPr>
@@ -17369,7 +22544,7 @@
       </p:sp>
       <p:sp>
         <p:nvSpPr>
-          <p:cNvPr id="14" name="Text 11"/>
+          <p:cNvPr id="21" name="Text 18"/>
           <p:cNvSpPr/>
           <p:nvPr/>
         </p:nvSpPr>
@@ -17408,7 +22583,7 @@
       </p:sp>
       <p:sp>
         <p:nvSpPr>
-          <p:cNvPr id="15" name="Text 12"/>
+          <p:cNvPr id="22" name="Text 19"/>
           <p:cNvSpPr/>
           <p:nvPr/>
         </p:nvSpPr>
@@ -17595,7 +22770,214 @@
       </p:sp>
       <p:sp>
         <p:nvSpPr>
-          <p:cNvPr id="5" name="Text 2"/>
+          <p:cNvPr id="5" name="Shape 2"/>
+          <p:cNvSpPr/>
+          <p:nvPr/>
+        </p:nvSpPr>
+        <p:spPr>
+          <a:xfrm>
+            <a:off x="8732520" y="109728"/>
+            <a:ext cx="2926080" cy="896112"/>
+          </a:xfrm>
+          <a:prstGeom prst="roundRect">
+            <a:avLst>
+              <a:gd name="adj" fmla="val 7143"/>
+            </a:avLst>
+          </a:prstGeom>
+          <a:solidFill>
+            <a:srgbClr val="1E3A50"/>
+          </a:solidFill>
+          <a:ln w="12700">
+            <a:solidFill>
+              <a:srgbClr val="2A4A63"/>
+            </a:solidFill>
+            <a:prstDash val="solid"/>
+          </a:ln>
+        </p:spPr>
+      </p:sp>
+      <p:sp>
+        <p:nvSpPr>
+          <p:cNvPr id="6" name="Shape 3"/>
+          <p:cNvSpPr/>
+          <p:nvPr/>
+        </p:nvSpPr>
+        <p:spPr>
+          <a:xfrm>
+            <a:off x="8732520" y="109728"/>
+            <a:ext cx="2926080" cy="237744"/>
+          </a:xfrm>
+          <a:prstGeom prst="roundRect">
+            <a:avLst>
+              <a:gd name="adj" fmla="val 26923"/>
+            </a:avLst>
+          </a:prstGeom>
+          <a:solidFill>
+            <a:srgbClr val="0D1E2E"/>
+          </a:solidFill>
+          <a:ln w="12700">
+            <a:solidFill>
+              <a:srgbClr val="0D1E2E"/>
+            </a:solidFill>
+            <a:prstDash val="solid"/>
+          </a:ln>
+        </p:spPr>
+      </p:sp>
+      <p:sp>
+        <p:nvSpPr>
+          <p:cNvPr id="7" name="Shape 4"/>
+          <p:cNvSpPr/>
+          <p:nvPr/>
+        </p:nvSpPr>
+        <p:spPr>
+          <a:xfrm>
+            <a:off x="8823960" y="182880"/>
+            <a:ext cx="91440" cy="91440"/>
+          </a:xfrm>
+          <a:prstGeom prst="ellipse">
+            <a:avLst/>
+          </a:prstGeom>
+          <a:solidFill>
+            <a:srgbClr val="E8837A"/>
+          </a:solidFill>
+          <a:ln w="12700">
+            <a:solidFill>
+              <a:srgbClr val="E8837A"/>
+            </a:solidFill>
+            <a:prstDash val="solid"/>
+          </a:ln>
+        </p:spPr>
+      </p:sp>
+      <p:sp>
+        <p:nvSpPr>
+          <p:cNvPr id="8" name="Shape 5"/>
+          <p:cNvSpPr/>
+          <p:nvPr/>
+        </p:nvSpPr>
+        <p:spPr>
+          <a:xfrm>
+            <a:off x="8970264" y="182880"/>
+            <a:ext cx="91440" cy="91440"/>
+          </a:xfrm>
+          <a:prstGeom prst="ellipse">
+            <a:avLst/>
+          </a:prstGeom>
+          <a:solidFill>
+            <a:srgbClr val="F4A825"/>
+          </a:solidFill>
+          <a:ln w="12700">
+            <a:solidFill>
+              <a:srgbClr val="F4A825"/>
+            </a:solidFill>
+            <a:prstDash val="solid"/>
+          </a:ln>
+        </p:spPr>
+      </p:sp>
+      <p:sp>
+        <p:nvSpPr>
+          <p:cNvPr id="9" name="Shape 6"/>
+          <p:cNvSpPr/>
+          <p:nvPr/>
+        </p:nvSpPr>
+        <p:spPr>
+          <a:xfrm>
+            <a:off x="9116568" y="182880"/>
+            <a:ext cx="91440" cy="91440"/>
+          </a:xfrm>
+          <a:prstGeom prst="ellipse">
+            <a:avLst/>
+          </a:prstGeom>
+          <a:solidFill>
+            <a:srgbClr val="2E7D5B"/>
+          </a:solidFill>
+          <a:ln w="12700">
+            <a:solidFill>
+              <a:srgbClr val="2E7D5B"/>
+            </a:solidFill>
+            <a:prstDash val="solid"/>
+          </a:ln>
+        </p:spPr>
+      </p:sp>
+      <p:sp>
+        <p:nvSpPr>
+          <p:cNvPr id="10" name="Text 7"/>
+          <p:cNvSpPr/>
+          <p:nvPr/>
+        </p:nvSpPr>
+        <p:spPr>
+          <a:xfrm>
+            <a:off x="9299448" y="109728"/>
+            <a:ext cx="2286000" cy="237744"/>
+          </a:xfrm>
+          <a:prstGeom prst="rect">
+            <a:avLst/>
+          </a:prstGeom>
+          <a:noFill/>
+          <a:ln/>
+        </p:spPr>
+        <p:txBody>
+          <a:bodyPr wrap="square" lIns="0" tIns="0" rIns="0" bIns="0" rtlCol="0" anchor="ctr"/>
+          <a:lstStyle/>
+          <a:p>
+            <a:pPr indent="0" marL="0">
+              <a:buNone/>
+            </a:pPr>
+            <a:r>
+              <a:rPr lang="en-US" sz="800" b="1" spc="100" kern="0" dirty="0">
+                <a:solidFill>
+                  <a:srgbClr val="9FB2C2"/>
+                </a:solidFill>
+                <a:latin typeface="Inter" pitchFamily="34" charset="0"/>
+                <a:ea typeface="Inter" pitchFamily="34" charset="-122"/>
+                <a:cs typeface="Inter" pitchFamily="34" charset="-120"/>
+              </a:rPr>
+              <a:t>MS. RIVERA'S SCREEN · SO FAR</a:t>
+            </a:r>
+            <a:endParaRPr lang="en-US" sz="800" dirty="0"/>
+          </a:p>
+        </p:txBody>
+      </p:sp>
+      <p:sp>
+        <p:nvSpPr>
+          <p:cNvPr id="11" name="Text 8"/>
+          <p:cNvSpPr/>
+          <p:nvPr/>
+        </p:nvSpPr>
+        <p:spPr>
+          <a:xfrm>
+            <a:off x="8860536" y="365760"/>
+            <a:ext cx="2670048" cy="566928"/>
+          </a:xfrm>
+          <a:prstGeom prst="rect">
+            <a:avLst/>
+          </a:prstGeom>
+          <a:noFill/>
+          <a:ln/>
+        </p:spPr>
+        <p:txBody>
+          <a:bodyPr wrap="square" lIns="0" tIns="0" rIns="0" bIns="0" rtlCol="0" anchor="ctr"/>
+          <a:lstStyle/>
+          <a:p>
+            <a:pPr indent="0" marL="0">
+              <a:buNone/>
+            </a:pPr>
+            <a:r>
+              <a:rPr lang="en-US" sz="1000" dirty="0">
+                <a:solidFill>
+                  <a:srgbClr val="C9D4DE"/>
+                </a:solidFill>
+                <a:latin typeface="Inter" pitchFamily="34" charset="0"/>
+                <a:ea typeface="Inter" pitchFamily="34" charset="-122"/>
+                <a:cs typeface="Inter" pitchFamily="34" charset="-120"/>
+              </a:rPr>
+              <a:t>Her red line, adopted: no accusation on a detector score alone.</a:t>
+            </a:r>
+            <a:endParaRPr lang="en-US" sz="1000" dirty="0"/>
+          </a:p>
+        </p:txBody>
+      </p:sp>
+      <p:sp>
+        <p:nvSpPr>
+          <p:cNvPr id="12" name="Text 9"/>
           <p:cNvSpPr/>
           <p:nvPr/>
         </p:nvSpPr>
@@ -17634,7 +23016,7 @@
       </p:sp>
       <p:sp>
         <p:nvSpPr>
-          <p:cNvPr id="6" name="Text 3"/>
+          <p:cNvPr id="13" name="Text 10"/>
           <p:cNvSpPr/>
           <p:nvPr/>
         </p:nvSpPr>
@@ -17696,7 +23078,7 @@
       </p:sp>
       <p:sp>
         <p:nvSpPr>
-          <p:cNvPr id="7" name="Text 4"/>
+          <p:cNvPr id="14" name="Text 11"/>
           <p:cNvSpPr/>
           <p:nvPr/>
         </p:nvSpPr>
@@ -17883,7 +23265,214 @@
       </p:sp>
       <p:sp>
         <p:nvSpPr>
-          <p:cNvPr id="5" name="Text 2"/>
+          <p:cNvPr id="5" name="Shape 2"/>
+          <p:cNvSpPr/>
+          <p:nvPr/>
+        </p:nvSpPr>
+        <p:spPr>
+          <a:xfrm>
+            <a:off x="8732520" y="109728"/>
+            <a:ext cx="2926080" cy="896112"/>
+          </a:xfrm>
+          <a:prstGeom prst="roundRect">
+            <a:avLst>
+              <a:gd name="adj" fmla="val 7143"/>
+            </a:avLst>
+          </a:prstGeom>
+          <a:solidFill>
+            <a:srgbClr val="F7F5F0"/>
+          </a:solidFill>
+          <a:ln w="12700">
+            <a:solidFill>
+              <a:srgbClr val="DCE3EA"/>
+            </a:solidFill>
+            <a:prstDash val="solid"/>
+          </a:ln>
+        </p:spPr>
+      </p:sp>
+      <p:sp>
+        <p:nvSpPr>
+          <p:cNvPr id="6" name="Shape 3"/>
+          <p:cNvSpPr/>
+          <p:nvPr/>
+        </p:nvSpPr>
+        <p:spPr>
+          <a:xfrm>
+            <a:off x="8732520" y="109728"/>
+            <a:ext cx="2926080" cy="237744"/>
+          </a:xfrm>
+          <a:prstGeom prst="roundRect">
+            <a:avLst>
+              <a:gd name="adj" fmla="val 26923"/>
+            </a:avLst>
+          </a:prstGeom>
+          <a:solidFill>
+            <a:srgbClr val="0D1E2E"/>
+          </a:solidFill>
+          <a:ln w="12700">
+            <a:solidFill>
+              <a:srgbClr val="0D1E2E"/>
+            </a:solidFill>
+            <a:prstDash val="solid"/>
+          </a:ln>
+        </p:spPr>
+      </p:sp>
+      <p:sp>
+        <p:nvSpPr>
+          <p:cNvPr id="7" name="Shape 4"/>
+          <p:cNvSpPr/>
+          <p:nvPr/>
+        </p:nvSpPr>
+        <p:spPr>
+          <a:xfrm>
+            <a:off x="8823960" y="182880"/>
+            <a:ext cx="91440" cy="91440"/>
+          </a:xfrm>
+          <a:prstGeom prst="ellipse">
+            <a:avLst/>
+          </a:prstGeom>
+          <a:solidFill>
+            <a:srgbClr val="E8837A"/>
+          </a:solidFill>
+          <a:ln w="12700">
+            <a:solidFill>
+              <a:srgbClr val="E8837A"/>
+            </a:solidFill>
+            <a:prstDash val="solid"/>
+          </a:ln>
+        </p:spPr>
+      </p:sp>
+      <p:sp>
+        <p:nvSpPr>
+          <p:cNvPr id="8" name="Shape 5"/>
+          <p:cNvSpPr/>
+          <p:nvPr/>
+        </p:nvSpPr>
+        <p:spPr>
+          <a:xfrm>
+            <a:off x="8970264" y="182880"/>
+            <a:ext cx="91440" cy="91440"/>
+          </a:xfrm>
+          <a:prstGeom prst="ellipse">
+            <a:avLst/>
+          </a:prstGeom>
+          <a:solidFill>
+            <a:srgbClr val="F4A825"/>
+          </a:solidFill>
+          <a:ln w="12700">
+            <a:solidFill>
+              <a:srgbClr val="F4A825"/>
+            </a:solidFill>
+            <a:prstDash val="solid"/>
+          </a:ln>
+        </p:spPr>
+      </p:sp>
+      <p:sp>
+        <p:nvSpPr>
+          <p:cNvPr id="9" name="Shape 6"/>
+          <p:cNvSpPr/>
+          <p:nvPr/>
+        </p:nvSpPr>
+        <p:spPr>
+          <a:xfrm>
+            <a:off x="9116568" y="182880"/>
+            <a:ext cx="91440" cy="91440"/>
+          </a:xfrm>
+          <a:prstGeom prst="ellipse">
+            <a:avLst/>
+          </a:prstGeom>
+          <a:solidFill>
+            <a:srgbClr val="2E7D5B"/>
+          </a:solidFill>
+          <a:ln w="12700">
+            <a:solidFill>
+              <a:srgbClr val="2E7D5B"/>
+            </a:solidFill>
+            <a:prstDash val="solid"/>
+          </a:ln>
+        </p:spPr>
+      </p:sp>
+      <p:sp>
+        <p:nvSpPr>
+          <p:cNvPr id="10" name="Text 7"/>
+          <p:cNvSpPr/>
+          <p:nvPr/>
+        </p:nvSpPr>
+        <p:spPr>
+          <a:xfrm>
+            <a:off x="9299448" y="109728"/>
+            <a:ext cx="2286000" cy="237744"/>
+          </a:xfrm>
+          <a:prstGeom prst="rect">
+            <a:avLst/>
+          </a:prstGeom>
+          <a:noFill/>
+          <a:ln/>
+        </p:spPr>
+        <p:txBody>
+          <a:bodyPr wrap="square" lIns="0" tIns="0" rIns="0" bIns="0" rtlCol="0" anchor="ctr"/>
+          <a:lstStyle/>
+          <a:p>
+            <a:pPr indent="0" marL="0">
+              <a:buNone/>
+            </a:pPr>
+            <a:r>
+              <a:rPr lang="en-US" sz="800" b="1" spc="100" kern="0" dirty="0">
+                <a:solidFill>
+                  <a:srgbClr val="9FB2C2"/>
+                </a:solidFill>
+                <a:latin typeface="Inter" pitchFamily="34" charset="0"/>
+                <a:ea typeface="Inter" pitchFamily="34" charset="-122"/>
+                <a:cs typeface="Inter" pitchFamily="34" charset="-120"/>
+              </a:rPr>
+              <a:t>MS. RIVERA'S SCREEN · SO FAR</a:t>
+            </a:r>
+            <a:endParaRPr lang="en-US" sz="800" dirty="0"/>
+          </a:p>
+        </p:txBody>
+      </p:sp>
+      <p:sp>
+        <p:nvSpPr>
+          <p:cNvPr id="11" name="Text 8"/>
+          <p:cNvSpPr/>
+          <p:nvPr/>
+        </p:nvSpPr>
+        <p:spPr>
+          <a:xfrm>
+            <a:off x="8860536" y="365760"/>
+            <a:ext cx="2670048" cy="566928"/>
+          </a:xfrm>
+          <a:prstGeom prst="rect">
+            <a:avLst/>
+          </a:prstGeom>
+          <a:noFill/>
+          <a:ln/>
+        </p:spPr>
+        <p:txBody>
+          <a:bodyPr wrap="square" lIns="0" tIns="0" rIns="0" bIns="0" rtlCol="0" anchor="ctr"/>
+          <a:lstStyle/>
+          <a:p>
+            <a:pPr indent="0" marL="0">
+              <a:buNone/>
+            </a:pPr>
+            <a:r>
+              <a:rPr lang="en-US" sz="1000" dirty="0">
+                <a:solidFill>
+                  <a:srgbClr val="1B1F24"/>
+                </a:solidFill>
+                <a:latin typeface="Inter" pitchFamily="34" charset="0"/>
+                <a:ea typeface="Inter" pitchFamily="34" charset="-122"/>
+                <a:cs typeface="Inter" pitchFamily="34" charset="-120"/>
+              </a:rPr>
+              <a:t>Her framework: three lanes. AI-free, AI-assisted, AI-included.</a:t>
+            </a:r>
+            <a:endParaRPr lang="en-US" sz="1000" dirty="0"/>
+          </a:p>
+        </p:txBody>
+      </p:sp>
+      <p:sp>
+        <p:nvSpPr>
+          <p:cNvPr id="12" name="Text 9"/>
           <p:cNvSpPr/>
           <p:nvPr/>
         </p:nvSpPr>
@@ -17922,7 +23511,7 @@
       </p:sp>
       <p:sp>
         <p:nvSpPr>
-          <p:cNvPr id="6" name="Text 3"/>
+          <p:cNvPr id="13" name="Text 10"/>
           <p:cNvSpPr/>
           <p:nvPr/>
         </p:nvSpPr>
@@ -17961,7 +23550,7 @@
       </p:sp>
       <p:sp>
         <p:nvSpPr>
-          <p:cNvPr id="7" name="Shape 4"/>
+          <p:cNvPr id="14" name="Shape 11"/>
           <p:cNvSpPr/>
           <p:nvPr/>
         </p:nvSpPr>
@@ -17988,7 +23577,7 @@
       </p:sp>
       <p:sp>
         <p:nvSpPr>
-          <p:cNvPr id="8" name="Text 5"/>
+          <p:cNvPr id="15" name="Text 12"/>
           <p:cNvSpPr/>
           <p:nvPr/>
         </p:nvSpPr>
@@ -18027,7 +23616,7 @@
       </p:sp>
       <p:sp>
         <p:nvSpPr>
-          <p:cNvPr id="9" name="Text 6"/>
+          <p:cNvPr id="16" name="Text 13"/>
           <p:cNvSpPr/>
           <p:nvPr/>
         </p:nvSpPr>
@@ -18066,7 +23655,7 @@
       </p:sp>
       <p:sp>
         <p:nvSpPr>
-          <p:cNvPr id="10" name="Text 7"/>
+          <p:cNvPr id="17" name="Text 14"/>
           <p:cNvSpPr/>
           <p:nvPr/>
         </p:nvSpPr>
@@ -18105,7 +23694,7 @@
       </p:sp>
       <p:sp>
         <p:nvSpPr>
-          <p:cNvPr id="11" name="Shape 8"/>
+          <p:cNvPr id="18" name="Shape 15"/>
           <p:cNvSpPr/>
           <p:nvPr/>
         </p:nvSpPr>
@@ -18132,7 +23721,7 @@
       </p:sp>
       <p:sp>
         <p:nvSpPr>
-          <p:cNvPr id="12" name="Text 9"/>
+          <p:cNvPr id="19" name="Text 16"/>
           <p:cNvSpPr/>
           <p:nvPr/>
         </p:nvSpPr>
@@ -18171,7 +23760,7 @@
       </p:sp>
       <p:sp>
         <p:nvSpPr>
-          <p:cNvPr id="13" name="Text 10"/>
+          <p:cNvPr id="20" name="Text 17"/>
           <p:cNvSpPr/>
           <p:nvPr/>
         </p:nvSpPr>
@@ -18210,7 +23799,7 @@
       </p:sp>
       <p:sp>
         <p:nvSpPr>
-          <p:cNvPr id="14" name="Text 11"/>
+          <p:cNvPr id="21" name="Text 18"/>
           <p:cNvSpPr/>
           <p:nvPr/>
         </p:nvSpPr>
@@ -18249,7 +23838,7 @@
       </p:sp>
       <p:sp>
         <p:nvSpPr>
-          <p:cNvPr id="15" name="Shape 12"/>
+          <p:cNvPr id="22" name="Shape 19"/>
           <p:cNvSpPr/>
           <p:nvPr/>
         </p:nvSpPr>
@@ -18276,7 +23865,7 @@
       </p:sp>
       <p:sp>
         <p:nvSpPr>
-          <p:cNvPr id="16" name="Text 13"/>
+          <p:cNvPr id="23" name="Text 20"/>
           <p:cNvSpPr/>
           <p:nvPr/>
         </p:nvSpPr>
@@ -18315,7 +23904,7 @@
       </p:sp>
       <p:sp>
         <p:nvSpPr>
-          <p:cNvPr id="17" name="Text 14"/>
+          <p:cNvPr id="24" name="Text 21"/>
           <p:cNvSpPr/>
           <p:nvPr/>
         </p:nvSpPr>
@@ -18354,7 +23943,7 @@
       </p:sp>
       <p:sp>
         <p:nvSpPr>
-          <p:cNvPr id="18" name="Text 15"/>
+          <p:cNvPr id="25" name="Text 22"/>
           <p:cNvSpPr/>
           <p:nvPr/>
         </p:nvSpPr>
@@ -18393,7 +23982,7 @@
       </p:sp>
       <p:sp>
         <p:nvSpPr>
-          <p:cNvPr id="19" name="Text 16"/>
+          <p:cNvPr id="26" name="Text 23"/>
           <p:cNvSpPr/>
           <p:nvPr/>
         </p:nvSpPr>

--- a/kits/kit05/Kit05_PresentationDeck.pptx
+++ b/kits/kit05/Kit05_PresentationDeck.pptx
@@ -707,7 +707,7 @@
           <a:p>
             <a:r>
               <a:rPr lang="en-US" dirty="0"/>
-              <a:t>The soft landing is load-bearing: punish disclosure once and the whole class learns to hide. Say that sentence explicitly.</a:t>
+              <a:t>Why fixed templates instead of free writing: ask thirty students for two honest sentences and you get thirty different things. Checkboxes make honesty the same size for everyone and identical building-wide. The soft landing is load-bearing: punish disclosure once and the whole class learns to hide. Say that sentence explicitly. Both templates are on the handout, copy-ready.</a:t>
             </a:r>
             <a:endParaRPr lang="en-US" dirty="0"/>
           </a:p>
@@ -795,7 +795,7 @@
           <a:p>
             <a:r>
               <a:rPr lang="en-US" dirty="0"/>
-              <a:t>Reveal answers after the room calls each one. 45-min cut: scenarios 1 and 3 only. Scenario 4 sets up the design segment: when a rule is unenforceable, design carries the integrity.</a:t>
+              <a:t>Reveal answers after the room calls each one. 45-min cut: scenarios 1 and 3 only. Scenario 4 sets up the upgrades segment: when a rule is unenforceable, the upgrade carries the integrity.</a:t>
             </a:r>
             <a:endParaRPr lang="en-US" dirty="0"/>
           </a:p>
@@ -883,7 +883,7 @@
           <a:p>
             <a:r>
               <a:rPr lang="en-US" dirty="0"/>
-              <a:t>Two of four moves. Emphasize: these are better teaching regardless of AI; integrity is a side effect of good design.</a:t>
+              <a:t>Two of four upgrades. Emphasize: these are better teaching regardless of AI; integrity is a side effect of good design. Plain words, no jargon: the room should hear four simple things they could do to any assignment.</a:t>
             </a:r>
             <a:endParaRPr lang="en-US" dirty="0"/>
           </a:p>
@@ -971,7 +971,7 @@
           <a:p>
             <a:r>
               <a:rPr lang="en-US" dirty="0"/>
-              <a:t>Warn against overcorrecting: four moves on every assignment is burnout. One is enough.</a:t>
+              <a:t>Warn against overcorrecting: four upgrades on every assignment is burnout. One is enough.</a:t>
             </a:r>
             <a:endParaRPr lang="en-US" dirty="0"/>
           </a:p>
@@ -1323,7 +1323,7 @@
           <a:p>
             <a:r>
               <a:rPr lang="en-US" dirty="0"/>
-              <a:t>Dark slide. Pairs formed inside two minutes. This lab is thinking and writing, not prompting; Wi-Fi optional. Protect every minute.</a:t>
+              <a:t>Dark slide. Pairs formed inside two minutes. This lab is thinking and writing, not prompting; Wi-Fi optional. Protect every minute. Ms. Rivera builds ONE persuasive essay across all four steps; her exemplar appears large on every step slide, so anyone lost can copy her structure.</a:t>
             </a:r>
             <a:endParaRPr lang="en-US" dirty="0"/>
           </a:p>
@@ -1411,7 +1411,7 @@
           <a:p>
             <a:r>
               <a:rPr lang="en-US" dirty="0"/>
-              <a:t>3 minutes. Circulate. The common stall is an assignment with parts in different lanes; the fix is naming a lane per part.</a:t>
+              <a:t>3 minutes. Circulate. Rivera's essay is the running exemplar for the whole lab: three parts, three lanes, one defense sentence. The common stall is an assignment with parts in different lanes; the fix is naming a lane per part, exactly as her card shows.</a:t>
             </a:r>
             <a:endParaRPr lang="en-US" dirty="0"/>
           </a:p>
@@ -1587,7 +1587,7 @@
           <a:p>
             <a:r>
               <a:rPr lang="en-US" dirty="0"/>
-              <a:t>Say: template on the left; on the right is Ms. Rivera's finished box for her persuasive essay (our running composite example, same teacher whose screen you saw in Kits 1-4). Mimic her box with your own assignment: at worst, copy its shape line for line. 6 minutes. Push for student language, not policy language. 45-min cut: lane line + disclosure line only.</a:t>
+              <a:t>Say: the school template on the left is the one from slide 11; the big card is Ms. Rivera's finished Box for her persuasive essay, the same essay from step 1. Mimic her box with your own assignment: at worst, copy its shape line for line. 6 minutes. Push for student language, not policy language. 45-min cut: check the lane boxes and fill the okay line only.</a:t>
             </a:r>
             <a:endParaRPr lang="en-US" dirty="0"/>
           </a:p>
@@ -1675,7 +1675,7 @@
           <a:p>
             <a:r>
               <a:rPr lang="en-US" dirty="0"/>
-              <a:t>6 minutes. One move only. Weakest results come from bolting on a quiz; strongest from local anchors and visible thinking.</a:t>
+              <a:t>6 minutes. One upgrade only. Rivera's pick is a visible-thinking checkpoint on the same essay. Weakest results come from bolting on a quiz; strongest from anchoring to the room and collecting the thinking.</a:t>
             </a:r>
             <a:endParaRPr lang="en-US" dirty="0"/>
           </a:p>
@@ -1763,7 +1763,7 @@
           <a:p>
             <a:r>
               <a:rPr lang="en-US" dirty="0"/>
-              <a:t>4 minutes, quiet writing, alone. This is the step people thank you for later. The handout has a box for it.</a:t>
+              <a:t>4 minutes, quiet writing, alone. This is the step people thank you for later. The handout has a box for it. Rivera's sentences stay on screen as the model: curiosity first, no accusation anywhere.</a:t>
             </a:r>
             <a:endParaRPr lang="en-US" dirty="0"/>
           </a:p>
@@ -4848,7 +4848,7 @@
                 <a:ea typeface="Inter" pitchFamily="34" charset="-122"/>
                 <a:cs typeface="Inter" pitchFamily="34" charset="-120"/>
               </a:rPr>
-              <a:t>Her disclosure norm: two lines: what tool, what it did. Honesty lands soft.</a:t>
+              <a:t>Her system: the AI Box on the assignment, the Disclosure block at the end. Fixed, school-wide.</a:t>
             </a:r>
             <a:endParaRPr lang="en-US" sz="1000" dirty="0"/>
           </a:p>
@@ -4887,7 +4887,7 @@
                 <a:ea typeface="Inter" pitchFamily="34" charset="-122"/>
                 <a:cs typeface="Inter" pitchFamily="34" charset="-120"/>
               </a:rPr>
-              <a:t>LANE 2'S ENGINE: CITATION, POINTED AT AI</a:t>
+              <a:t>FIXED TEMPLATES, IDENTICAL IN EVERY CLASSROOM</a:t>
             </a:r>
             <a:endParaRPr lang="en-US" sz="1200" dirty="0"/>
           </a:p>
@@ -4902,7 +4902,7 @@
         <p:spPr>
           <a:xfrm>
             <a:off x="548640" y="384048"/>
-            <a:ext cx="11091672" cy="777240"/>
+            <a:ext cx="7955280" cy="777240"/>
           </a:xfrm>
           <a:prstGeom prst="rect">
             <a:avLst/>
@@ -4926,7 +4926,7 @@
                 <a:ea typeface="Inter" pitchFamily="34" charset="-122"/>
                 <a:cs typeface="Inter" pitchFamily="34" charset="-120"/>
               </a:rPr>
-              <a:t>The disclosure norm</a:t>
+              <a:t>One system, two boxes</a:t>
             </a:r>
             <a:endParaRPr lang="en-US" sz="3200" dirty="0"/>
           </a:p>
@@ -4940,12 +4940,277 @@
         </p:nvSpPr>
         <p:spPr>
           <a:xfrm>
-            <a:off x="640080" y="1508760"/>
-            <a:ext cx="10972800" cy="1737360"/>
+            <a:off x="640080" y="1463040"/>
+            <a:ext cx="5394960" cy="4069080"/>
           </a:xfrm>
           <a:prstGeom prst="roundRect">
             <a:avLst>
-              <a:gd name="adj" fmla="val 4737"/>
+              <a:gd name="adj" fmla="val 2022"/>
+            </a:avLst>
+          </a:prstGeom>
+          <a:solidFill>
+            <a:srgbClr val="F7F5F0"/>
+          </a:solidFill>
+          <a:ln w="12700">
+            <a:solidFill>
+              <a:srgbClr val="F7F5F0"/>
+            </a:solidFill>
+            <a:prstDash val="solid"/>
+          </a:ln>
+        </p:spPr>
+      </p:sp>
+      <p:sp>
+        <p:nvSpPr>
+          <p:cNvPr id="15" name="Text 12"/>
+          <p:cNvSpPr/>
+          <p:nvPr/>
+        </p:nvSpPr>
+        <p:spPr>
+          <a:xfrm>
+            <a:off x="914400" y="1627632"/>
+            <a:ext cx="4937760" cy="274320"/>
+          </a:xfrm>
+          <a:prstGeom prst="rect">
+            <a:avLst/>
+          </a:prstGeom>
+          <a:noFill/>
+          <a:ln/>
+        </p:spPr>
+        <p:txBody>
+          <a:bodyPr wrap="square" lIns="0" tIns="0" rIns="0" bIns="0" rtlCol="0" anchor="ctr"/>
+          <a:lstStyle/>
+          <a:p>
+            <a:pPr indent="0" marL="0">
+              <a:buNone/>
+            </a:pPr>
+            <a:r>
+              <a:rPr lang="en-US" sz="1150" b="1" spc="120" kern="0" dirty="0">
+                <a:solidFill>
+                  <a:srgbClr val="2A9D8F"/>
+                </a:solidFill>
+                <a:latin typeface="Inter" pitchFamily="34" charset="0"/>
+                <a:ea typeface="Inter" pitchFamily="34" charset="-122"/>
+                <a:cs typeface="Inter" pitchFamily="34" charset="-120"/>
+              </a:rPr>
+              <a:t>THE AI BOX · PRINTS ON THE ASSIGNMENT (TEACHER'S HALF)</a:t>
+            </a:r>
+            <a:endParaRPr lang="en-US" sz="1150" dirty="0"/>
+          </a:p>
+        </p:txBody>
+      </p:sp>
+      <p:sp>
+        <p:nvSpPr>
+          <p:cNvPr id="16" name="Text 13"/>
+          <p:cNvSpPr/>
+          <p:nvPr/>
+        </p:nvSpPr>
+        <p:spPr>
+          <a:xfrm>
+            <a:off x="914400" y="2011680"/>
+            <a:ext cx="4892040" cy="3291840"/>
+          </a:xfrm>
+          <a:prstGeom prst="rect">
+            <a:avLst/>
+          </a:prstGeom>
+          <a:noFill/>
+          <a:ln/>
+        </p:spPr>
+        <p:txBody>
+          <a:bodyPr wrap="square" lIns="0" tIns="0" rIns="0" bIns="0" rtlCol="0" anchor="t"/>
+          <a:lstStyle/>
+          <a:p>
+            <a:pPr indent="0" marL="0">
+              <a:lnSpc>
+                <a:spcPct val="125000"/>
+              </a:lnSpc>
+              <a:buNone/>
+            </a:pPr>
+            <a:r>
+              <a:rPr lang="en-US" sz="1600" b="1" dirty="0">
+                <a:solidFill>
+                  <a:srgbClr val="13293D"/>
+                </a:solidFill>
+                <a:latin typeface="Inter" pitchFamily="34" charset="0"/>
+                <a:ea typeface="Inter" pitchFamily="34" charset="-122"/>
+                <a:cs typeface="Inter" pitchFamily="34" charset="-120"/>
+              </a:rPr>
+              <a:t>Lane: </a:t>
+            </a:r>
+            <a:pPr indent="0" marL="0">
+              <a:lnSpc>
+                <a:spcPct val="125000"/>
+              </a:lnSpc>
+              <a:buNone/>
+            </a:pPr>
+            <a:r>
+              <a:rPr lang="en-US" sz="1600" dirty="0">
+                <a:solidFill>
+                  <a:srgbClr val="1B1F24"/>
+                </a:solidFill>
+                <a:latin typeface="Inter" pitchFamily="34" charset="0"/>
+                <a:ea typeface="Inter" pitchFamily="34" charset="-122"/>
+                <a:cs typeface="Inter" pitchFamily="34" charset="-120"/>
+              </a:rPr>
+              <a:t>□ 1 AI-free   □ 2 AI-assisted   □ 3 AI-included
+</a:t>
+            </a:r>
+            <a:pPr indent="0" marL="0">
+              <a:lnSpc>
+                <a:spcPct val="125000"/>
+              </a:lnSpc>
+              <a:buNone/>
+            </a:pPr>
+            <a:r>
+              <a:rPr lang="en-US" sz="1600" b="1" dirty="0">
+                <a:solidFill>
+                  <a:srgbClr val="13293D"/>
+                </a:solidFill>
+                <a:latin typeface="Inter" pitchFamily="34" charset="0"/>
+                <a:ea typeface="Inter" pitchFamily="34" charset="-122"/>
+                <a:cs typeface="Inter" pitchFamily="34" charset="-120"/>
+              </a:rPr>
+              <a:t>Okay: </a:t>
+            </a:r>
+            <a:pPr indent="0" marL="0">
+              <a:lnSpc>
+                <a:spcPct val="125000"/>
+              </a:lnSpc>
+              <a:buNone/>
+            </a:pPr>
+            <a:r>
+              <a:rPr lang="en-US" sz="1600" dirty="0">
+                <a:solidFill>
+                  <a:srgbClr val="1B1F24"/>
+                </a:solidFill>
+                <a:latin typeface="Inter" pitchFamily="34" charset="0"/>
+                <a:ea typeface="Inter" pitchFamily="34" charset="-122"/>
+                <a:cs typeface="Inter" pitchFamily="34" charset="-120"/>
+              </a:rPr>
+              <a:t>[what's allowed, in student words]
+</a:t>
+            </a:r>
+            <a:pPr indent="0" marL="0">
+              <a:lnSpc>
+                <a:spcPct val="125000"/>
+              </a:lnSpc>
+              <a:buNone/>
+            </a:pPr>
+            <a:r>
+              <a:rPr lang="en-US" sz="1600" b="1" dirty="0">
+                <a:solidFill>
+                  <a:srgbClr val="13293D"/>
+                </a:solidFill>
+                <a:latin typeface="Inter" pitchFamily="34" charset="0"/>
+                <a:ea typeface="Inter" pitchFamily="34" charset="-122"/>
+                <a:cs typeface="Inter" pitchFamily="34" charset="-120"/>
+              </a:rPr>
+              <a:t>Not okay: </a:t>
+            </a:r>
+            <a:pPr indent="0" marL="0">
+              <a:lnSpc>
+                <a:spcPct val="125000"/>
+              </a:lnSpc>
+              <a:buNone/>
+            </a:pPr>
+            <a:r>
+              <a:rPr lang="en-US" sz="1600" dirty="0">
+                <a:solidFill>
+                  <a:srgbClr val="1B1F24"/>
+                </a:solidFill>
+                <a:latin typeface="Inter" pitchFamily="34" charset="0"/>
+                <a:ea typeface="Inter" pitchFamily="34" charset="-122"/>
+                <a:cs typeface="Inter" pitchFamily="34" charset="-120"/>
+              </a:rPr>
+              <a:t>[what's not, in student words]
+</a:t>
+            </a:r>
+            <a:pPr indent="0" marL="0">
+              <a:lnSpc>
+                <a:spcPct val="125000"/>
+              </a:lnSpc>
+              <a:buNone/>
+            </a:pPr>
+            <a:r>
+              <a:rPr lang="en-US" sz="1600" b="1" dirty="0">
+                <a:solidFill>
+                  <a:srgbClr val="13293D"/>
+                </a:solidFill>
+                <a:latin typeface="Inter" pitchFamily="34" charset="0"/>
+                <a:ea typeface="Inter" pitchFamily="34" charset="-122"/>
+                <a:cs typeface="Inter" pitchFamily="34" charset="-120"/>
+              </a:rPr>
+              <a:t>Disclosure: </a:t>
+            </a:r>
+            <a:pPr indent="0" marL="0">
+              <a:lnSpc>
+                <a:spcPct val="125000"/>
+              </a:lnSpc>
+              <a:buNone/>
+            </a:pPr>
+            <a:r>
+              <a:rPr lang="en-US" sz="1600" dirty="0">
+                <a:solidFill>
+                  <a:srgbClr val="1B1F24"/>
+                </a:solidFill>
+                <a:latin typeface="Inter" pitchFamily="34" charset="0"/>
+                <a:ea typeface="Inter" pitchFamily="34" charset="-122"/>
+                <a:cs typeface="Inter" pitchFamily="34" charset="-120"/>
+              </a:rPr>
+              <a:t>fill in the Disclosure block. Every time.
+</a:t>
+            </a:r>
+            <a:pPr indent="0" marL="0">
+              <a:lnSpc>
+                <a:spcPct val="125000"/>
+              </a:lnSpc>
+              <a:buNone/>
+            </a:pPr>
+            <a:r>
+              <a:rPr lang="en-US" sz="1600" b="1" dirty="0">
+                <a:solidFill>
+                  <a:srgbClr val="13293D"/>
+                </a:solidFill>
+                <a:latin typeface="Inter" pitchFamily="34" charset="0"/>
+                <a:ea typeface="Inter" pitchFamily="34" charset="-122"/>
+                <a:cs typeface="Inter" pitchFamily="34" charset="-120"/>
+              </a:rPr>
+              <a:t>If something seems off: </a:t>
+            </a:r>
+            <a:pPr indent="0" marL="0">
+              <a:lnSpc>
+                <a:spcPct val="125000"/>
+              </a:lnSpc>
+              <a:buNone/>
+            </a:pPr>
+            <a:r>
+              <a:rPr lang="en-US" sz="1600" dirty="0">
+                <a:solidFill>
+                  <a:srgbClr val="1B1F24"/>
+                </a:solidFill>
+                <a:latin typeface="Inter" pitchFamily="34" charset="0"/>
+                <a:ea typeface="Inter" pitchFamily="34" charset="-122"/>
+                <a:cs typeface="Inter" pitchFamily="34" charset="-120"/>
+              </a:rPr>
+              <a:t>we walk through the work together.</a:t>
+            </a:r>
+            <a:endParaRPr lang="en-US" sz="1600" dirty="0"/>
+          </a:p>
+        </p:txBody>
+      </p:sp>
+      <p:sp>
+        <p:nvSpPr>
+          <p:cNvPr id="17" name="Shape 14"/>
+          <p:cNvSpPr/>
+          <p:nvPr/>
+        </p:nvSpPr>
+        <p:spPr>
+          <a:xfrm>
+            <a:off x="6263640" y="1463040"/>
+            <a:ext cx="5394960" cy="4069080"/>
+          </a:xfrm>
+          <a:prstGeom prst="roundRect">
+            <a:avLst>
+              <a:gd name="adj" fmla="val 2022"/>
             </a:avLst>
           </a:prstGeom>
           <a:solidFill>
@@ -4961,26 +5226,68 @@
       </p:sp>
       <p:sp>
         <p:nvSpPr>
-          <p:cNvPr id="15" name="Text 12"/>
-          <p:cNvSpPr/>
-          <p:nvPr/>
-        </p:nvSpPr>
-        <p:spPr>
-          <a:xfrm>
-            <a:off x="914400" y="1691640"/>
-            <a:ext cx="10424160" cy="365760"/>
-          </a:xfrm>
-          <a:prstGeom prst="rect">
-            <a:avLst/>
-          </a:prstGeom>
-          <a:noFill/>
-          <a:ln/>
-        </p:spPr>
-        <p:txBody>
-          <a:bodyPr wrap="square" lIns="0" tIns="0" rIns="0" bIns="0" rtlCol="0" anchor="ctr"/>
-          <a:lstStyle/>
-          <a:p>
-            <a:pPr indent="0" marL="0">
+          <p:cNvPr id="18" name="Text 15"/>
+          <p:cNvSpPr/>
+          <p:nvPr/>
+        </p:nvSpPr>
+        <p:spPr>
+          <a:xfrm>
+            <a:off x="6537960" y="1627632"/>
+            <a:ext cx="4937760" cy="274320"/>
+          </a:xfrm>
+          <a:prstGeom prst="rect">
+            <a:avLst/>
+          </a:prstGeom>
+          <a:noFill/>
+          <a:ln/>
+        </p:spPr>
+        <p:txBody>
+          <a:bodyPr wrap="square" lIns="0" tIns="0" rIns="0" bIns="0" rtlCol="0" anchor="ctr"/>
+          <a:lstStyle/>
+          <a:p>
+            <a:pPr indent="0" marL="0">
+              <a:buNone/>
+            </a:pPr>
+            <a:r>
+              <a:rPr lang="en-US" sz="1150" b="1" spc="120" kern="0" dirty="0">
+                <a:solidFill>
+                  <a:srgbClr val="2A9D8F"/>
+                </a:solidFill>
+                <a:latin typeface="Inter" pitchFamily="34" charset="0"/>
+                <a:ea typeface="Inter" pitchFamily="34" charset="-122"/>
+                <a:cs typeface="Inter" pitchFamily="34" charset="-120"/>
+              </a:rPr>
+              <a:t>THE AI DISCLOSURE BLOCK · END OF THE WORK (STUDENT'S HALF)</a:t>
+            </a:r>
+            <a:endParaRPr lang="en-US" sz="1150" dirty="0"/>
+          </a:p>
+        </p:txBody>
+      </p:sp>
+      <p:sp>
+        <p:nvSpPr>
+          <p:cNvPr id="19" name="Text 16"/>
+          <p:cNvSpPr/>
+          <p:nvPr/>
+        </p:nvSpPr>
+        <p:spPr>
+          <a:xfrm>
+            <a:off x="6537960" y="2011680"/>
+            <a:ext cx="4892040" cy="3291840"/>
+          </a:xfrm>
+          <a:prstGeom prst="rect">
+            <a:avLst/>
+          </a:prstGeom>
+          <a:noFill/>
+          <a:ln/>
+        </p:spPr>
+        <p:txBody>
+          <a:bodyPr wrap="square" lIns="0" tIns="0" rIns="0" bIns="0" rtlCol="0" anchor="t"/>
+          <a:lstStyle/>
+          <a:p>
+            <a:pPr indent="0" marL="0">
+              <a:lnSpc>
+                <a:spcPct val="125000"/>
+              </a:lnSpc>
               <a:buNone/>
             </a:pPr>
             <a:r>
@@ -4992,7 +5299,98 @@
                 <a:ea typeface="Inter" pitchFamily="34" charset="-122"/>
                 <a:cs typeface="Inter" pitchFamily="34" charset="-120"/>
               </a:rPr>
-              <a:t>Two lines at the end of the work:</a:t>
+              <a:t>AI DISCLOSURE (check all that apply)
+</a:t>
+            </a:r>
+            <a:pPr indent="0" marL="0">
+              <a:lnSpc>
+                <a:spcPct val="125000"/>
+              </a:lnSpc>
+              <a:buNone/>
+            </a:pPr>
+            <a:r>
+              <a:rPr lang="en-US" sz="1600" dirty="0">
+                <a:solidFill>
+                  <a:srgbClr val="1B1F24"/>
+                </a:solidFill>
+                <a:latin typeface="Inter" pitchFamily="34" charset="0"/>
+                <a:ea typeface="Inter" pitchFamily="34" charset="-122"/>
+                <a:cs typeface="Inter" pitchFamily="34" charset="-120"/>
+              </a:rPr>
+              <a:t>□ No AI used
+□ AI helped me brainstorm or outline
+□ AI gave me feedback on a draft
+□ AI drafted text that I revised
+</a:t>
+            </a:r>
+            <a:pPr indent="0" marL="0">
+              <a:lnSpc>
+                <a:spcPct val="125000"/>
+              </a:lnSpc>
+              <a:buNone/>
+            </a:pPr>
+            <a:r>
+              <a:rPr lang="en-US" sz="1600" b="1" dirty="0">
+                <a:solidFill>
+                  <a:srgbClr val="13293D"/>
+                </a:solidFill>
+                <a:latin typeface="Inter" pitchFamily="34" charset="0"/>
+                <a:ea typeface="Inter" pitchFamily="34" charset="-122"/>
+                <a:cs typeface="Inter" pitchFamily="34" charset="-120"/>
+              </a:rPr>
+              <a:t>Tool I used: </a:t>
+            </a:r>
+            <a:pPr indent="0" marL="0">
+              <a:lnSpc>
+                <a:spcPct val="125000"/>
+              </a:lnSpc>
+              <a:buNone/>
+            </a:pPr>
+            <a:r>
+              <a:rPr lang="en-US" sz="1600" dirty="0">
+                <a:solidFill>
+                  <a:srgbClr val="1B1F24"/>
+                </a:solidFill>
+                <a:latin typeface="Inter" pitchFamily="34" charset="0"/>
+                <a:ea typeface="Inter" pitchFamily="34" charset="-122"/>
+                <a:cs typeface="Inter" pitchFamily="34" charset="-120"/>
+              </a:rPr>
+              <a:t>____________
+</a:t>
+            </a:r>
+            <a:pPr indent="0" marL="0">
+              <a:lnSpc>
+                <a:spcPct val="125000"/>
+              </a:lnSpc>
+              <a:buNone/>
+            </a:pPr>
+            <a:r>
+              <a:rPr lang="en-US" sz="1600" b="1" dirty="0">
+                <a:solidFill>
+                  <a:srgbClr val="13293D"/>
+                </a:solidFill>
+                <a:latin typeface="Inter" pitchFamily="34" charset="0"/>
+                <a:ea typeface="Inter" pitchFamily="34" charset="-122"/>
+                <a:cs typeface="Inter" pitchFamily="34" charset="-120"/>
+              </a:rPr>
+              <a:t>What I asked it to do: </a:t>
+            </a:r>
+            <a:pPr indent="0" marL="0">
+              <a:lnSpc>
+                <a:spcPct val="125000"/>
+              </a:lnSpc>
+              <a:buNone/>
+            </a:pPr>
+            <a:r>
+              <a:rPr lang="en-US" sz="1600" dirty="0">
+                <a:solidFill>
+                  <a:srgbClr val="1B1F24"/>
+                </a:solidFill>
+                <a:latin typeface="Inter" pitchFamily="34" charset="0"/>
+                <a:ea typeface="Inter" pitchFamily="34" charset="-122"/>
+                <a:cs typeface="Inter" pitchFamily="34" charset="-120"/>
+              </a:rPr>
+              <a:t>____________</a:t>
             </a:r>
             <a:endParaRPr lang="en-US" sz="1600" dirty="0"/>
           </a:p>
@@ -5000,142 +5398,40 @@
       </p:sp>
       <p:sp>
         <p:nvSpPr>
-          <p:cNvPr id="16" name="Text 13"/>
-          <p:cNvSpPr/>
-          <p:nvPr/>
-        </p:nvSpPr>
-        <p:spPr>
-          <a:xfrm>
-            <a:off x="914400" y="2103120"/>
-            <a:ext cx="10424160" cy="1005840"/>
-          </a:xfrm>
-          <a:prstGeom prst="rect">
-            <a:avLst/>
-          </a:prstGeom>
-          <a:noFill/>
-          <a:ln/>
-        </p:spPr>
-        <p:txBody>
-          <a:bodyPr wrap="square" lIns="0" tIns="0" rIns="0" bIns="0" rtlCol="0" anchor="ctr"/>
-          <a:lstStyle/>
-          <a:p>
-            <a:pPr indent="0" marL="0">
-              <a:buNone/>
-            </a:pPr>
-            <a:r>
-              <a:rPr lang="en-US" sz="1800" i="1" dirty="0">
-                <a:solidFill>
-                  <a:srgbClr val="1B1F24"/>
-                </a:solidFill>
-                <a:latin typeface="Inter" pitchFamily="34" charset="0"/>
-                <a:ea typeface="Inter" pitchFamily="34" charset="-122"/>
-                <a:cs typeface="Inter" pitchFamily="34" charset="-120"/>
-              </a:rPr>
-              <a:t>"I used a chatbot to brainstorm three opening ideas and picked one."</a:t>
-            </a:r>
-            <a:endParaRPr lang="en-US" sz="1800" dirty="0"/>
-          </a:p>
-          <a:p>
-            <a:pPr indent="0" marL="0">
-              <a:buNone/>
-            </a:pPr>
-            <a:r>
-              <a:rPr lang="en-US" sz="1800" i="1" dirty="0">
-                <a:solidFill>
-                  <a:srgbClr val="1B1F24"/>
-                </a:solidFill>
-                <a:latin typeface="Inter" pitchFamily="34" charset="0"/>
-                <a:ea typeface="Inter" pitchFamily="34" charset="-122"/>
-                <a:cs typeface="Inter" pitchFamily="34" charset="-120"/>
-              </a:rPr>
-              <a:t>"I pasted my draft in and used two of its suggestions."</a:t>
-            </a:r>
-            <a:endParaRPr lang="en-US" sz="1800" dirty="0"/>
-          </a:p>
-        </p:txBody>
-      </p:sp>
-      <p:sp>
-        <p:nvSpPr>
-          <p:cNvPr id="17" name="Text 14"/>
-          <p:cNvSpPr/>
-          <p:nvPr/>
-        </p:nvSpPr>
-        <p:spPr>
-          <a:xfrm>
-            <a:off x="640080" y="3474720"/>
-            <a:ext cx="10908792" cy="2011680"/>
-          </a:xfrm>
-          <a:prstGeom prst="rect">
-            <a:avLst/>
-          </a:prstGeom>
-          <a:noFill/>
-          <a:ln/>
-        </p:spPr>
-        <p:txBody>
-          <a:bodyPr wrap="square" rtlCol="0" anchor="t"/>
-          <a:lstStyle/>
-          <a:p>
-            <a:pPr marL="342900" indent="-342900">
-              <a:spcAft>
-                <a:spcPts val="1000"/>
-              </a:spcAft>
-              <a:buSzPct val="100000"/>
-              <a:buChar char="•"/>
-            </a:pPr>
-            <a:r>
-              <a:rPr lang="en-US" sz="1900" dirty="0">
-                <a:solidFill>
-                  <a:srgbClr val="1B1F24"/>
-                </a:solidFill>
-                <a:latin typeface="Inter" pitchFamily="34" charset="0"/>
-                <a:ea typeface="Inter" pitchFamily="34" charset="-122"/>
-                <a:cs typeface="Inter" pitchFamily="34" charset="-120"/>
-              </a:rPr>
-              <a:t>Disclosure turns AI use from a secret into a skill: the habit professionals need</a:t>
-            </a:r>
-            <a:endParaRPr lang="en-US" sz="1900" dirty="0"/>
-          </a:p>
-          <a:p>
-            <a:pPr marL="342900" indent="-342900">
-              <a:spcAft>
-                <a:spcPts val="1000"/>
-              </a:spcAft>
-              <a:buSzPct val="100000"/>
-              <a:buChar char="•"/>
-            </a:pPr>
-            <a:r>
-              <a:rPr lang="en-US" sz="1900" dirty="0">
-                <a:solidFill>
-                  <a:srgbClr val="1B1F24"/>
-                </a:solidFill>
-                <a:latin typeface="Inter" pitchFamily="34" charset="0"/>
-                <a:ea typeface="Inter" pitchFamily="34" charset="-122"/>
-                <a:cs typeface="Inter" pitchFamily="34" charset="-120"/>
-              </a:rPr>
-              <a:t>A culture where disclosure is normal makes hiding the exception</a:t>
-            </a:r>
-            <a:endParaRPr lang="en-US" sz="1900" dirty="0"/>
-          </a:p>
-          <a:p>
-            <a:pPr marL="342900" indent="-342900">
-              <a:spcAft>
-                <a:spcPts val="1000"/>
-              </a:spcAft>
-              <a:buSzPct val="100000"/>
-              <a:buChar char="•"/>
-            </a:pPr>
-            <a:r>
-              <a:rPr lang="en-US" sz="1900" b="1" dirty="0">
-                <a:solidFill>
-                  <a:srgbClr val="1B1F24"/>
-                </a:solidFill>
-                <a:latin typeface="Inter" pitchFamily="34" charset="0"/>
-                <a:ea typeface="Inter" pitchFamily="34" charset="-122"/>
-                <a:cs typeface="Inter" pitchFamily="34" charset="-120"/>
-              </a:rPr>
-              <a:t>The soft-landing rule: if a student disclosed it, the conversation is coaching, not consequences</a:t>
-            </a:r>
-            <a:endParaRPr lang="en-US" sz="1900" dirty="0"/>
+          <p:cNvPr id="20" name="Text 17"/>
+          <p:cNvSpPr/>
+          <p:nvPr/>
+        </p:nvSpPr>
+        <p:spPr>
+          <a:xfrm>
+            <a:off x="640080" y="5669280"/>
+            <a:ext cx="10972800" cy="502920"/>
+          </a:xfrm>
+          <a:prstGeom prst="rect">
+            <a:avLst/>
+          </a:prstGeom>
+          <a:noFill/>
+          <a:ln/>
+        </p:spPr>
+        <p:txBody>
+          <a:bodyPr wrap="square" lIns="0" tIns="0" rIns="0" bIns="0" rtlCol="0" anchor="ctr"/>
+          <a:lstStyle/>
+          <a:p>
+            <a:pPr algn="ctr" indent="0" marL="0">
+              <a:buNone/>
+            </a:pPr>
+            <a:r>
+              <a:rPr lang="en-US" sz="1700" b="1" dirty="0">
+                <a:solidFill>
+                  <a:srgbClr val="13293D"/>
+                </a:solidFill>
+                <a:latin typeface="Inter" pitchFamily="34" charset="0"/>
+                <a:ea typeface="Inter" pitchFamily="34" charset="-122"/>
+                <a:cs typeface="Inter" pitchFamily="34" charset="-120"/>
+              </a:rPr>
+              <a:t>Checkboxes beat "write two honest sentences": ten seconds to fill, identical in every room. And honesty gets a soft landing.</a:t>
+            </a:r>
+            <a:endParaRPr lang="en-US" sz="1700" dirty="0"/>
           </a:p>
         </p:txBody>
       </p:sp>
@@ -5488,7 +5784,7 @@
                 <a:ea typeface="Inter" pitchFamily="34" charset="-122"/>
                 <a:cs typeface="Inter" pitchFamily="34" charset="-120"/>
               </a:rPr>
-              <a:t>Her calls: quiz lane 1, essay lane 2, research lane 3, homework = design.</a:t>
+              <a:t>Her calls: quiz lane 1, essay lane 2, research lane 3, homework = the upgrades.</a:t>
             </a:r>
             <a:endParaRPr lang="en-US" sz="1000" dirty="0"/>
           </a:p>
@@ -6034,7 +6330,7 @@
                 <a:ea typeface="Inter" pitchFamily="34" charset="-122"/>
                 <a:cs typeface="Inter" pitchFamily="34" charset="-120"/>
               </a:rPr>
-              <a:t>Lane 1 by intent, unenforceable at home: design must carry it</a:t>
+              <a:t>Lane 1 by intent, unenforceable at home: the upgrades must carry it</a:t>
             </a:r>
             <a:endParaRPr lang="en-US" sz="1450" dirty="0"/>
           </a:p>
@@ -6389,7 +6685,7 @@
                 <a:ea typeface="Inter" pitchFamily="34" charset="-122"/>
                 <a:cs typeface="Inter" pitchFamily="34" charset="-120"/>
               </a:rPr>
-              <a:t>Her design moves: visible thinking, plus anchors from Tuesday's class.</a:t>
+              <a:t>Her upgrades so far: collect the outline, anchor to Tuesday's class.</a:t>
             </a:r>
             <a:endParaRPr lang="en-US" sz="1000" dirty="0"/>
           </a:p>
@@ -6428,7 +6724,7 @@
                 <a:ea typeface="Inter" pitchFamily="34" charset="-122"/>
                 <a:cs typeface="Inter" pitchFamily="34" charset="-120"/>
               </a:rPr>
-              <a:t>DESIGN MOVES · HONEST WORK AS THE EASY PATH</a:t>
+              <a:t>ASSIGNMENT UPGRADES · HONEST WORK AS THE EASY PATH</a:t>
             </a:r>
             <a:endParaRPr lang="en-US" sz="1200" dirty="0"/>
           </a:p>
@@ -6459,7 +6755,7 @@
               <a:buNone/>
             </a:pPr>
             <a:r>
-              <a:rPr lang="en-US" sz="2800" b="1" dirty="0">
+              <a:rPr lang="en-US" sz="2500" b="1" dirty="0">
                 <a:solidFill>
                   <a:srgbClr val="13293D"/>
                 </a:solidFill>
@@ -6467,9 +6763,9 @@
                 <a:ea typeface="Inter" pitchFamily="34" charset="-122"/>
                 <a:cs typeface="Inter" pitchFamily="34" charset="-120"/>
               </a:rPr>
-              <a:t>Move 1: visible thinking · Move 2: local anchors</a:t>
-            </a:r>
-            <a:endParaRPr lang="en-US" sz="2800" dirty="0"/>
+              <a:t>Upgrade 1: collect the thinking · Upgrade 2: anchor it to your room</a:t>
+            </a:r>
+            <a:endParaRPr lang="en-US" sz="2500" dirty="0"/>
           </a:p>
         </p:txBody>
       </p:sp>
@@ -7078,7 +7374,7 @@
                 <a:ea typeface="Inter" pitchFamily="34" charset="-122"/>
                 <a:cs typeface="Inter" pitchFamily="34" charset="-120"/>
               </a:rPr>
-              <a:t>Her other moves: a two-minute live defense; the process in the rubric.</a:t>
+              <a:t>Her other upgrades: a two-minute live defense; the process in the rubric.</a:t>
             </a:r>
             <a:endParaRPr lang="en-US" sz="1000" dirty="0"/>
           </a:p>
@@ -7117,7 +7413,7 @@
                 <a:ea typeface="Inter" pitchFamily="34" charset="-122"/>
                 <a:cs typeface="Inter" pitchFamily="34" charset="-120"/>
               </a:rPr>
-              <a:t>DESIGN MOVES · HONEST WORK AS THE EASY PATH</a:t>
+              <a:t>ASSIGNMENT UPGRADES · HONEST WORK AS THE EASY PATH</a:t>
             </a:r>
             <a:endParaRPr lang="en-US" sz="1200" dirty="0"/>
           </a:p>
@@ -7148,7 +7444,7 @@
               <a:buNone/>
             </a:pPr>
             <a:r>
-              <a:rPr lang="en-US" sz="2800" b="1" dirty="0">
+              <a:rPr lang="en-US" sz="2500" b="1" dirty="0">
                 <a:solidFill>
                   <a:srgbClr val="13293D"/>
                 </a:solidFill>
@@ -7156,9 +7452,9 @@
                 <a:ea typeface="Inter" pitchFamily="34" charset="-122"/>
                 <a:cs typeface="Inter" pitchFamily="34" charset="-120"/>
               </a:rPr>
-              <a:t>Move 3: live thinking · Move 4: assessed process</a:t>
-            </a:r>
-            <a:endParaRPr lang="en-US" sz="2800" dirty="0"/>
+              <a:t>Upgrade 3: add a live moment · Upgrade 4: grade the process</a:t>
+            </a:r>
+            <a:endParaRPr lang="en-US" sz="2500" dirty="0"/>
           </a:p>
         </p:txBody>
       </p:sp>
@@ -7389,7 +7685,7 @@
                 <a:ea typeface="Inter" pitchFamily="34" charset="-122"/>
                 <a:cs typeface="Inter" pitchFamily="34" charset="-120"/>
               </a:rPr>
-              <a:t>Where AI is allowed, grade the disclosure line, the prompts, and a short accept/reject reflection.</a:t>
+              <a:t>Where AI is allowed, grade the Disclosure block, the prompts, and a short accept/reject reflection.</a:t>
             </a:r>
             <a:endParaRPr lang="en-US" sz="1700" dirty="0"/>
           </a:p>
@@ -7451,7 +7747,7 @@
                 <a:ea typeface="Inter" pitchFamily="34" charset="-122"/>
                 <a:cs typeface="Inter" pitchFamily="34" charset="-120"/>
               </a:rPr>
-              <a:t>One move per assignment is usually enough to change the honesty math.</a:t>
+              <a:t>One upgrade per assignment is usually enough to change the honesty math.</a:t>
             </a:r>
             <a:endParaRPr lang="en-US" sz="1900" dirty="0"/>
           </a:p>
@@ -10311,7 +10607,7 @@
                 <a:ea typeface="Inter" pitchFamily="34" charset="-122"/>
                 <a:cs typeface="Inter" pitchFamily="34" charset="-120"/>
               </a:rPr>
-              <a:t>Her lab pick: the persuasive essay she assigns next week.</a:t>
+              <a:t>Her lab pick, one assignment all the way through: next week's persuasive essay.</a:t>
             </a:r>
             <a:endParaRPr lang="en-US" sz="1000" dirty="0"/>
           </a:p>
@@ -10737,7 +11033,7 @@
                 <a:ea typeface="Inter" pitchFamily="34" charset="-122"/>
                 <a:cs typeface="Inter" pitchFamily="34" charset="-120"/>
               </a:rPr>
-              <a:t>Four deliverables: the lane, the box, one design move, your two sentences</a:t>
+              <a:t>Four deliverables: the lane, the filled-in AI Box, one upgrade, your two sentences</a:t>
             </a:r>
             <a:endParaRPr lang="en-US" sz="2100" dirty="0"/>
           </a:p>
@@ -11092,7 +11388,7 @@
                 <a:ea typeface="Inter" pitchFamily="34" charset="-122"/>
                 <a:cs typeface="Inter" pitchFamily="34" charset="-120"/>
               </a:rPr>
-              <a:t>Her lanes: research lane 3, final draft lane 1. Defended in one sentence.</a:t>
+              <a:t>Her essay's lanes, on screen big: research 3, outline 2, final draft 1.</a:t>
             </a:r>
             <a:endParaRPr lang="en-US" sz="1000" dirty="0"/>
           </a:p>
@@ -11146,7 +11442,7 @@
         <p:spPr>
           <a:xfrm>
             <a:off x="548640" y="384048"/>
-            <a:ext cx="11091672" cy="777240"/>
+            <a:ext cx="7955280" cy="777240"/>
           </a:xfrm>
           <a:prstGeom prst="rect">
             <a:avLst/>
@@ -11184,8 +11480,8 @@
         </p:nvSpPr>
         <p:spPr>
           <a:xfrm>
-            <a:off x="640080" y="1371600"/>
-            <a:ext cx="10908792" cy="4297680"/>
+            <a:off x="640080" y="1554480"/>
+            <a:ext cx="5394960" cy="4023360"/>
           </a:xfrm>
           <a:prstGeom prst="rect">
             <a:avLst/>
@@ -11205,7 +11501,7 @@
               <a:buChar char="•"/>
             </a:pPr>
             <a:r>
-              <a:rPr lang="en-US" sz="2100" dirty="0">
+              <a:rPr lang="en-US" sz="1800" dirty="0">
                 <a:solidFill>
                   <a:srgbClr val="1B1F24"/>
                 </a:solidFill>
@@ -11215,7 +11511,7 @@
               </a:rPr>
               <a:t>One lane for the whole assignment, or a lane per part</a:t>
             </a:r>
-            <a:endParaRPr lang="en-US" sz="2100" dirty="0"/>
+            <a:endParaRPr lang="en-US" sz="1800" dirty="0"/>
           </a:p>
           <a:p>
             <a:pPr marL="342900" indent="-342900">
@@ -11226,7 +11522,7 @@
               <a:buChar char="•"/>
             </a:pPr>
             <a:r>
-              <a:rPr lang="en-US" sz="2100" dirty="0">
+              <a:rPr lang="en-US" sz="1800" dirty="0">
                 <a:solidFill>
                   <a:srgbClr val="1B1F24"/>
                 </a:solidFill>
@@ -11234,9 +11530,9 @@
                 <a:ea typeface="Inter" pitchFamily="34" charset="-122"/>
                 <a:cs typeface="Inter" pitchFamily="34" charset="-120"/>
               </a:rPr>
-              <a:t>"Research lane 3, final draft lane 1" is a perfectly good answer</a:t>
-            </a:r>
-            <a:endParaRPr lang="en-US" sz="2100" dirty="0"/>
+              <a:t>Say your lane out loud to your partner</a:t>
+            </a:r>
+            <a:endParaRPr lang="en-US" sz="1800" dirty="0"/>
           </a:p>
           <a:p>
             <a:pPr marL="342900" indent="-342900">
@@ -11247,7 +11543,7 @@
               <a:buChar char="•"/>
             </a:pPr>
             <a:r>
-              <a:rPr lang="en-US" sz="2100" dirty="0">
+              <a:rPr lang="en-US" sz="1800" dirty="0">
                 <a:solidFill>
                   <a:srgbClr val="1B1F24"/>
                 </a:solidFill>
@@ -11255,9 +11551,9 @@
                 <a:ea typeface="Inter" pitchFamily="34" charset="-122"/>
                 <a:cs typeface="Inter" pitchFamily="34" charset="-120"/>
               </a:rPr>
-              <a:t>Say your lane out loud to your partner and defend it in one sentence</a:t>
-            </a:r>
-            <a:endParaRPr lang="en-US" sz="2100" dirty="0"/>
+              <a:t>Defend it in one sentence</a:t>
+            </a:r>
+            <a:endParaRPr lang="en-US" sz="1800" dirty="0"/>
           </a:p>
           <a:p>
             <a:pPr marL="342900" indent="-342900">
@@ -11268,7 +11564,7 @@
               <a:buChar char="•"/>
             </a:pPr>
             <a:r>
-              <a:rPr lang="en-US" sz="2100" b="1" dirty="0">
+              <a:rPr lang="en-US" sz="1800" b="1" dirty="0">
                 <a:solidFill>
                   <a:srgbClr val="1B1F24"/>
                 </a:solidFill>
@@ -11278,7 +11574,220 @@
               </a:rPr>
               <a:t>Can't defend it? The assignment might not know what it's assessing yet.</a:t>
             </a:r>
-            <a:endParaRPr lang="en-US" sz="2100" dirty="0"/>
+            <a:endParaRPr lang="en-US" sz="1800" dirty="0"/>
+          </a:p>
+        </p:txBody>
+      </p:sp>
+      <p:sp>
+        <p:nvSpPr>
+          <p:cNvPr id="15" name="Shape 12"/>
+          <p:cNvSpPr/>
+          <p:nvPr/>
+        </p:nvSpPr>
+        <p:spPr>
+          <a:xfrm>
+            <a:off x="6263640" y="1554480"/>
+            <a:ext cx="5394960" cy="4023360"/>
+          </a:xfrm>
+          <a:prstGeom prst="roundRect">
+            <a:avLst>
+              <a:gd name="adj" fmla="val 2045"/>
+            </a:avLst>
+          </a:prstGeom>
+          <a:solidFill>
+            <a:srgbClr val="EAF5F3"/>
+          </a:solidFill>
+          <a:ln w="12700">
+            <a:solidFill>
+              <a:srgbClr val="EAF5F3"/>
+            </a:solidFill>
+            <a:prstDash val="solid"/>
+          </a:ln>
+        </p:spPr>
+      </p:sp>
+      <p:sp>
+        <p:nvSpPr>
+          <p:cNvPr id="16" name="Text 13"/>
+          <p:cNvSpPr/>
+          <p:nvPr/>
+        </p:nvSpPr>
+        <p:spPr>
+          <a:xfrm>
+            <a:off x="6537960" y="1737360"/>
+            <a:ext cx="4937760" cy="292608"/>
+          </a:xfrm>
+          <a:prstGeom prst="rect">
+            <a:avLst/>
+          </a:prstGeom>
+          <a:noFill/>
+          <a:ln/>
+        </p:spPr>
+        <p:txBody>
+          <a:bodyPr wrap="square" lIns="0" tIns="0" rIns="0" bIns="0" rtlCol="0" anchor="ctr"/>
+          <a:lstStyle/>
+          <a:p>
+            <a:pPr indent="0" marL="0">
+              <a:buNone/>
+            </a:pPr>
+            <a:r>
+              <a:rPr lang="en-US" sz="1250" b="1" spc="150" kern="0" dirty="0">
+                <a:solidFill>
+                  <a:srgbClr val="2A9D8F"/>
+                </a:solidFill>
+                <a:latin typeface="Inter" pitchFamily="34" charset="0"/>
+                <a:ea typeface="Inter" pitchFamily="34" charset="-122"/>
+                <a:cs typeface="Inter" pitchFamily="34" charset="-120"/>
+              </a:rPr>
+              <a:t>MS. RIVERA'S ESSAY · STEP 1</a:t>
+            </a:r>
+            <a:endParaRPr lang="en-US" sz="1250" dirty="0"/>
+          </a:p>
+        </p:txBody>
+      </p:sp>
+      <p:sp>
+        <p:nvSpPr>
+          <p:cNvPr id="17" name="Text 14"/>
+          <p:cNvSpPr/>
+          <p:nvPr/>
+        </p:nvSpPr>
+        <p:spPr>
+          <a:xfrm>
+            <a:off x="6537960" y="2148840"/>
+            <a:ext cx="4892040" cy="3200400"/>
+          </a:xfrm>
+          <a:prstGeom prst="rect">
+            <a:avLst/>
+          </a:prstGeom>
+          <a:noFill/>
+          <a:ln/>
+        </p:spPr>
+        <p:txBody>
+          <a:bodyPr wrap="square" lIns="0" tIns="0" rIns="0" bIns="0" rtlCol="0" anchor="t"/>
+          <a:lstStyle/>
+          <a:p>
+            <a:pPr indent="0" marL="0">
+              <a:lnSpc>
+                <a:spcPct val="130000"/>
+              </a:lnSpc>
+              <a:buNone/>
+            </a:pPr>
+            <a:r>
+              <a:rPr lang="en-US" sz="2200" b="1" dirty="0">
+                <a:solidFill>
+                  <a:srgbClr val="13293D"/>
+                </a:solidFill>
+                <a:latin typeface="Inter" pitchFamily="34" charset="0"/>
+                <a:ea typeface="Inter" pitchFamily="34" charset="-122"/>
+                <a:cs typeface="Inter" pitchFamily="34" charset="-120"/>
+              </a:rPr>
+              <a:t>Research</a:t>
+            </a:r>
+            <a:pPr indent="0" marL="0">
+              <a:lnSpc>
+                <a:spcPct val="130000"/>
+              </a:lnSpc>
+              <a:buNone/>
+            </a:pPr>
+            <a:r>
+              <a:rPr lang="en-US" sz="2200" dirty="0">
+                <a:solidFill>
+                  <a:srgbClr val="1B1F24"/>
+                </a:solidFill>
+                <a:latin typeface="Inter" pitchFamily="34" charset="0"/>
+                <a:ea typeface="Inter" pitchFamily="34" charset="-122"/>
+                <a:cs typeface="Inter" pitchFamily="34" charset="-120"/>
+              </a:rPr>
+              <a:t>  →  Lane 3
+</a:t>
+            </a:r>
+            <a:pPr indent="0" marL="0">
+              <a:lnSpc>
+                <a:spcPct val="130000"/>
+              </a:lnSpc>
+              <a:buNone/>
+            </a:pPr>
+            <a:r>
+              <a:rPr lang="en-US" sz="2200" b="1" dirty="0">
+                <a:solidFill>
+                  <a:srgbClr val="13293D"/>
+                </a:solidFill>
+                <a:latin typeface="Inter" pitchFamily="34" charset="0"/>
+                <a:ea typeface="Inter" pitchFamily="34" charset="-122"/>
+                <a:cs typeface="Inter" pitchFamily="34" charset="-120"/>
+              </a:rPr>
+              <a:t>Outline</a:t>
+            </a:r>
+            <a:pPr indent="0" marL="0">
+              <a:lnSpc>
+                <a:spcPct val="130000"/>
+              </a:lnSpc>
+              <a:buNone/>
+            </a:pPr>
+            <a:r>
+              <a:rPr lang="en-US" sz="2200" dirty="0">
+                <a:solidFill>
+                  <a:srgbClr val="1B1F24"/>
+                </a:solidFill>
+                <a:latin typeface="Inter" pitchFamily="34" charset="0"/>
+                <a:ea typeface="Inter" pitchFamily="34" charset="-122"/>
+                <a:cs typeface="Inter" pitchFamily="34" charset="-120"/>
+              </a:rPr>
+              <a:t>  →  Lane 2
+</a:t>
+            </a:r>
+            <a:pPr indent="0" marL="0">
+              <a:lnSpc>
+                <a:spcPct val="130000"/>
+              </a:lnSpc>
+              <a:buNone/>
+            </a:pPr>
+            <a:r>
+              <a:rPr lang="en-US" sz="2200" b="1" dirty="0">
+                <a:solidFill>
+                  <a:srgbClr val="13293D"/>
+                </a:solidFill>
+                <a:latin typeface="Inter" pitchFamily="34" charset="0"/>
+                <a:ea typeface="Inter" pitchFamily="34" charset="-122"/>
+                <a:cs typeface="Inter" pitchFamily="34" charset="-120"/>
+              </a:rPr>
+              <a:t>Final draft</a:t>
+            </a:r>
+            <a:pPr indent="0" marL="0">
+              <a:lnSpc>
+                <a:spcPct val="130000"/>
+              </a:lnSpc>
+              <a:buNone/>
+            </a:pPr>
+            <a:r>
+              <a:rPr lang="en-US" sz="2200" dirty="0">
+                <a:solidFill>
+                  <a:srgbClr val="1B1F24"/>
+                </a:solidFill>
+                <a:latin typeface="Inter" pitchFamily="34" charset="0"/>
+                <a:ea typeface="Inter" pitchFamily="34" charset="-122"/>
+                <a:cs typeface="Inter" pitchFamily="34" charset="-120"/>
+              </a:rPr>
+              <a:t>  →  Lane 1
+</a:t>
+            </a:r>
+            <a:pPr indent="0" marL="0">
+              <a:lnSpc>
+                <a:spcPct val="130000"/>
+              </a:lnSpc>
+              <a:buNone/>
+            </a:pPr>
+            <a:r>
+              <a:rPr lang="en-US" sz="2200" i="1" dirty="0">
+                <a:solidFill>
+                  <a:srgbClr val="5B6B7A"/>
+                </a:solidFill>
+                <a:latin typeface="Inter" pitchFamily="34" charset="0"/>
+                <a:ea typeface="Inter" pitchFamily="34" charset="-122"/>
+                <a:cs typeface="Inter" pitchFamily="34" charset="-120"/>
+              </a:rPr>
+              <a:t>"I'm grading the argument, not the typing."</a:t>
+            </a:r>
+            <a:endParaRPr lang="en-US" sz="2200" dirty="0"/>
           </a:p>
         </p:txBody>
       </p:sp>
@@ -12262,7 +12771,7 @@
                 <a:ea typeface="Inter" pitchFamily="34" charset="-122"/>
                 <a:cs typeface="Inter" pitchFamily="34" charset="-120"/>
               </a:rPr>
-              <a:t>Write the AI-expectation box</a:t>
+              <a:t>Fill in the AI Box</a:t>
             </a:r>
             <a:endParaRPr lang="en-US" sz="3200" dirty="0"/>
           </a:p>
@@ -12277,11 +12786,11 @@
         <p:spPr>
           <a:xfrm>
             <a:off x="640080" y="1463040"/>
-            <a:ext cx="5394960" cy="3566160"/>
+            <a:ext cx="4160520" cy="3703320"/>
           </a:xfrm>
           <a:prstGeom prst="roundRect">
             <a:avLst>
-              <a:gd name="adj" fmla="val 2308"/>
+              <a:gd name="adj" fmla="val 2222"/>
             </a:avLst>
           </a:prstGeom>
           <a:solidFill>
@@ -12303,24 +12812,24 @@
         </p:nvSpPr>
         <p:spPr>
           <a:xfrm>
-            <a:off x="914400" y="1627632"/>
-            <a:ext cx="4846320" cy="274320"/>
-          </a:xfrm>
-          <a:prstGeom prst="rect">
-            <a:avLst/>
-          </a:prstGeom>
-          <a:noFill/>
-          <a:ln/>
-        </p:spPr>
-        <p:txBody>
-          <a:bodyPr wrap="square" lIns="0" tIns="0" rIns="0" bIns="0" rtlCol="0" anchor="ctr"/>
-          <a:lstStyle/>
-          <a:p>
-            <a:pPr indent="0" marL="0">
-              <a:buNone/>
-            </a:pPr>
-            <a:r>
-              <a:rPr lang="en-US" sz="1200" b="1" spc="200" kern="0" dirty="0">
+            <a:off x="868680" y="1627632"/>
+            <a:ext cx="3749040" cy="274320"/>
+          </a:xfrm>
+          <a:prstGeom prst="rect">
+            <a:avLst/>
+          </a:prstGeom>
+          <a:noFill/>
+          <a:ln/>
+        </p:spPr>
+        <p:txBody>
+          <a:bodyPr wrap="square" lIns="0" tIns="0" rIns="0" bIns="0" rtlCol="0" anchor="ctr"/>
+          <a:lstStyle/>
+          <a:p>
+            <a:pPr indent="0" marL="0">
+              <a:buNone/>
+            </a:pPr>
+            <a:r>
+              <a:rPr lang="en-US" sz="1100" b="1" spc="150" kern="0" dirty="0">
                 <a:solidFill>
                   <a:srgbClr val="5B6B7A"/>
                 </a:solidFill>
@@ -12328,9 +12837,9 @@
                 <a:ea typeface="Inter" pitchFamily="34" charset="-122"/>
                 <a:cs typeface="Inter" pitchFamily="34" charset="-120"/>
               </a:rPr>
-              <a:t>THE TEMPLATE</a:t>
-            </a:r>
-            <a:endParaRPr lang="en-US" sz="1200" dirty="0"/>
+              <a:t>THE SCHOOL TEMPLATE (SLIDE 11)</a:t>
+            </a:r>
+            <a:endParaRPr lang="en-US" sz="1100" dirty="0"/>
           </a:p>
         </p:txBody>
       </p:sp>
@@ -12342,8 +12851,8 @@
         </p:nvSpPr>
         <p:spPr>
           <a:xfrm>
-            <a:off x="914400" y="1965960"/>
-            <a:ext cx="4892040" cy="2926080"/>
+            <a:off x="868680" y="1965960"/>
+            <a:ext cx="3749040" cy="3017520"/>
           </a:xfrm>
           <a:prstGeom prst="rect">
             <a:avLst/>
@@ -12362,7 +12871,7 @@
               <a:buNone/>
             </a:pPr>
             <a:r>
-              <a:rPr lang="en-US" sz="1600" b="1" dirty="0">
+              <a:rPr lang="en-US" sz="1400" b="1" dirty="0">
                 <a:solidFill>
                   <a:srgbClr val="13293D"/>
                 </a:solidFill>
@@ -12379,7 +12888,7 @@
               <a:buNone/>
             </a:pPr>
             <a:r>
-              <a:rPr lang="en-US" sz="1600" dirty="0">
+              <a:rPr lang="en-US" sz="1400" dirty="0">
                 <a:solidFill>
                   <a:srgbClr val="1B1F24"/>
                 </a:solidFill>
@@ -12387,7 +12896,7 @@
                 <a:ea typeface="Inter" pitchFamily="34" charset="-122"/>
                 <a:cs typeface="Inter" pitchFamily="34" charset="-120"/>
               </a:rPr>
-              <a:t>[1 / 2 / 3], because [what this assignment teaches]
+              <a:t>□ 1  □ 2  □ 3
 </a:t>
             </a:r>
             <a:pPr indent="0" marL="0">
@@ -12397,7 +12906,7 @@
               <a:buNone/>
             </a:pPr>
             <a:r>
-              <a:rPr lang="en-US" sz="1600" b="1" dirty="0">
+              <a:rPr lang="en-US" sz="1400" b="1" dirty="0">
                 <a:solidFill>
                   <a:srgbClr val="13293D"/>
                 </a:solidFill>
@@ -12414,7 +12923,7 @@
               <a:buNone/>
             </a:pPr>
             <a:r>
-              <a:rPr lang="en-US" sz="1600" dirty="0">
+              <a:rPr lang="en-US" sz="1400" dirty="0">
                 <a:solidFill>
                   <a:srgbClr val="1B1F24"/>
                 </a:solidFill>
@@ -12422,7 +12931,7 @@
                 <a:ea typeface="Inter" pitchFamily="34" charset="-122"/>
                 <a:cs typeface="Inter" pitchFamily="34" charset="-120"/>
               </a:rPr>
-              <a:t>[what's allowed, in student words]
+              <a:t>[student words]
 </a:t>
             </a:r>
             <a:pPr indent="0" marL="0">
@@ -12432,7 +12941,7 @@
               <a:buNone/>
             </a:pPr>
             <a:r>
-              <a:rPr lang="en-US" sz="1600" b="1" dirty="0">
+              <a:rPr lang="en-US" sz="1400" b="1" dirty="0">
                 <a:solidFill>
                   <a:srgbClr val="13293D"/>
                 </a:solidFill>
@@ -12449,7 +12958,7 @@
               <a:buNone/>
             </a:pPr>
             <a:r>
-              <a:rPr lang="en-US" sz="1600" dirty="0">
+              <a:rPr lang="en-US" sz="1400" dirty="0">
                 <a:solidFill>
                   <a:srgbClr val="1B1F24"/>
                 </a:solidFill>
@@ -12457,7 +12966,7 @@
                 <a:ea typeface="Inter" pitchFamily="34" charset="-122"/>
                 <a:cs typeface="Inter" pitchFamily="34" charset="-120"/>
               </a:rPr>
-              <a:t>[what's not, in student words]
+              <a:t>[student words]
 </a:t>
             </a:r>
             <a:pPr indent="0" marL="0">
@@ -12467,7 +12976,7 @@
               <a:buNone/>
             </a:pPr>
             <a:r>
-              <a:rPr lang="en-US" sz="1600" b="1" dirty="0">
+              <a:rPr lang="en-US" sz="1400" b="1" dirty="0">
                 <a:solidFill>
                   <a:srgbClr val="13293D"/>
                 </a:solidFill>
@@ -12475,7 +12984,7 @@
                 <a:ea typeface="Inter" pitchFamily="34" charset="-122"/>
                 <a:cs typeface="Inter" pitchFamily="34" charset="-120"/>
               </a:rPr>
-              <a:t>If you used AI: </a:t>
+              <a:t>Disclosure: </a:t>
             </a:r>
             <a:pPr indent="0" marL="0">
               <a:lnSpc>
@@ -12484,7 +12993,7 @@
               <a:buNone/>
             </a:pPr>
             <a:r>
-              <a:rPr lang="en-US" sz="1600" dirty="0">
+              <a:rPr lang="en-US" sz="1400" dirty="0">
                 <a:solidFill>
                   <a:srgbClr val="1B1F24"/>
                 </a:solidFill>
@@ -12492,7 +13001,7 @@
                 <a:ea typeface="Inter" pitchFamily="34" charset="-122"/>
                 <a:cs typeface="Inter" pitchFamily="34" charset="-120"/>
               </a:rPr>
-              <a:t>two lines: what tool, what it did
+              <a:t>the block, every time
 </a:t>
             </a:r>
             <a:pPr indent="0" marL="0">
@@ -12502,7 +13011,7 @@
               <a:buNone/>
             </a:pPr>
             <a:r>
-              <a:rPr lang="en-US" sz="1600" b="1" dirty="0">
+              <a:rPr lang="en-US" sz="1400" b="1" dirty="0">
                 <a:solidFill>
                   <a:srgbClr val="13293D"/>
                 </a:solidFill>
@@ -12519,7 +13028,7 @@
               <a:buNone/>
             </a:pPr>
             <a:r>
-              <a:rPr lang="en-US" sz="1600" dirty="0">
+              <a:rPr lang="en-US" sz="1400" dirty="0">
                 <a:solidFill>
                   <a:srgbClr val="1B1F24"/>
                 </a:solidFill>
@@ -12527,9 +13036,9 @@
                 <a:ea typeface="Inter" pitchFamily="34" charset="-122"/>
                 <a:cs typeface="Inter" pitchFamily="34" charset="-120"/>
               </a:rPr>
-              <a:t>we walk through the work together.</a:t>
-            </a:r>
-            <a:endParaRPr lang="en-US" sz="1600" dirty="0"/>
+              <a:t>we talk it through.</a:t>
+            </a:r>
+            <a:endParaRPr lang="en-US" sz="1400" dirty="0"/>
           </a:p>
         </p:txBody>
       </p:sp>
@@ -12541,12 +13050,12 @@
         </p:nvSpPr>
         <p:spPr>
           <a:xfrm>
-            <a:off x="6263640" y="1463040"/>
-            <a:ext cx="5394960" cy="3566160"/>
+            <a:off x="5029200" y="1463040"/>
+            <a:ext cx="6629400" cy="3703320"/>
           </a:xfrm>
           <a:prstGeom prst="roundRect">
             <a:avLst>
-              <a:gd name="adj" fmla="val 2308"/>
+              <a:gd name="adj" fmla="val 2222"/>
             </a:avLst>
           </a:prstGeom>
           <a:solidFill>
@@ -12568,24 +13077,24 @@
         </p:nvSpPr>
         <p:spPr>
           <a:xfrm>
-            <a:off x="6537960" y="1627632"/>
-            <a:ext cx="4846320" cy="274320"/>
-          </a:xfrm>
-          <a:prstGeom prst="rect">
-            <a:avLst/>
-          </a:prstGeom>
-          <a:noFill/>
-          <a:ln/>
-        </p:spPr>
-        <p:txBody>
-          <a:bodyPr wrap="square" lIns="0" tIns="0" rIns="0" bIns="0" rtlCol="0" anchor="ctr"/>
-          <a:lstStyle/>
-          <a:p>
-            <a:pPr indent="0" marL="0">
-              <a:buNone/>
-            </a:pPr>
-            <a:r>
-              <a:rPr lang="en-US" sz="1200" b="1" spc="150" kern="0" dirty="0">
+            <a:off x="5303520" y="1627632"/>
+            <a:ext cx="6126480" cy="274320"/>
+          </a:xfrm>
+          <a:prstGeom prst="rect">
+            <a:avLst/>
+          </a:prstGeom>
+          <a:noFill/>
+          <a:ln/>
+        </p:spPr>
+        <p:txBody>
+          <a:bodyPr wrap="square" lIns="0" tIns="0" rIns="0" bIns="0" rtlCol="0" anchor="ctr"/>
+          <a:lstStyle/>
+          <a:p>
+            <a:pPr indent="0" marL="0">
+              <a:buNone/>
+            </a:pPr>
+            <a:r>
+              <a:rPr lang="en-US" sz="1250" b="1" spc="150" kern="0" dirty="0">
                 <a:solidFill>
                   <a:srgbClr val="2A9D8F"/>
                 </a:solidFill>
@@ -12593,9 +13102,9 @@
                 <a:ea typeface="Inter" pitchFamily="34" charset="-122"/>
                 <a:cs typeface="Inter" pitchFamily="34" charset="-120"/>
               </a:rPr>
-              <a:t>MS. RIVERA'S BOX · PERSUASIVE ESSAY (COMPOSITE EXAMPLE)</a:t>
-            </a:r>
-            <a:endParaRPr lang="en-US" sz="1200" dirty="0"/>
+              <a:t>MS. RIVERA'S ESSAY · STEP 2 · HER BOX, FILLED IN</a:t>
+            </a:r>
+            <a:endParaRPr lang="en-US" sz="1250" dirty="0"/>
           </a:p>
         </p:txBody>
       </p:sp>
@@ -12607,8 +13116,8 @@
         </p:nvSpPr>
         <p:spPr>
           <a:xfrm>
-            <a:off x="6537960" y="1965960"/>
-            <a:ext cx="4892040" cy="2926080"/>
+            <a:off x="5303520" y="1965960"/>
+            <a:ext cx="6080760" cy="3108960"/>
           </a:xfrm>
           <a:prstGeom prst="rect">
             <a:avLst/>
@@ -12622,12 +13131,12 @@
           <a:p>
             <a:pPr indent="0" marL="0">
               <a:lnSpc>
-                <a:spcPct val="120000"/>
+                <a:spcPct val="125000"/>
               </a:lnSpc>
               <a:buNone/>
             </a:pPr>
             <a:r>
-              <a:rPr lang="en-US" sz="1600" b="1" dirty="0">
+              <a:rPr lang="en-US" sz="1750" b="1" dirty="0">
                 <a:solidFill>
                   <a:srgbClr val="13293D"/>
                 </a:solidFill>
@@ -12639,12 +13148,12 @@
             </a:r>
             <a:pPr indent="0" marL="0">
               <a:lnSpc>
-                <a:spcPct val="120000"/>
+                <a:spcPct val="125000"/>
               </a:lnSpc>
               <a:buNone/>
             </a:pPr>
             <a:r>
-              <a:rPr lang="en-US" sz="1600" dirty="0">
+              <a:rPr lang="en-US" sz="1750" dirty="0">
                 <a:solidFill>
                   <a:srgbClr val="1B1F24"/>
                 </a:solidFill>
@@ -12652,17 +13161,17 @@
                 <a:ea typeface="Inter" pitchFamily="34" charset="-122"/>
                 <a:cs typeface="Inter" pitchFamily="34" charset="-120"/>
               </a:rPr>
-              <a:t>2 · AI-assisted, because I'm grading your argument, not your typing.
+              <a:t>☒ 2 · AI-assisted, because I'm grading your argument, not your typing.
 </a:t>
             </a:r>
             <a:pPr indent="0" marL="0">
               <a:lnSpc>
-                <a:spcPct val="120000"/>
+                <a:spcPct val="125000"/>
               </a:lnSpc>
               <a:buNone/>
             </a:pPr>
             <a:r>
-              <a:rPr lang="en-US" sz="1600" b="1" dirty="0">
+              <a:rPr lang="en-US" sz="1750" b="1" dirty="0">
                 <a:solidFill>
                   <a:srgbClr val="13293D"/>
                 </a:solidFill>
@@ -12674,12 +13183,12 @@
             </a:r>
             <a:pPr indent="0" marL="0">
               <a:lnSpc>
-                <a:spcPct val="120000"/>
+                <a:spcPct val="125000"/>
               </a:lnSpc>
               <a:buNone/>
             </a:pPr>
             <a:r>
-              <a:rPr lang="en-US" sz="1600" dirty="0">
+              <a:rPr lang="en-US" sz="1750" dirty="0">
                 <a:solidFill>
                   <a:srgbClr val="1B1F24"/>
                 </a:solidFill>
@@ -12692,12 +13201,12 @@
             </a:r>
             <a:pPr indent="0" marL="0">
               <a:lnSpc>
-                <a:spcPct val="120000"/>
+                <a:spcPct val="125000"/>
               </a:lnSpc>
               <a:buNone/>
             </a:pPr>
             <a:r>
-              <a:rPr lang="en-US" sz="1600" b="1" dirty="0">
+              <a:rPr lang="en-US" sz="1750" b="1" dirty="0">
                 <a:solidFill>
                   <a:srgbClr val="13293D"/>
                 </a:solidFill>
@@ -12709,12 +13218,12 @@
             </a:r>
             <a:pPr indent="0" marL="0">
               <a:lnSpc>
-                <a:spcPct val="120000"/>
+                <a:spcPct val="125000"/>
               </a:lnSpc>
               <a:buNone/>
             </a:pPr>
             <a:r>
-              <a:rPr lang="en-US" sz="1600" dirty="0">
+              <a:rPr lang="en-US" sz="1750" dirty="0">
                 <a:solidFill>
                   <a:srgbClr val="1B1F24"/>
                 </a:solidFill>
@@ -12727,12 +13236,12 @@
             </a:r>
             <a:pPr indent="0" marL="0">
               <a:lnSpc>
-                <a:spcPct val="120000"/>
+                <a:spcPct val="125000"/>
               </a:lnSpc>
               <a:buNone/>
             </a:pPr>
             <a:r>
-              <a:rPr lang="en-US" sz="1600" b="1" dirty="0">
+              <a:rPr lang="en-US" sz="1750" b="1" dirty="0">
                 <a:solidFill>
                   <a:srgbClr val="13293D"/>
                 </a:solidFill>
@@ -12740,16 +13249,16 @@
                 <a:ea typeface="Inter" pitchFamily="34" charset="-122"/>
                 <a:cs typeface="Inter" pitchFamily="34" charset="-120"/>
               </a:rPr>
-              <a:t>If you used AI: </a:t>
+              <a:t>Disclosure: </a:t>
             </a:r>
             <a:pPr indent="0" marL="0">
               <a:lnSpc>
-                <a:spcPct val="120000"/>
+                <a:spcPct val="125000"/>
               </a:lnSpc>
               <a:buNone/>
             </a:pPr>
             <a:r>
-              <a:rPr lang="en-US" sz="1600" dirty="0">
+              <a:rPr lang="en-US" sz="1750" dirty="0">
                 <a:solidFill>
                   <a:srgbClr val="1B1F24"/>
                 </a:solidFill>
@@ -12757,17 +13266,17 @@
                 <a:ea typeface="Inter" pitchFamily="34" charset="-122"/>
                 <a:cs typeface="Inter" pitchFamily="34" charset="-120"/>
               </a:rPr>
-              <a:t>two lines at the end.
+              <a:t>fill in the Disclosure block at the end. Every time.
 </a:t>
             </a:r>
             <a:pPr indent="0" marL="0">
               <a:lnSpc>
-                <a:spcPct val="120000"/>
+                <a:spcPct val="125000"/>
               </a:lnSpc>
               <a:buNone/>
             </a:pPr>
             <a:r>
-              <a:rPr lang="en-US" sz="1600" b="1" dirty="0">
+              <a:rPr lang="en-US" sz="1750" b="1" dirty="0">
                 <a:solidFill>
                   <a:srgbClr val="13293D"/>
                 </a:solidFill>
@@ -12779,12 +13288,12 @@
             </a:r>
             <a:pPr indent="0" marL="0">
               <a:lnSpc>
-                <a:spcPct val="120000"/>
+                <a:spcPct val="125000"/>
               </a:lnSpc>
               <a:buNone/>
             </a:pPr>
             <a:r>
-              <a:rPr lang="en-US" sz="1600" dirty="0">
+              <a:rPr lang="en-US" sz="1750" dirty="0">
                 <a:solidFill>
                   <a:srgbClr val="1B1F24"/>
                 </a:solidFill>
@@ -12794,7 +13303,7 @@
               </a:rPr>
               <a:t>we'll talk it through, not write it up.</a:t>
             </a:r>
-            <a:endParaRPr lang="en-US" sz="1600" dirty="0"/>
+            <a:endParaRPr lang="en-US" sz="1750" dirty="0"/>
           </a:p>
         </p:txBody>
       </p:sp>
@@ -12806,7 +13315,7 @@
         </p:nvSpPr>
         <p:spPr>
           <a:xfrm>
-            <a:off x="640080" y="5257800"/>
+            <a:off x="640080" y="5349240"/>
             <a:ext cx="10972800" cy="502920"/>
           </a:xfrm>
           <a:prstGeom prst="rect">
@@ -13186,7 +13695,7 @@
                 <a:ea typeface="Inter" pitchFamily="34" charset="-122"/>
                 <a:cs typeface="Inter" pitchFamily="34" charset="-120"/>
               </a:rPr>
-              <a:t>Her design change: outline due Thursday, worth ten points.</a:t>
+              <a:t>Her essay's upgrade, on screen: outline due Thursday, worth ten points.</a:t>
             </a:r>
             <a:endParaRPr lang="en-US" sz="1000" dirty="0"/>
           </a:p>
@@ -13240,7 +13749,7 @@
         <p:spPr>
           <a:xfrm>
             <a:off x="548640" y="384048"/>
-            <a:ext cx="11091672" cy="777240"/>
+            <a:ext cx="7955280" cy="777240"/>
           </a:xfrm>
           <a:prstGeom prst="rect">
             <a:avLst/>
@@ -13264,7 +13773,7 @@
                 <a:ea typeface="Inter" pitchFamily="34" charset="-122"/>
                 <a:cs typeface="Inter" pitchFamily="34" charset="-120"/>
               </a:rPr>
-              <a:t>Apply one design move</a:t>
+              <a:t>Apply one upgrade</a:t>
             </a:r>
             <a:endParaRPr lang="en-US" sz="3200" dirty="0"/>
           </a:p>
@@ -13278,8 +13787,8 @@
         </p:nvSpPr>
         <p:spPr>
           <a:xfrm>
-            <a:off x="640080" y="1371600"/>
-            <a:ext cx="10908792" cy="4297680"/>
+            <a:off x="640080" y="1554480"/>
+            <a:ext cx="5394960" cy="2743200"/>
           </a:xfrm>
           <a:prstGeom prst="rect">
             <a:avLst/>
@@ -13299,7 +13808,7 @@
               <a:buChar char="•"/>
             </a:pPr>
             <a:r>
-              <a:rPr lang="en-US" sz="2100" dirty="0">
+              <a:rPr lang="en-US" sz="1700" dirty="0">
                 <a:solidFill>
                   <a:srgbClr val="1B1F24"/>
                 </a:solidFill>
@@ -13307,9 +13816,9 @@
                 <a:ea typeface="Inter" pitchFamily="34" charset="-122"/>
                 <a:cs typeface="Inter" pitchFamily="34" charset="-120"/>
               </a:rPr>
-              <a:t>Add a visible-thinking checkpoint (outline, draft, version history)</a:t>
-            </a:r>
-            <a:endParaRPr lang="en-US" sz="2100" dirty="0"/>
+              <a:t>Collect the thinking: an outline or draft checkpoint</a:t>
+            </a:r>
+            <a:endParaRPr lang="en-US" sz="1700" dirty="0"/>
           </a:p>
           <a:p>
             <a:pPr marL="342900" indent="-342900">
@@ -13320,7 +13829,7 @@
               <a:buChar char="•"/>
             </a:pPr>
             <a:r>
-              <a:rPr lang="en-US" sz="2100" dirty="0">
+              <a:rPr lang="en-US" sz="1700" dirty="0">
                 <a:solidFill>
                   <a:srgbClr val="1B1F24"/>
                 </a:solidFill>
@@ -13328,9 +13837,9 @@
                 <a:ea typeface="Inter" pitchFamily="34" charset="-122"/>
                 <a:cs typeface="Inter" pitchFamily="34" charset="-120"/>
               </a:rPr>
-              <a:t>Anchor a prompt to something that happened in your room</a:t>
-            </a:r>
-            <a:endParaRPr lang="en-US" sz="2100" dirty="0"/>
+              <a:t>Anchor it to something that happened in your room</a:t>
+            </a:r>
+            <a:endParaRPr lang="en-US" sz="1700" dirty="0"/>
           </a:p>
           <a:p>
             <a:pPr marL="342900" indent="-342900">
@@ -13341,7 +13850,7 @@
               <a:buChar char="•"/>
             </a:pPr>
             <a:r>
-              <a:rPr lang="en-US" sz="2100" dirty="0">
+              <a:rPr lang="en-US" sz="1700" dirty="0">
                 <a:solidFill>
                   <a:srgbClr val="1B1F24"/>
                 </a:solidFill>
@@ -13349,9 +13858,9 @@
                 <a:ea typeface="Inter" pitchFamily="34" charset="-122"/>
                 <a:cs typeface="Inter" pitchFamily="34" charset="-120"/>
               </a:rPr>
-              <a:t>Plan a two-minute live defense as a normal step</a:t>
-            </a:r>
-            <a:endParaRPr lang="en-US" sz="2100" dirty="0"/>
+              <a:t>Add a two-minute live moment as a normal step</a:t>
+            </a:r>
+            <a:endParaRPr lang="en-US" sz="1700" dirty="0"/>
           </a:p>
           <a:p>
             <a:pPr marL="342900" indent="-342900">
@@ -13362,7 +13871,7 @@
               <a:buChar char="•"/>
             </a:pPr>
             <a:r>
-              <a:rPr lang="en-US" sz="2100" dirty="0">
+              <a:rPr lang="en-US" sz="1700" dirty="0">
                 <a:solidFill>
                   <a:srgbClr val="1B1F24"/>
                 </a:solidFill>
@@ -13370,9 +13879,9 @@
                 <a:ea typeface="Inter" pitchFamily="34" charset="-122"/>
                 <a:cs typeface="Inter" pitchFamily="34" charset="-120"/>
               </a:rPr>
-              <a:t>Fold disclosure + a short reflection into the rubric</a:t>
-            </a:r>
-            <a:endParaRPr lang="en-US" sz="2100" dirty="0"/>
+              <a:t>Grade the process: Disclosure block + prompts + reflection</a:t>
+            </a:r>
+            <a:endParaRPr lang="en-US" sz="1700" dirty="0"/>
           </a:p>
         </p:txBody>
       </p:sp>
@@ -13384,12 +13893,12 @@
         </p:nvSpPr>
         <p:spPr>
           <a:xfrm>
-            <a:off x="640080" y="4480560"/>
-            <a:ext cx="10972800" cy="1234440"/>
+            <a:off x="6263640" y="1554480"/>
+            <a:ext cx="5394960" cy="2743200"/>
           </a:xfrm>
           <a:prstGeom prst="roundRect">
             <a:avLst>
-              <a:gd name="adj" fmla="val 6667"/>
+              <a:gd name="adj" fmla="val 3000"/>
             </a:avLst>
           </a:prstGeom>
           <a:solidFill>
@@ -13411,8 +13920,156 @@
         </p:nvSpPr>
         <p:spPr>
           <a:xfrm>
-            <a:off x="914400" y="4617720"/>
-            <a:ext cx="10424160" cy="960120"/>
+            <a:off x="6537960" y="1737360"/>
+            <a:ext cx="4937760" cy="292608"/>
+          </a:xfrm>
+          <a:prstGeom prst="rect">
+            <a:avLst/>
+          </a:prstGeom>
+          <a:noFill/>
+          <a:ln/>
+        </p:spPr>
+        <p:txBody>
+          <a:bodyPr wrap="square" lIns="0" tIns="0" rIns="0" bIns="0" rtlCol="0" anchor="ctr"/>
+          <a:lstStyle/>
+          <a:p>
+            <a:pPr indent="0" marL="0">
+              <a:buNone/>
+            </a:pPr>
+            <a:r>
+              <a:rPr lang="en-US" sz="1250" b="1" spc="150" kern="0" dirty="0">
+                <a:solidFill>
+                  <a:srgbClr val="2A9D8F"/>
+                </a:solidFill>
+                <a:latin typeface="Inter" pitchFamily="34" charset="0"/>
+                <a:ea typeface="Inter" pitchFamily="34" charset="-122"/>
+                <a:cs typeface="Inter" pitchFamily="34" charset="-120"/>
+              </a:rPr>
+              <a:t>MS. RIVERA'S ESSAY · STEP 3 · HER UPGRADE</a:t>
+            </a:r>
+            <a:endParaRPr lang="en-US" sz="1250" dirty="0"/>
+          </a:p>
+        </p:txBody>
+      </p:sp>
+      <p:sp>
+        <p:nvSpPr>
+          <p:cNvPr id="17" name="Text 14"/>
+          <p:cNvSpPr/>
+          <p:nvPr/>
+        </p:nvSpPr>
+        <p:spPr>
+          <a:xfrm>
+            <a:off x="6537960" y="2148840"/>
+            <a:ext cx="4892040" cy="2011680"/>
+          </a:xfrm>
+          <a:prstGeom prst="rect">
+            <a:avLst/>
+          </a:prstGeom>
+          <a:noFill/>
+          <a:ln/>
+        </p:spPr>
+        <p:txBody>
+          <a:bodyPr wrap="square" lIns="0" tIns="0" rIns="0" bIns="0" rtlCol="0" anchor="t"/>
+          <a:lstStyle/>
+          <a:p>
+            <a:pPr indent="0" marL="0">
+              <a:lnSpc>
+                <a:spcPct val="125000"/>
+              </a:lnSpc>
+              <a:buNone/>
+            </a:pPr>
+            <a:r>
+              <a:rPr lang="en-US" sz="2400" b="1" dirty="0">
+                <a:solidFill>
+                  <a:srgbClr val="13293D"/>
+                </a:solidFill>
+                <a:latin typeface="Inter" pitchFamily="34" charset="0"/>
+                <a:ea typeface="Inter" pitchFamily="34" charset="-122"/>
+                <a:cs typeface="Inter" pitchFamily="34" charset="-120"/>
+              </a:rPr>
+              <a:t>Outline due Thursday.</a:t>
+            </a:r>
+            <a:endParaRPr lang="en-US" sz="2400" dirty="0"/>
+          </a:p>
+          <a:p>
+            <a:pPr indent="0" marL="0">
+              <a:lnSpc>
+                <a:spcPct val="125000"/>
+              </a:lnSpc>
+              <a:buNone/>
+            </a:pPr>
+            <a:r>
+              <a:rPr lang="en-US" sz="2400" b="1" dirty="0">
+                <a:solidFill>
+                  <a:srgbClr val="13293D"/>
+                </a:solidFill>
+                <a:latin typeface="Inter" pitchFamily="34" charset="0"/>
+                <a:ea typeface="Inter" pitchFamily="34" charset="-122"/>
+                <a:cs typeface="Inter" pitchFamily="34" charset="-120"/>
+              </a:rPr>
+              <a:t>Ten points.</a:t>
+            </a:r>
+            <a:endParaRPr lang="en-US" sz="2400" dirty="0"/>
+          </a:p>
+          <a:p>
+            <a:pPr indent="0" marL="0">
+              <a:lnSpc>
+                <a:spcPct val="125000"/>
+              </a:lnSpc>
+              <a:buNone/>
+            </a:pPr>
+            <a:r>
+              <a:rPr lang="en-US" sz="2400" b="1" dirty="0">
+                <a:solidFill>
+                  <a:srgbClr val="13293D"/>
+                </a:solidFill>
+                <a:latin typeface="Inter" pitchFamily="34" charset="0"/>
+                <a:ea typeface="Inter" pitchFamily="34" charset="-122"/>
+                <a:cs typeface="Inter" pitchFamily="34" charset="-120"/>
+              </a:rPr>
+              <a:t>Before drafting begins.</a:t>
+            </a:r>
+            <a:endParaRPr lang="en-US" sz="2400" dirty="0"/>
+          </a:p>
+        </p:txBody>
+      </p:sp>
+      <p:sp>
+        <p:nvSpPr>
+          <p:cNvPr id="18" name="Shape 15"/>
+          <p:cNvSpPr/>
+          <p:nvPr/>
+        </p:nvSpPr>
+        <p:spPr>
+          <a:xfrm>
+            <a:off x="640080" y="4526280"/>
+            <a:ext cx="10972800" cy="1188720"/>
+          </a:xfrm>
+          <a:prstGeom prst="roundRect">
+            <a:avLst>
+              <a:gd name="adj" fmla="val 6923"/>
+            </a:avLst>
+          </a:prstGeom>
+          <a:solidFill>
+            <a:srgbClr val="F7F5F0"/>
+          </a:solidFill>
+          <a:ln w="12700">
+            <a:solidFill>
+              <a:srgbClr val="F7F5F0"/>
+            </a:solidFill>
+            <a:prstDash val="solid"/>
+          </a:ln>
+        </p:spPr>
+      </p:sp>
+      <p:sp>
+        <p:nvSpPr>
+          <p:cNvPr id="19" name="Text 16"/>
+          <p:cNvSpPr/>
+          <p:nvPr/>
+        </p:nvSpPr>
+        <p:spPr>
+          <a:xfrm>
+            <a:off x="914400" y="4663440"/>
+            <a:ext cx="10424160" cy="914400"/>
           </a:xfrm>
           <a:prstGeom prst="rect">
             <a:avLst/>
@@ -13436,7 +14093,7 @@
                 <a:ea typeface="Inter" pitchFamily="34" charset="-122"/>
                 <a:cs typeface="Inter" pitchFamily="34" charset="-120"/>
               </a:rPr>
-              <a:t>Write the actual change: what's due, when, worth how much. Then tell your partner why this move makes honest work easier than faking it.</a:t>
+              <a:t>Write the actual change: what's due, when, worth how much. Then tell your partner why this upgrade makes honest work easier than faking it.</a:t>
             </a:r>
             <a:endParaRPr lang="en-US" sz="1700" dirty="0"/>
           </a:p>
@@ -13791,7 +14448,7 @@
                 <a:ea typeface="Inter" pitchFamily="34" charset="-122"/>
                 <a:cs typeface="Inter" pitchFamily="34" charset="-120"/>
               </a:rPr>
-              <a:t>Her two sentences: written calm, filed where frustrated-her will look.</a:t>
+              <a:t>Her essay plan's last piece, two sentences: written calm, filed for later.</a:t>
             </a:r>
             <a:endParaRPr lang="en-US" sz="1000" dirty="0"/>
           </a:p>
@@ -13845,7 +14502,7 @@
         <p:spPr>
           <a:xfrm>
             <a:off x="548640" y="384048"/>
-            <a:ext cx="11091672" cy="777240"/>
+            <a:ext cx="7955280" cy="777240"/>
           </a:xfrm>
           <a:prstGeom prst="rect">
             <a:avLst/>
@@ -13884,11 +14541,11 @@
         <p:spPr>
           <a:xfrm>
             <a:off x="640080" y="1554480"/>
-            <a:ext cx="10972800" cy="2377440"/>
+            <a:ext cx="5394960" cy="2651760"/>
           </a:xfrm>
           <a:prstGeom prst="roundRect">
             <a:avLst>
-              <a:gd name="adj" fmla="val 3462"/>
+              <a:gd name="adj" fmla="val 3103"/>
             </a:avLst>
           </a:prstGeom>
           <a:solidFill>
@@ -13910,8 +14567,8 @@
         </p:nvSpPr>
         <p:spPr>
           <a:xfrm>
-            <a:off x="960120" y="1828800"/>
-            <a:ext cx="10332720" cy="1828800"/>
+            <a:off x="914400" y="1783080"/>
+            <a:ext cx="4846320" cy="2194560"/>
           </a:xfrm>
           <a:prstGeom prst="rect">
             <a:avLst/>
@@ -13925,12 +14582,12 @@
           <a:p>
             <a:pPr indent="0" marL="0">
               <a:lnSpc>
-                <a:spcPct val="120000"/>
+                <a:spcPct val="125000"/>
               </a:lnSpc>
               <a:buNone/>
             </a:pPr>
             <a:r>
-              <a:rPr lang="en-US" sz="2200" dirty="0">
+              <a:rPr lang="en-US" sz="1800" dirty="0">
                 <a:solidFill>
                   <a:srgbClr val="1B1F24"/>
                 </a:solidFill>
@@ -13938,41 +14595,129 @@
                 <a:ea typeface="Inter" pitchFamily="34" charset="-122"/>
                 <a:cs typeface="Inter" pitchFamily="34" charset="-120"/>
               </a:rPr>
-              <a:t>The first two sentences you'll say when work feels wrong.</a:t>
+              <a:t>The first two sentences you'll say when work feels wrong. In your voice. Starting with curiosity. Written now, calm, instead of improvised upset.</a:t>
+            </a:r>
+            <a:endParaRPr lang="en-US" sz="1800" dirty="0"/>
+          </a:p>
+        </p:txBody>
+      </p:sp>
+      <p:sp>
+        <p:nvSpPr>
+          <p:cNvPr id="16" name="Shape 13"/>
+          <p:cNvSpPr/>
+          <p:nvPr/>
+        </p:nvSpPr>
+        <p:spPr>
+          <a:xfrm>
+            <a:off x="6263640" y="1554480"/>
+            <a:ext cx="5394960" cy="2651760"/>
+          </a:xfrm>
+          <a:prstGeom prst="roundRect">
+            <a:avLst>
+              <a:gd name="adj" fmla="val 3103"/>
+            </a:avLst>
+          </a:prstGeom>
+          <a:solidFill>
+            <a:srgbClr val="EAF5F3"/>
+          </a:solidFill>
+          <a:ln w="12700">
+            <a:solidFill>
+              <a:srgbClr val="EAF5F3"/>
+            </a:solidFill>
+            <a:prstDash val="solid"/>
+          </a:ln>
+        </p:spPr>
+      </p:sp>
+      <p:sp>
+        <p:nvSpPr>
+          <p:cNvPr id="17" name="Text 14"/>
+          <p:cNvSpPr/>
+          <p:nvPr/>
+        </p:nvSpPr>
+        <p:spPr>
+          <a:xfrm>
+            <a:off x="6537960" y="1737360"/>
+            <a:ext cx="4937760" cy="292608"/>
+          </a:xfrm>
+          <a:prstGeom prst="rect">
+            <a:avLst/>
+          </a:prstGeom>
+          <a:noFill/>
+          <a:ln/>
+        </p:spPr>
+        <p:txBody>
+          <a:bodyPr wrap="square" lIns="0" tIns="0" rIns="0" bIns="0" rtlCol="0" anchor="ctr"/>
+          <a:lstStyle/>
+          <a:p>
+            <a:pPr indent="0" marL="0">
+              <a:buNone/>
+            </a:pPr>
+            <a:r>
+              <a:rPr lang="en-US" sz="1250" b="1" spc="120" kern="0" dirty="0">
+                <a:solidFill>
+                  <a:srgbClr val="2A9D8F"/>
+                </a:solidFill>
+                <a:latin typeface="Inter" pitchFamily="34" charset="0"/>
+                <a:ea typeface="Inter" pitchFamily="34" charset="-122"/>
+                <a:cs typeface="Inter" pitchFamily="34" charset="-120"/>
+              </a:rPr>
+              <a:t>MS. RIVERA'S ESSAY · STEP 4 · HER TWO SENTENCES</a:t>
+            </a:r>
+            <a:endParaRPr lang="en-US" sz="1250" dirty="0"/>
+          </a:p>
+        </p:txBody>
+      </p:sp>
+      <p:sp>
+        <p:nvSpPr>
+          <p:cNvPr id="18" name="Text 15"/>
+          <p:cNvSpPr/>
+          <p:nvPr/>
+        </p:nvSpPr>
+        <p:spPr>
+          <a:xfrm>
+            <a:off x="6537960" y="2194560"/>
+            <a:ext cx="4892040" cy="1737360"/>
+          </a:xfrm>
+          <a:prstGeom prst="rect">
+            <a:avLst/>
+          </a:prstGeom>
+          <a:noFill/>
+          <a:ln/>
+        </p:spPr>
+        <p:txBody>
+          <a:bodyPr wrap="square" lIns="0" tIns="0" rIns="0" bIns="0" rtlCol="0" anchor="t"/>
+          <a:lstStyle/>
+          <a:p>
+            <a:pPr indent="0" marL="0">
+              <a:lnSpc>
+                <a:spcPct val="125000"/>
+              </a:lnSpc>
+              <a:buNone/>
+            </a:pPr>
+            <a:r>
+              <a:rPr lang="en-US" sz="2200" i="1" dirty="0">
+                <a:solidFill>
+                  <a:srgbClr val="13293D"/>
+                </a:solidFill>
+                <a:latin typeface="Inter" pitchFamily="34" charset="0"/>
+                <a:ea typeface="Inter" pitchFamily="34" charset="-122"/>
+                <a:cs typeface="Inter" pitchFamily="34" charset="-120"/>
+              </a:rPr>
+              <a:t>"Walk me through how you made this. What was the hardest part?"</a:t>
             </a:r>
             <a:endParaRPr lang="en-US" sz="2200" dirty="0"/>
           </a:p>
-          <a:p>
-            <a:pPr indent="0" marL="0">
-              <a:lnSpc>
-                <a:spcPct val="120000"/>
-              </a:lnSpc>
-              <a:buNone/>
-            </a:pPr>
-            <a:r>
-              <a:rPr lang="en-US" sz="2200" dirty="0">
-                <a:solidFill>
-                  <a:srgbClr val="1B1F24"/>
-                </a:solidFill>
-                <a:latin typeface="Inter" pitchFamily="34" charset="0"/>
-                <a:ea typeface="Inter" pitchFamily="34" charset="-122"/>
-                <a:cs typeface="Inter" pitchFamily="34" charset="-120"/>
-              </a:rPr>
-              <a:t>In your voice. Starting with curiosity. Written now, calm, instead of improvised upset.</a:t>
-            </a:r>
-            <a:endParaRPr lang="en-US" sz="2200" dirty="0"/>
-          </a:p>
-        </p:txBody>
-      </p:sp>
-      <p:sp>
-        <p:nvSpPr>
-          <p:cNvPr id="16" name="Text 13"/>
-          <p:cNvSpPr/>
-          <p:nvPr/>
-        </p:nvSpPr>
-        <p:spPr>
-          <a:xfrm>
-            <a:off x="640080" y="4297680"/>
+        </p:txBody>
+      </p:sp>
+      <p:sp>
+        <p:nvSpPr>
+          <p:cNvPr id="19" name="Text 16"/>
+          <p:cNvSpPr/>
+          <p:nvPr/>
+        </p:nvSpPr>
+        <p:spPr>
+          <a:xfrm>
+            <a:off x="640080" y="4526280"/>
             <a:ext cx="10972800" cy="548640"/>
           </a:xfrm>
           <a:prstGeom prst="rect">
@@ -14352,7 +15097,7 @@
                 <a:ea typeface="Inter" pitchFamily="34" charset="-122"/>
                 <a:cs typeface="Inter" pitchFamily="34" charset="-120"/>
               </a:rPr>
-              <a:t>Her share-out: the box, read aloud, in student words.</a:t>
+              <a:t>Her share-out: her essay's AI Box, read aloud, in student words.</a:t>
             </a:r>
             <a:endParaRPr lang="en-US" sz="1000" dirty="0"/>
           </a:p>
@@ -14430,7 +15175,7 @@
                 <a:ea typeface="Inter" pitchFamily="34" charset="-122"/>
                 <a:cs typeface="Inter" pitchFamily="34" charset="-120"/>
               </a:rPr>
-              <a:t>Read us your box, or your sentences</a:t>
+              <a:t>Read us your AI Box, or your sentences</a:t>
             </a:r>
             <a:endParaRPr lang="en-US" sz="3200" dirty="0"/>
           </a:p>
@@ -14473,7 +15218,7 @@
                 <a:ea typeface="Inter" pitchFamily="34" charset="-122"/>
                 <a:cs typeface="Inter" pitchFamily="34" charset="-120"/>
               </a:rPr>
-              <a:t>Four voices, one minute each: your expectation box or your two sentences</a:t>
+              <a:t>Four voices, one minute each: your AI Box or your two sentences</a:t>
             </a:r>
             <a:endParaRPr lang="en-US" sz="2100" dirty="0"/>
           </a:p>
@@ -14870,7 +15615,7 @@
                 <a:ea typeface="Inter" pitchFamily="34" charset="-122"/>
                 <a:cs typeface="Inter" pitchFamily="34" charset="-120"/>
               </a:rPr>
-              <a:t>Her inventory: lane, box, one design move, two sentences.</a:t>
+              <a:t>Her inventory, one essay: lane, Box, one upgrade, two sentences.</a:t>
             </a:r>
             <a:endParaRPr lang="en-US" sz="1000" dirty="0"/>
           </a:p>
@@ -15014,7 +15759,7 @@
                 <a:ea typeface="Inter" pitchFamily="34" charset="-122"/>
                 <a:cs typeface="Inter" pitchFamily="34" charset="-120"/>
               </a:rPr>
-              <a:t>A real assignment with its lane named. An AI-expectation box in student language. One design change that makes thinking visible. And your own two sentences for the hard moment, written calm.
+              <a:t>A real assignment with its lane named. A filled-in AI Box in student language. One upgrade that makes thinking visible. And your own two sentences for the hard moment, written calm.
 </a:t>
             </a:r>
             <a:pPr indent="0" marL="0">
@@ -16168,7 +16913,7 @@
                 <a:ea typeface="Inter" pitchFamily="34" charset="-122"/>
                 <a:cs typeface="Inter" pitchFamily="34" charset="-120"/>
               </a:rPr>
-              <a:t>I teach the disclosure norm, and honesty gets a soft landing, every time</a:t>
+              <a:t>I teach the Disclosure block, and honesty gets a soft landing, every time</a:t>
             </a:r>
             <a:endParaRPr lang="en-US" sz="2100" dirty="0"/>
           </a:p>
@@ -17449,7 +18194,7 @@
                 <a:ea typeface="Inter" pitchFamily="34" charset="-122"/>
                 <a:cs typeface="Inter" pitchFamily="34" charset="-120"/>
               </a:rPr>
-              <a:t>Her 48 hours: box out, norm taught once, sentences filed.</a:t>
+              <a:t>Her 48 hours: Box printed, Disclosure block taught once, sentences filed.</a:t>
             </a:r>
             <a:endParaRPr lang="en-US" sz="1000" dirty="0"/>
           </a:p>
@@ -17815,7 +18560,7 @@
                 <a:ea typeface="Inter" pitchFamily="34" charset="-122"/>
                 <a:cs typeface="Inter" pitchFamily="34" charset="-120"/>
               </a:rPr>
-              <a:t>Teach the disclosure norm to one class</a:t>
+              <a:t>Teach the Disclosure block to one class</a:t>
             </a:r>
             <a:endParaRPr lang="en-US" sz="1800" dirty="0"/>
           </a:p>
@@ -17854,7 +18599,7 @@
                 <a:ea typeface="Inter" pitchFamily="34" charset="-122"/>
                 <a:cs typeface="Inter" pitchFamily="34" charset="-120"/>
               </a:rPr>
-              <a:t>Two lines + the soft-landing rule, said out loud</a:t>
+              <a:t>The checkboxes + the soft-landing rule, said out loud</a:t>
             </a:r>
             <a:endParaRPr lang="en-US" sz="1450" dirty="0"/>
           </a:p>
@@ -18573,7 +19318,7 @@
                 <a:ea typeface="Inter" pitchFamily="34" charset="-122"/>
                 <a:cs typeface="Inter" pitchFamily="34" charset="-120"/>
               </a:rPr>
-              <a:t>One line from your expectation box</a:t>
+              <a:t>One line from your AI Box</a:t>
             </a:r>
             <a:endParaRPr lang="en-US" sz="2100" dirty="0"/>
           </a:p>
@@ -20291,7 +21036,7 @@
                 <a:ea typeface="Inter" pitchFamily="34" charset="-122"/>
                 <a:cs typeface="Inter" pitchFamily="34" charset="-120"/>
               </a:rPr>
-              <a:t>The three lanes + the disclosure norm</a:t>
+              <a:t>The three lanes + the two school-wide boxes</a:t>
             </a:r>
             <a:endParaRPr lang="en-US" sz="2000" dirty="0"/>
           </a:p>
@@ -20369,7 +21114,7 @@
                 <a:ea typeface="Inter" pitchFamily="34" charset="-122"/>
                 <a:cs typeface="Inter" pitchFamily="34" charset="-120"/>
               </a:rPr>
-              <a:t>Design moves + the hard conversation</a:t>
+              <a:t>Assignment upgrades + the hard conversation</a:t>
             </a:r>
             <a:endParaRPr lang="en-US" sz="2000" dirty="0"/>
           </a:p>
@@ -20630,7 +21375,7 @@
                 <a:ea typeface="Inter" pitchFamily="34" charset="-122"/>
                 <a:cs typeface="Inter" pitchFamily="34" charset="-120"/>
               </a:rPr>
-              <a:t>You leave with your next assignment's lane named, its AI-expectation box written, and your words for the hard conversation. Ready before you need them.</a:t>
+              <a:t>You leave with your next assignment's lane named, its AI Box filled in, and your words for the hard conversation. Ready before you need them.</a:t>
             </a:r>
             <a:endParaRPr lang="en-US" sz="1350" dirty="0"/>
           </a:p>

--- a/kits/kit05/Kit05_PresentationDeck.pptx
+++ b/kits/kit05/Kit05_PresentationDeck.pptx
@@ -13161,7 +13161,7 @@
                 <a:ea typeface="Inter" pitchFamily="34" charset="-122"/>
                 <a:cs typeface="Inter" pitchFamily="34" charset="-120"/>
               </a:rPr>
-              <a:t>☒ 2 · AI-assisted, because I'm grading your argument, not your typing.
+              <a:t>by part · Research ☒ 3 · Outline ☒ 2 · Final draft ☒ 1, because I'm grading your argument, not your typing.
 </a:t>
             </a:r>
             <a:pPr indent="0" marL="0">
@@ -13196,7 +13196,7 @@
                 <a:ea typeface="Inter" pitchFamily="34" charset="-122"/>
                 <a:cs typeface="Inter" pitchFamily="34" charset="-120"/>
               </a:rPr>
-              <a:t>brainstorming ideas; feedback on your draft.
+              <a:t>AI to compare sources; brainstorming and feedback on your outline.
 </a:t>
             </a:r>
             <a:pPr indent="0" marL="0">
@@ -13231,7 +13231,7 @@
                 <a:ea typeface="Inter" pitchFamily="34" charset="-122"/>
                 <a:cs typeface="Inter" pitchFamily="34" charset="-120"/>
               </a:rPr>
-              <a:t>turning in sentences you didn't write.
+              <a:t>AI-written sentences in your final draft.
 </a:t>
             </a:r>
             <a:pPr indent="0" marL="0">
@@ -15151,23 +15151,23 @@
         <p:spPr>
           <a:xfrm>
             <a:off x="548640" y="384048"/>
-            <a:ext cx="11091672" cy="777240"/>
-          </a:xfrm>
-          <a:prstGeom prst="rect">
-            <a:avLst/>
-          </a:prstGeom>
-          <a:noFill/>
-          <a:ln/>
-        </p:spPr>
-        <p:txBody>
-          <a:bodyPr wrap="square" lIns="0" tIns="0" rIns="0" bIns="0" rtlCol="0" anchor="ctr"/>
-          <a:lstStyle/>
-          <a:p>
-            <a:pPr indent="0" marL="0">
-              <a:buNone/>
-            </a:pPr>
-            <a:r>
-              <a:rPr lang="en-US" sz="3200" b="1" dirty="0">
+            <a:ext cx="7955280" cy="777240"/>
+          </a:xfrm>
+          <a:prstGeom prst="rect">
+            <a:avLst/>
+          </a:prstGeom>
+          <a:noFill/>
+          <a:ln/>
+        </p:spPr>
+        <p:txBody>
+          <a:bodyPr wrap="square" lIns="0" tIns="0" rIns="0" bIns="0" rtlCol="0" anchor="ctr"/>
+          <a:lstStyle/>
+          <a:p>
+            <a:pPr indent="0" marL="0">
+              <a:buNone/>
+            </a:pPr>
+            <a:r>
+              <a:rPr lang="en-US" sz="2800" b="1" dirty="0">
                 <a:solidFill>
                   <a:srgbClr val="13293D"/>
                 </a:solidFill>
@@ -15177,7 +15177,7 @@
               </a:rPr>
               <a:t>Read us your AI Box, or your sentences</a:t>
             </a:r>
-            <a:endParaRPr lang="en-US" sz="3200" dirty="0"/>
+            <a:endParaRPr lang="en-US" sz="2800" dirty="0"/>
           </a:p>
         </p:txBody>
       </p:sp>

--- a/kits/kit05/Kit05_PresentationDeck.pptx
+++ b/kits/kit05/Kit05_PresentationDeck.pptx
@@ -4076,7 +4076,7 @@
         <p:spPr>
           <a:xfrm>
             <a:off x="566928" y="128016"/>
-            <a:ext cx="11055096" cy="274320"/>
+            <a:ext cx="7955280" cy="274320"/>
           </a:xfrm>
           <a:prstGeom prst="rect">
             <a:avLst/>
@@ -4115,7 +4115,7 @@
         <p:spPr>
           <a:xfrm>
             <a:off x="548640" y="384048"/>
-            <a:ext cx="11091672" cy="777240"/>
+            <a:ext cx="7955280" cy="777240"/>
           </a:xfrm>
           <a:prstGeom prst="rect">
             <a:avLst/>
@@ -4863,7 +4863,7 @@
         <p:spPr>
           <a:xfrm>
             <a:off x="566928" y="128016"/>
-            <a:ext cx="11055096" cy="274320"/>
+            <a:ext cx="7955280" cy="274320"/>
           </a:xfrm>
           <a:prstGeom prst="rect">
             <a:avLst/>
@@ -5799,7 +5799,7 @@
         <p:spPr>
           <a:xfrm>
             <a:off x="566928" y="128016"/>
-            <a:ext cx="11055096" cy="274320"/>
+            <a:ext cx="7955280" cy="274320"/>
           </a:xfrm>
           <a:prstGeom prst="rect">
             <a:avLst/>
@@ -5838,7 +5838,7 @@
         <p:spPr>
           <a:xfrm>
             <a:off x="548640" y="384048"/>
-            <a:ext cx="11091672" cy="777240"/>
+            <a:ext cx="7955280" cy="777240"/>
           </a:xfrm>
           <a:prstGeom prst="rect">
             <a:avLst/>
@@ -6700,7 +6700,7 @@
         <p:spPr>
           <a:xfrm>
             <a:off x="566928" y="128016"/>
-            <a:ext cx="11055096" cy="274320"/>
+            <a:ext cx="7955280" cy="274320"/>
           </a:xfrm>
           <a:prstGeom prst="rect">
             <a:avLst/>
@@ -6738,17 +6738,17 @@
         </p:nvSpPr>
         <p:spPr>
           <a:xfrm>
-            <a:off x="548640" y="384048"/>
-            <a:ext cx="7955280" cy="777240"/>
-          </a:xfrm>
-          <a:prstGeom prst="rect">
-            <a:avLst/>
-          </a:prstGeom>
-          <a:noFill/>
-          <a:ln/>
-        </p:spPr>
-        <p:txBody>
-          <a:bodyPr wrap="square" lIns="0" tIns="0" rIns="0" bIns="0" rtlCol="0" anchor="ctr"/>
+            <a:off x="548640" y="457200"/>
+            <a:ext cx="7955280" cy="914400"/>
+          </a:xfrm>
+          <a:prstGeom prst="rect">
+            <a:avLst/>
+          </a:prstGeom>
+          <a:noFill/>
+          <a:ln/>
+        </p:spPr>
+        <p:txBody>
+          <a:bodyPr wrap="square" lIns="0" tIns="0" rIns="0" bIns="0" rtlCol="0" anchor="t"/>
           <a:lstStyle/>
           <a:p>
             <a:pPr indent="0" marL="0">
@@ -7389,7 +7389,7 @@
         <p:spPr>
           <a:xfrm>
             <a:off x="566928" y="128016"/>
-            <a:ext cx="11055096" cy="274320"/>
+            <a:ext cx="7955280" cy="274320"/>
           </a:xfrm>
           <a:prstGeom prst="rect">
             <a:avLst/>
@@ -7427,17 +7427,17 @@
         </p:nvSpPr>
         <p:spPr>
           <a:xfrm>
-            <a:off x="548640" y="384048"/>
-            <a:ext cx="7955280" cy="777240"/>
-          </a:xfrm>
-          <a:prstGeom prst="rect">
-            <a:avLst/>
-          </a:prstGeom>
-          <a:noFill/>
-          <a:ln/>
-        </p:spPr>
-        <p:txBody>
-          <a:bodyPr wrap="square" lIns="0" tIns="0" rIns="0" bIns="0" rtlCol="0" anchor="ctr"/>
+            <a:off x="548640" y="457200"/>
+            <a:ext cx="7955280" cy="914400"/>
+          </a:xfrm>
+          <a:prstGeom prst="rect">
+            <a:avLst/>
+          </a:prstGeom>
+          <a:noFill/>
+          <a:ln/>
+        </p:spPr>
+        <p:txBody>
+          <a:bodyPr wrap="square" lIns="0" tIns="0" rIns="0" bIns="0" rtlCol="0" anchor="t"/>
           <a:lstStyle/>
           <a:p>
             <a:pPr indent="0" marL="0">
@@ -8117,7 +8117,7 @@
         <p:spPr>
           <a:xfrm>
             <a:off x="566928" y="128016"/>
-            <a:ext cx="11055096" cy="274320"/>
+            <a:ext cx="7955280" cy="274320"/>
           </a:xfrm>
           <a:prstGeom prst="rect">
             <a:avLst/>
@@ -8155,24 +8155,24 @@
         </p:nvSpPr>
         <p:spPr>
           <a:xfrm>
-            <a:off x="548640" y="384048"/>
-            <a:ext cx="11091672" cy="777240"/>
-          </a:xfrm>
-          <a:prstGeom prst="rect">
-            <a:avLst/>
-          </a:prstGeom>
-          <a:noFill/>
-          <a:ln/>
-        </p:spPr>
-        <p:txBody>
-          <a:bodyPr wrap="square" lIns="0" tIns="0" rIns="0" bIns="0" rtlCol="0" anchor="ctr"/>
-          <a:lstStyle/>
-          <a:p>
-            <a:pPr indent="0" marL="0">
-              <a:buNone/>
-            </a:pPr>
-            <a:r>
-              <a:rPr lang="en-US" sz="3200" b="1" dirty="0">
+            <a:off x="548640" y="457200"/>
+            <a:ext cx="7955280" cy="914400"/>
+          </a:xfrm>
+          <a:prstGeom prst="rect">
+            <a:avLst/>
+          </a:prstGeom>
+          <a:noFill/>
+          <a:ln/>
+        </p:spPr>
+        <p:txBody>
+          <a:bodyPr wrap="square" lIns="0" tIns="0" rIns="0" bIns="0" rtlCol="0" anchor="t"/>
+          <a:lstStyle/>
+          <a:p>
+            <a:pPr indent="0" marL="0">
+              <a:buNone/>
+            </a:pPr>
+            <a:r>
+              <a:rPr lang="en-US" sz="2800" b="1" dirty="0">
                 <a:solidFill>
                   <a:srgbClr val="13293D"/>
                 </a:solidFill>
@@ -8182,7 +8182,7 @@
               </a:rPr>
               <a:t>The conversation: curiosity first</a:t>
             </a:r>
-            <a:endParaRPr lang="en-US" sz="3200" dirty="0"/>
+            <a:endParaRPr lang="en-US" sz="2800" dirty="0"/>
           </a:p>
         </p:txBody>
       </p:sp>
@@ -9754,7 +9754,7 @@
         <p:spPr>
           <a:xfrm>
             <a:off x="566928" y="128016"/>
-            <a:ext cx="11055096" cy="274320"/>
+            <a:ext cx="7955280" cy="274320"/>
           </a:xfrm>
           <a:prstGeom prst="rect">
             <a:avLst/>
@@ -9793,7 +9793,7 @@
         <p:spPr>
           <a:xfrm>
             <a:off x="548640" y="384048"/>
-            <a:ext cx="11091672" cy="777240"/>
+            <a:ext cx="7955280" cy="777240"/>
           </a:xfrm>
           <a:prstGeom prst="rect">
             <a:avLst/>
@@ -11403,7 +11403,7 @@
         <p:spPr>
           <a:xfrm>
             <a:off x="566928" y="128016"/>
-            <a:ext cx="11055096" cy="274320"/>
+            <a:ext cx="7955280" cy="274320"/>
           </a:xfrm>
           <a:prstGeom prst="rect">
             <a:avLst/>
@@ -12155,7 +12155,7 @@
         <p:spPr>
           <a:xfrm>
             <a:off x="566928" y="128016"/>
-            <a:ext cx="11055096" cy="274320"/>
+            <a:ext cx="7955280" cy="274320"/>
           </a:xfrm>
           <a:prstGeom prst="rect">
             <a:avLst/>
@@ -12194,7 +12194,7 @@
         <p:spPr>
           <a:xfrm>
             <a:off x="548640" y="384048"/>
-            <a:ext cx="11091672" cy="777240"/>
+            <a:ext cx="7955280" cy="777240"/>
           </a:xfrm>
           <a:prstGeom prst="rect">
             <a:avLst/>
@@ -13710,7 +13710,7 @@
         <p:spPr>
           <a:xfrm>
             <a:off x="566928" y="128016"/>
-            <a:ext cx="11055096" cy="274320"/>
+            <a:ext cx="7955280" cy="274320"/>
           </a:xfrm>
           <a:prstGeom prst="rect">
             <a:avLst/>
@@ -14463,7 +14463,7 @@
         <p:spPr>
           <a:xfrm>
             <a:off x="566928" y="128016"/>
-            <a:ext cx="11055096" cy="274320"/>
+            <a:ext cx="7955280" cy="274320"/>
           </a:xfrm>
           <a:prstGeom prst="rect">
             <a:avLst/>
@@ -15112,7 +15112,7 @@
         <p:spPr>
           <a:xfrm>
             <a:off x="566928" y="128016"/>
-            <a:ext cx="11055096" cy="274320"/>
+            <a:ext cx="7955280" cy="274320"/>
           </a:xfrm>
           <a:prstGeom prst="rect">
             <a:avLst/>
@@ -15150,17 +15150,17 @@
         </p:nvSpPr>
         <p:spPr>
           <a:xfrm>
-            <a:off x="548640" y="384048"/>
-            <a:ext cx="7955280" cy="777240"/>
-          </a:xfrm>
-          <a:prstGeom prst="rect">
-            <a:avLst/>
-          </a:prstGeom>
-          <a:noFill/>
-          <a:ln/>
-        </p:spPr>
-        <p:txBody>
-          <a:bodyPr wrap="square" lIns="0" tIns="0" rIns="0" bIns="0" rtlCol="0" anchor="ctr"/>
+            <a:off x="548640" y="457200"/>
+            <a:ext cx="7955280" cy="914400"/>
+          </a:xfrm>
+          <a:prstGeom prst="rect">
+            <a:avLst/>
+          </a:prstGeom>
+          <a:noFill/>
+          <a:ln/>
+        </p:spPr>
+        <p:txBody>
+          <a:bodyPr wrap="square" lIns="0" tIns="0" rIns="0" bIns="0" rtlCol="0" anchor="t"/>
           <a:lstStyle/>
           <a:p>
             <a:pPr indent="0" marL="0">
@@ -15630,7 +15630,7 @@
         <p:spPr>
           <a:xfrm>
             <a:off x="566928" y="128016"/>
-            <a:ext cx="11055096" cy="274320"/>
+            <a:ext cx="7955280" cy="274320"/>
           </a:xfrm>
           <a:prstGeom prst="rect">
             <a:avLst/>
@@ -15669,7 +15669,7 @@
         <p:spPr>
           <a:xfrm>
             <a:off x="548640" y="384048"/>
-            <a:ext cx="11091672" cy="777240"/>
+            <a:ext cx="7955280" cy="777240"/>
           </a:xfrm>
           <a:prstGeom prst="rect">
             <a:avLst/>
@@ -16144,7 +16144,7 @@
         <p:spPr>
           <a:xfrm>
             <a:off x="566928" y="128016"/>
-            <a:ext cx="11055096" cy="274320"/>
+            <a:ext cx="7955280" cy="274320"/>
           </a:xfrm>
           <a:prstGeom prst="rect">
             <a:avLst/>
@@ -16183,7 +16183,7 @@
         <p:spPr>
           <a:xfrm>
             <a:off x="548640" y="384048"/>
-            <a:ext cx="11091672" cy="777240"/>
+            <a:ext cx="7955280" cy="777240"/>
           </a:xfrm>
           <a:prstGeom prst="rect">
             <a:avLst/>
@@ -17425,7 +17425,7 @@
         <p:spPr>
           <a:xfrm>
             <a:off x="566928" y="128016"/>
-            <a:ext cx="11055096" cy="274320"/>
+            <a:ext cx="7955280" cy="274320"/>
           </a:xfrm>
           <a:prstGeom prst="rect">
             <a:avLst/>
@@ -17464,7 +17464,7 @@
         <p:spPr>
           <a:xfrm>
             <a:off x="548640" y="384048"/>
-            <a:ext cx="11091672" cy="777240"/>
+            <a:ext cx="7955280" cy="777240"/>
           </a:xfrm>
           <a:prstGeom prst="rect">
             <a:avLst/>
@@ -18209,7 +18209,7 @@
         <p:spPr>
           <a:xfrm>
             <a:off x="566928" y="128016"/>
-            <a:ext cx="11055096" cy="274320"/>
+            <a:ext cx="7955280" cy="274320"/>
           </a:xfrm>
           <a:prstGeom prst="rect">
             <a:avLst/>
@@ -18248,7 +18248,7 @@
         <p:spPr>
           <a:xfrm>
             <a:off x="548640" y="384048"/>
-            <a:ext cx="11091672" cy="777240"/>
+            <a:ext cx="7955280" cy="777240"/>
           </a:xfrm>
           <a:prstGeom prst="rect">
             <a:avLst/>
@@ -19191,7 +19191,7 @@
         <p:spPr>
           <a:xfrm>
             <a:off x="566928" y="128016"/>
-            <a:ext cx="11055096" cy="274320"/>
+            <a:ext cx="7955280" cy="274320"/>
           </a:xfrm>
           <a:prstGeom prst="rect">
             <a:avLst/>
@@ -19230,7 +19230,7 @@
         <p:spPr>
           <a:xfrm>
             <a:off x="548640" y="384048"/>
-            <a:ext cx="11091672" cy="777240"/>
+            <a:ext cx="7955280" cy="777240"/>
           </a:xfrm>
           <a:prstGeom prst="rect">
             <a:avLst/>
@@ -19730,7 +19730,7 @@
         <p:spPr>
           <a:xfrm>
             <a:off x="566928" y="128016"/>
-            <a:ext cx="11055096" cy="274320"/>
+            <a:ext cx="7955280" cy="274320"/>
           </a:xfrm>
           <a:prstGeom prst="rect">
             <a:avLst/>
@@ -19768,17 +19768,17 @@
         </p:nvSpPr>
         <p:spPr>
           <a:xfrm>
-            <a:off x="548640" y="384048"/>
-            <a:ext cx="7955280" cy="777240"/>
-          </a:xfrm>
-          <a:prstGeom prst="rect">
-            <a:avLst/>
-          </a:prstGeom>
-          <a:noFill/>
-          <a:ln/>
-        </p:spPr>
-        <p:txBody>
-          <a:bodyPr wrap="square" lIns="0" tIns="0" rIns="0" bIns="0" rtlCol="0" anchor="ctr"/>
+            <a:off x="548640" y="457200"/>
+            <a:ext cx="7955280" cy="914400"/>
+          </a:xfrm>
+          <a:prstGeom prst="rect">
+            <a:avLst/>
+          </a:prstGeom>
+          <a:noFill/>
+          <a:ln/>
+        </p:spPr>
+        <p:txBody>
+          <a:bodyPr wrap="square" lIns="0" tIns="0" rIns="0" bIns="0" rtlCol="0" anchor="t"/>
           <a:lstStyle/>
           <a:p>
             <a:pPr indent="0" marL="0">
@@ -20817,7 +20817,7 @@
         <p:spPr>
           <a:xfrm>
             <a:off x="566928" y="128016"/>
-            <a:ext cx="11055096" cy="274320"/>
+            <a:ext cx="7955280" cy="274320"/>
           </a:xfrm>
           <a:prstGeom prst="rect">
             <a:avLst/>
@@ -20856,7 +20856,7 @@
         <p:spPr>
           <a:xfrm>
             <a:off x="548640" y="384048"/>
-            <a:ext cx="11091672" cy="777240"/>
+            <a:ext cx="7955280" cy="777240"/>
           </a:xfrm>
           <a:prstGeom prst="rect">
             <a:avLst/>
@@ -21745,7 +21745,7 @@
         <p:spPr>
           <a:xfrm>
             <a:off x="566928" y="128016"/>
-            <a:ext cx="11055096" cy="274320"/>
+            <a:ext cx="7955280" cy="274320"/>
           </a:xfrm>
           <a:prstGeom prst="rect">
             <a:avLst/>
@@ -21784,7 +21784,7 @@
         <p:spPr>
           <a:xfrm>
             <a:off x="548640" y="384048"/>
-            <a:ext cx="11091672" cy="777240"/>
+            <a:ext cx="7955280" cy="777240"/>
           </a:xfrm>
           <a:prstGeom prst="rect">
             <a:avLst/>
@@ -22350,7 +22350,7 @@
         <p:spPr>
           <a:xfrm>
             <a:off x="566928" y="128016"/>
-            <a:ext cx="11055096" cy="274320"/>
+            <a:ext cx="7955280" cy="274320"/>
           </a:xfrm>
           <a:prstGeom prst="rect">
             <a:avLst/>
@@ -22389,7 +22389,7 @@
         <p:spPr>
           <a:xfrm>
             <a:off x="548640" y="384048"/>
-            <a:ext cx="11091672" cy="777240"/>
+            <a:ext cx="7955280" cy="777240"/>
           </a:xfrm>
           <a:prstGeom prst="rect">
             <a:avLst/>
@@ -22969,7 +22969,7 @@
         <p:spPr>
           <a:xfrm>
             <a:off x="566928" y="128016"/>
-            <a:ext cx="11055096" cy="274320"/>
+            <a:ext cx="7955280" cy="274320"/>
           </a:xfrm>
           <a:prstGeom prst="rect">
             <a:avLst/>
@@ -23008,7 +23008,7 @@
         <p:spPr>
           <a:xfrm>
             <a:off x="548640" y="384048"/>
-            <a:ext cx="11091672" cy="777240"/>
+            <a:ext cx="7955280" cy="777240"/>
           </a:xfrm>
           <a:prstGeom prst="rect">
             <a:avLst/>
@@ -24224,7 +24224,7 @@
         <p:spPr>
           <a:xfrm>
             <a:off x="566928" y="128016"/>
-            <a:ext cx="11055096" cy="274320"/>
+            <a:ext cx="7955280" cy="274320"/>
           </a:xfrm>
           <a:prstGeom prst="rect">
             <a:avLst/>
@@ -24263,7 +24263,7 @@
         <p:spPr>
           <a:xfrm>
             <a:off x="548640" y="384048"/>
-            <a:ext cx="11091672" cy="777240"/>
+            <a:ext cx="7955280" cy="777240"/>
           </a:xfrm>
           <a:prstGeom prst="rect">
             <a:avLst/>

--- a/kits/kit05/Kit05_PresentationDeck.pptx
+++ b/kits/kit05/Kit05_PresentationDeck.pptx
@@ -12951,7 +12951,7 @@
                 <a:ea typeface="Inter" pitchFamily="34" charset="-122"/>
                 <a:cs typeface="Inter" pitchFamily="34" charset="-120"/>
               </a:rPr>
-              <a:t>RAND finds student AI use at 54% while school guidance lags far behind adoption. Most students are guessing at the rules. (RAND, 2025)</a:t>
+              <a:t>RAND finds student AI use at 54% while school guidance lags far behind adoption. Most students have had little explicit instruction or written guidance. (RAND, 2025)</a:t>
             </a:r>
             <a:endParaRPr lang="en-US" sz="1600" dirty="0"/>
           </a:p>
@@ -29216,7 +29216,7 @@
                 <a:ea typeface="Inter" pitchFamily="34" charset="-122"/>
                 <a:cs typeface="Inter" pitchFamily="34" charset="-120"/>
               </a:rPr>
-              <a:t>A detector score is not evidence.</a:t>
+              <a:t>A detector score alone is not evidence enough to accuse.</a:t>
             </a:r>
             <a:endParaRPr lang="en-US" sz="2100" dirty="0"/>
           </a:p>

--- a/kits/kit05/Kit05_PresentationDeck.pptx
+++ b/kits/kit05/Kit05_PresentationDeck.pptx
@@ -712,7 +712,7 @@
           <a:p>
             <a:r>
               <a:rPr lang="en-US" dirty="0"/>
-              <a:t>Why fixed templates instead of free writing: ask thirty students for two honest sentences and you get thirty different things. Checkboxes make honesty the same size for everyone and identical building-wide. The soft landing is load-bearing: punish disclosure once and the whole class learns to hide. Say that sentence explicitly. Both templates are on the handout, copy-ready.</a:t>
+              <a:t>Why fixed templates instead of free writing: ask thirty students for two honest sentences and you get thirty different things. Checkboxes make honesty the same size for everyone. Be careful not to oversell this as policy: the ask today is one assignment in their own room, and wider adoption is a decision leadership makes later, if it ever does. The soft landing is load-bearing: punish disclosure once and the whole class learns to hide. Say that sentence explicitly. Both templates are on the handout, copy-ready.</a:t>
             </a:r>
             <a:endParaRPr lang="en-US" dirty="0"/>
           </a:p>
@@ -5293,7 +5293,7 @@
                 <a:ea typeface="Inter" pitchFamily="34" charset="-122"/>
                 <a:cs typeface="Inter" pitchFamily="34" charset="-120"/>
               </a:rPr>
-              <a:t>Her system: the AI Box on the assignment, the Disclosure block at the end. Fixed, school-wide.</a:t>
+              <a:t>Her system: the AI Box on the assignment, the Disclosure block at the end. Her room first.</a:t>
             </a:r>
             <a:endParaRPr lang="en-US" sz="1000" dirty="0"/>
           </a:p>
@@ -5332,7 +5332,7 @@
                 <a:ea typeface="Inter" pitchFamily="34" charset="-122"/>
                 <a:cs typeface="Inter" pitchFamily="34" charset="-120"/>
               </a:rPr>
-              <a:t>FIXED TEMPLATES, IDENTICAL IN EVERY CLASSROOM</a:t>
+              <a:t>WRITTEN OUT FOR YOU, SO YOU NEVER DRAFT THEM</a:t>
             </a:r>
             <a:endParaRPr lang="en-US" sz="1200" dirty="0"/>
           </a:p>
@@ -5874,7 +5874,7 @@
                 <a:ea typeface="Inter" pitchFamily="34" charset="-122"/>
                 <a:cs typeface="Inter" pitchFamily="34" charset="-120"/>
               </a:rPr>
-              <a:t>Checkboxes beat "write two honest sentences": ten seconds to fill, identical in every room. And honesty gets a soft landing.</a:t>
+              <a:t>Checkboxes beat "write two honest sentences": ten seconds to fill, ten to read. Try them on one assignment before anyone calls them policy.</a:t>
             </a:r>
             <a:endParaRPr lang="en-US" sz="1700" dirty="0"/>
           </a:p>
@@ -20599,7 +20599,7 @@
                 <a:ea typeface="Inter" pitchFamily="34" charset="-122"/>
                 <a:cs typeface="Inter" pitchFamily="34" charset="-120"/>
               </a:rPr>
-              <a:t>Same two blocks, every classroom, all year.</a:t>
+              <a:t>Start in your room this week. Wider adoption is a decision for later.</a:t>
             </a:r>
             <a:endParaRPr lang="en-US" sz="1500" dirty="0"/>
           </a:p>
@@ -26893,7 +26893,7 @@
                 <a:ea typeface="Inter" pitchFamily="34" charset="-122"/>
                 <a:cs typeface="Inter" pitchFamily="34" charset="-120"/>
               </a:rPr>
-              <a:t>The three lanes + the two school-wide boxes</a:t>
+              <a:t>The three lanes + the two ready-made boxes</a:t>
             </a:r>
             <a:endParaRPr lang="en-US" sz="2000" dirty="0"/>
           </a:p>
